--- a/output/Module02_V07_Updated.pptx
+++ b/output/Module02_V07_Updated.pptx
@@ -5,22 +5,22 @@
     <p:sldMasterId id="2147483648" r:id="rId1"/>
   </p:sldMasterIdLst>
   <p:sldIdLst>
-    <p:sldId id="256" r:id="rId7"/>
-    <p:sldId id="257" r:id="rId8"/>
-    <p:sldId id="258" r:id="rId9"/>
-    <p:sldId id="269" r:id="rId20"/>
-    <p:sldId id="266" r:id="rId17"/>
-    <p:sldId id="268" r:id="rId19"/>
-    <p:sldId id="259" r:id="rId10"/>
-    <p:sldId id="267" r:id="rId18"/>
-    <p:sldId id="265" r:id="rId16"/>
-    <p:sldId id="260" r:id="rId11"/>
-    <p:sldId id="264" r:id="rId15"/>
-    <p:sldId id="261" r:id="rId12"/>
-    <p:sldId id="262" r:id="rId13"/>
-    <p:sldId id="263" r:id="rId14"/>
+    <p:sldId id="256" r:id="rId2"/>
+    <p:sldId id="257" r:id="rId3"/>
+    <p:sldId id="258" r:id="rId4"/>
+    <p:sldId id="259" r:id="rId5"/>
+    <p:sldId id="267" r:id="rId6"/>
+    <p:sldId id="260" r:id="rId7"/>
+    <p:sldId id="268" r:id="rId8"/>
+    <p:sldId id="261" r:id="rId9"/>
+    <p:sldId id="262" r:id="rId10"/>
+    <p:sldId id="263" r:id="rId11"/>
+    <p:sldId id="269" r:id="rId12"/>
+    <p:sldId id="264" r:id="rId13"/>
+    <p:sldId id="265" r:id="rId14"/>
+    <p:sldId id="266" r:id="rId15"/>
   </p:sldIdLst>
-  <p:sldSz cx="12191695" cy="6858000" type="screen4x3"/>
+  <p:sldSz cx="12192000" cy="6858000"/>
   <p:notesSz cx="6858000" cy="9144000"/>
   <p:defaultTextStyle>
     <a:defPPr>
@@ -117,6 +117,22 @@
       </a:defRPr>
     </a:lvl9pPr>
   </p:defaultTextStyle>
+  <p:extLst>
+    <p:ext uri="{EFAFB233-063F-42B5-8137-9DF3F51BA10A}">
+      <p15:sldGuideLst xmlns:p15="http://schemas.microsoft.com/office/powerpoint/2012/main">
+        <p15:guide id="1" orient="horz" pos="2160">
+          <p15:clr>
+            <a:srgbClr val="A4A3A4"/>
+          </p15:clr>
+        </p15:guide>
+        <p15:guide id="2" pos="2880">
+          <p15:clr>
+            <a:srgbClr val="A4A3A4"/>
+          </p15:clr>
+        </p15:guide>
+      </p15:sldGuideLst>
+    </p:ext>
+  </p:extLst>
 </p:presentation>
 </file>
 
@@ -158,10 +174,9 @@
           <a:lstStyle/>
           <a:p>
             <a:r>
-              <a:rPr lang="en-US" smtClean="0"/>
+              <a:rPr lang="en-US"/>
               <a:t>Click to edit Master title style</a:t>
             </a:r>
-            <a:endParaRPr lang="en-US"/>
           </a:p>
         </p:txBody>
       </p:sp>
@@ -277,10 +292,9 @@
           </a:lstStyle>
           <a:p>
             <a:r>
-              <a:rPr lang="en-US" smtClean="0"/>
+              <a:rPr lang="en-US"/>
               <a:t>Click to edit Master subtitle style</a:t>
             </a:r>
-            <a:endParaRPr lang="en-US"/>
           </a:p>
         </p:txBody>
       </p:sp>
@@ -301,7 +315,7 @@
           <a:p>
             <a:fld id="{5BCAD085-E8A6-8845-BD4E-CB4CCA059FC4}" type="datetimeFigureOut">
               <a:rPr lang="en-US" smtClean="0"/>
-              <a:t>1/27/13</a:t>
+              <a:t>9/9/26</a:t>
             </a:fld>
             <a:endParaRPr lang="en-US"/>
           </a:p>
@@ -395,10 +409,9 @@
           <a:lstStyle/>
           <a:p>
             <a:r>
-              <a:rPr lang="en-US" smtClean="0"/>
+              <a:rPr lang="en-US"/>
               <a:t>Click to edit Master title style</a:t>
             </a:r>
-            <a:endParaRPr lang="en-US"/>
           </a:p>
         </p:txBody>
       </p:sp>
@@ -419,38 +432,37 @@
           <a:p>
             <a:pPr lvl="0"/>
             <a:r>
-              <a:rPr lang="en-US" smtClean="0"/>
+              <a:rPr lang="en-US"/>
               <a:t>Click to edit Master text styles</a:t>
             </a:r>
           </a:p>
           <a:p>
             <a:pPr lvl="1"/>
             <a:r>
-              <a:rPr lang="en-US" smtClean="0"/>
+              <a:rPr lang="en-US"/>
               <a:t>Second level</a:t>
             </a:r>
           </a:p>
           <a:p>
             <a:pPr lvl="2"/>
             <a:r>
-              <a:rPr lang="en-US" smtClean="0"/>
+              <a:rPr lang="en-US"/>
               <a:t>Third level</a:t>
             </a:r>
           </a:p>
           <a:p>
             <a:pPr lvl="3"/>
             <a:r>
-              <a:rPr lang="en-US" smtClean="0"/>
+              <a:rPr lang="en-US"/>
               <a:t>Fourth level</a:t>
             </a:r>
           </a:p>
           <a:p>
             <a:pPr lvl="4"/>
             <a:r>
-              <a:rPr lang="en-US" smtClean="0"/>
+              <a:rPr lang="en-US"/>
               <a:t>Fifth level</a:t>
             </a:r>
-            <a:endParaRPr lang="en-US"/>
           </a:p>
         </p:txBody>
       </p:sp>
@@ -471,7 +483,7 @@
           <a:p>
             <a:fld id="{5BCAD085-E8A6-8845-BD4E-CB4CCA059FC4}" type="datetimeFigureOut">
               <a:rPr lang="en-US" smtClean="0"/>
-              <a:t>1/27/13</a:t>
+              <a:t>9/9/26</a:t>
             </a:fld>
             <a:endParaRPr lang="en-US"/>
           </a:p>
@@ -570,10 +582,9 @@
           <a:lstStyle/>
           <a:p>
             <a:r>
-              <a:rPr lang="en-US" smtClean="0"/>
+              <a:rPr lang="en-US"/>
               <a:t>Click to edit Master title style</a:t>
             </a:r>
-            <a:endParaRPr lang="en-US"/>
           </a:p>
         </p:txBody>
       </p:sp>
@@ -599,38 +610,37 @@
           <a:p>
             <a:pPr lvl="0"/>
             <a:r>
-              <a:rPr lang="en-US" smtClean="0"/>
+              <a:rPr lang="en-US"/>
               <a:t>Click to edit Master text styles</a:t>
             </a:r>
           </a:p>
           <a:p>
             <a:pPr lvl="1"/>
             <a:r>
-              <a:rPr lang="en-US" smtClean="0"/>
+              <a:rPr lang="en-US"/>
               <a:t>Second level</a:t>
             </a:r>
           </a:p>
           <a:p>
             <a:pPr lvl="2"/>
             <a:r>
-              <a:rPr lang="en-US" smtClean="0"/>
+              <a:rPr lang="en-US"/>
               <a:t>Third level</a:t>
             </a:r>
           </a:p>
           <a:p>
             <a:pPr lvl="3"/>
             <a:r>
-              <a:rPr lang="en-US" smtClean="0"/>
+              <a:rPr lang="en-US"/>
               <a:t>Fourth level</a:t>
             </a:r>
           </a:p>
           <a:p>
             <a:pPr lvl="4"/>
             <a:r>
-              <a:rPr lang="en-US" smtClean="0"/>
+              <a:rPr lang="en-US"/>
               <a:t>Fifth level</a:t>
             </a:r>
-            <a:endParaRPr lang="en-US"/>
           </a:p>
         </p:txBody>
       </p:sp>
@@ -651,7 +661,7 @@
           <a:p>
             <a:fld id="{5BCAD085-E8A6-8845-BD4E-CB4CCA059FC4}" type="datetimeFigureOut">
               <a:rPr lang="en-US" smtClean="0"/>
-              <a:t>1/27/13</a:t>
+              <a:t>9/9/26</a:t>
             </a:fld>
             <a:endParaRPr lang="en-US"/>
           </a:p>
@@ -745,10 +755,9 @@
           <a:lstStyle/>
           <a:p>
             <a:r>
-              <a:rPr lang="en-US" smtClean="0"/>
+              <a:rPr lang="en-US"/>
               <a:t>Click to edit Master title style</a:t>
             </a:r>
-            <a:endParaRPr lang="en-US"/>
           </a:p>
         </p:txBody>
       </p:sp>
@@ -769,38 +778,37 @@
           <a:p>
             <a:pPr lvl="0"/>
             <a:r>
-              <a:rPr lang="en-US" smtClean="0"/>
+              <a:rPr lang="en-US"/>
               <a:t>Click to edit Master text styles</a:t>
             </a:r>
           </a:p>
           <a:p>
             <a:pPr lvl="1"/>
             <a:r>
-              <a:rPr lang="en-US" smtClean="0"/>
+              <a:rPr lang="en-US"/>
               <a:t>Second level</a:t>
             </a:r>
           </a:p>
           <a:p>
             <a:pPr lvl="2"/>
             <a:r>
-              <a:rPr lang="en-US" smtClean="0"/>
+              <a:rPr lang="en-US"/>
               <a:t>Third level</a:t>
             </a:r>
           </a:p>
           <a:p>
             <a:pPr lvl="3"/>
             <a:r>
-              <a:rPr lang="en-US" smtClean="0"/>
+              <a:rPr lang="en-US"/>
               <a:t>Fourth level</a:t>
             </a:r>
           </a:p>
           <a:p>
             <a:pPr lvl="4"/>
             <a:r>
-              <a:rPr lang="en-US" smtClean="0"/>
+              <a:rPr lang="en-US"/>
               <a:t>Fifth level</a:t>
             </a:r>
-            <a:endParaRPr lang="en-US"/>
           </a:p>
         </p:txBody>
       </p:sp>
@@ -821,7 +829,7 @@
           <a:p>
             <a:fld id="{5BCAD085-E8A6-8845-BD4E-CB4CCA059FC4}" type="datetimeFigureOut">
               <a:rPr lang="en-US" smtClean="0"/>
-              <a:t>1/27/13</a:t>
+              <a:t>9/9/26</a:t>
             </a:fld>
             <a:endParaRPr lang="en-US"/>
           </a:p>
@@ -924,10 +932,9 @@
           </a:lstStyle>
           <a:p>
             <a:r>
-              <a:rPr lang="en-US" smtClean="0"/>
+              <a:rPr lang="en-US"/>
               <a:t>Click to edit Master title style</a:t>
             </a:r>
-            <a:endParaRPr lang="en-US"/>
           </a:p>
         </p:txBody>
       </p:sp>
@@ -1044,7 +1051,7 @@
           <a:p>
             <a:pPr lvl="0"/>
             <a:r>
-              <a:rPr lang="en-US" smtClean="0"/>
+              <a:rPr lang="en-US"/>
               <a:t>Click to edit Master text styles</a:t>
             </a:r>
           </a:p>
@@ -1067,7 +1074,7 @@
           <a:p>
             <a:fld id="{5BCAD085-E8A6-8845-BD4E-CB4CCA059FC4}" type="datetimeFigureOut">
               <a:rPr lang="en-US" smtClean="0"/>
-              <a:t>1/27/13</a:t>
+              <a:t>9/9/26</a:t>
             </a:fld>
             <a:endParaRPr lang="en-US"/>
           </a:p>
@@ -1161,10 +1168,9 @@
           <a:lstStyle/>
           <a:p>
             <a:r>
-              <a:rPr lang="en-US" smtClean="0"/>
+              <a:rPr lang="en-US"/>
               <a:t>Click to edit Master title style</a:t>
             </a:r>
-            <a:endParaRPr lang="en-US"/>
           </a:p>
         </p:txBody>
       </p:sp>
@@ -1218,38 +1224,37 @@
           <a:p>
             <a:pPr lvl="0"/>
             <a:r>
-              <a:rPr lang="en-US" smtClean="0"/>
+              <a:rPr lang="en-US"/>
               <a:t>Click to edit Master text styles</a:t>
             </a:r>
           </a:p>
           <a:p>
             <a:pPr lvl="1"/>
             <a:r>
-              <a:rPr lang="en-US" smtClean="0"/>
+              <a:rPr lang="en-US"/>
               <a:t>Second level</a:t>
             </a:r>
           </a:p>
           <a:p>
             <a:pPr lvl="2"/>
             <a:r>
-              <a:rPr lang="en-US" smtClean="0"/>
+              <a:rPr lang="en-US"/>
               <a:t>Third level</a:t>
             </a:r>
           </a:p>
           <a:p>
             <a:pPr lvl="3"/>
             <a:r>
-              <a:rPr lang="en-US" smtClean="0"/>
+              <a:rPr lang="en-US"/>
               <a:t>Fourth level</a:t>
             </a:r>
           </a:p>
           <a:p>
             <a:pPr lvl="4"/>
             <a:r>
-              <a:rPr lang="en-US" smtClean="0"/>
+              <a:rPr lang="en-US"/>
               <a:t>Fifth level</a:t>
             </a:r>
-            <a:endParaRPr lang="en-US"/>
           </a:p>
         </p:txBody>
       </p:sp>
@@ -1303,38 +1308,37 @@
           <a:p>
             <a:pPr lvl="0"/>
             <a:r>
-              <a:rPr lang="en-US" smtClean="0"/>
+              <a:rPr lang="en-US"/>
               <a:t>Click to edit Master text styles</a:t>
             </a:r>
           </a:p>
           <a:p>
             <a:pPr lvl="1"/>
             <a:r>
-              <a:rPr lang="en-US" smtClean="0"/>
+              <a:rPr lang="en-US"/>
               <a:t>Second level</a:t>
             </a:r>
           </a:p>
           <a:p>
             <a:pPr lvl="2"/>
             <a:r>
-              <a:rPr lang="en-US" smtClean="0"/>
+              <a:rPr lang="en-US"/>
               <a:t>Third level</a:t>
             </a:r>
           </a:p>
           <a:p>
             <a:pPr lvl="3"/>
             <a:r>
-              <a:rPr lang="en-US" smtClean="0"/>
+              <a:rPr lang="en-US"/>
               <a:t>Fourth level</a:t>
             </a:r>
           </a:p>
           <a:p>
             <a:pPr lvl="4"/>
             <a:r>
-              <a:rPr lang="en-US" smtClean="0"/>
+              <a:rPr lang="en-US"/>
               <a:t>Fifth level</a:t>
             </a:r>
-            <a:endParaRPr lang="en-US"/>
           </a:p>
         </p:txBody>
       </p:sp>
@@ -1355,7 +1359,7 @@
           <a:p>
             <a:fld id="{5BCAD085-E8A6-8845-BD4E-CB4CCA059FC4}" type="datetimeFigureOut">
               <a:rPr lang="en-US" smtClean="0"/>
-              <a:t>1/27/13</a:t>
+              <a:t>9/9/26</a:t>
             </a:fld>
             <a:endParaRPr lang="en-US"/>
           </a:p>
@@ -1453,10 +1457,9 @@
           </a:lstStyle>
           <a:p>
             <a:r>
-              <a:rPr lang="en-US" smtClean="0"/>
+              <a:rPr lang="en-US"/>
               <a:t>Click to edit Master title style</a:t>
             </a:r>
-            <a:endParaRPr lang="en-US"/>
           </a:p>
         </p:txBody>
       </p:sp>
@@ -1519,7 +1522,7 @@
           <a:p>
             <a:pPr lvl="0"/>
             <a:r>
-              <a:rPr lang="en-US" smtClean="0"/>
+              <a:rPr lang="en-US"/>
               <a:t>Click to edit Master text styles</a:t>
             </a:r>
           </a:p>
@@ -1575,38 +1578,37 @@
           <a:p>
             <a:pPr lvl="0"/>
             <a:r>
-              <a:rPr lang="en-US" smtClean="0"/>
+              <a:rPr lang="en-US"/>
               <a:t>Click to edit Master text styles</a:t>
             </a:r>
           </a:p>
           <a:p>
             <a:pPr lvl="1"/>
             <a:r>
-              <a:rPr lang="en-US" smtClean="0"/>
+              <a:rPr lang="en-US"/>
               <a:t>Second level</a:t>
             </a:r>
           </a:p>
           <a:p>
             <a:pPr lvl="2"/>
             <a:r>
-              <a:rPr lang="en-US" smtClean="0"/>
+              <a:rPr lang="en-US"/>
               <a:t>Third level</a:t>
             </a:r>
           </a:p>
           <a:p>
             <a:pPr lvl="3"/>
             <a:r>
-              <a:rPr lang="en-US" smtClean="0"/>
+              <a:rPr lang="en-US"/>
               <a:t>Fourth level</a:t>
             </a:r>
           </a:p>
           <a:p>
             <a:pPr lvl="4"/>
             <a:r>
-              <a:rPr lang="en-US" smtClean="0"/>
+              <a:rPr lang="en-US"/>
               <a:t>Fifth level</a:t>
             </a:r>
-            <a:endParaRPr lang="en-US"/>
           </a:p>
         </p:txBody>
       </p:sp>
@@ -1669,7 +1671,7 @@
           <a:p>
             <a:pPr lvl="0"/>
             <a:r>
-              <a:rPr lang="en-US" smtClean="0"/>
+              <a:rPr lang="en-US"/>
               <a:t>Click to edit Master text styles</a:t>
             </a:r>
           </a:p>
@@ -1725,38 +1727,37 @@
           <a:p>
             <a:pPr lvl="0"/>
             <a:r>
-              <a:rPr lang="en-US" smtClean="0"/>
+              <a:rPr lang="en-US"/>
               <a:t>Click to edit Master text styles</a:t>
             </a:r>
           </a:p>
           <a:p>
             <a:pPr lvl="1"/>
             <a:r>
-              <a:rPr lang="en-US" smtClean="0"/>
+              <a:rPr lang="en-US"/>
               <a:t>Second level</a:t>
             </a:r>
           </a:p>
           <a:p>
             <a:pPr lvl="2"/>
             <a:r>
-              <a:rPr lang="en-US" smtClean="0"/>
+              <a:rPr lang="en-US"/>
               <a:t>Third level</a:t>
             </a:r>
           </a:p>
           <a:p>
             <a:pPr lvl="3"/>
             <a:r>
-              <a:rPr lang="en-US" smtClean="0"/>
+              <a:rPr lang="en-US"/>
               <a:t>Fourth level</a:t>
             </a:r>
           </a:p>
           <a:p>
             <a:pPr lvl="4"/>
             <a:r>
-              <a:rPr lang="en-US" smtClean="0"/>
+              <a:rPr lang="en-US"/>
               <a:t>Fifth level</a:t>
             </a:r>
-            <a:endParaRPr lang="en-US"/>
           </a:p>
         </p:txBody>
       </p:sp>
@@ -1777,7 +1778,7 @@
           <a:p>
             <a:fld id="{5BCAD085-E8A6-8845-BD4E-CB4CCA059FC4}" type="datetimeFigureOut">
               <a:rPr lang="en-US" smtClean="0"/>
-              <a:t>1/27/13</a:t>
+              <a:t>9/9/26</a:t>
             </a:fld>
             <a:endParaRPr lang="en-US"/>
           </a:p>
@@ -1871,10 +1872,9 @@
           <a:lstStyle/>
           <a:p>
             <a:r>
-              <a:rPr lang="en-US" smtClean="0"/>
+              <a:rPr lang="en-US"/>
               <a:t>Click to edit Master title style</a:t>
             </a:r>
-            <a:endParaRPr lang="en-US"/>
           </a:p>
         </p:txBody>
       </p:sp>
@@ -1895,7 +1895,7 @@
           <a:p>
             <a:fld id="{5BCAD085-E8A6-8845-BD4E-CB4CCA059FC4}" type="datetimeFigureOut">
               <a:rPr lang="en-US" smtClean="0"/>
-              <a:t>1/27/13</a:t>
+              <a:t>9/9/26</a:t>
             </a:fld>
             <a:endParaRPr lang="en-US"/>
           </a:p>
@@ -1990,7 +1990,7 @@
           <a:p>
             <a:fld id="{5BCAD085-E8A6-8845-BD4E-CB4CCA059FC4}" type="datetimeFigureOut">
               <a:rPr lang="en-US" smtClean="0"/>
-              <a:t>1/27/13</a:t>
+              <a:t>9/9/26</a:t>
             </a:fld>
             <a:endParaRPr lang="en-US"/>
           </a:p>
@@ -2093,10 +2093,9 @@
           </a:lstStyle>
           <a:p>
             <a:r>
-              <a:rPr lang="en-US" smtClean="0"/>
+              <a:rPr lang="en-US"/>
               <a:t>Click to edit Master title style</a:t>
             </a:r>
-            <a:endParaRPr lang="en-US"/>
           </a:p>
         </p:txBody>
       </p:sp>
@@ -2150,38 +2149,37 @@
           <a:p>
             <a:pPr lvl="0"/>
             <a:r>
-              <a:rPr lang="en-US" smtClean="0"/>
+              <a:rPr lang="en-US"/>
               <a:t>Click to edit Master text styles</a:t>
             </a:r>
           </a:p>
           <a:p>
             <a:pPr lvl="1"/>
             <a:r>
-              <a:rPr lang="en-US" smtClean="0"/>
+              <a:rPr lang="en-US"/>
               <a:t>Second level</a:t>
             </a:r>
           </a:p>
           <a:p>
             <a:pPr lvl="2"/>
             <a:r>
-              <a:rPr lang="en-US" smtClean="0"/>
+              <a:rPr lang="en-US"/>
               <a:t>Third level</a:t>
             </a:r>
           </a:p>
           <a:p>
             <a:pPr lvl="3"/>
             <a:r>
-              <a:rPr lang="en-US" smtClean="0"/>
+              <a:rPr lang="en-US"/>
               <a:t>Fourth level</a:t>
             </a:r>
           </a:p>
           <a:p>
             <a:pPr lvl="4"/>
             <a:r>
-              <a:rPr lang="en-US" smtClean="0"/>
+              <a:rPr lang="en-US"/>
               <a:t>Fifth level</a:t>
             </a:r>
-            <a:endParaRPr lang="en-US"/>
           </a:p>
         </p:txBody>
       </p:sp>
@@ -2244,7 +2242,7 @@
           <a:p>
             <a:pPr lvl="0"/>
             <a:r>
-              <a:rPr lang="en-US" smtClean="0"/>
+              <a:rPr lang="en-US"/>
               <a:t>Click to edit Master text styles</a:t>
             </a:r>
           </a:p>
@@ -2267,7 +2265,7 @@
           <a:p>
             <a:fld id="{5BCAD085-E8A6-8845-BD4E-CB4CCA059FC4}" type="datetimeFigureOut">
               <a:rPr lang="en-US" smtClean="0"/>
-              <a:t>1/27/13</a:t>
+              <a:t>9/9/26</a:t>
             </a:fld>
             <a:endParaRPr lang="en-US"/>
           </a:p>
@@ -2370,10 +2368,9 @@
           </a:lstStyle>
           <a:p>
             <a:r>
-              <a:rPr lang="en-US" smtClean="0"/>
+              <a:rPr lang="en-US"/>
               <a:t>Click to edit Master title style</a:t>
             </a:r>
-            <a:endParaRPr lang="en-US"/>
           </a:p>
         </p:txBody>
       </p:sp>
@@ -2497,7 +2494,7 @@
           <a:p>
             <a:pPr lvl="0"/>
             <a:r>
-              <a:rPr lang="en-US" smtClean="0"/>
+              <a:rPr lang="en-US"/>
               <a:t>Click to edit Master text styles</a:t>
             </a:r>
           </a:p>
@@ -2520,7 +2517,7 @@
           <a:p>
             <a:fld id="{5BCAD085-E8A6-8845-BD4E-CB4CCA059FC4}" type="datetimeFigureOut">
               <a:rPr lang="en-US" smtClean="0"/>
-              <a:t>1/27/13</a:t>
+              <a:t>9/9/26</a:t>
             </a:fld>
             <a:endParaRPr lang="en-US"/>
           </a:p>
@@ -2629,10 +2626,9 @@
           <a:lstStyle/>
           <a:p>
             <a:r>
-              <a:rPr lang="en-US" smtClean="0"/>
+              <a:rPr lang="en-US"/>
               <a:t>Click to edit Master title style</a:t>
             </a:r>
-            <a:endParaRPr lang="en-US"/>
           </a:p>
         </p:txBody>
       </p:sp>
@@ -2663,38 +2659,37 @@
           <a:p>
             <a:pPr lvl="0"/>
             <a:r>
-              <a:rPr lang="en-US" smtClean="0"/>
+              <a:rPr lang="en-US"/>
               <a:t>Click to edit Master text styles</a:t>
             </a:r>
           </a:p>
           <a:p>
             <a:pPr lvl="1"/>
             <a:r>
-              <a:rPr lang="en-US" smtClean="0"/>
+              <a:rPr lang="en-US"/>
               <a:t>Second level</a:t>
             </a:r>
           </a:p>
           <a:p>
             <a:pPr lvl="2"/>
             <a:r>
-              <a:rPr lang="en-US" smtClean="0"/>
+              <a:rPr lang="en-US"/>
               <a:t>Third level</a:t>
             </a:r>
           </a:p>
           <a:p>
             <a:pPr lvl="3"/>
             <a:r>
-              <a:rPr lang="en-US" smtClean="0"/>
+              <a:rPr lang="en-US"/>
               <a:t>Fourth level</a:t>
             </a:r>
           </a:p>
           <a:p>
             <a:pPr lvl="4"/>
             <a:r>
-              <a:rPr lang="en-US" smtClean="0"/>
+              <a:rPr lang="en-US"/>
               <a:t>Fifth level</a:t>
             </a:r>
-            <a:endParaRPr lang="en-US"/>
           </a:p>
         </p:txBody>
       </p:sp>
@@ -2733,7 +2728,7 @@
           <a:p>
             <a:fld id="{5BCAD085-E8A6-8845-BD4E-CB4CCA059FC4}" type="datetimeFigureOut">
               <a:rPr lang="en-US" smtClean="0"/>
-              <a:t>1/27/13</a:t>
+              <a:t>9/9/26</a:t>
             </a:fld>
             <a:endParaRPr lang="en-US"/>
           </a:p>
@@ -3092,7 +3087,7 @@
 </file>
 
 <file path=ppt/slides/slide1.xml><?xml version="1.0" encoding="utf-8"?>
-<p:sld xmlns:a="http://schemas.openxmlformats.org/drawingml/2006/main" xmlns:p="http://schemas.openxmlformats.org/presentationml/2006/main" xmlns:r="http://schemas.openxmlformats.org/officeDocument/2006/relationships">
+<p:sld xmlns:a="http://schemas.openxmlformats.org/drawingml/2006/main" xmlns:r="http://schemas.openxmlformats.org/officeDocument/2006/relationships" xmlns:p="http://schemas.openxmlformats.org/presentationml/2006/main">
   <p:cSld>
     <p:bg>
       <p:bgPr>
@@ -3108,7 +3103,14 @@
         <p:cNvGrpSpPr/>
         <p:nvPr/>
       </p:nvGrpSpPr>
-      <p:grpSpPr/>
+      <p:grpSpPr>
+        <a:xfrm>
+          <a:off x="0" y="0"/>
+          <a:ext cx="0" cy="0"/>
+          <a:chOff x="0" y="0"/>
+          <a:chExt cx="0" cy="0"/>
+        </a:xfrm>
+      </p:grpSpPr>
       <p:sp>
         <p:nvSpPr>
           <p:cNvPr id="2" name="TextBox 1"/>
@@ -3117,8 +3119,43 @@
         </p:nvSpPr>
         <p:spPr>
           <a:xfrm>
-            <a:off x="822960" y="1280160"/>
-            <a:ext cx="10515600" cy="731520"/>
+            <a:off x="822960" y="1097280"/>
+            <a:ext cx="10515600" cy="640080"/>
+          </a:xfrm>
+          <a:prstGeom prst="rect">
+            <a:avLst/>
+          </a:prstGeom>
+          <a:noFill/>
+        </p:spPr>
+        <p:txBody>
+          <a:bodyPr wrap="square">
+            <a:spAutoFit/>
+          </a:bodyPr>
+          <a:lstStyle/>
+          <a:p>
+            <a:pPr algn="l" rtl="0"/>
+            <a:r>
+              <a:rPr sz="2800" b="1">
+                <a:solidFill>
+                  <a:srgbClr val="1F4E79"/>
+                </a:solidFill>
+                <a:latin typeface="Calibri"/>
+              </a:rPr>
+              <a:t>Module 02  |  V07</a:t>
+            </a:r>
+          </a:p>
+        </p:txBody>
+      </p:sp>
+      <p:sp>
+        <p:nvSpPr>
+          <p:cNvPr id="3" name="TextBox 2"/>
+          <p:cNvSpPr txBox="1"/>
+          <p:nvPr/>
+        </p:nvSpPr>
+        <p:spPr>
+          <a:xfrm>
+            <a:off x="822960" y="1920240"/>
+            <a:ext cx="10515600" cy="1097280"/>
           </a:xfrm>
           <a:prstGeom prst="rect">
             <a:avLst/>
@@ -3133,27 +3170,62 @@
           <a:p>
             <a:pPr algn="r" rtl="1"/>
             <a:r>
-              <a:rPr sz="3400" b="1">
-                <a:solidFill>
-                  <a:srgbClr val="1F4E79"/>
+              <a:rPr sz="4400" b="1">
+                <a:solidFill>
+                  <a:srgbClr val="1F3B5C"/>
+                </a:solidFill>
+                <a:latin typeface="Arial"/>
+              </a:rPr>
+              <a:t>المستودعات والبحيرات ومعمارية Lakehouse</a:t>
+            </a:r>
+          </a:p>
+        </p:txBody>
+      </p:sp>
+      <p:sp>
+        <p:nvSpPr>
+          <p:cNvPr id="4" name="TextBox 3"/>
+          <p:cNvSpPr txBox="1"/>
+          <p:nvPr/>
+        </p:nvSpPr>
+        <p:spPr>
+          <a:xfrm>
+            <a:off x="822960" y="3200400"/>
+            <a:ext cx="10515600" cy="914400"/>
+          </a:xfrm>
+          <a:prstGeom prst="rect">
+            <a:avLst/>
+          </a:prstGeom>
+          <a:noFill/>
+        </p:spPr>
+        <p:txBody>
+          <a:bodyPr wrap="square">
+            <a:spAutoFit/>
+          </a:bodyPr>
+          <a:lstStyle/>
+          <a:p>
+            <a:pPr algn="l" rtl="0"/>
+            <a:r>
+              <a:rPr sz="3000" b="0">
+                <a:solidFill>
+                  <a:srgbClr val="333333"/>
                 </a:solidFill>
                 <a:latin typeface="Calibri"/>
               </a:rPr>
-              <a:t>V07</a:t>
-            </a:r>
-          </a:p>
-        </p:txBody>
-      </p:sp>
-      <p:sp>
-        <p:nvSpPr>
-          <p:cNvPr id="3" name="TextBox 2"/>
-          <p:cNvSpPr txBox="1"/>
-          <p:nvPr/>
-        </p:nvSpPr>
-        <p:spPr>
-          <a:xfrm>
-            <a:off x="822960" y="2194560"/>
-            <a:ext cx="10515600" cy="1097280"/>
+              <a:t>Warehouses, Data Lakes &amp; Lakehouse</a:t>
+            </a:r>
+          </a:p>
+        </p:txBody>
+      </p:sp>
+      <p:sp>
+        <p:nvSpPr>
+          <p:cNvPr id="5" name="TextBox 4"/>
+          <p:cNvSpPr txBox="1"/>
+          <p:nvPr/>
+        </p:nvSpPr>
+        <p:spPr>
+          <a:xfrm>
+            <a:off x="822960" y="4937760"/>
+            <a:ext cx="10515600" cy="548640"/>
           </a:xfrm>
           <a:prstGeom prst="rect">
             <a:avLst/>
@@ -3168,62 +3240,132 @@
           <a:p>
             <a:pPr algn="r" rtl="1"/>
             <a:r>
-              <a:rPr sz="4800" b="1">
-                <a:solidFill>
-                  <a:srgbClr val="1F3B5C"/>
+              <a:rPr sz="1800" b="0">
+                <a:solidFill>
+                  <a:srgbClr val="666666"/>
+                </a:solidFill>
+                <a:latin typeface="Arial"/>
+              </a:rPr>
+              <a:t>Module 02 — Data &amp; AI Engineering Track  |  الوحدة الثانية</a:t>
+            </a:r>
+          </a:p>
+        </p:txBody>
+      </p:sp>
+      <p:sp>
+        <p:nvSpPr>
+          <p:cNvPr id="6" name="TextBox 5"/>
+          <p:cNvSpPr txBox="1"/>
+          <p:nvPr/>
+        </p:nvSpPr>
+        <p:spPr>
+          <a:xfrm>
+            <a:off x="822960" y="5486400"/>
+            <a:ext cx="10515600" cy="457200"/>
+          </a:xfrm>
+          <a:prstGeom prst="rect">
+            <a:avLst/>
+          </a:prstGeom>
+          <a:noFill/>
+        </p:spPr>
+        <p:txBody>
+          <a:bodyPr wrap="square">
+            <a:spAutoFit/>
+          </a:bodyPr>
+          <a:lstStyle/>
+          <a:p>
+            <a:pPr algn="l" rtl="0"/>
+            <a:r>
+              <a:rPr sz="1400" b="0">
+                <a:solidFill>
+                  <a:srgbClr val="666666"/>
                 </a:solidFill>
                 <a:latin typeface="Calibri"/>
               </a:rPr>
-              <a:t>المستودعات والبحيرات ومعمارية Lakehouse</a:t>
-            </a:r>
-          </a:p>
-        </p:txBody>
-      </p:sp>
-      <p:sp>
-        <p:nvSpPr>
-          <p:cNvPr id="4" name="TextBox 3"/>
-          <p:cNvSpPr txBox="1"/>
-          <p:nvPr/>
-        </p:nvSpPr>
-        <p:spPr>
-          <a:xfrm>
-            <a:off x="822960" y="3566160"/>
-            <a:ext cx="10515600" cy="914400"/>
-          </a:xfrm>
-          <a:prstGeom prst="rect">
-            <a:avLst/>
-          </a:prstGeom>
-          <a:noFill/>
-        </p:spPr>
-        <p:txBody>
-          <a:bodyPr wrap="square">
-            <a:spAutoFit/>
-          </a:bodyPr>
-          <a:lstStyle/>
-          <a:p>
-            <a:pPr algn="r" rtl="0"/>
-            <a:r>
-              <a:rPr sz="3400" b="0">
-                <a:solidFill>
-                  <a:srgbClr val="333333"/>
+              <a:t>Light theme  |  Bilingual AR/EN  |  Ready to present</a:t>
+            </a:r>
+          </a:p>
+        </p:txBody>
+      </p:sp>
+      <p:sp>
+        <p:nvSpPr>
+          <p:cNvPr id="7" name="TextBox 6"/>
+          <p:cNvSpPr txBox="1"/>
+          <p:nvPr/>
+        </p:nvSpPr>
+        <p:spPr>
+          <a:xfrm>
+            <a:off x="640080" y="6400800"/>
+            <a:ext cx="8686800" cy="320040"/>
+          </a:xfrm>
+          <a:prstGeom prst="rect">
+            <a:avLst/>
+          </a:prstGeom>
+          <a:noFill/>
+        </p:spPr>
+        <p:txBody>
+          <a:bodyPr wrap="square">
+            <a:spAutoFit/>
+          </a:bodyPr>
+          <a:lstStyle/>
+          <a:p>
+            <a:pPr algn="r" rtl="1"/>
+            <a:r>
+              <a:rPr sz="1000" b="0">
+                <a:solidFill>
+                  <a:srgbClr val="666666"/>
+                </a:solidFill>
+                <a:latin typeface="Arial"/>
+              </a:rPr>
+              <a:t>Module 02 — Data &amp; AI Engineering Track  |  الوحدة الثانية</a:t>
+            </a:r>
+          </a:p>
+        </p:txBody>
+      </p:sp>
+      <p:sp>
+        <p:nvSpPr>
+          <p:cNvPr id="8" name="TextBox 7"/>
+          <p:cNvSpPr txBox="1"/>
+          <p:nvPr/>
+        </p:nvSpPr>
+        <p:spPr>
+          <a:xfrm>
+            <a:off x="9601200" y="6400800"/>
+            <a:ext cx="1920240" cy="320040"/>
+          </a:xfrm>
+          <a:prstGeom prst="rect">
+            <a:avLst/>
+          </a:prstGeom>
+          <a:noFill/>
+        </p:spPr>
+        <p:txBody>
+          <a:bodyPr wrap="square">
+            <a:spAutoFit/>
+          </a:bodyPr>
+          <a:lstStyle/>
+          <a:p>
+            <a:pPr algn="l" rtl="0"/>
+            <a:r>
+              <a:rPr sz="1000" b="0">
+                <a:solidFill>
+                  <a:srgbClr val="666666"/>
                 </a:solidFill>
                 <a:latin typeface="Calibri"/>
               </a:rPr>
-              <a:t>Warehouses, Data Lakes &amp; Lakehouse</a:t>
-            </a:r>
-          </a:p>
-        </p:txBody>
-      </p:sp>
-      <p:sp>
-        <p:nvSpPr>
-          <p:cNvPr id="5" name="TextBox 4"/>
-          <p:cNvSpPr txBox="1"/>
-          <p:nvPr/>
-        </p:nvSpPr>
-        <p:spPr>
-          <a:xfrm>
-            <a:off x="822960" y="5120640"/>
-            <a:ext cx="10515600" cy="548640"/>
+              <a:t>V07  •  1/14</a:t>
+            </a:r>
+          </a:p>
+        </p:txBody>
+      </p:sp>
+      <p:sp>
+        <p:nvSpPr>
+          <p:cNvPr id="9" name="TextBox 8"/>
+          <p:cNvSpPr txBox="1"/>
+          <p:nvPr/>
+        </p:nvSpPr>
+        <p:spPr>
+          <a:xfrm>
+            <a:off x="640080" y="6400800"/>
+            <a:ext cx="8686800" cy="320040"/>
           </a:xfrm>
           <a:prstGeom prst="rect">
             <a:avLst/>
@@ -3238,13 +3380,118 @@
           <a:p>
             <a:pPr algn="r" rtl="1"/>
             <a:r>
-              <a:rPr sz="1800" b="0">
+              <a:rPr sz="1000" b="0">
+                <a:solidFill>
+                  <a:srgbClr val="666666"/>
+                </a:solidFill>
+                <a:latin typeface="Arial"/>
+              </a:rPr>
+              <a:t>Module 02 — Data &amp; AI Engineering Track  |  الوحدة الثانية</a:t>
+            </a:r>
+          </a:p>
+        </p:txBody>
+      </p:sp>
+      <p:sp>
+        <p:nvSpPr>
+          <p:cNvPr id="10" name="TextBox 9"/>
+          <p:cNvSpPr txBox="1"/>
+          <p:nvPr/>
+        </p:nvSpPr>
+        <p:spPr>
+          <a:xfrm>
+            <a:off x="9601200" y="6400800"/>
+            <a:ext cx="1920240" cy="320040"/>
+          </a:xfrm>
+          <a:prstGeom prst="rect">
+            <a:avLst/>
+          </a:prstGeom>
+          <a:noFill/>
+        </p:spPr>
+        <p:txBody>
+          <a:bodyPr wrap="square">
+            <a:spAutoFit/>
+          </a:bodyPr>
+          <a:lstStyle/>
+          <a:p>
+            <a:pPr algn="l" rtl="0"/>
+            <a:r>
+              <a:rPr sz="1000" b="0">
                 <a:solidFill>
                   <a:srgbClr val="666666"/>
                 </a:solidFill>
                 <a:latin typeface="Calibri"/>
               </a:rPr>
+              <a:t>07_  •  1/14</a:t>
+            </a:r>
+          </a:p>
+        </p:txBody>
+      </p:sp>
+      <p:sp>
+        <p:nvSpPr>
+          <p:cNvPr id="11" name="TextBox 10"/>
+          <p:cNvSpPr txBox="1"/>
+          <p:nvPr/>
+        </p:nvSpPr>
+        <p:spPr>
+          <a:xfrm>
+            <a:off x="640080" y="6400800"/>
+            <a:ext cx="8686800" cy="320040"/>
+          </a:xfrm>
+          <a:prstGeom prst="rect">
+            <a:avLst/>
+          </a:prstGeom>
+          <a:noFill/>
+        </p:spPr>
+        <p:txBody>
+          <a:bodyPr wrap="square">
+            <a:spAutoFit/>
+          </a:bodyPr>
+          <a:lstStyle/>
+          <a:p>
+            <a:pPr algn="r" rtl="1"/>
+            <a:r>
+              <a:rPr sz="1000" b="0">
+                <a:solidFill>
+                  <a:srgbClr val="666666"/>
+                </a:solidFill>
+                <a:latin typeface="Arial"/>
+              </a:rPr>
               <a:t>Module 02 — Data &amp; AI Engineering Track  |  الوحدة الثانية</a:t>
+            </a:r>
+          </a:p>
+        </p:txBody>
+      </p:sp>
+      <p:sp>
+        <p:nvSpPr>
+          <p:cNvPr id="12" name="TextBox 11"/>
+          <p:cNvSpPr txBox="1"/>
+          <p:nvPr/>
+        </p:nvSpPr>
+        <p:spPr>
+          <a:xfrm>
+            <a:off x="9601200" y="6400800"/>
+            <a:ext cx="1920240" cy="320040"/>
+          </a:xfrm>
+          <a:prstGeom prst="rect">
+            <a:avLst/>
+          </a:prstGeom>
+          <a:noFill/>
+        </p:spPr>
+        <p:txBody>
+          <a:bodyPr wrap="square">
+            <a:spAutoFit/>
+          </a:bodyPr>
+          <a:lstStyle/>
+          <a:p>
+            <a:pPr algn="l" rtl="0"/>
+            <a:r>
+              <a:rPr sz="1000" b="0">
+                <a:solidFill>
+                  <a:srgbClr val="666666"/>
+                </a:solidFill>
+                <a:latin typeface="Calibri"/>
+              </a:rPr>
+              <a:t>07_  •  1/14</a:t>
             </a:r>
           </a:p>
         </p:txBody>
@@ -3258,7 +3505,7 @@
 </file>
 
 <file path=ppt/slides/slide10.xml><?xml version="1.0" encoding="utf-8"?>
-<p:sld xmlns:a="http://schemas.openxmlformats.org/drawingml/2006/main" xmlns:p="http://schemas.openxmlformats.org/presentationml/2006/main" xmlns:r="http://schemas.openxmlformats.org/officeDocument/2006/relationships">
+<p:sld xmlns:a="http://schemas.openxmlformats.org/drawingml/2006/main" xmlns:r="http://schemas.openxmlformats.org/officeDocument/2006/relationships" xmlns:p="http://schemas.openxmlformats.org/presentationml/2006/main">
   <p:cSld>
     <p:bg>
       <p:bgPr>
@@ -3274,7 +3521,14 @@
         <p:cNvGrpSpPr/>
         <p:nvPr/>
       </p:nvGrpSpPr>
-      <p:grpSpPr/>
+      <p:grpSpPr>
+        <a:xfrm>
+          <a:off x="0" y="0"/>
+          <a:ext cx="0" cy="0"/>
+          <a:chOff x="0" y="0"/>
+          <a:chExt cx="0" cy="0"/>
+        </a:xfrm>
+      </p:grpSpPr>
       <p:sp>
         <p:nvSpPr>
           <p:cNvPr id="2" name="Rectangle 1"/>
@@ -3318,6 +3572,7 @@
           <a:lstStyle/>
           <a:p>
             <a:pPr algn="ctr"/>
+            <a:endParaRPr/>
           </a:p>
         </p:txBody>
       </p:sp>
@@ -3349,128 +3604,568 @@
                 <a:solidFill>
                   <a:srgbClr val="1F3B5C"/>
                 </a:solidFill>
+                <a:latin typeface="Arial"/>
+              </a:rPr>
+              <a:t>متى تختار كل نموذج؟ / Decision Matrix</a:t>
+            </a:r>
+          </a:p>
+        </p:txBody>
+      </p:sp>
+      <p:graphicFrame>
+        <p:nvGraphicFramePr>
+          <p:cNvPr id="4" name="Table 3"/>
+          <p:cNvGraphicFramePr>
+            <a:graphicFrameLocks noGrp="1"/>
+          </p:cNvGraphicFramePr>
+          <p:nvPr/>
+        </p:nvGraphicFramePr>
+        <p:xfrm>
+          <a:off x="640080" y="1371600"/>
+          <a:ext cx="10972800" cy="2194560"/>
+        </p:xfrm>
+        <a:graphic>
+          <a:graphicData uri="http://schemas.openxmlformats.org/drawingml/2006/table">
+            <a:tbl>
+              <a:tblPr firstRow="1" bandRow="1">
+                <a:tableStyleId>{5C22544A-7EE6-4342-B048-85BDC9FD1C3A}</a:tableStyleId>
+              </a:tblPr>
+              <a:tblGrid>
+                <a:gridCol w="3657600">
+                  <a:extLst>
+                    <a:ext uri="{9D8B030D-6E8A-4147-A177-3AD203B41FA5}">
+                      <a16:colId xmlns:a16="http://schemas.microsoft.com/office/drawing/2014/main" val="20000"/>
+                    </a:ext>
+                  </a:extLst>
+                </a:gridCol>
+                <a:gridCol w="3657600">
+                  <a:extLst>
+                    <a:ext uri="{9D8B030D-6E8A-4147-A177-3AD203B41FA5}">
+                      <a16:colId xmlns:a16="http://schemas.microsoft.com/office/drawing/2014/main" val="20001"/>
+                    </a:ext>
+                  </a:extLst>
+                </a:gridCol>
+                <a:gridCol w="3657600">
+                  <a:extLst>
+                    <a:ext uri="{9D8B030D-6E8A-4147-A177-3AD203B41FA5}">
+                      <a16:colId xmlns:a16="http://schemas.microsoft.com/office/drawing/2014/main" val="20002"/>
+                    </a:ext>
+                  </a:extLst>
+                </a:gridCol>
+              </a:tblGrid>
+              <a:tr h="548640">
+                <a:tc>
+                  <a:txBody>
+                    <a:bodyPr/>
+                    <a:lstStyle/>
+                    <a:p>
+                      <a:pPr algn="ctr" rtl="1"/>
+                      <a:r>
+                        <a:rPr sz="1400" b="1">
+                          <a:solidFill>
+                            <a:srgbClr val="FFFFFF"/>
+                          </a:solidFill>
+                          <a:latin typeface="Arial"/>
+                        </a:rPr>
+                        <a:t>الحالة</a:t>
+                      </a:r>
+                    </a:p>
+                  </a:txBody>
+                  <a:tcPr>
+                    <a:solidFill>
+                      <a:srgbClr val="1F4E79"/>
+                    </a:solidFill>
+                  </a:tcPr>
+                </a:tc>
+                <a:tc>
+                  <a:txBody>
+                    <a:bodyPr/>
+                    <a:lstStyle/>
+                    <a:p>
+                      <a:pPr algn="ctr" rtl="1"/>
+                      <a:r>
+                        <a:rPr sz="1400" b="1">
+                          <a:solidFill>
+                            <a:srgbClr val="FFFFFF"/>
+                          </a:solidFill>
+                          <a:latin typeface="Arial"/>
+                        </a:rPr>
+                        <a:t>الاختيار</a:t>
+                      </a:r>
+                    </a:p>
+                  </a:txBody>
+                  <a:tcPr>
+                    <a:solidFill>
+                      <a:srgbClr val="1F4E79"/>
+                    </a:solidFill>
+                  </a:tcPr>
+                </a:tc>
+                <a:tc>
+                  <a:txBody>
+                    <a:bodyPr/>
+                    <a:lstStyle/>
+                    <a:p>
+                      <a:pPr algn="ctr" rtl="1"/>
+                      <a:r>
+                        <a:rPr sz="1400" b="1">
+                          <a:solidFill>
+                            <a:srgbClr val="FFFFFF"/>
+                          </a:solidFill>
+                          <a:latin typeface="Arial"/>
+                        </a:rPr>
+                        <a:t>السبب</a:t>
+                      </a:r>
+                    </a:p>
+                  </a:txBody>
+                  <a:tcPr>
+                    <a:solidFill>
+                      <a:srgbClr val="1F4E79"/>
+                    </a:solidFill>
+                  </a:tcPr>
+                </a:tc>
+                <a:extLst>
+                  <a:ext uri="{0D108BD9-81ED-4DB2-BD59-A6C34878D82A}">
+                    <a16:rowId xmlns:a16="http://schemas.microsoft.com/office/drawing/2014/main" val="10000"/>
+                  </a:ext>
+                </a:extLst>
+              </a:tr>
+              <a:tr h="548640">
+                <a:tc>
+                  <a:txBody>
+                    <a:bodyPr/>
+                    <a:lstStyle/>
+                    <a:p>
+                      <a:pPr algn="ctr" rtl="1"/>
+                      <a:r>
+                        <a:rPr sz="1200">
+                          <a:solidFill>
+                            <a:srgbClr val="333333"/>
+                          </a:solidFill>
+                          <a:latin typeface="Arial"/>
+                        </a:rPr>
+                        <a:t>فريق مركزي + تحليلات</a:t>
+                      </a:r>
+                    </a:p>
+                  </a:txBody>
+                  <a:tcPr>
+                    <a:solidFill>
+                      <a:srgbClr val="FFFFFF"/>
+                    </a:solidFill>
+                  </a:tcPr>
+                </a:tc>
+                <a:tc>
+                  <a:txBody>
+                    <a:bodyPr/>
+                    <a:lstStyle/>
+                    <a:p>
+                      <a:pPr algn="ctr" rtl="1"/>
+                      <a:r>
+                        <a:rPr sz="1200">
+                          <a:solidFill>
+                            <a:srgbClr val="333333"/>
+                          </a:solidFill>
+                          <a:latin typeface="Arial"/>
+                        </a:rPr>
+                        <a:t>Medallion / Lakehouse</a:t>
+                      </a:r>
+                    </a:p>
+                  </a:txBody>
+                  <a:tcPr>
+                    <a:solidFill>
+                      <a:srgbClr val="FFFFFF"/>
+                    </a:solidFill>
+                  </a:tcPr>
+                </a:tc>
+                <a:tc>
+                  <a:txBody>
+                    <a:bodyPr/>
+                    <a:lstStyle/>
+                    <a:p>
+                      <a:pPr algn="ctr" rtl="1"/>
+                      <a:r>
+                        <a:rPr sz="1200">
+                          <a:solidFill>
+                            <a:srgbClr val="333333"/>
+                          </a:solidFill>
+                          <a:latin typeface="Arial"/>
+                        </a:rPr>
+                        <a:t>مرونة + حوكمة طبقية</a:t>
+                      </a:r>
+                    </a:p>
+                  </a:txBody>
+                  <a:tcPr>
+                    <a:solidFill>
+                      <a:srgbClr val="FFFFFF"/>
+                    </a:solidFill>
+                  </a:tcPr>
+                </a:tc>
+                <a:extLst>
+                  <a:ext uri="{0D108BD9-81ED-4DB2-BD59-A6C34878D82A}">
+                    <a16:rowId xmlns:a16="http://schemas.microsoft.com/office/drawing/2014/main" val="10001"/>
+                  </a:ext>
+                </a:extLst>
+              </a:tr>
+              <a:tr h="548640">
+                <a:tc>
+                  <a:txBody>
+                    <a:bodyPr/>
+                    <a:lstStyle/>
+                    <a:p>
+                      <a:pPr algn="ctr" rtl="1"/>
+                      <a:r>
+                        <a:rPr sz="1200">
+                          <a:solidFill>
+                            <a:srgbClr val="333333"/>
+                          </a:solidFill>
+                          <a:latin typeface="Arial"/>
+                        </a:rPr>
+                        <a:t>تقارير صارمة</a:t>
+                      </a:r>
+                    </a:p>
+                  </a:txBody>
+                  <a:tcPr>
+                    <a:solidFill>
+                      <a:srgbClr val="F2F2F2"/>
+                    </a:solidFill>
+                  </a:tcPr>
+                </a:tc>
+                <a:tc>
+                  <a:txBody>
+                    <a:bodyPr/>
+                    <a:lstStyle/>
+                    <a:p>
+                      <a:pPr algn="ctr" rtl="1"/>
+                      <a:r>
+                        <a:rPr sz="1200">
+                          <a:solidFill>
+                            <a:srgbClr val="333333"/>
+                          </a:solidFill>
+                          <a:latin typeface="Arial"/>
+                        </a:rPr>
+                        <a:t>Warehouse</a:t>
+                      </a:r>
+                    </a:p>
+                  </a:txBody>
+                  <a:tcPr>
+                    <a:solidFill>
+                      <a:srgbClr val="F2F2F2"/>
+                    </a:solidFill>
+                  </a:tcPr>
+                </a:tc>
+                <a:tc>
+                  <a:txBody>
+                    <a:bodyPr/>
+                    <a:lstStyle/>
+                    <a:p>
+                      <a:pPr algn="ctr" rtl="1"/>
+                      <a:r>
+                        <a:rPr sz="1200">
+                          <a:solidFill>
+                            <a:srgbClr val="333333"/>
+                          </a:solidFill>
+                          <a:latin typeface="Arial"/>
+                        </a:rPr>
+                        <a:t>SQL سريع + مخطط ثابت</a:t>
+                      </a:r>
+                    </a:p>
+                  </a:txBody>
+                  <a:tcPr>
+                    <a:solidFill>
+                      <a:srgbClr val="F2F2F2"/>
+                    </a:solidFill>
+                  </a:tcPr>
+                </a:tc>
+                <a:extLst>
+                  <a:ext uri="{0D108BD9-81ED-4DB2-BD59-A6C34878D82A}">
+                    <a16:rowId xmlns:a16="http://schemas.microsoft.com/office/drawing/2014/main" val="10002"/>
+                  </a:ext>
+                </a:extLst>
+              </a:tr>
+              <a:tr h="548640">
+                <a:tc>
+                  <a:txBody>
+                    <a:bodyPr/>
+                    <a:lstStyle/>
+                    <a:p>
+                      <a:pPr algn="ctr" rtl="1"/>
+                      <a:r>
+                        <a:rPr sz="1200">
+                          <a:solidFill>
+                            <a:srgbClr val="333333"/>
+                          </a:solidFill>
+                          <a:latin typeface="Arial"/>
+                        </a:rPr>
+                        <a:t>فرق مستقلة كبيرة</a:t>
+                      </a:r>
+                    </a:p>
+                  </a:txBody>
+                  <a:tcPr>
+                    <a:solidFill>
+                      <a:srgbClr val="FFFFFF"/>
+                    </a:solidFill>
+                  </a:tcPr>
+                </a:tc>
+                <a:tc>
+                  <a:txBody>
+                    <a:bodyPr/>
+                    <a:lstStyle/>
+                    <a:p>
+                      <a:pPr algn="ctr" rtl="1"/>
+                      <a:r>
+                        <a:rPr sz="1200">
+                          <a:solidFill>
+                            <a:srgbClr val="333333"/>
+                          </a:solidFill>
+                          <a:latin typeface="Arial"/>
+                        </a:rPr>
+                        <a:t>Data Mesh</a:t>
+                      </a:r>
+                    </a:p>
+                  </a:txBody>
+                  <a:tcPr>
+                    <a:solidFill>
+                      <a:srgbClr val="FFFFFF"/>
+                    </a:solidFill>
+                  </a:tcPr>
+                </a:tc>
+                <a:tc>
+                  <a:txBody>
+                    <a:bodyPr/>
+                    <a:lstStyle/>
+                    <a:p>
+                      <a:pPr algn="ctr" rtl="1"/>
+                      <a:r>
+                        <a:rPr sz="1200">
+                          <a:solidFill>
+                            <a:srgbClr val="333333"/>
+                          </a:solidFill>
+                          <a:latin typeface="Arial"/>
+                        </a:rPr>
+                        <a:t>ملكية لامركزية + عقود</a:t>
+                      </a:r>
+                    </a:p>
+                  </a:txBody>
+                  <a:tcPr>
+                    <a:solidFill>
+                      <a:srgbClr val="FFFFFF"/>
+                    </a:solidFill>
+                  </a:tcPr>
+                </a:tc>
+                <a:extLst>
+                  <a:ext uri="{0D108BD9-81ED-4DB2-BD59-A6C34878D82A}">
+                    <a16:rowId xmlns:a16="http://schemas.microsoft.com/office/drawing/2014/main" val="10003"/>
+                  </a:ext>
+                </a:extLst>
+              </a:tr>
+            </a:tbl>
+          </a:graphicData>
+        </a:graphic>
+      </p:graphicFrame>
+      <p:sp>
+        <p:nvSpPr>
+          <p:cNvPr id="5" name="TextBox 4"/>
+          <p:cNvSpPr txBox="1"/>
+          <p:nvPr/>
+        </p:nvSpPr>
+        <p:spPr>
+          <a:xfrm>
+            <a:off x="640080" y="6400800"/>
+            <a:ext cx="8686800" cy="320040"/>
+          </a:xfrm>
+          <a:prstGeom prst="rect">
+            <a:avLst/>
+          </a:prstGeom>
+          <a:noFill/>
+        </p:spPr>
+        <p:txBody>
+          <a:bodyPr wrap="square">
+            <a:spAutoFit/>
+          </a:bodyPr>
+          <a:lstStyle/>
+          <a:p>
+            <a:pPr algn="r" rtl="1"/>
+            <a:r>
+              <a:rPr sz="1000" b="0">
+                <a:solidFill>
+                  <a:srgbClr val="666666"/>
+                </a:solidFill>
+                <a:latin typeface="Arial"/>
+              </a:rPr>
+              <a:t>Module 02 — Data &amp; AI Engineering Track  |  الوحدة الثانية</a:t>
+            </a:r>
+          </a:p>
+        </p:txBody>
+      </p:sp>
+      <p:sp>
+        <p:nvSpPr>
+          <p:cNvPr id="6" name="TextBox 5"/>
+          <p:cNvSpPr txBox="1"/>
+          <p:nvPr/>
+        </p:nvSpPr>
+        <p:spPr>
+          <a:xfrm>
+            <a:off x="9601200" y="6400800"/>
+            <a:ext cx="1920240" cy="320040"/>
+          </a:xfrm>
+          <a:prstGeom prst="rect">
+            <a:avLst/>
+          </a:prstGeom>
+          <a:noFill/>
+        </p:spPr>
+        <p:txBody>
+          <a:bodyPr wrap="square">
+            <a:spAutoFit/>
+          </a:bodyPr>
+          <a:lstStyle/>
+          <a:p>
+            <a:pPr algn="l" rtl="0"/>
+            <a:r>
+              <a:rPr sz="1000" b="0">
+                <a:solidFill>
+                  <a:srgbClr val="666666"/>
+                </a:solidFill>
                 <a:latin typeface="Calibri"/>
               </a:rPr>
-              <a:t>اختبار قصير / Quick Quiz</a:t>
-            </a:r>
-          </a:p>
-        </p:txBody>
-      </p:sp>
-      <p:sp>
-        <p:nvSpPr>
-          <p:cNvPr id="4" name="TextBox 3"/>
-          <p:cNvSpPr txBox="1"/>
-          <p:nvPr/>
-        </p:nvSpPr>
-        <p:spPr>
-          <a:xfrm>
-            <a:off x="640080" y="1280160"/>
-            <a:ext cx="10972800" cy="5212080"/>
-          </a:xfrm>
-          <a:prstGeom prst="rect">
-            <a:avLst/>
-          </a:prstGeom>
-          <a:noFill/>
-        </p:spPr>
-        <p:txBody>
-          <a:bodyPr wrap="square">
-            <a:spAutoFit/>
-          </a:bodyPr>
-          <a:lstStyle/>
-          <a:p>
-            <a:pPr algn="r" rtl="1">
-              <a:spcAft>
-                <a:spcPts val="1000"/>
-              </a:spcAft>
-            </a:pPr>
-            <a:r>
-              <a:rPr sz="2000">
-                <a:solidFill>
-                  <a:srgbClr val="333333"/>
+              <a:t>V07  •  8/14</a:t>
+            </a:r>
+          </a:p>
+        </p:txBody>
+      </p:sp>
+      <p:sp>
+        <p:nvSpPr>
+          <p:cNvPr id="7" name="TextBox 6"/>
+          <p:cNvSpPr txBox="1"/>
+          <p:nvPr/>
+        </p:nvSpPr>
+        <p:spPr>
+          <a:xfrm>
+            <a:off x="640080" y="6400800"/>
+            <a:ext cx="8686800" cy="320040"/>
+          </a:xfrm>
+          <a:prstGeom prst="rect">
+            <a:avLst/>
+          </a:prstGeom>
+          <a:noFill/>
+        </p:spPr>
+        <p:txBody>
+          <a:bodyPr wrap="square">
+            <a:spAutoFit/>
+          </a:bodyPr>
+          <a:lstStyle/>
+          <a:p>
+            <a:pPr algn="r" rtl="1"/>
+            <a:r>
+              <a:rPr sz="1000" b="0">
+                <a:solidFill>
+                  <a:srgbClr val="666666"/>
+                </a:solidFill>
+                <a:latin typeface="Arial"/>
+              </a:rPr>
+              <a:t>Module 02 — Data &amp; AI Engineering Track  |  الوحدة الثانية</a:t>
+            </a:r>
+          </a:p>
+        </p:txBody>
+      </p:sp>
+      <p:sp>
+        <p:nvSpPr>
+          <p:cNvPr id="8" name="TextBox 7"/>
+          <p:cNvSpPr txBox="1"/>
+          <p:nvPr/>
+        </p:nvSpPr>
+        <p:spPr>
+          <a:xfrm>
+            <a:off x="9601200" y="6400800"/>
+            <a:ext cx="1920240" cy="320040"/>
+          </a:xfrm>
+          <a:prstGeom prst="rect">
+            <a:avLst/>
+          </a:prstGeom>
+          <a:noFill/>
+        </p:spPr>
+        <p:txBody>
+          <a:bodyPr wrap="square">
+            <a:spAutoFit/>
+          </a:bodyPr>
+          <a:lstStyle/>
+          <a:p>
+            <a:pPr algn="l" rtl="0"/>
+            <a:r>
+              <a:rPr sz="1000" b="0">
+                <a:solidFill>
+                  <a:srgbClr val="666666"/>
                 </a:solidFill>
                 <a:latin typeface="Calibri"/>
               </a:rPr>
-              <a:t>• 1. ما معنى «مخطط عند القراءة»؟</a:t>
-            </a:r>
-          </a:p>
-          <a:p>
-            <a:pPr algn="r" rtl="0">
-              <a:spcAft>
-                <a:spcPts val="1000"/>
-              </a:spcAft>
-            </a:pPr>
-            <a:r>
-              <a:rPr sz="2000">
+              <a:t>07_  •  10/14</a:t>
+            </a:r>
+          </a:p>
+        </p:txBody>
+      </p:sp>
+      <p:sp>
+        <p:nvSpPr>
+          <p:cNvPr id="9" name="TextBox 8"/>
+          <p:cNvSpPr txBox="1"/>
+          <p:nvPr/>
+        </p:nvSpPr>
+        <p:spPr>
+          <a:xfrm>
+            <a:off x="640080" y="6400800"/>
+            <a:ext cx="8686800" cy="320040"/>
+          </a:xfrm>
+          <a:prstGeom prst="rect">
+            <a:avLst/>
+          </a:prstGeom>
+          <a:noFill/>
+        </p:spPr>
+        <p:txBody>
+          <a:bodyPr wrap="square">
+            <a:spAutoFit/>
+          </a:bodyPr>
+          <a:lstStyle/>
+          <a:p>
+            <a:pPr algn="r" rtl="1"/>
+            <a:r>
+              <a:rPr sz="1000" b="0">
+                <a:solidFill>
+                  <a:srgbClr val="666666"/>
+                </a:solidFill>
+                <a:latin typeface="Arial"/>
+              </a:rPr>
+              <a:t>Module 02 — Data &amp; AI Engineering Track  |  الوحدة الثانية</a:t>
+            </a:r>
+          </a:p>
+        </p:txBody>
+      </p:sp>
+      <p:sp>
+        <p:nvSpPr>
+          <p:cNvPr id="10" name="TextBox 9"/>
+          <p:cNvSpPr txBox="1"/>
+          <p:nvPr/>
+        </p:nvSpPr>
+        <p:spPr>
+          <a:xfrm>
+            <a:off x="9601200" y="6400800"/>
+            <a:ext cx="1920240" cy="320040"/>
+          </a:xfrm>
+          <a:prstGeom prst="rect">
+            <a:avLst/>
+          </a:prstGeom>
+          <a:noFill/>
+        </p:spPr>
+        <p:txBody>
+          <a:bodyPr wrap="square">
+            <a:spAutoFit/>
+          </a:bodyPr>
+          <a:lstStyle/>
+          <a:p>
+            <a:pPr algn="l" rtl="0"/>
+            <a:r>
+              <a:rPr sz="1000" b="0">
                 <a:solidFill>
                   <a:srgbClr val="666666"/>
                 </a:solidFill>
                 <a:latin typeface="Calibri"/>
               </a:rPr>
-              <a:t>   What does 'schema-on-read' mean?</a:t>
-            </a:r>
-          </a:p>
-          <a:p>
-            <a:pPr algn="r" rtl="1">
-              <a:spcAft>
-                <a:spcPts val="1000"/>
-              </a:spcAft>
-            </a:pPr>
-            <a:r>
-              <a:rPr sz="2000">
-                <a:solidFill>
-                  <a:srgbClr val="333333"/>
-                </a:solidFill>
-                <a:latin typeface="Calibri"/>
-              </a:rPr>
-              <a:t>• 2. ما مكونات عقد البيانات الثلاثة؟</a:t>
-            </a:r>
-          </a:p>
-          <a:p>
-            <a:pPr algn="r" rtl="0">
-              <a:spcAft>
-                <a:spcPts val="1000"/>
-              </a:spcAft>
-            </a:pPr>
-            <a:r>
-              <a:rPr sz="2000">
-                <a:solidFill>
-                  <a:srgbClr val="666666"/>
-                </a:solidFill>
-                <a:latin typeface="Calibri"/>
-              </a:rPr>
-              <a:t>   What are the three components of a data contract?</a:t>
-            </a:r>
-          </a:p>
-          <a:p>
-            <a:pPr algn="r" rtl="1">
-              <a:spcAft>
-                <a:spcPts val="1000"/>
-              </a:spcAft>
-            </a:pPr>
-            <a:r>
-              <a:rPr sz="2000">
-                <a:solidFill>
-                  <a:srgbClr val="333333"/>
-                </a:solidFill>
-                <a:latin typeface="Calibri"/>
-              </a:rPr>
-              <a:t>• 3. ماذا يضيف Lakehouse عن البحيرة المجردة؟</a:t>
-            </a:r>
-          </a:p>
-          <a:p>
-            <a:pPr algn="r" rtl="0">
-              <a:spcAft>
-                <a:spcPts val="1000"/>
-              </a:spcAft>
-            </a:pPr>
-            <a:r>
-              <a:rPr sz="2000">
-                <a:solidFill>
-                  <a:srgbClr val="666666"/>
-                </a:solidFill>
-                <a:latin typeface="Calibri"/>
-              </a:rPr>
-              <a:t>   What does a lakehouse add over a raw lake?</a:t>
+              <a:t>07_  •  10/14</a:t>
             </a:r>
           </a:p>
         </p:txBody>
@@ -3484,7 +4179,7 @@
 </file>
 
 <file path=ppt/slides/slide11.xml><?xml version="1.0" encoding="utf-8"?>
-<p:sld xmlns:a="http://schemas.openxmlformats.org/drawingml/2006/main" xmlns:p="http://schemas.openxmlformats.org/presentationml/2006/main" xmlns:r="http://schemas.openxmlformats.org/officeDocument/2006/relationships">
+<p:sld xmlns:a="http://schemas.openxmlformats.org/drawingml/2006/main" xmlns:r="http://schemas.openxmlformats.org/officeDocument/2006/relationships" xmlns:p="http://schemas.openxmlformats.org/presentationml/2006/main">
   <p:cSld>
     <p:bg>
       <p:bgPr>
@@ -3500,25 +4195,67 @@
         <p:cNvGrpSpPr/>
         <p:nvPr/>
       </p:nvGrpSpPr>
-      <p:grpSpPr/>
-      <p:sp>
-        <p:nvSpPr>
-          <p:cNvPr id="2" name="Rectangle 1"/>
+      <p:grpSpPr>
+        <a:xfrm>
+          <a:off x="0" y="0"/>
+          <a:ext cx="0" cy="0"/>
+          <a:chOff x="0" y="0"/>
+          <a:chExt cx="0" cy="0"/>
+        </a:xfrm>
+      </p:grpSpPr>
+      <p:sp>
+        <p:nvSpPr>
+          <p:cNvPr id="2" name="TextBox 1"/>
+          <p:cNvSpPr txBox="1"/>
+          <p:nvPr/>
+        </p:nvSpPr>
+        <p:spPr>
+          <a:xfrm>
+            <a:off x="640080" y="137160"/>
+            <a:ext cx="10972800" cy="640080"/>
+          </a:xfrm>
+          <a:prstGeom prst="rect">
+            <a:avLst/>
+          </a:prstGeom>
+          <a:noFill/>
+        </p:spPr>
+        <p:txBody>
+          <a:bodyPr wrap="none">
+            <a:spAutoFit/>
+          </a:bodyPr>
+          <a:lstStyle/>
+          <a:p>
+            <a:pPr algn="r" rtl="1"/>
+            <a:r>
+              <a:rPr sz="3000" b="1">
+                <a:solidFill>
+                  <a:srgbClr val="1F3B5C"/>
+                </a:solidFill>
+                <a:latin typeface="Arial"/>
+              </a:rPr>
+              <a:t>أنماط معالجة البيانات الثلاثة / Three Data Patterns</a:t>
+            </a:r>
+          </a:p>
+        </p:txBody>
+      </p:sp>
+      <p:sp>
+        <p:nvSpPr>
+          <p:cNvPr id="3" name="Rounded Rectangle 2"/>
           <p:cNvSpPr/>
           <p:nvPr/>
         </p:nvSpPr>
         <p:spPr>
           <a:xfrm>
-            <a:off x="0" y="0"/>
-            <a:ext cx="12191695" cy="1005840"/>
-          </a:xfrm>
-          <a:prstGeom prst="rect">
+            <a:off x="640080" y="1371600"/>
+            <a:ext cx="3566160" cy="914400"/>
+          </a:xfrm>
+          <a:prstGeom prst="roundRect">
             <a:avLst/>
           </a:prstGeom>
           <a:solidFill>
-            <a:srgbClr val="FFFFFF"/>
+            <a:srgbClr val="DCE6F1"/>
           </a:solidFill>
-          <a:ln w="25400">
+          <a:ln w="12700">
             <a:solidFill>
               <a:srgbClr val="1F4E79"/>
             </a:solidFill>
@@ -3540,23 +4277,343 @@
           </a:fontRef>
         </p:style>
         <p:txBody>
-          <a:bodyPr rtlCol="0" anchor="ctr"/>
-          <a:lstStyle/>
-          <a:p>
-            <a:pPr algn="ctr"/>
-          </a:p>
-        </p:txBody>
-      </p:sp>
-      <p:sp>
-        <p:nvSpPr>
-          <p:cNvPr id="3" name="TextBox 2"/>
-          <p:cNvSpPr txBox="1"/>
-          <p:nvPr/>
-        </p:nvSpPr>
-        <p:spPr>
-          <a:xfrm>
-            <a:off x="640080" y="182880"/>
-            <a:ext cx="10972800" cy="640080"/>
+          <a:bodyPr wrap="square" rtlCol="0" anchor="ctr"/>
+          <a:lstStyle/>
+          <a:p>
+            <a:pPr algn="ctr" rtl="1"/>
+            <a:r>
+              <a:rPr sz="1800" b="1">
+                <a:solidFill>
+                  <a:srgbClr val="333333"/>
+                </a:solidFill>
+                <a:latin typeface="Arial"/>
+              </a:rPr>
+              <a:t>المعمارية المتدرِّجة</a:t>
+            </a:r>
+          </a:p>
+          <a:p>
+            <a:pPr algn="ctr" rtl="0"/>
+            <a:r>
+              <a:rPr sz="1300">
+                <a:solidFill>
+                  <a:srgbClr val="666666"/>
+                </a:solidFill>
+                <a:latin typeface="Calibri"/>
+              </a:rPr>
+              <a:t>Medallion</a:t>
+            </a:r>
+          </a:p>
+        </p:txBody>
+      </p:sp>
+      <p:sp>
+        <p:nvSpPr>
+          <p:cNvPr id="4" name="Rounded Rectangle 3"/>
+          <p:cNvSpPr/>
+          <p:nvPr/>
+        </p:nvSpPr>
+        <p:spPr>
+          <a:xfrm>
+            <a:off x="640080" y="2468880"/>
+            <a:ext cx="3566160" cy="2560320"/>
+          </a:xfrm>
+          <a:prstGeom prst="roundRect">
+            <a:avLst/>
+          </a:prstGeom>
+          <a:solidFill>
+            <a:srgbClr val="EDEDED"/>
+          </a:solidFill>
+          <a:ln w="12700">
+            <a:solidFill>
+              <a:srgbClr val="1F4E79"/>
+            </a:solidFill>
+          </a:ln>
+          <a:effectLst/>
+        </p:spPr>
+        <p:style>
+          <a:lnRef idx="1">
+            <a:schemeClr val="accent1"/>
+          </a:lnRef>
+          <a:fillRef idx="3">
+            <a:schemeClr val="accent1"/>
+          </a:fillRef>
+          <a:effectRef idx="2">
+            <a:schemeClr val="accent1"/>
+          </a:effectRef>
+          <a:fontRef idx="minor">
+            <a:schemeClr val="lt1"/>
+          </a:fontRef>
+        </p:style>
+        <p:txBody>
+          <a:bodyPr wrap="square" rtlCol="0" anchor="ctr"/>
+          <a:lstStyle/>
+          <a:p>
+            <a:pPr algn="ctr" rtl="1"/>
+            <a:r>
+              <a:rPr sz="1500" b="1">
+                <a:solidFill>
+                  <a:srgbClr val="333333"/>
+                </a:solidFill>
+                <a:latin typeface="Arial"/>
+              </a:rPr>
+              <a:t>فريق مركزي — تحليلات وAI/ML/RAG</a:t>
+            </a:r>
+          </a:p>
+        </p:txBody>
+      </p:sp>
+      <p:sp>
+        <p:nvSpPr>
+          <p:cNvPr id="5" name="Rounded Rectangle 4"/>
+          <p:cNvSpPr/>
+          <p:nvPr/>
+        </p:nvSpPr>
+        <p:spPr>
+          <a:xfrm>
+            <a:off x="4389119" y="1371600"/>
+            <a:ext cx="3566160" cy="914400"/>
+          </a:xfrm>
+          <a:prstGeom prst="roundRect">
+            <a:avLst/>
+          </a:prstGeom>
+          <a:solidFill>
+            <a:srgbClr val="E2EFDA"/>
+          </a:solidFill>
+          <a:ln w="12700">
+            <a:solidFill>
+              <a:srgbClr val="1F4E79"/>
+            </a:solidFill>
+          </a:ln>
+          <a:effectLst/>
+        </p:spPr>
+        <p:style>
+          <a:lnRef idx="1">
+            <a:schemeClr val="accent1"/>
+          </a:lnRef>
+          <a:fillRef idx="3">
+            <a:schemeClr val="accent1"/>
+          </a:fillRef>
+          <a:effectRef idx="2">
+            <a:schemeClr val="accent1"/>
+          </a:effectRef>
+          <a:fontRef idx="minor">
+            <a:schemeClr val="lt1"/>
+          </a:fontRef>
+        </p:style>
+        <p:txBody>
+          <a:bodyPr wrap="square" rtlCol="0" anchor="ctr"/>
+          <a:lstStyle/>
+          <a:p>
+            <a:pPr algn="ctr" rtl="1"/>
+            <a:r>
+              <a:rPr sz="1800" b="1">
+                <a:solidFill>
+                  <a:srgbClr val="333333"/>
+                </a:solidFill>
+                <a:latin typeface="Arial"/>
+              </a:rPr>
+              <a:t>مستودع البيانات</a:t>
+            </a:r>
+          </a:p>
+          <a:p>
+            <a:pPr algn="ctr" rtl="0"/>
+            <a:r>
+              <a:rPr sz="1300">
+                <a:solidFill>
+                  <a:srgbClr val="666666"/>
+                </a:solidFill>
+                <a:latin typeface="Calibri"/>
+              </a:rPr>
+              <a:t>Data Warehouse</a:t>
+            </a:r>
+          </a:p>
+        </p:txBody>
+      </p:sp>
+      <p:sp>
+        <p:nvSpPr>
+          <p:cNvPr id="6" name="Rounded Rectangle 5"/>
+          <p:cNvSpPr/>
+          <p:nvPr/>
+        </p:nvSpPr>
+        <p:spPr>
+          <a:xfrm>
+            <a:off x="4389119" y="2468880"/>
+            <a:ext cx="3566160" cy="2560320"/>
+          </a:xfrm>
+          <a:prstGeom prst="roundRect">
+            <a:avLst/>
+          </a:prstGeom>
+          <a:solidFill>
+            <a:srgbClr val="EDEDED"/>
+          </a:solidFill>
+          <a:ln w="12700">
+            <a:solidFill>
+              <a:srgbClr val="1F4E79"/>
+            </a:solidFill>
+          </a:ln>
+          <a:effectLst/>
+        </p:spPr>
+        <p:style>
+          <a:lnRef idx="1">
+            <a:schemeClr val="accent1"/>
+          </a:lnRef>
+          <a:fillRef idx="3">
+            <a:schemeClr val="accent1"/>
+          </a:fillRef>
+          <a:effectRef idx="2">
+            <a:schemeClr val="accent1"/>
+          </a:effectRef>
+          <a:fontRef idx="minor">
+            <a:schemeClr val="lt1"/>
+          </a:fontRef>
+        </p:style>
+        <p:txBody>
+          <a:bodyPr wrap="square" rtlCol="0" anchor="ctr"/>
+          <a:lstStyle/>
+          <a:p>
+            <a:pPr algn="ctr" rtl="1"/>
+            <a:r>
+              <a:rPr sz="1500" b="1">
+                <a:solidFill>
+                  <a:srgbClr val="333333"/>
+                </a:solidFill>
+                <a:latin typeface="Arial"/>
+              </a:rPr>
+              <a:t>فرق BI — تقارير وذكاء أعمال</a:t>
+            </a:r>
+          </a:p>
+        </p:txBody>
+      </p:sp>
+      <p:sp>
+        <p:nvSpPr>
+          <p:cNvPr id="7" name="Rounded Rectangle 6"/>
+          <p:cNvSpPr/>
+          <p:nvPr/>
+        </p:nvSpPr>
+        <p:spPr>
+          <a:xfrm>
+            <a:off x="8138158" y="1371600"/>
+            <a:ext cx="3566160" cy="914400"/>
+          </a:xfrm>
+          <a:prstGeom prst="roundRect">
+            <a:avLst/>
+          </a:prstGeom>
+          <a:solidFill>
+            <a:srgbClr val="FDE9D9"/>
+          </a:solidFill>
+          <a:ln w="12700">
+            <a:solidFill>
+              <a:srgbClr val="1F4E79"/>
+            </a:solidFill>
+          </a:ln>
+          <a:effectLst/>
+        </p:spPr>
+        <p:style>
+          <a:lnRef idx="1">
+            <a:schemeClr val="accent1"/>
+          </a:lnRef>
+          <a:fillRef idx="3">
+            <a:schemeClr val="accent1"/>
+          </a:fillRef>
+          <a:effectRef idx="2">
+            <a:schemeClr val="accent1"/>
+          </a:effectRef>
+          <a:fontRef idx="minor">
+            <a:schemeClr val="lt1"/>
+          </a:fontRef>
+        </p:style>
+        <p:txBody>
+          <a:bodyPr wrap="square" rtlCol="0" anchor="ctr"/>
+          <a:lstStyle/>
+          <a:p>
+            <a:pPr algn="ctr" rtl="1"/>
+            <a:r>
+              <a:rPr sz="1800" b="1">
+                <a:solidFill>
+                  <a:srgbClr val="333333"/>
+                </a:solidFill>
+                <a:latin typeface="Arial"/>
+              </a:rPr>
+              <a:t>شبكة البيانات</a:t>
+            </a:r>
+          </a:p>
+          <a:p>
+            <a:pPr algn="ctr" rtl="0"/>
+            <a:r>
+              <a:rPr sz="1300">
+                <a:solidFill>
+                  <a:srgbClr val="666666"/>
+                </a:solidFill>
+                <a:latin typeface="Calibri"/>
+              </a:rPr>
+              <a:t>Data Mesh</a:t>
+            </a:r>
+          </a:p>
+        </p:txBody>
+      </p:sp>
+      <p:sp>
+        <p:nvSpPr>
+          <p:cNvPr id="8" name="Rounded Rectangle 7"/>
+          <p:cNvSpPr/>
+          <p:nvPr/>
+        </p:nvSpPr>
+        <p:spPr>
+          <a:xfrm>
+            <a:off x="8138158" y="2468880"/>
+            <a:ext cx="3566160" cy="2560320"/>
+          </a:xfrm>
+          <a:prstGeom prst="roundRect">
+            <a:avLst/>
+          </a:prstGeom>
+          <a:solidFill>
+            <a:srgbClr val="EDEDED"/>
+          </a:solidFill>
+          <a:ln w="12700">
+            <a:solidFill>
+              <a:srgbClr val="1F4E79"/>
+            </a:solidFill>
+          </a:ln>
+          <a:effectLst/>
+        </p:spPr>
+        <p:style>
+          <a:lnRef idx="1">
+            <a:schemeClr val="accent1"/>
+          </a:lnRef>
+          <a:fillRef idx="3">
+            <a:schemeClr val="accent1"/>
+          </a:fillRef>
+          <a:effectRef idx="2">
+            <a:schemeClr val="accent1"/>
+          </a:effectRef>
+          <a:fontRef idx="minor">
+            <a:schemeClr val="lt1"/>
+          </a:fontRef>
+        </p:style>
+        <p:txBody>
+          <a:bodyPr wrap="square" rtlCol="0" anchor="ctr"/>
+          <a:lstStyle/>
+          <a:p>
+            <a:pPr algn="ctr" rtl="1"/>
+            <a:r>
+              <a:rPr sz="1500" b="1">
+                <a:solidFill>
+                  <a:srgbClr val="333333"/>
+                </a:solidFill>
+                <a:latin typeface="Arial"/>
+              </a:rPr>
+              <a:t>فرق المجالات — مؤسسات كبيرة</a:t>
+            </a:r>
+          </a:p>
+        </p:txBody>
+      </p:sp>
+      <p:sp>
+        <p:nvSpPr>
+          <p:cNvPr id="9" name="TextBox 8"/>
+          <p:cNvSpPr txBox="1"/>
+          <p:nvPr/>
+        </p:nvSpPr>
+        <p:spPr>
+          <a:xfrm>
+            <a:off x="640080" y="6126480"/>
+            <a:ext cx="10972800" cy="548640"/>
           </a:xfrm>
           <a:prstGeom prst="rect">
             <a:avLst/>
@@ -3571,100 +4628,159 @@
           <a:p>
             <a:pPr algn="r" rtl="1"/>
             <a:r>
-              <a:rPr sz="3200" b="1">
-                <a:solidFill>
-                  <a:srgbClr val="1F3B5C"/>
+              <a:rPr sz="1400">
+                <a:solidFill>
+                  <a:srgbClr val="666666"/>
+                </a:solidFill>
+                <a:latin typeface="Arial"/>
+              </a:rPr>
+              <a:t>المعايير: الفكرة الجوهرية / المالك / الحوكمة / حالة الاستخدام المثلى.</a:t>
+            </a:r>
+          </a:p>
+          <a:p>
+            <a:pPr algn="r" rtl="0"/>
+            <a:r>
+              <a:t>Criteria: core idea / ownership / governance / best use case.</a:t>
+            </a:r>
+          </a:p>
+        </p:txBody>
+      </p:sp>
+      <p:sp>
+        <p:nvSpPr>
+          <p:cNvPr id="10" name="TextBox 9"/>
+          <p:cNvSpPr txBox="1"/>
+          <p:nvPr/>
+        </p:nvSpPr>
+        <p:spPr>
+          <a:xfrm>
+            <a:off x="640080" y="6400800"/>
+            <a:ext cx="8686800" cy="320040"/>
+          </a:xfrm>
+          <a:prstGeom prst="rect">
+            <a:avLst/>
+          </a:prstGeom>
+          <a:noFill/>
+        </p:spPr>
+        <p:txBody>
+          <a:bodyPr wrap="square">
+            <a:spAutoFit/>
+          </a:bodyPr>
+          <a:lstStyle/>
+          <a:p>
+            <a:pPr algn="r" rtl="1"/>
+            <a:r>
+              <a:rPr sz="1000" b="0">
+                <a:solidFill>
+                  <a:srgbClr val="666666"/>
+                </a:solidFill>
+                <a:latin typeface="Arial"/>
+              </a:rPr>
+              <a:t>Module 02 — Data &amp; AI Engineering Track  |  الوحدة الثانية</a:t>
+            </a:r>
+          </a:p>
+        </p:txBody>
+      </p:sp>
+      <p:sp>
+        <p:nvSpPr>
+          <p:cNvPr id="11" name="TextBox 10"/>
+          <p:cNvSpPr txBox="1"/>
+          <p:nvPr/>
+        </p:nvSpPr>
+        <p:spPr>
+          <a:xfrm>
+            <a:off x="9601200" y="6400800"/>
+            <a:ext cx="1920240" cy="320040"/>
+          </a:xfrm>
+          <a:prstGeom prst="rect">
+            <a:avLst/>
+          </a:prstGeom>
+          <a:noFill/>
+        </p:spPr>
+        <p:txBody>
+          <a:bodyPr wrap="square">
+            <a:spAutoFit/>
+          </a:bodyPr>
+          <a:lstStyle/>
+          <a:p>
+            <a:pPr algn="l" rtl="0"/>
+            <a:r>
+              <a:rPr sz="1000" b="0">
+                <a:solidFill>
+                  <a:srgbClr val="666666"/>
                 </a:solidFill>
                 <a:latin typeface="Calibri"/>
               </a:rPr>
-              <a:t>للاستزادة / Further Reading</a:t>
-            </a:r>
-          </a:p>
-        </p:txBody>
-      </p:sp>
-      <p:sp>
-        <p:nvSpPr>
-          <p:cNvPr id="4" name="TextBox 3"/>
-          <p:cNvSpPr txBox="1"/>
-          <p:nvPr/>
-        </p:nvSpPr>
-        <p:spPr>
-          <a:xfrm>
-            <a:off x="640080" y="1280160"/>
-            <a:ext cx="10972800" cy="5212080"/>
-          </a:xfrm>
-          <a:prstGeom prst="rect">
-            <a:avLst/>
-          </a:prstGeom>
-          <a:noFill/>
-        </p:spPr>
-        <p:txBody>
-          <a:bodyPr wrap="square">
-            <a:spAutoFit/>
-          </a:bodyPr>
-          <a:lstStyle/>
-          <a:p>
-            <a:pPr algn="r" rtl="1">
-              <a:spcAft>
-                <a:spcPts val="1000"/>
-              </a:spcAft>
-            </a:pPr>
-            <a:r>
-              <a:rPr sz="2000">
-                <a:solidFill>
-                  <a:srgbClr val="333333"/>
+              <a:t>07_  •  11/14</a:t>
+            </a:r>
+          </a:p>
+        </p:txBody>
+      </p:sp>
+      <p:sp>
+        <p:nvSpPr>
+          <p:cNvPr id="12" name="TextBox 11"/>
+          <p:cNvSpPr txBox="1"/>
+          <p:nvPr/>
+        </p:nvSpPr>
+        <p:spPr>
+          <a:xfrm>
+            <a:off x="640080" y="6400800"/>
+            <a:ext cx="8686800" cy="320040"/>
+          </a:xfrm>
+          <a:prstGeom prst="rect">
+            <a:avLst/>
+          </a:prstGeom>
+          <a:noFill/>
+        </p:spPr>
+        <p:txBody>
+          <a:bodyPr wrap="square">
+            <a:spAutoFit/>
+          </a:bodyPr>
+          <a:lstStyle/>
+          <a:p>
+            <a:pPr algn="r" rtl="1"/>
+            <a:r>
+              <a:rPr sz="1000" b="0">
+                <a:solidFill>
+                  <a:srgbClr val="666666"/>
+                </a:solidFill>
+                <a:latin typeface="Arial"/>
+              </a:rPr>
+              <a:t>Module 02 — Data &amp; AI Engineering Track  |  الوحدة الثانية</a:t>
+            </a:r>
+          </a:p>
+        </p:txBody>
+      </p:sp>
+      <p:sp>
+        <p:nvSpPr>
+          <p:cNvPr id="13" name="TextBox 12"/>
+          <p:cNvSpPr txBox="1"/>
+          <p:nvPr/>
+        </p:nvSpPr>
+        <p:spPr>
+          <a:xfrm>
+            <a:off x="9601200" y="6400800"/>
+            <a:ext cx="1920240" cy="320040"/>
+          </a:xfrm>
+          <a:prstGeom prst="rect">
+            <a:avLst/>
+          </a:prstGeom>
+          <a:noFill/>
+        </p:spPr>
+        <p:txBody>
+          <a:bodyPr wrap="square">
+            <a:spAutoFit/>
+          </a:bodyPr>
+          <a:lstStyle/>
+          <a:p>
+            <a:pPr algn="l" rtl="0"/>
+            <a:r>
+              <a:rPr sz="1000" b="0">
+                <a:solidFill>
+                  <a:srgbClr val="666666"/>
                 </a:solidFill>
                 <a:latin typeface="Calibri"/>
               </a:rPr>
-              <a:t>• توثيق Delta Lake وApache Iceberg.</a:t>
-            </a:r>
-          </a:p>
-          <a:p>
-            <a:pPr algn="r" rtl="0">
-              <a:spcAft>
-                <a:spcPts val="1000"/>
-              </a:spcAft>
-            </a:pPr>
-            <a:r>
-              <a:rPr sz="2000">
-                <a:solidFill>
-                  <a:srgbClr val="666666"/>
-                </a:solidFill>
-                <a:latin typeface="Calibri"/>
-              </a:rPr>
-              <a:t>   Delta Lake and Apache Iceberg docs.</a:t>
-            </a:r>
-          </a:p>
-          <a:p>
-            <a:pPr algn="r" rtl="1">
-              <a:spcAft>
-                <a:spcPts val="1000"/>
-              </a:spcAft>
-            </a:pPr>
-            <a:r>
-              <a:rPr sz="2000">
-                <a:solidFill>
-                  <a:srgbClr val="333333"/>
-                </a:solidFill>
-                <a:latin typeface="Calibri"/>
-              </a:rPr>
-              <a:t>• مقالات Data Contracts (Chad Sanderson).</a:t>
-            </a:r>
-          </a:p>
-          <a:p>
-            <a:pPr algn="r" rtl="0">
-              <a:spcAft>
-                <a:spcPts val="1000"/>
-              </a:spcAft>
-            </a:pPr>
-            <a:r>
-              <a:rPr sz="2000">
-                <a:solidFill>
-                  <a:srgbClr val="666666"/>
-                </a:solidFill>
-                <a:latin typeface="Calibri"/>
-              </a:rPr>
-              <a:t>   Data contracts articles (Chad Sanderson).</a:t>
+              <a:t>07_  •  11/14</a:t>
             </a:r>
           </a:p>
         </p:txBody>
@@ -3678,7 +4794,7 @@
 </file>
 
 <file path=ppt/slides/slide12.xml><?xml version="1.0" encoding="utf-8"?>
-<p:sld xmlns:a="http://schemas.openxmlformats.org/drawingml/2006/main" xmlns:p="http://schemas.openxmlformats.org/presentationml/2006/main" xmlns:r="http://schemas.openxmlformats.org/officeDocument/2006/relationships">
+<p:sld xmlns:a="http://schemas.openxmlformats.org/drawingml/2006/main" xmlns:r="http://schemas.openxmlformats.org/officeDocument/2006/relationships" xmlns:p="http://schemas.openxmlformats.org/presentationml/2006/main">
   <p:cSld>
     <p:bg>
       <p:bgPr>
@@ -3694,60 +4810,32 @@
         <p:cNvGrpSpPr/>
         <p:nvPr/>
       </p:nvGrpSpPr>
-      <p:grpSpPr/>
-      <p:sp>
-        <p:nvSpPr>
-          <p:cNvPr id="2" name="TextBox 1"/>
-          <p:cNvSpPr txBox="1"/>
-          <p:nvPr/>
-        </p:nvSpPr>
-        <p:spPr>
-          <a:xfrm>
-            <a:off x="640080" y="137160"/>
-            <a:ext cx="10972800" cy="640080"/>
-          </a:xfrm>
-          <a:prstGeom prst="rect">
-            <a:avLst/>
-          </a:prstGeom>
-          <a:noFill/>
-        </p:spPr>
-        <p:txBody>
-          <a:bodyPr wrap="none">
-            <a:spAutoFit/>
-          </a:bodyPr>
-          <a:lstStyle/>
-          <a:p>
-            <a:pPr algn="r" rtl="1"/>
-            <a:r>
-              <a:rPr sz="3000" b="1">
-                <a:solidFill>
-                  <a:srgbClr val="1F3B5C"/>
-                </a:solidFill>
-                <a:latin typeface="Calibri"/>
-              </a:rPr>
-              <a:t>أنماط معالجة البيانات الثلاثة / Three Data Patterns</a:t>
-            </a:r>
-          </a:p>
-        </p:txBody>
-      </p:sp>
-      <p:sp>
-        <p:nvSpPr>
-          <p:cNvPr id="3" name="Rounded Rectangle 2"/>
+      <p:grpSpPr>
+        <a:xfrm>
+          <a:off x="0" y="0"/>
+          <a:ext cx="0" cy="0"/>
+          <a:chOff x="0" y="0"/>
+          <a:chExt cx="0" cy="0"/>
+        </a:xfrm>
+      </p:grpSpPr>
+      <p:sp>
+        <p:nvSpPr>
+          <p:cNvPr id="2" name="Rectangle 1"/>
           <p:cNvSpPr/>
           <p:nvPr/>
         </p:nvSpPr>
         <p:spPr>
           <a:xfrm>
-            <a:off x="640080" y="1371600"/>
-            <a:ext cx="3566160" cy="914400"/>
-          </a:xfrm>
-          <a:prstGeom prst="roundRect">
+            <a:off x="0" y="0"/>
+            <a:ext cx="12191695" cy="1005840"/>
+          </a:xfrm>
+          <a:prstGeom prst="rect">
             <a:avLst/>
           </a:prstGeom>
           <a:solidFill>
-            <a:srgbClr val="DCE6F1"/>
+            <a:srgbClr val="FFFFFF"/>
           </a:solidFill>
-          <a:ln w="12700">
+          <a:ln w="25400">
             <a:solidFill>
               <a:srgbClr val="1F4E79"/>
             </a:solidFill>
@@ -3769,370 +4857,392 @@
           </a:fontRef>
         </p:style>
         <p:txBody>
-          <a:bodyPr rtlCol="0" anchor="ctr" wrap="square"/>
-          <a:lstStyle/>
-          <a:p>
-            <a:pPr algn="ctr" rtl="1"/>
-            <a:r>
-              <a:rPr sz="1800" b="1">
+          <a:bodyPr rtlCol="0" anchor="ctr"/>
+          <a:lstStyle/>
+          <a:p>
+            <a:pPr algn="ctr"/>
+            <a:endParaRPr/>
+          </a:p>
+        </p:txBody>
+      </p:sp>
+      <p:sp>
+        <p:nvSpPr>
+          <p:cNvPr id="3" name="TextBox 2"/>
+          <p:cNvSpPr txBox="1"/>
+          <p:nvPr/>
+        </p:nvSpPr>
+        <p:spPr>
+          <a:xfrm>
+            <a:off x="640080" y="182880"/>
+            <a:ext cx="10972800" cy="640080"/>
+          </a:xfrm>
+          <a:prstGeom prst="rect">
+            <a:avLst/>
+          </a:prstGeom>
+          <a:noFill/>
+        </p:spPr>
+        <p:txBody>
+          <a:bodyPr wrap="square">
+            <a:spAutoFit/>
+          </a:bodyPr>
+          <a:lstStyle/>
+          <a:p>
+            <a:pPr algn="r" rtl="1"/>
+            <a:r>
+              <a:rPr sz="3200" b="1">
+                <a:solidFill>
+                  <a:srgbClr val="1F3B5C"/>
+                </a:solidFill>
+                <a:latin typeface="Arial"/>
+              </a:rPr>
+              <a:t>اختبار قصير / Quick Quiz</a:t>
+            </a:r>
+          </a:p>
+        </p:txBody>
+      </p:sp>
+      <p:sp>
+        <p:nvSpPr>
+          <p:cNvPr id="4" name="TextBox 3"/>
+          <p:cNvSpPr txBox="1"/>
+          <p:nvPr/>
+        </p:nvSpPr>
+        <p:spPr>
+          <a:xfrm>
+            <a:off x="640080" y="1280160"/>
+            <a:ext cx="10972800" cy="5212080"/>
+          </a:xfrm>
+          <a:prstGeom prst="rect">
+            <a:avLst/>
+          </a:prstGeom>
+          <a:noFill/>
+        </p:spPr>
+        <p:txBody>
+          <a:bodyPr wrap="square">
+            <a:spAutoFit/>
+          </a:bodyPr>
+          <a:lstStyle/>
+          <a:p>
+            <a:pPr algn="r" rtl="1">
+              <a:spcBef>
+                <a:spcPts val="200"/>
+              </a:spcBef>
+              <a:spcAft>
+                <a:spcPts val="1000"/>
+              </a:spcAft>
+            </a:pPr>
+            <a:r>
+              <a:rPr sz="2000">
                 <a:solidFill>
                   <a:srgbClr val="333333"/>
                 </a:solidFill>
+                <a:latin typeface="Arial"/>
+              </a:rPr>
+              <a:t>• 1. ما معنى «مخطط عند القراءة»؟</a:t>
+            </a:r>
+          </a:p>
+          <a:p>
+            <a:pPr algn="l" rtl="0">
+              <a:spcBef>
+                <a:spcPts val="200"/>
+              </a:spcBef>
+              <a:spcAft>
+                <a:spcPts val="1000"/>
+              </a:spcAft>
+            </a:pPr>
+            <a:r>
+              <a:rPr sz="1700">
+                <a:solidFill>
+                  <a:srgbClr val="666666"/>
+                </a:solidFill>
                 <a:latin typeface="Calibri"/>
               </a:rPr>
-              <a:t>المعمارية المتدرِّجة</a:t>
-            </a:r>
-          </a:p>
-          <a:p>
-            <a:pPr algn="ctr" rtl="0"/>
-            <a:r>
-              <a:rPr sz="1300">
+              <a:t>• What does 'schema-on-read' mean?</a:t>
+            </a:r>
+          </a:p>
+          <a:p>
+            <a:pPr algn="r" rtl="1">
+              <a:spcBef>
+                <a:spcPts val="200"/>
+              </a:spcBef>
+              <a:spcAft>
+                <a:spcPts val="1000"/>
+              </a:spcAft>
+            </a:pPr>
+            <a:r>
+              <a:rPr sz="2000">
+                <a:solidFill>
+                  <a:srgbClr val="333333"/>
+                </a:solidFill>
+                <a:latin typeface="Arial"/>
+              </a:rPr>
+              <a:t>• 2. ما مكونات عقد البيانات الثلاثة؟</a:t>
+            </a:r>
+          </a:p>
+          <a:p>
+            <a:pPr algn="l" rtl="0">
+              <a:spcBef>
+                <a:spcPts val="200"/>
+              </a:spcBef>
+              <a:spcAft>
+                <a:spcPts val="1000"/>
+              </a:spcAft>
+            </a:pPr>
+            <a:r>
+              <a:rPr sz="1700">
                 <a:solidFill>
                   <a:srgbClr val="666666"/>
                 </a:solidFill>
                 <a:latin typeface="Calibri"/>
               </a:rPr>
-              <a:t>Medallion</a:t>
-            </a:r>
-          </a:p>
-        </p:txBody>
-      </p:sp>
-      <p:sp>
-        <p:nvSpPr>
-          <p:cNvPr id="4" name="Rounded Rectangle 3"/>
-          <p:cNvSpPr/>
-          <p:nvPr/>
-        </p:nvSpPr>
-        <p:spPr>
-          <a:xfrm>
-            <a:off x="640080" y="2468880"/>
-            <a:ext cx="3566160" cy="2560320"/>
-          </a:xfrm>
-          <a:prstGeom prst="roundRect">
-            <a:avLst/>
-          </a:prstGeom>
-          <a:solidFill>
-            <a:srgbClr val="EDEDED"/>
-          </a:solidFill>
-          <a:ln w="12700">
-            <a:solidFill>
-              <a:srgbClr val="1F4E79"/>
-            </a:solidFill>
-          </a:ln>
-          <a:effectLst/>
-        </p:spPr>
-        <p:style>
-          <a:lnRef idx="1">
-            <a:schemeClr val="accent1"/>
-          </a:lnRef>
-          <a:fillRef idx="3">
-            <a:schemeClr val="accent1"/>
-          </a:fillRef>
-          <a:effectRef idx="2">
-            <a:schemeClr val="accent1"/>
-          </a:effectRef>
-          <a:fontRef idx="minor">
-            <a:schemeClr val="lt1"/>
-          </a:fontRef>
-        </p:style>
-        <p:txBody>
-          <a:bodyPr rtlCol="0" anchor="ctr" wrap="square"/>
-          <a:lstStyle/>
-          <a:p>
-            <a:pPr algn="ctr" rtl="1"/>
-            <a:r>
-              <a:rPr sz="1500" b="1">
+              <a:t>• What are the three components of a data contract?</a:t>
+            </a:r>
+          </a:p>
+          <a:p>
+            <a:pPr algn="r" rtl="1">
+              <a:spcBef>
+                <a:spcPts val="200"/>
+              </a:spcBef>
+              <a:spcAft>
+                <a:spcPts val="1000"/>
+              </a:spcAft>
+            </a:pPr>
+            <a:r>
+              <a:rPr sz="2000">
                 <a:solidFill>
                   <a:srgbClr val="333333"/>
                 </a:solidFill>
+                <a:latin typeface="Arial"/>
+              </a:rPr>
+              <a:t>• 3. ماذا يضيف Lakehouse عن البحيرة المجردة؟</a:t>
+            </a:r>
+          </a:p>
+          <a:p>
+            <a:pPr algn="l" rtl="0">
+              <a:spcBef>
+                <a:spcPts val="200"/>
+              </a:spcBef>
+              <a:spcAft>
+                <a:spcPts val="1000"/>
+              </a:spcAft>
+            </a:pPr>
+            <a:r>
+              <a:rPr sz="1700">
+                <a:solidFill>
+                  <a:srgbClr val="666666"/>
+                </a:solidFill>
                 <a:latin typeface="Calibri"/>
               </a:rPr>
-              <a:t>فريق مركزي — تحليلات وAI/ML/RAG</a:t>
-            </a:r>
-          </a:p>
-        </p:txBody>
-      </p:sp>
-      <p:sp>
-        <p:nvSpPr>
-          <p:cNvPr id="5" name="Rounded Rectangle 4"/>
-          <p:cNvSpPr/>
-          <p:nvPr/>
-        </p:nvSpPr>
-        <p:spPr>
-          <a:xfrm>
-            <a:off x="4389119" y="1371600"/>
-            <a:ext cx="3566160" cy="914400"/>
-          </a:xfrm>
-          <a:prstGeom prst="roundRect">
-            <a:avLst/>
-          </a:prstGeom>
-          <a:solidFill>
-            <a:srgbClr val="E2EFDA"/>
-          </a:solidFill>
-          <a:ln w="12700">
-            <a:solidFill>
-              <a:srgbClr val="1F4E79"/>
-            </a:solidFill>
-          </a:ln>
-          <a:effectLst/>
-        </p:spPr>
-        <p:style>
-          <a:lnRef idx="1">
-            <a:schemeClr val="accent1"/>
-          </a:lnRef>
-          <a:fillRef idx="3">
-            <a:schemeClr val="accent1"/>
-          </a:fillRef>
-          <a:effectRef idx="2">
-            <a:schemeClr val="accent1"/>
-          </a:effectRef>
-          <a:fontRef idx="minor">
-            <a:schemeClr val="lt1"/>
-          </a:fontRef>
-        </p:style>
-        <p:txBody>
-          <a:bodyPr rtlCol="0" anchor="ctr" wrap="square"/>
-          <a:lstStyle/>
-          <a:p>
-            <a:pPr algn="ctr" rtl="1"/>
-            <a:r>
-              <a:rPr sz="1800" b="1">
-                <a:solidFill>
-                  <a:srgbClr val="333333"/>
+              <a:t>• What does a lakehouse add over a raw lake?</a:t>
+            </a:r>
+          </a:p>
+        </p:txBody>
+      </p:sp>
+      <p:sp>
+        <p:nvSpPr>
+          <p:cNvPr id="5" name="TextBox 4"/>
+          <p:cNvSpPr txBox="1"/>
+          <p:nvPr/>
+        </p:nvSpPr>
+        <p:spPr>
+          <a:xfrm>
+            <a:off x="640080" y="6400800"/>
+            <a:ext cx="8686800" cy="320040"/>
+          </a:xfrm>
+          <a:prstGeom prst="rect">
+            <a:avLst/>
+          </a:prstGeom>
+          <a:noFill/>
+        </p:spPr>
+        <p:txBody>
+          <a:bodyPr wrap="square">
+            <a:spAutoFit/>
+          </a:bodyPr>
+          <a:lstStyle/>
+          <a:p>
+            <a:pPr algn="r" rtl="1"/>
+            <a:r>
+              <a:rPr sz="1000" b="0">
+                <a:solidFill>
+                  <a:srgbClr val="666666"/>
+                </a:solidFill>
+                <a:latin typeface="Arial"/>
+              </a:rPr>
+              <a:t>Module 02 — Data &amp; AI Engineering Track  |  الوحدة الثانية</a:t>
+            </a:r>
+          </a:p>
+        </p:txBody>
+      </p:sp>
+      <p:sp>
+        <p:nvSpPr>
+          <p:cNvPr id="6" name="TextBox 5"/>
+          <p:cNvSpPr txBox="1"/>
+          <p:nvPr/>
+        </p:nvSpPr>
+        <p:spPr>
+          <a:xfrm>
+            <a:off x="9601200" y="6400800"/>
+            <a:ext cx="1920240" cy="320040"/>
+          </a:xfrm>
+          <a:prstGeom prst="rect">
+            <a:avLst/>
+          </a:prstGeom>
+          <a:noFill/>
+        </p:spPr>
+        <p:txBody>
+          <a:bodyPr wrap="square">
+            <a:spAutoFit/>
+          </a:bodyPr>
+          <a:lstStyle/>
+          <a:p>
+            <a:pPr algn="l" rtl="0"/>
+            <a:r>
+              <a:rPr sz="1000" b="0">
+                <a:solidFill>
+                  <a:srgbClr val="666666"/>
                 </a:solidFill>
                 <a:latin typeface="Calibri"/>
               </a:rPr>
-              <a:t>مستودع البيانات</a:t>
-            </a:r>
-          </a:p>
-          <a:p>
-            <a:pPr algn="ctr" rtl="0"/>
-            <a:r>
-              <a:rPr sz="1300">
+              <a:t>V07  •  9/14</a:t>
+            </a:r>
+          </a:p>
+        </p:txBody>
+      </p:sp>
+      <p:sp>
+        <p:nvSpPr>
+          <p:cNvPr id="7" name="TextBox 6"/>
+          <p:cNvSpPr txBox="1"/>
+          <p:nvPr/>
+        </p:nvSpPr>
+        <p:spPr>
+          <a:xfrm>
+            <a:off x="640080" y="6400800"/>
+            <a:ext cx="8686800" cy="320040"/>
+          </a:xfrm>
+          <a:prstGeom prst="rect">
+            <a:avLst/>
+          </a:prstGeom>
+          <a:noFill/>
+        </p:spPr>
+        <p:txBody>
+          <a:bodyPr wrap="square">
+            <a:spAutoFit/>
+          </a:bodyPr>
+          <a:lstStyle/>
+          <a:p>
+            <a:pPr algn="r" rtl="1"/>
+            <a:r>
+              <a:rPr sz="1000" b="0">
+                <a:solidFill>
+                  <a:srgbClr val="666666"/>
+                </a:solidFill>
+                <a:latin typeface="Arial"/>
+              </a:rPr>
+              <a:t>Module 02 — Data &amp; AI Engineering Track  |  الوحدة الثانية</a:t>
+            </a:r>
+          </a:p>
+        </p:txBody>
+      </p:sp>
+      <p:sp>
+        <p:nvSpPr>
+          <p:cNvPr id="8" name="TextBox 7"/>
+          <p:cNvSpPr txBox="1"/>
+          <p:nvPr/>
+        </p:nvSpPr>
+        <p:spPr>
+          <a:xfrm>
+            <a:off x="9601200" y="6400800"/>
+            <a:ext cx="1920240" cy="320040"/>
+          </a:xfrm>
+          <a:prstGeom prst="rect">
+            <a:avLst/>
+          </a:prstGeom>
+          <a:noFill/>
+        </p:spPr>
+        <p:txBody>
+          <a:bodyPr wrap="square">
+            <a:spAutoFit/>
+          </a:bodyPr>
+          <a:lstStyle/>
+          <a:p>
+            <a:pPr algn="l" rtl="0"/>
+            <a:r>
+              <a:rPr sz="1000" b="0">
                 <a:solidFill>
                   <a:srgbClr val="666666"/>
                 </a:solidFill>
                 <a:latin typeface="Calibri"/>
               </a:rPr>
-              <a:t>Data Warehouse</a:t>
-            </a:r>
-          </a:p>
-        </p:txBody>
-      </p:sp>
-      <p:sp>
-        <p:nvSpPr>
-          <p:cNvPr id="6" name="Rounded Rectangle 5"/>
-          <p:cNvSpPr/>
-          <p:nvPr/>
-        </p:nvSpPr>
-        <p:spPr>
-          <a:xfrm>
-            <a:off x="4389119" y="2468880"/>
-            <a:ext cx="3566160" cy="2560320"/>
-          </a:xfrm>
-          <a:prstGeom prst="roundRect">
-            <a:avLst/>
-          </a:prstGeom>
-          <a:solidFill>
-            <a:srgbClr val="EDEDED"/>
-          </a:solidFill>
-          <a:ln w="12700">
-            <a:solidFill>
-              <a:srgbClr val="1F4E79"/>
-            </a:solidFill>
-          </a:ln>
-          <a:effectLst/>
-        </p:spPr>
-        <p:style>
-          <a:lnRef idx="1">
-            <a:schemeClr val="accent1"/>
-          </a:lnRef>
-          <a:fillRef idx="3">
-            <a:schemeClr val="accent1"/>
-          </a:fillRef>
-          <a:effectRef idx="2">
-            <a:schemeClr val="accent1"/>
-          </a:effectRef>
-          <a:fontRef idx="minor">
-            <a:schemeClr val="lt1"/>
-          </a:fontRef>
-        </p:style>
-        <p:txBody>
-          <a:bodyPr rtlCol="0" anchor="ctr" wrap="square"/>
-          <a:lstStyle/>
-          <a:p>
-            <a:pPr algn="ctr" rtl="1"/>
-            <a:r>
-              <a:rPr sz="1500" b="1">
-                <a:solidFill>
-                  <a:srgbClr val="333333"/>
+              <a:t>07_  •  12/14</a:t>
+            </a:r>
+          </a:p>
+        </p:txBody>
+      </p:sp>
+      <p:sp>
+        <p:nvSpPr>
+          <p:cNvPr id="9" name="TextBox 8"/>
+          <p:cNvSpPr txBox="1"/>
+          <p:nvPr/>
+        </p:nvSpPr>
+        <p:spPr>
+          <a:xfrm>
+            <a:off x="640080" y="6400800"/>
+            <a:ext cx="8686800" cy="320040"/>
+          </a:xfrm>
+          <a:prstGeom prst="rect">
+            <a:avLst/>
+          </a:prstGeom>
+          <a:noFill/>
+        </p:spPr>
+        <p:txBody>
+          <a:bodyPr wrap="square">
+            <a:spAutoFit/>
+          </a:bodyPr>
+          <a:lstStyle/>
+          <a:p>
+            <a:pPr algn="r" rtl="1"/>
+            <a:r>
+              <a:rPr sz="1000" b="0">
+                <a:solidFill>
+                  <a:srgbClr val="666666"/>
+                </a:solidFill>
+                <a:latin typeface="Arial"/>
+              </a:rPr>
+              <a:t>Module 02 — Data &amp; AI Engineering Track  |  الوحدة الثانية</a:t>
+            </a:r>
+          </a:p>
+        </p:txBody>
+      </p:sp>
+      <p:sp>
+        <p:nvSpPr>
+          <p:cNvPr id="10" name="TextBox 9"/>
+          <p:cNvSpPr txBox="1"/>
+          <p:nvPr/>
+        </p:nvSpPr>
+        <p:spPr>
+          <a:xfrm>
+            <a:off x="9601200" y="6400800"/>
+            <a:ext cx="1920240" cy="320040"/>
+          </a:xfrm>
+          <a:prstGeom prst="rect">
+            <a:avLst/>
+          </a:prstGeom>
+          <a:noFill/>
+        </p:spPr>
+        <p:txBody>
+          <a:bodyPr wrap="square">
+            <a:spAutoFit/>
+          </a:bodyPr>
+          <a:lstStyle/>
+          <a:p>
+            <a:pPr algn="l" rtl="0"/>
+            <a:r>
+              <a:rPr sz="1000" b="0">
+                <a:solidFill>
+                  <a:srgbClr val="666666"/>
                 </a:solidFill>
                 <a:latin typeface="Calibri"/>
               </a:rPr>
-              <a:t>فرق BI — تقارير وذكاء أعمال</a:t>
-            </a:r>
-          </a:p>
-        </p:txBody>
-      </p:sp>
-      <p:sp>
-        <p:nvSpPr>
-          <p:cNvPr id="7" name="Rounded Rectangle 6"/>
-          <p:cNvSpPr/>
-          <p:nvPr/>
-        </p:nvSpPr>
-        <p:spPr>
-          <a:xfrm>
-            <a:off x="8138158" y="1371600"/>
-            <a:ext cx="3566160" cy="914400"/>
-          </a:xfrm>
-          <a:prstGeom prst="roundRect">
-            <a:avLst/>
-          </a:prstGeom>
-          <a:solidFill>
-            <a:srgbClr val="FDE9D9"/>
-          </a:solidFill>
-          <a:ln w="12700">
-            <a:solidFill>
-              <a:srgbClr val="1F4E79"/>
-            </a:solidFill>
-          </a:ln>
-          <a:effectLst/>
-        </p:spPr>
-        <p:style>
-          <a:lnRef idx="1">
-            <a:schemeClr val="accent1"/>
-          </a:lnRef>
-          <a:fillRef idx="3">
-            <a:schemeClr val="accent1"/>
-          </a:fillRef>
-          <a:effectRef idx="2">
-            <a:schemeClr val="accent1"/>
-          </a:effectRef>
-          <a:fontRef idx="minor">
-            <a:schemeClr val="lt1"/>
-          </a:fontRef>
-        </p:style>
-        <p:txBody>
-          <a:bodyPr rtlCol="0" anchor="ctr" wrap="square"/>
-          <a:lstStyle/>
-          <a:p>
-            <a:pPr algn="ctr" rtl="1"/>
-            <a:r>
-              <a:rPr sz="1800" b="1">
-                <a:solidFill>
-                  <a:srgbClr val="333333"/>
-                </a:solidFill>
-                <a:latin typeface="Calibri"/>
-              </a:rPr>
-              <a:t>شبكة البيانات</a:t>
-            </a:r>
-          </a:p>
-          <a:p>
-            <a:pPr algn="ctr" rtl="0"/>
-            <a:r>
-              <a:rPr sz="1300">
-                <a:solidFill>
-                  <a:srgbClr val="666666"/>
-                </a:solidFill>
-                <a:latin typeface="Calibri"/>
-              </a:rPr>
-              <a:t>Data Mesh</a:t>
-            </a:r>
-          </a:p>
-        </p:txBody>
-      </p:sp>
-      <p:sp>
-        <p:nvSpPr>
-          <p:cNvPr id="8" name="Rounded Rectangle 7"/>
-          <p:cNvSpPr/>
-          <p:nvPr/>
-        </p:nvSpPr>
-        <p:spPr>
-          <a:xfrm>
-            <a:off x="8138158" y="2468880"/>
-            <a:ext cx="3566160" cy="2560320"/>
-          </a:xfrm>
-          <a:prstGeom prst="roundRect">
-            <a:avLst/>
-          </a:prstGeom>
-          <a:solidFill>
-            <a:srgbClr val="EDEDED"/>
-          </a:solidFill>
-          <a:ln w="12700">
-            <a:solidFill>
-              <a:srgbClr val="1F4E79"/>
-            </a:solidFill>
-          </a:ln>
-          <a:effectLst/>
-        </p:spPr>
-        <p:style>
-          <a:lnRef idx="1">
-            <a:schemeClr val="accent1"/>
-          </a:lnRef>
-          <a:fillRef idx="3">
-            <a:schemeClr val="accent1"/>
-          </a:fillRef>
-          <a:effectRef idx="2">
-            <a:schemeClr val="accent1"/>
-          </a:effectRef>
-          <a:fontRef idx="minor">
-            <a:schemeClr val="lt1"/>
-          </a:fontRef>
-        </p:style>
-        <p:txBody>
-          <a:bodyPr rtlCol="0" anchor="ctr" wrap="square"/>
-          <a:lstStyle/>
-          <a:p>
-            <a:pPr algn="ctr" rtl="1"/>
-            <a:r>
-              <a:rPr sz="1500" b="1">
-                <a:solidFill>
-                  <a:srgbClr val="333333"/>
-                </a:solidFill>
-                <a:latin typeface="Calibri"/>
-              </a:rPr>
-              <a:t>فرق المجالات — مؤسسات كبيرة</a:t>
-            </a:r>
-          </a:p>
-        </p:txBody>
-      </p:sp>
-      <p:sp>
-        <p:nvSpPr>
-          <p:cNvPr id="9" name="TextBox 8"/>
-          <p:cNvSpPr txBox="1"/>
-          <p:nvPr/>
-        </p:nvSpPr>
-        <p:spPr>
-          <a:xfrm>
-            <a:off x="640080" y="6126480"/>
-            <a:ext cx="10972800" cy="548640"/>
-          </a:xfrm>
-          <a:prstGeom prst="rect">
-            <a:avLst/>
-          </a:prstGeom>
-          <a:noFill/>
-        </p:spPr>
-        <p:txBody>
-          <a:bodyPr wrap="square">
-            <a:spAutoFit/>
-          </a:bodyPr>
-          <a:lstStyle/>
-          <a:p>
-            <a:pPr algn="r" rtl="1"/>
-            <a:r>
-              <a:rPr sz="1400">
-                <a:solidFill>
-                  <a:srgbClr val="666666"/>
-                </a:solidFill>
-                <a:latin typeface="Calibri"/>
-              </a:rPr>
-              <a:t>المعايير: الفكرة الجوهرية / المالك / الحوكمة / حالة الاستخدام المثلى.</a:t>
-            </a:r>
-          </a:p>
-          <a:p>
-            <a:pPr algn="r" rtl="0"/>
-            <a:r>
-              <a:t>Criteria: core idea / ownership / governance / best use case.</a:t>
+              <a:t>07_  •  12/14</a:t>
             </a:r>
           </a:p>
         </p:txBody>
@@ -4146,7 +5256,7 @@
 </file>
 
 <file path=ppt/slides/slide13.xml><?xml version="1.0" encoding="utf-8"?>
-<p:sld xmlns:a="http://schemas.openxmlformats.org/drawingml/2006/main" xmlns:p="http://schemas.openxmlformats.org/presentationml/2006/main" xmlns:r="http://schemas.openxmlformats.org/officeDocument/2006/relationships">
+<p:sld xmlns:a="http://schemas.openxmlformats.org/drawingml/2006/main" xmlns:r="http://schemas.openxmlformats.org/officeDocument/2006/relationships" xmlns:p="http://schemas.openxmlformats.org/presentationml/2006/main">
   <p:cSld>
     <p:bg>
       <p:bgPr>
@@ -4162,60 +5272,32 @@
         <p:cNvGrpSpPr/>
         <p:nvPr/>
       </p:nvGrpSpPr>
-      <p:grpSpPr/>
-      <p:sp>
-        <p:nvSpPr>
-          <p:cNvPr id="2" name="TextBox 1"/>
-          <p:cNvSpPr txBox="1"/>
-          <p:nvPr/>
-        </p:nvSpPr>
-        <p:spPr>
-          <a:xfrm>
-            <a:off x="640080" y="137160"/>
-            <a:ext cx="10972800" cy="640080"/>
-          </a:xfrm>
-          <a:prstGeom prst="rect">
-            <a:avLst/>
-          </a:prstGeom>
-          <a:noFill/>
-        </p:spPr>
-        <p:txBody>
-          <a:bodyPr wrap="none">
-            <a:spAutoFit/>
-          </a:bodyPr>
-          <a:lstStyle/>
-          <a:p>
-            <a:pPr algn="r" rtl="1"/>
-            <a:r>
-              <a:rPr sz="3000" b="1">
-                <a:solidFill>
-                  <a:srgbClr val="1F3B5C"/>
-                </a:solidFill>
-                <a:latin typeface="Calibri"/>
-              </a:rPr>
-              <a:t>منتج البيانات وعقد البيانات / Data Product &amp; Contract</a:t>
-            </a:r>
-          </a:p>
-        </p:txBody>
-      </p:sp>
-      <p:sp>
-        <p:nvSpPr>
-          <p:cNvPr id="3" name="Rounded Rectangle 2"/>
+      <p:grpSpPr>
+        <a:xfrm>
+          <a:off x="0" y="0"/>
+          <a:ext cx="0" cy="0"/>
+          <a:chOff x="0" y="0"/>
+          <a:chExt cx="0" cy="0"/>
+        </a:xfrm>
+      </p:grpSpPr>
+      <p:sp>
+        <p:nvSpPr>
+          <p:cNvPr id="2" name="Rectangle 1"/>
           <p:cNvSpPr/>
           <p:nvPr/>
         </p:nvSpPr>
         <p:spPr>
           <a:xfrm>
-            <a:off x="822960" y="1645920"/>
-            <a:ext cx="4206240" cy="3108960"/>
-          </a:xfrm>
-          <a:prstGeom prst="roundRect">
+            <a:off x="0" y="0"/>
+            <a:ext cx="12191695" cy="1005840"/>
+          </a:xfrm>
+          <a:prstGeom prst="rect">
             <a:avLst/>
           </a:prstGeom>
           <a:solidFill>
-            <a:srgbClr val="DCE6F1"/>
+            <a:srgbClr val="FFFFFF"/>
           </a:solidFill>
-          <a:ln w="12700">
+          <a:ln w="25400">
             <a:solidFill>
               <a:srgbClr val="1F4E79"/>
             </a:solidFill>
@@ -4237,347 +5319,392 @@
           </a:fontRef>
         </p:style>
         <p:txBody>
-          <a:bodyPr rtlCol="0" anchor="ctr" wrap="square"/>
-          <a:lstStyle/>
-          <a:p>
-            <a:pPr algn="ctr" rtl="1"/>
-            <a:r>
-              <a:rPr sz="2000" b="1">
+          <a:bodyPr rtlCol="0" anchor="ctr"/>
+          <a:lstStyle/>
+          <a:p>
+            <a:pPr algn="ctr"/>
+            <a:endParaRPr/>
+          </a:p>
+        </p:txBody>
+      </p:sp>
+      <p:sp>
+        <p:nvSpPr>
+          <p:cNvPr id="3" name="TextBox 2"/>
+          <p:cNvSpPr txBox="1"/>
+          <p:nvPr/>
+        </p:nvSpPr>
+        <p:spPr>
+          <a:xfrm>
+            <a:off x="640080" y="182880"/>
+            <a:ext cx="10972800" cy="640080"/>
+          </a:xfrm>
+          <a:prstGeom prst="rect">
+            <a:avLst/>
+          </a:prstGeom>
+          <a:noFill/>
+        </p:spPr>
+        <p:txBody>
+          <a:bodyPr wrap="square">
+            <a:spAutoFit/>
+          </a:bodyPr>
+          <a:lstStyle/>
+          <a:p>
+            <a:pPr algn="r" rtl="1"/>
+            <a:r>
+              <a:rPr sz="3200" b="1">
+                <a:solidFill>
+                  <a:srgbClr val="1F3B5C"/>
+                </a:solidFill>
+                <a:latin typeface="Arial"/>
+              </a:rPr>
+              <a:t>إجابات الاختبار / Quiz Answers</a:t>
+            </a:r>
+          </a:p>
+        </p:txBody>
+      </p:sp>
+      <p:sp>
+        <p:nvSpPr>
+          <p:cNvPr id="4" name="TextBox 3"/>
+          <p:cNvSpPr txBox="1"/>
+          <p:nvPr/>
+        </p:nvSpPr>
+        <p:spPr>
+          <a:xfrm>
+            <a:off x="640080" y="1280160"/>
+            <a:ext cx="10972800" cy="5212080"/>
+          </a:xfrm>
+          <a:prstGeom prst="rect">
+            <a:avLst/>
+          </a:prstGeom>
+          <a:noFill/>
+        </p:spPr>
+        <p:txBody>
+          <a:bodyPr wrap="square">
+            <a:spAutoFit/>
+          </a:bodyPr>
+          <a:lstStyle/>
+          <a:p>
+            <a:pPr algn="r" rtl="1">
+              <a:spcBef>
+                <a:spcPts val="200"/>
+              </a:spcBef>
+              <a:spcAft>
+                <a:spcPts val="1000"/>
+              </a:spcAft>
+            </a:pPr>
+            <a:r>
+              <a:rPr sz="1800">
                 <a:solidFill>
                   <a:srgbClr val="333333"/>
                 </a:solidFill>
+                <a:latin typeface="Arial"/>
+              </a:rPr>
+              <a:t>• 1. لا يُفرض المخطط عند الكتابة بل عند القراءة — سمة البحيرات.</a:t>
+            </a:r>
+          </a:p>
+          <a:p>
+            <a:pPr algn="l" rtl="0">
+              <a:spcBef>
+                <a:spcPts val="200"/>
+              </a:spcBef>
+              <a:spcAft>
+                <a:spcPts val="1000"/>
+              </a:spcAft>
+            </a:pPr>
+            <a:r>
+              <a:rPr sz="1500">
+                <a:solidFill>
+                  <a:srgbClr val="666666"/>
+                </a:solidFill>
                 <a:latin typeface="Calibri"/>
               </a:rPr>
-              <a:t>منتج البيانات</a:t>
-            </a:r>
-          </a:p>
-          <a:p>
-            <a:pPr algn="ctr" rtl="0"/>
-            <a:r>
-              <a:rPr sz="1400">
+              <a:t>• Schema is enforced at read time, not write time — a lake trait.</a:t>
+            </a:r>
+          </a:p>
+          <a:p>
+            <a:pPr algn="r" rtl="1">
+              <a:spcBef>
+                <a:spcPts val="200"/>
+              </a:spcBef>
+              <a:spcAft>
+                <a:spcPts val="1000"/>
+              </a:spcAft>
+            </a:pPr>
+            <a:r>
+              <a:rPr sz="1800">
+                <a:solidFill>
+                  <a:srgbClr val="333333"/>
+                </a:solidFill>
+                <a:latin typeface="Arial"/>
+              </a:rPr>
+              <a:t>• 2. المخطط، الأمان، مستوى الخدمة SLA.</a:t>
+            </a:r>
+          </a:p>
+          <a:p>
+            <a:pPr algn="l" rtl="0">
+              <a:spcBef>
+                <a:spcPts val="200"/>
+              </a:spcBef>
+              <a:spcAft>
+                <a:spcPts val="1000"/>
+              </a:spcAft>
+            </a:pPr>
+            <a:r>
+              <a:rPr sz="1500">
                 <a:solidFill>
                   <a:srgbClr val="666666"/>
                 </a:solidFill>
                 <a:latin typeface="Calibri"/>
               </a:rPr>
-              <a:t>Data Product — موثوق • موثّق • قابل للاكتشاف</a:t>
-            </a:r>
-          </a:p>
-        </p:txBody>
-      </p:sp>
-      <p:sp>
-        <p:nvSpPr>
-          <p:cNvPr id="4" name="Rounded Rectangle 3"/>
-          <p:cNvSpPr/>
-          <p:nvPr/>
-        </p:nvSpPr>
-        <p:spPr>
-          <a:xfrm>
-            <a:off x="7223760" y="1645920"/>
-            <a:ext cx="4206240" cy="914400"/>
-          </a:xfrm>
-          <a:prstGeom prst="roundRect">
-            <a:avLst/>
-          </a:prstGeom>
-          <a:solidFill>
-            <a:srgbClr val="E2EFDA"/>
-          </a:solidFill>
-          <a:ln w="12700">
-            <a:solidFill>
-              <a:srgbClr val="1F4E79"/>
-            </a:solidFill>
-          </a:ln>
-          <a:effectLst/>
-        </p:spPr>
-        <p:style>
-          <a:lnRef idx="1">
-            <a:schemeClr val="accent1"/>
-          </a:lnRef>
-          <a:fillRef idx="3">
-            <a:schemeClr val="accent1"/>
-          </a:fillRef>
-          <a:effectRef idx="2">
-            <a:schemeClr val="accent1"/>
-          </a:effectRef>
-          <a:fontRef idx="minor">
-            <a:schemeClr val="lt1"/>
-          </a:fontRef>
-        </p:style>
-        <p:txBody>
-          <a:bodyPr rtlCol="0" anchor="ctr" wrap="square"/>
-          <a:lstStyle/>
-          <a:p>
-            <a:pPr algn="ctr" rtl="1"/>
-            <a:r>
-              <a:rPr sz="2000" b="1">
+              <a:t>• Schema, security, and SLA.</a:t>
+            </a:r>
+          </a:p>
+          <a:p>
+            <a:pPr algn="r" rtl="1">
+              <a:spcBef>
+                <a:spcPts val="200"/>
+              </a:spcBef>
+              <a:spcAft>
+                <a:spcPts val="1000"/>
+              </a:spcAft>
+            </a:pPr>
+            <a:r>
+              <a:rPr sz="1800">
                 <a:solidFill>
                   <a:srgbClr val="333333"/>
                 </a:solidFill>
+                <a:latin typeface="Arial"/>
+              </a:rPr>
+              <a:t>• 3. معاملات ACID وأداء SQL وحوكمة.</a:t>
+            </a:r>
+          </a:p>
+          <a:p>
+            <a:pPr algn="l" rtl="0">
+              <a:spcBef>
+                <a:spcPts val="200"/>
+              </a:spcBef>
+              <a:spcAft>
+                <a:spcPts val="1000"/>
+              </a:spcAft>
+            </a:pPr>
+            <a:r>
+              <a:rPr sz="1500">
+                <a:solidFill>
+                  <a:srgbClr val="666666"/>
+                </a:solidFill>
                 <a:latin typeface="Calibri"/>
               </a:rPr>
-              <a:t>عقد البيانات</a:t>
-            </a:r>
-          </a:p>
-          <a:p>
-            <a:pPr algn="ctr" rtl="0"/>
-            <a:r>
-              <a:rPr sz="1400">
+              <a:t>• ACID transactions, SQL performance, and governance.</a:t>
+            </a:r>
+          </a:p>
+        </p:txBody>
+      </p:sp>
+      <p:sp>
+        <p:nvSpPr>
+          <p:cNvPr id="5" name="TextBox 4"/>
+          <p:cNvSpPr txBox="1"/>
+          <p:nvPr/>
+        </p:nvSpPr>
+        <p:spPr>
+          <a:xfrm>
+            <a:off x="640080" y="6400800"/>
+            <a:ext cx="8686800" cy="320040"/>
+          </a:xfrm>
+          <a:prstGeom prst="rect">
+            <a:avLst/>
+          </a:prstGeom>
+          <a:noFill/>
+        </p:spPr>
+        <p:txBody>
+          <a:bodyPr wrap="square">
+            <a:spAutoFit/>
+          </a:bodyPr>
+          <a:lstStyle/>
+          <a:p>
+            <a:pPr algn="r" rtl="1"/>
+            <a:r>
+              <a:rPr sz="1000" b="0">
+                <a:solidFill>
+                  <a:srgbClr val="666666"/>
+                </a:solidFill>
+                <a:latin typeface="Arial"/>
+              </a:rPr>
+              <a:t>Module 02 — Data &amp; AI Engineering Track  |  الوحدة الثانية</a:t>
+            </a:r>
+          </a:p>
+        </p:txBody>
+      </p:sp>
+      <p:sp>
+        <p:nvSpPr>
+          <p:cNvPr id="6" name="TextBox 5"/>
+          <p:cNvSpPr txBox="1"/>
+          <p:nvPr/>
+        </p:nvSpPr>
+        <p:spPr>
+          <a:xfrm>
+            <a:off x="9601200" y="6400800"/>
+            <a:ext cx="1920240" cy="320040"/>
+          </a:xfrm>
+          <a:prstGeom prst="rect">
+            <a:avLst/>
+          </a:prstGeom>
+          <a:noFill/>
+        </p:spPr>
+        <p:txBody>
+          <a:bodyPr wrap="square">
+            <a:spAutoFit/>
+          </a:bodyPr>
+          <a:lstStyle/>
+          <a:p>
+            <a:pPr algn="l" rtl="0"/>
+            <a:r>
+              <a:rPr sz="1000" b="0">
                 <a:solidFill>
                   <a:srgbClr val="666666"/>
                 </a:solidFill>
                 <a:latin typeface="Calibri"/>
               </a:rPr>
-              <a:t>Data Contract</a:t>
-            </a:r>
-          </a:p>
-        </p:txBody>
-      </p:sp>
-      <p:sp>
-        <p:nvSpPr>
-          <p:cNvPr id="5" name="Rounded Rectangle 4"/>
-          <p:cNvSpPr/>
-          <p:nvPr/>
-        </p:nvSpPr>
-        <p:spPr>
-          <a:xfrm>
-            <a:off x="7589520" y="2743200"/>
-            <a:ext cx="3474720" cy="594360"/>
-          </a:xfrm>
-          <a:prstGeom prst="roundRect">
-            <a:avLst/>
-          </a:prstGeom>
-          <a:solidFill>
-            <a:srgbClr val="EDEDED"/>
-          </a:solidFill>
-          <a:ln w="12700">
-            <a:solidFill>
-              <a:srgbClr val="1F4E79"/>
-            </a:solidFill>
-          </a:ln>
-          <a:effectLst/>
-        </p:spPr>
-        <p:style>
-          <a:lnRef idx="1">
-            <a:schemeClr val="accent1"/>
-          </a:lnRef>
-          <a:fillRef idx="3">
-            <a:schemeClr val="accent1"/>
-          </a:fillRef>
-          <a:effectRef idx="2">
-            <a:schemeClr val="accent1"/>
-          </a:effectRef>
-          <a:fontRef idx="minor">
-            <a:schemeClr val="lt1"/>
-          </a:fontRef>
-        </p:style>
-        <p:txBody>
-          <a:bodyPr rtlCol="0" anchor="ctr" wrap="square"/>
-          <a:lstStyle/>
-          <a:p>
-            <a:pPr algn="ctr" rtl="1"/>
-            <a:r>
-              <a:rPr sz="1400" b="1">
-                <a:solidFill>
-                  <a:srgbClr val="333333"/>
+              <a:t>V07  •  10/14</a:t>
+            </a:r>
+          </a:p>
+        </p:txBody>
+      </p:sp>
+      <p:sp>
+        <p:nvSpPr>
+          <p:cNvPr id="7" name="TextBox 6"/>
+          <p:cNvSpPr txBox="1"/>
+          <p:nvPr/>
+        </p:nvSpPr>
+        <p:spPr>
+          <a:xfrm>
+            <a:off x="640080" y="6400800"/>
+            <a:ext cx="8686800" cy="320040"/>
+          </a:xfrm>
+          <a:prstGeom prst="rect">
+            <a:avLst/>
+          </a:prstGeom>
+          <a:noFill/>
+        </p:spPr>
+        <p:txBody>
+          <a:bodyPr wrap="square">
+            <a:spAutoFit/>
+          </a:bodyPr>
+          <a:lstStyle/>
+          <a:p>
+            <a:pPr algn="r" rtl="1"/>
+            <a:r>
+              <a:rPr sz="1000" b="0">
+                <a:solidFill>
+                  <a:srgbClr val="666666"/>
+                </a:solidFill>
+                <a:latin typeface="Arial"/>
+              </a:rPr>
+              <a:t>Module 02 — Data &amp; AI Engineering Track  |  الوحدة الثانية</a:t>
+            </a:r>
+          </a:p>
+        </p:txBody>
+      </p:sp>
+      <p:sp>
+        <p:nvSpPr>
+          <p:cNvPr id="8" name="TextBox 7"/>
+          <p:cNvSpPr txBox="1"/>
+          <p:nvPr/>
+        </p:nvSpPr>
+        <p:spPr>
+          <a:xfrm>
+            <a:off x="9601200" y="6400800"/>
+            <a:ext cx="1920240" cy="320040"/>
+          </a:xfrm>
+          <a:prstGeom prst="rect">
+            <a:avLst/>
+          </a:prstGeom>
+          <a:noFill/>
+        </p:spPr>
+        <p:txBody>
+          <a:bodyPr wrap="square">
+            <a:spAutoFit/>
+          </a:bodyPr>
+          <a:lstStyle/>
+          <a:p>
+            <a:pPr algn="l" rtl="0"/>
+            <a:r>
+              <a:rPr sz="1000" b="0">
+                <a:solidFill>
+                  <a:srgbClr val="666666"/>
                 </a:solidFill>
                 <a:latin typeface="Calibri"/>
               </a:rPr>
-              <a:t>المخطط / Schema</a:t>
-            </a:r>
-          </a:p>
-        </p:txBody>
-      </p:sp>
-      <p:sp>
-        <p:nvSpPr>
-          <p:cNvPr id="6" name="Rounded Rectangle 5"/>
-          <p:cNvSpPr/>
-          <p:nvPr/>
-        </p:nvSpPr>
-        <p:spPr>
-          <a:xfrm>
-            <a:off x="7589520" y="668904631200"/>
-            <a:ext cx="3474720" cy="594360"/>
-          </a:xfrm>
-          <a:prstGeom prst="roundRect">
-            <a:avLst/>
-          </a:prstGeom>
-          <a:solidFill>
-            <a:srgbClr val="EDEDED"/>
-          </a:solidFill>
-          <a:ln w="12700">
-            <a:solidFill>
-              <a:srgbClr val="1F4E79"/>
-            </a:solidFill>
-          </a:ln>
-          <a:effectLst/>
-        </p:spPr>
-        <p:style>
-          <a:lnRef idx="1">
-            <a:schemeClr val="accent1"/>
-          </a:lnRef>
-          <a:fillRef idx="3">
-            <a:schemeClr val="accent1"/>
-          </a:fillRef>
-          <a:effectRef idx="2">
-            <a:schemeClr val="accent1"/>
-          </a:effectRef>
-          <a:fontRef idx="minor">
-            <a:schemeClr val="lt1"/>
-          </a:fontRef>
-        </p:style>
-        <p:txBody>
-          <a:bodyPr rtlCol="0" anchor="ctr" wrap="square"/>
-          <a:lstStyle/>
-          <a:p>
-            <a:pPr algn="ctr" rtl="1"/>
-            <a:r>
-              <a:rPr sz="1400" b="1">
-                <a:solidFill>
-                  <a:srgbClr val="333333"/>
+              <a:t>07_  •  13/14</a:t>
+            </a:r>
+          </a:p>
+        </p:txBody>
+      </p:sp>
+      <p:sp>
+        <p:nvSpPr>
+          <p:cNvPr id="9" name="TextBox 8"/>
+          <p:cNvSpPr txBox="1"/>
+          <p:nvPr/>
+        </p:nvSpPr>
+        <p:spPr>
+          <a:xfrm>
+            <a:off x="640080" y="6400800"/>
+            <a:ext cx="8686800" cy="320040"/>
+          </a:xfrm>
+          <a:prstGeom prst="rect">
+            <a:avLst/>
+          </a:prstGeom>
+          <a:noFill/>
+        </p:spPr>
+        <p:txBody>
+          <a:bodyPr wrap="square">
+            <a:spAutoFit/>
+          </a:bodyPr>
+          <a:lstStyle/>
+          <a:p>
+            <a:pPr algn="r" rtl="1"/>
+            <a:r>
+              <a:rPr sz="1000" b="0">
+                <a:solidFill>
+                  <a:srgbClr val="666666"/>
+                </a:solidFill>
+                <a:latin typeface="Arial"/>
+              </a:rPr>
+              <a:t>Module 02 — Data &amp; AI Engineering Track  |  الوحدة الثانية</a:t>
+            </a:r>
+          </a:p>
+        </p:txBody>
+      </p:sp>
+      <p:sp>
+        <p:nvSpPr>
+          <p:cNvPr id="10" name="TextBox 9"/>
+          <p:cNvSpPr txBox="1"/>
+          <p:nvPr/>
+        </p:nvSpPr>
+        <p:spPr>
+          <a:xfrm>
+            <a:off x="9601200" y="6400800"/>
+            <a:ext cx="1920240" cy="320040"/>
+          </a:xfrm>
+          <a:prstGeom prst="rect">
+            <a:avLst/>
+          </a:prstGeom>
+          <a:noFill/>
+        </p:spPr>
+        <p:txBody>
+          <a:bodyPr wrap="square">
+            <a:spAutoFit/>
+          </a:bodyPr>
+          <a:lstStyle/>
+          <a:p>
+            <a:pPr algn="l" rtl="0"/>
+            <a:r>
+              <a:rPr sz="1000" b="0">
+                <a:solidFill>
+                  <a:srgbClr val="666666"/>
                 </a:solidFill>
                 <a:latin typeface="Calibri"/>
               </a:rPr>
-              <a:t>الأمان / Security</a:t>
-            </a:r>
-          </a:p>
-        </p:txBody>
-      </p:sp>
-      <p:sp>
-        <p:nvSpPr>
-          <p:cNvPr id="7" name="Rounded Rectangle 6"/>
-          <p:cNvSpPr/>
-          <p:nvPr/>
-        </p:nvSpPr>
-        <p:spPr>
-          <a:xfrm>
-            <a:off x="7589520" y="1337806519200"/>
-            <a:ext cx="3474720" cy="594360"/>
-          </a:xfrm>
-          <a:prstGeom prst="roundRect">
-            <a:avLst/>
-          </a:prstGeom>
-          <a:solidFill>
-            <a:srgbClr val="EDEDED"/>
-          </a:solidFill>
-          <a:ln w="12700">
-            <a:solidFill>
-              <a:srgbClr val="1F4E79"/>
-            </a:solidFill>
-          </a:ln>
-          <a:effectLst/>
-        </p:spPr>
-        <p:style>
-          <a:lnRef idx="1">
-            <a:schemeClr val="accent1"/>
-          </a:lnRef>
-          <a:fillRef idx="3">
-            <a:schemeClr val="accent1"/>
-          </a:fillRef>
-          <a:effectRef idx="2">
-            <a:schemeClr val="accent1"/>
-          </a:effectRef>
-          <a:fontRef idx="minor">
-            <a:schemeClr val="lt1"/>
-          </a:fontRef>
-        </p:style>
-        <p:txBody>
-          <a:bodyPr rtlCol="0" anchor="ctr" wrap="square"/>
-          <a:lstStyle/>
-          <a:p>
-            <a:pPr algn="ctr" rtl="1"/>
-            <a:r>
-              <a:rPr sz="1400" b="1">
-                <a:solidFill>
-                  <a:srgbClr val="333333"/>
-                </a:solidFill>
-                <a:latin typeface="Calibri"/>
-              </a:rPr>
-              <a:t>مستوى الخدمة / SLA</a:t>
-            </a:r>
-          </a:p>
-        </p:txBody>
-      </p:sp>
-      <p:sp>
-        <p:nvSpPr>
-          <p:cNvPr id="8" name="Right Arrow 7"/>
-          <p:cNvSpPr/>
-          <p:nvPr/>
-        </p:nvSpPr>
-        <p:spPr>
-          <a:xfrm>
-            <a:off x="5257800" y="3017520"/>
-            <a:ext cx="1737360" cy="365760"/>
-          </a:xfrm>
-          <a:prstGeom prst="rightArrow">
-            <a:avLst/>
-          </a:prstGeom>
-          <a:solidFill>
-            <a:srgbClr val="1F4E79"/>
-          </a:solidFill>
-          <a:ln>
-            <a:noFill/>
-          </a:ln>
-          <a:effectLst/>
-        </p:spPr>
-        <p:style>
-          <a:lnRef idx="1">
-            <a:schemeClr val="accent1"/>
-          </a:lnRef>
-          <a:fillRef idx="3">
-            <a:schemeClr val="accent1"/>
-          </a:fillRef>
-          <a:effectRef idx="2">
-            <a:schemeClr val="accent1"/>
-          </a:effectRef>
-          <a:fontRef idx="minor">
-            <a:schemeClr val="lt1"/>
-          </a:fontRef>
-        </p:style>
-        <p:txBody>
-          <a:bodyPr rtlCol="0" anchor="ctr"/>
-          <a:lstStyle/>
-          <a:p>
-            <a:pPr algn="ctr"/>
-          </a:p>
-        </p:txBody>
-      </p:sp>
-      <p:sp>
-        <p:nvSpPr>
-          <p:cNvPr id="9" name="TextBox 8"/>
-          <p:cNvSpPr txBox="1"/>
-          <p:nvPr/>
-        </p:nvSpPr>
-        <p:spPr>
-          <a:xfrm>
-            <a:off x="640080" y="6126480"/>
-            <a:ext cx="10972800" cy="548640"/>
-          </a:xfrm>
-          <a:prstGeom prst="rect">
-            <a:avLst/>
-          </a:prstGeom>
-          <a:noFill/>
-        </p:spPr>
-        <p:txBody>
-          <a:bodyPr wrap="square">
-            <a:spAutoFit/>
-          </a:bodyPr>
-          <a:lstStyle/>
-          <a:p>
-            <a:pPr algn="r" rtl="1"/>
-            <a:r>
-              <a:rPr sz="1400">
-                <a:solidFill>
-                  <a:srgbClr val="666666"/>
-                </a:solidFill>
-                <a:latin typeface="Calibri"/>
-              </a:rPr>
-              <a:t>وحدة التسليم الحديثة في هندسة البيانات.</a:t>
-            </a:r>
-          </a:p>
-          <a:p>
-            <a:pPr algn="r" rtl="0"/>
-            <a:r>
-              <a:t>The modern delivery unit in data engineering.</a:t>
+              <a:t>07_  •  13/14</a:t>
             </a:r>
           </a:p>
         </p:txBody>
@@ -4591,7 +5718,7 @@
 </file>
 
 <file path=ppt/slides/slide14.xml><?xml version="1.0" encoding="utf-8"?>
-<p:sld xmlns:a="http://schemas.openxmlformats.org/drawingml/2006/main" xmlns:p="http://schemas.openxmlformats.org/presentationml/2006/main" xmlns:r="http://schemas.openxmlformats.org/officeDocument/2006/relationships">
+<p:sld xmlns:a="http://schemas.openxmlformats.org/drawingml/2006/main" xmlns:r="http://schemas.openxmlformats.org/officeDocument/2006/relationships" xmlns:p="http://schemas.openxmlformats.org/presentationml/2006/main">
   <p:cSld>
     <p:bg>
       <p:bgPr>
@@ -4607,60 +5734,32 @@
         <p:cNvGrpSpPr/>
         <p:nvPr/>
       </p:nvGrpSpPr>
-      <p:grpSpPr/>
-      <p:sp>
-        <p:nvSpPr>
-          <p:cNvPr id="2" name="TextBox 1"/>
-          <p:cNvSpPr txBox="1"/>
-          <p:nvPr/>
-        </p:nvSpPr>
-        <p:spPr>
-          <a:xfrm>
-            <a:off x="640080" y="137160"/>
-            <a:ext cx="10972800" cy="640080"/>
-          </a:xfrm>
-          <a:prstGeom prst="rect">
-            <a:avLst/>
-          </a:prstGeom>
-          <a:noFill/>
-        </p:spPr>
-        <p:txBody>
-          <a:bodyPr wrap="none">
-            <a:spAutoFit/>
-          </a:bodyPr>
-          <a:lstStyle/>
-          <a:p>
-            <a:pPr algn="r" rtl="1"/>
-            <a:r>
-              <a:rPr sz="3000" b="1">
-                <a:solidFill>
-                  <a:srgbClr val="1F3B5C"/>
-                </a:solidFill>
-                <a:latin typeface="Calibri"/>
-              </a:rPr>
-              <a:t>المعمارية المتدرِّجة Medallion / Medallion Layers</a:t>
-            </a:r>
-          </a:p>
-        </p:txBody>
-      </p:sp>
-      <p:sp>
-        <p:nvSpPr>
-          <p:cNvPr id="3" name="Rounded Rectangle 2"/>
+      <p:grpSpPr>
+        <a:xfrm>
+          <a:off x="0" y="0"/>
+          <a:ext cx="0" cy="0"/>
+          <a:chOff x="0" y="0"/>
+          <a:chExt cx="0" cy="0"/>
+        </a:xfrm>
+      </p:grpSpPr>
+      <p:sp>
+        <p:nvSpPr>
+          <p:cNvPr id="2" name="Rectangle 1"/>
           <p:cNvSpPr/>
           <p:nvPr/>
         </p:nvSpPr>
         <p:spPr>
           <a:xfrm>
-            <a:off x="2286000" y="1188720"/>
-            <a:ext cx="7589520" cy="1234440"/>
-          </a:xfrm>
-          <a:prstGeom prst="roundRect">
+            <a:off x="0" y="0"/>
+            <a:ext cx="12191695" cy="1005840"/>
+          </a:xfrm>
+          <a:prstGeom prst="rect">
             <a:avLst/>
           </a:prstGeom>
           <a:solidFill>
-            <a:srgbClr val="FDE9D9"/>
+            <a:srgbClr val="FFFFFF"/>
           </a:solidFill>
-          <a:ln w="12700">
+          <a:ln w="25400">
             <a:solidFill>
               <a:srgbClr val="1F4E79"/>
             </a:solidFill>
@@ -4682,293 +5781,354 @@
           </a:fontRef>
         </p:style>
         <p:txBody>
-          <a:bodyPr rtlCol="0" anchor="ctr" wrap="square"/>
-          <a:lstStyle/>
-          <a:p>
-            <a:pPr algn="ctr" rtl="1"/>
-            <a:r>
-              <a:rPr sz="1800" b="1">
+          <a:bodyPr rtlCol="0" anchor="ctr"/>
+          <a:lstStyle/>
+          <a:p>
+            <a:pPr algn="ctr"/>
+            <a:endParaRPr/>
+          </a:p>
+        </p:txBody>
+      </p:sp>
+      <p:sp>
+        <p:nvSpPr>
+          <p:cNvPr id="3" name="TextBox 2"/>
+          <p:cNvSpPr txBox="1"/>
+          <p:nvPr/>
+        </p:nvSpPr>
+        <p:spPr>
+          <a:xfrm>
+            <a:off x="640080" y="182880"/>
+            <a:ext cx="10972800" cy="640080"/>
+          </a:xfrm>
+          <a:prstGeom prst="rect">
+            <a:avLst/>
+          </a:prstGeom>
+          <a:noFill/>
+        </p:spPr>
+        <p:txBody>
+          <a:bodyPr wrap="square">
+            <a:spAutoFit/>
+          </a:bodyPr>
+          <a:lstStyle/>
+          <a:p>
+            <a:pPr algn="r" rtl="1"/>
+            <a:r>
+              <a:rPr sz="3200" b="1">
+                <a:solidFill>
+                  <a:srgbClr val="1F3B5C"/>
+                </a:solidFill>
+                <a:latin typeface="Arial"/>
+              </a:rPr>
+              <a:t>للاستزادة / Further Reading</a:t>
+            </a:r>
+          </a:p>
+        </p:txBody>
+      </p:sp>
+      <p:sp>
+        <p:nvSpPr>
+          <p:cNvPr id="4" name="TextBox 3"/>
+          <p:cNvSpPr txBox="1"/>
+          <p:nvPr/>
+        </p:nvSpPr>
+        <p:spPr>
+          <a:xfrm>
+            <a:off x="640080" y="1280160"/>
+            <a:ext cx="10972800" cy="5212080"/>
+          </a:xfrm>
+          <a:prstGeom prst="rect">
+            <a:avLst/>
+          </a:prstGeom>
+          <a:noFill/>
+        </p:spPr>
+        <p:txBody>
+          <a:bodyPr wrap="square">
+            <a:spAutoFit/>
+          </a:bodyPr>
+          <a:lstStyle/>
+          <a:p>
+            <a:pPr algn="r" rtl="1">
+              <a:spcBef>
+                <a:spcPts val="200"/>
+              </a:spcBef>
+              <a:spcAft>
+                <a:spcPts val="1000"/>
+              </a:spcAft>
+            </a:pPr>
+            <a:r>
+              <a:rPr sz="2000">
                 <a:solidFill>
                   <a:srgbClr val="333333"/>
                 </a:solidFill>
+                <a:latin typeface="Arial"/>
+              </a:rPr>
+              <a:t>• توثيق Delta Lake وApache Iceberg.</a:t>
+            </a:r>
+          </a:p>
+          <a:p>
+            <a:pPr algn="l" rtl="0">
+              <a:spcBef>
+                <a:spcPts val="200"/>
+              </a:spcBef>
+              <a:spcAft>
+                <a:spcPts val="1000"/>
+              </a:spcAft>
+            </a:pPr>
+            <a:r>
+              <a:rPr sz="1700">
+                <a:solidFill>
+                  <a:srgbClr val="666666"/>
+                </a:solidFill>
                 <a:latin typeface="Calibri"/>
               </a:rPr>
-              <a:t>Bronze — بيانات خام غير قابلة للتغيير</a:t>
-            </a:r>
-          </a:p>
-          <a:p>
-            <a:pPr algn="ctr" rtl="0"/>
-            <a:r>
-              <a:rPr sz="1300">
+              <a:t>• Delta Lake and Apache Iceberg docs.</a:t>
+            </a:r>
+          </a:p>
+          <a:p>
+            <a:pPr algn="r" rtl="1">
+              <a:spcBef>
+                <a:spcPts val="200"/>
+              </a:spcBef>
+              <a:spcAft>
+                <a:spcPts val="1000"/>
+              </a:spcAft>
+            </a:pPr>
+            <a:r>
+              <a:rPr sz="2000">
+                <a:solidFill>
+                  <a:srgbClr val="333333"/>
+                </a:solidFill>
+                <a:latin typeface="Arial"/>
+              </a:rPr>
+              <a:t>• مقالات Data Contracts (Chad Sanderson).</a:t>
+            </a:r>
+          </a:p>
+          <a:p>
+            <a:pPr algn="l" rtl="0">
+              <a:spcBef>
+                <a:spcPts val="200"/>
+              </a:spcBef>
+              <a:spcAft>
+                <a:spcPts val="1000"/>
+              </a:spcAft>
+            </a:pPr>
+            <a:r>
+              <a:rPr sz="1700">
                 <a:solidFill>
                   <a:srgbClr val="666666"/>
                 </a:solidFill>
                 <a:latin typeface="Calibri"/>
               </a:rPr>
-              <a:t>Raw immutable data</a:t>
-            </a:r>
-          </a:p>
-        </p:txBody>
-      </p:sp>
-      <p:sp>
-        <p:nvSpPr>
-          <p:cNvPr id="4" name="Rounded Rectangle 3"/>
-          <p:cNvSpPr/>
-          <p:nvPr/>
-        </p:nvSpPr>
-        <p:spPr>
-          <a:xfrm>
-            <a:off x="2286000" y="2697480"/>
-            <a:ext cx="7589520" cy="1234440"/>
-          </a:xfrm>
-          <a:prstGeom prst="roundRect">
-            <a:avLst/>
-          </a:prstGeom>
-          <a:solidFill>
-            <a:srgbClr val="EDEDED"/>
-          </a:solidFill>
-          <a:ln w="12700">
-            <a:solidFill>
-              <a:srgbClr val="1F4E79"/>
-            </a:solidFill>
-          </a:ln>
-          <a:effectLst/>
-        </p:spPr>
-        <p:style>
-          <a:lnRef idx="1">
-            <a:schemeClr val="accent1"/>
-          </a:lnRef>
-          <a:fillRef idx="3">
-            <a:schemeClr val="accent1"/>
-          </a:fillRef>
-          <a:effectRef idx="2">
-            <a:schemeClr val="accent1"/>
-          </a:effectRef>
-          <a:fontRef idx="minor">
-            <a:schemeClr val="lt1"/>
-          </a:fontRef>
-        </p:style>
-        <p:txBody>
-          <a:bodyPr rtlCol="0" anchor="ctr" wrap="square"/>
-          <a:lstStyle/>
-          <a:p>
-            <a:pPr algn="ctr" rtl="1"/>
-            <a:r>
-              <a:rPr sz="1800" b="1">
-                <a:solidFill>
-                  <a:srgbClr val="333333"/>
+              <a:t>• Data contracts articles (Chad Sanderson).</a:t>
+            </a:r>
+          </a:p>
+        </p:txBody>
+      </p:sp>
+      <p:sp>
+        <p:nvSpPr>
+          <p:cNvPr id="5" name="TextBox 4"/>
+          <p:cNvSpPr txBox="1"/>
+          <p:nvPr/>
+        </p:nvSpPr>
+        <p:spPr>
+          <a:xfrm>
+            <a:off x="640080" y="6400800"/>
+            <a:ext cx="8686800" cy="320040"/>
+          </a:xfrm>
+          <a:prstGeom prst="rect">
+            <a:avLst/>
+          </a:prstGeom>
+          <a:noFill/>
+        </p:spPr>
+        <p:txBody>
+          <a:bodyPr wrap="square">
+            <a:spAutoFit/>
+          </a:bodyPr>
+          <a:lstStyle/>
+          <a:p>
+            <a:pPr algn="r" rtl="1"/>
+            <a:r>
+              <a:rPr sz="1000" b="0">
+                <a:solidFill>
+                  <a:srgbClr val="666666"/>
+                </a:solidFill>
+                <a:latin typeface="Arial"/>
+              </a:rPr>
+              <a:t>Module 02 — Data &amp; AI Engineering Track  |  الوحدة الثانية</a:t>
+            </a:r>
+          </a:p>
+        </p:txBody>
+      </p:sp>
+      <p:sp>
+        <p:nvSpPr>
+          <p:cNvPr id="6" name="TextBox 5"/>
+          <p:cNvSpPr txBox="1"/>
+          <p:nvPr/>
+        </p:nvSpPr>
+        <p:spPr>
+          <a:xfrm>
+            <a:off x="9601200" y="6400800"/>
+            <a:ext cx="1920240" cy="320040"/>
+          </a:xfrm>
+          <a:prstGeom prst="rect">
+            <a:avLst/>
+          </a:prstGeom>
+          <a:noFill/>
+        </p:spPr>
+        <p:txBody>
+          <a:bodyPr wrap="square">
+            <a:spAutoFit/>
+          </a:bodyPr>
+          <a:lstStyle/>
+          <a:p>
+            <a:pPr algn="l" rtl="0"/>
+            <a:r>
+              <a:rPr sz="1000" b="0">
+                <a:solidFill>
+                  <a:srgbClr val="666666"/>
                 </a:solidFill>
                 <a:latin typeface="Calibri"/>
               </a:rPr>
-              <a:t>Silver — بيانات منقَّاة ومنظَّمة</a:t>
-            </a:r>
-          </a:p>
-          <a:p>
-            <a:pPr algn="ctr" rtl="0"/>
-            <a:r>
-              <a:rPr sz="1300">
+              <a:t>V07  •  11/14</a:t>
+            </a:r>
+          </a:p>
+        </p:txBody>
+      </p:sp>
+      <p:sp>
+        <p:nvSpPr>
+          <p:cNvPr id="7" name="TextBox 6"/>
+          <p:cNvSpPr txBox="1"/>
+          <p:nvPr/>
+        </p:nvSpPr>
+        <p:spPr>
+          <a:xfrm>
+            <a:off x="640080" y="6400800"/>
+            <a:ext cx="8686800" cy="320040"/>
+          </a:xfrm>
+          <a:prstGeom prst="rect">
+            <a:avLst/>
+          </a:prstGeom>
+          <a:noFill/>
+        </p:spPr>
+        <p:txBody>
+          <a:bodyPr wrap="square">
+            <a:spAutoFit/>
+          </a:bodyPr>
+          <a:lstStyle/>
+          <a:p>
+            <a:pPr algn="r" rtl="1"/>
+            <a:r>
+              <a:rPr sz="1000" b="0">
+                <a:solidFill>
+                  <a:srgbClr val="666666"/>
+                </a:solidFill>
+                <a:latin typeface="Arial"/>
+              </a:rPr>
+              <a:t>Module 02 — Data &amp; AI Engineering Track  |  الوحدة الثانية</a:t>
+            </a:r>
+          </a:p>
+        </p:txBody>
+      </p:sp>
+      <p:sp>
+        <p:nvSpPr>
+          <p:cNvPr id="8" name="TextBox 7"/>
+          <p:cNvSpPr txBox="1"/>
+          <p:nvPr/>
+        </p:nvSpPr>
+        <p:spPr>
+          <a:xfrm>
+            <a:off x="9601200" y="6400800"/>
+            <a:ext cx="1920240" cy="320040"/>
+          </a:xfrm>
+          <a:prstGeom prst="rect">
+            <a:avLst/>
+          </a:prstGeom>
+          <a:noFill/>
+        </p:spPr>
+        <p:txBody>
+          <a:bodyPr wrap="square">
+            <a:spAutoFit/>
+          </a:bodyPr>
+          <a:lstStyle/>
+          <a:p>
+            <a:pPr algn="l" rtl="0"/>
+            <a:r>
+              <a:rPr sz="1000" b="0">
                 <a:solidFill>
                   <a:srgbClr val="666666"/>
                 </a:solidFill>
                 <a:latin typeface="Calibri"/>
               </a:rPr>
-              <a:t>Cleansed &amp; structured data</a:t>
-            </a:r>
-          </a:p>
-        </p:txBody>
-      </p:sp>
-      <p:sp>
-        <p:nvSpPr>
-          <p:cNvPr id="5" name="Rounded Rectangle 4"/>
-          <p:cNvSpPr/>
-          <p:nvPr/>
-        </p:nvSpPr>
-        <p:spPr>
-          <a:xfrm>
-            <a:off x="2286000" y="4206240"/>
-            <a:ext cx="7589520" cy="1234440"/>
-          </a:xfrm>
-          <a:prstGeom prst="roundRect">
-            <a:avLst/>
-          </a:prstGeom>
-          <a:solidFill>
-            <a:srgbClr val="E2EFDA"/>
-          </a:solidFill>
-          <a:ln w="12700">
-            <a:solidFill>
-              <a:srgbClr val="1F4E79"/>
-            </a:solidFill>
-          </a:ln>
-          <a:effectLst/>
-        </p:spPr>
-        <p:style>
-          <a:lnRef idx="1">
-            <a:schemeClr val="accent1"/>
-          </a:lnRef>
-          <a:fillRef idx="3">
-            <a:schemeClr val="accent1"/>
-          </a:fillRef>
-          <a:effectRef idx="2">
-            <a:schemeClr val="accent1"/>
-          </a:effectRef>
-          <a:fontRef idx="minor">
-            <a:schemeClr val="lt1"/>
-          </a:fontRef>
-        </p:style>
-        <p:txBody>
-          <a:bodyPr rtlCol="0" anchor="ctr" wrap="square"/>
-          <a:lstStyle/>
-          <a:p>
-            <a:pPr algn="ctr" rtl="1"/>
-            <a:r>
-              <a:rPr sz="1800" b="1">
-                <a:solidFill>
-                  <a:srgbClr val="333333"/>
+              <a:t>07_  •  14/14</a:t>
+            </a:r>
+          </a:p>
+        </p:txBody>
+      </p:sp>
+      <p:sp>
+        <p:nvSpPr>
+          <p:cNvPr id="9" name="TextBox 8"/>
+          <p:cNvSpPr txBox="1"/>
+          <p:nvPr/>
+        </p:nvSpPr>
+        <p:spPr>
+          <a:xfrm>
+            <a:off x="640080" y="6400800"/>
+            <a:ext cx="8686800" cy="320040"/>
+          </a:xfrm>
+          <a:prstGeom prst="rect">
+            <a:avLst/>
+          </a:prstGeom>
+          <a:noFill/>
+        </p:spPr>
+        <p:txBody>
+          <a:bodyPr wrap="square">
+            <a:spAutoFit/>
+          </a:bodyPr>
+          <a:lstStyle/>
+          <a:p>
+            <a:pPr algn="r" rtl="1"/>
+            <a:r>
+              <a:rPr sz="1000" b="0">
+                <a:solidFill>
+                  <a:srgbClr val="666666"/>
+                </a:solidFill>
+                <a:latin typeface="Arial"/>
+              </a:rPr>
+              <a:t>Module 02 — Data &amp; AI Engineering Track  |  الوحدة الثانية</a:t>
+            </a:r>
+          </a:p>
+        </p:txBody>
+      </p:sp>
+      <p:sp>
+        <p:nvSpPr>
+          <p:cNvPr id="10" name="TextBox 9"/>
+          <p:cNvSpPr txBox="1"/>
+          <p:nvPr/>
+        </p:nvSpPr>
+        <p:spPr>
+          <a:xfrm>
+            <a:off x="9601200" y="6400800"/>
+            <a:ext cx="1920240" cy="320040"/>
+          </a:xfrm>
+          <a:prstGeom prst="rect">
+            <a:avLst/>
+          </a:prstGeom>
+          <a:noFill/>
+        </p:spPr>
+        <p:txBody>
+          <a:bodyPr wrap="square">
+            <a:spAutoFit/>
+          </a:bodyPr>
+          <a:lstStyle/>
+          <a:p>
+            <a:pPr algn="l" rtl="0"/>
+            <a:r>
+              <a:rPr sz="1000" b="0">
+                <a:solidFill>
+                  <a:srgbClr val="666666"/>
                 </a:solidFill>
                 <a:latin typeface="Calibri"/>
               </a:rPr>
-              <a:t>Gold — تجميعات جاهزة للتحليل</a:t>
-            </a:r>
-          </a:p>
-          <a:p>
-            <a:pPr algn="ctr" rtl="0"/>
-            <a:r>
-              <a:rPr sz="1300">
-                <a:solidFill>
-                  <a:srgbClr val="666666"/>
-                </a:solidFill>
-                <a:latin typeface="Calibri"/>
-              </a:rPr>
-              <a:t>Analytics-ready aggregates</a:t>
-            </a:r>
-          </a:p>
-        </p:txBody>
-      </p:sp>
-      <p:sp>
-        <p:nvSpPr>
-          <p:cNvPr id="6" name="Right Arrow 5"/>
-          <p:cNvSpPr/>
-          <p:nvPr/>
-        </p:nvSpPr>
-        <p:spPr>
-          <a:xfrm>
-            <a:off x="5897880" y="2450592"/>
-            <a:ext cx="365760" cy="274320"/>
-          </a:xfrm>
-          <a:prstGeom prst="rightArrow">
-            <a:avLst/>
-          </a:prstGeom>
-          <a:solidFill>
-            <a:srgbClr val="1F4E79"/>
-          </a:solidFill>
-          <a:ln>
-            <a:noFill/>
-          </a:ln>
-          <a:effectLst/>
-        </p:spPr>
-        <p:style>
-          <a:lnRef idx="1">
-            <a:schemeClr val="accent1"/>
-          </a:lnRef>
-          <a:fillRef idx="3">
-            <a:schemeClr val="accent1"/>
-          </a:fillRef>
-          <a:effectRef idx="2">
-            <a:schemeClr val="accent1"/>
-          </a:effectRef>
-          <a:fontRef idx="minor">
-            <a:schemeClr val="lt1"/>
-          </a:fontRef>
-        </p:style>
-        <p:txBody>
-          <a:bodyPr rtlCol="0" anchor="ctr"/>
-          <a:lstStyle/>
-          <a:p>
-            <a:pPr algn="ctr"/>
-          </a:p>
-        </p:txBody>
-      </p:sp>
-      <p:sp>
-        <p:nvSpPr>
-          <p:cNvPr id="7" name="Right Arrow 6"/>
-          <p:cNvSpPr/>
-          <p:nvPr/>
-        </p:nvSpPr>
-        <p:spPr>
-          <a:xfrm>
-            <a:off x="5897880" y="3959352"/>
-            <a:ext cx="365760" cy="274320"/>
-          </a:xfrm>
-          <a:prstGeom prst="rightArrow">
-            <a:avLst/>
-          </a:prstGeom>
-          <a:solidFill>
-            <a:srgbClr val="1F4E79"/>
-          </a:solidFill>
-          <a:ln>
-            <a:noFill/>
-          </a:ln>
-          <a:effectLst/>
-        </p:spPr>
-        <p:style>
-          <a:lnRef idx="1">
-            <a:schemeClr val="accent1"/>
-          </a:lnRef>
-          <a:fillRef idx="3">
-            <a:schemeClr val="accent1"/>
-          </a:fillRef>
-          <a:effectRef idx="2">
-            <a:schemeClr val="accent1"/>
-          </a:effectRef>
-          <a:fontRef idx="minor">
-            <a:schemeClr val="lt1"/>
-          </a:fontRef>
-        </p:style>
-        <p:txBody>
-          <a:bodyPr rtlCol="0" anchor="ctr"/>
-          <a:lstStyle/>
-          <a:p>
-            <a:pPr algn="ctr"/>
-          </a:p>
-        </p:txBody>
-      </p:sp>
-      <p:sp>
-        <p:nvSpPr>
-          <p:cNvPr id="8" name="TextBox 7"/>
-          <p:cNvSpPr txBox="1"/>
-          <p:nvPr/>
-        </p:nvSpPr>
-        <p:spPr>
-          <a:xfrm>
-            <a:off x="640080" y="6126480"/>
-            <a:ext cx="10972800" cy="548640"/>
-          </a:xfrm>
-          <a:prstGeom prst="rect">
-            <a:avLst/>
-          </a:prstGeom>
-          <a:noFill/>
-        </p:spPr>
-        <p:txBody>
-          <a:bodyPr wrap="square">
-            <a:spAutoFit/>
-          </a:bodyPr>
-          <a:lstStyle/>
-          <a:p>
-            <a:pPr algn="r" rtl="1"/>
-            <a:r>
-              <a:rPr sz="1400">
-                <a:solidFill>
-                  <a:srgbClr val="666666"/>
-                </a:solidFill>
-                <a:latin typeface="Calibri"/>
-              </a:rPr>
-              <a:t>الحوكمة عبر تحسين الجودة بين الطبقات — إدارة مركزية.</a:t>
-            </a:r>
-          </a:p>
-          <a:p>
-            <a:pPr algn="r" rtl="0"/>
-            <a:r>
-              <a:t>Governance via quality improvement between layers — central ownership.</a:t>
+              <a:t>07_  •  14/14</a:t>
             </a:r>
           </a:p>
         </p:txBody>
@@ -4982,7 +6142,7 @@
 </file>
 
 <file path=ppt/slides/slide2.xml><?xml version="1.0" encoding="utf-8"?>
-<p:sld xmlns:a="http://schemas.openxmlformats.org/drawingml/2006/main" xmlns:p="http://schemas.openxmlformats.org/presentationml/2006/main" xmlns:r="http://schemas.openxmlformats.org/officeDocument/2006/relationships">
+<p:sld xmlns:a="http://schemas.openxmlformats.org/drawingml/2006/main" xmlns:r="http://schemas.openxmlformats.org/officeDocument/2006/relationships" xmlns:p="http://schemas.openxmlformats.org/presentationml/2006/main">
   <p:cSld>
     <p:bg>
       <p:bgPr>
@@ -4998,7 +6158,14 @@
         <p:cNvGrpSpPr/>
         <p:nvPr/>
       </p:nvGrpSpPr>
-      <p:grpSpPr/>
+      <p:grpSpPr>
+        <a:xfrm>
+          <a:off x="0" y="0"/>
+          <a:ext cx="0" cy="0"/>
+          <a:chOff x="0" y="0"/>
+          <a:chExt cx="0" cy="0"/>
+        </a:xfrm>
+      </p:grpSpPr>
       <p:sp>
         <p:nvSpPr>
           <p:cNvPr id="2" name="Rectangle 1"/>
@@ -5042,6 +6209,7 @@
           <a:lstStyle/>
           <a:p>
             <a:pPr algn="ctr"/>
+            <a:endParaRPr/>
           </a:p>
         </p:txBody>
       </p:sp>
@@ -5073,9 +6241,9 @@
                 <a:solidFill>
                   <a:srgbClr val="1F3B5C"/>
                 </a:solidFill>
-                <a:latin typeface="Calibri"/>
-              </a:rPr>
-              <a:t>المستودع مقابل البحيرة / Warehouse vs Lake</a:t>
+                <a:latin typeface="Arial"/>
+              </a:rPr>
+              <a:t>أجندة العرض / Agenda</a:t>
             </a:r>
           </a:p>
         </p:txBody>
@@ -5103,66 +6271,345 @@
           <a:lstStyle/>
           <a:p>
             <a:pPr algn="r" rtl="1">
+              <a:spcBef>
+                <a:spcPts val="200"/>
+              </a:spcBef>
               <a:spcAft>
                 <a:spcPts val="1000"/>
               </a:spcAft>
             </a:pPr>
             <a:r>
-              <a:rPr sz="1900">
+              <a:rPr sz="1600">
                 <a:solidFill>
                   <a:srgbClr val="333333"/>
                 </a:solidFill>
-                <a:latin typeface="Calibri"/>
-              </a:rPr>
-              <a:t>• المستودع: مخطط عند الكتابة، SQL سريع، بيانات مهيكلة فقط.</a:t>
-            </a:r>
-          </a:p>
-          <a:p>
-            <a:pPr algn="r" rtl="0">
+                <a:latin typeface="Arial"/>
+              </a:rPr>
+              <a:t>• V07 — المستودعات والبحيرات ومعمارية Lakehouse</a:t>
+            </a:r>
+          </a:p>
+          <a:p>
+            <a:pPr algn="l" rtl="0">
+              <a:spcBef>
+                <a:spcPts val="200"/>
+              </a:spcBef>
               <a:spcAft>
                 <a:spcPts val="1000"/>
               </a:spcAft>
             </a:pPr>
             <a:r>
-              <a:rPr sz="1900">
+              <a:rPr sz="1300">
                 <a:solidFill>
                   <a:srgbClr val="666666"/>
                 </a:solidFill>
                 <a:latin typeface="Calibri"/>
               </a:rPr>
-              <a:t>   Warehouse: schema-on-write, fast SQL, structured data only.</a:t>
+              <a:t>• V07 — Warehouses, Data Lakes &amp; Lakehouse</a:t>
             </a:r>
           </a:p>
           <a:p>
             <a:pPr algn="r" rtl="1">
+              <a:spcBef>
+                <a:spcPts val="200"/>
+              </a:spcBef>
               <a:spcAft>
                 <a:spcPts val="1000"/>
               </a:spcAft>
             </a:pPr>
             <a:r>
-              <a:rPr sz="1900">
+              <a:rPr sz="1600">
                 <a:solidFill>
                   <a:srgbClr val="333333"/>
                 </a:solidFill>
-                <a:latin typeface="Calibri"/>
-              </a:rPr>
-              <a:t>• البحيرة: مخطط عند القراءة، كل التنسيقات، تكلفة تخزين منخفضة.</a:t>
-            </a:r>
-          </a:p>
-          <a:p>
-            <a:pPr algn="r" rtl="0">
+                <a:latin typeface="Arial"/>
+              </a:rPr>
+              <a:t>• المستودع مقابل البحيرة / Warehouse vs Lake</a:t>
+            </a:r>
+          </a:p>
+          <a:p>
+            <a:pPr algn="r" rtl="1">
+              <a:spcBef>
+                <a:spcPts val="200"/>
+              </a:spcBef>
               <a:spcAft>
                 <a:spcPts val="1000"/>
               </a:spcAft>
             </a:pPr>
             <a:r>
-              <a:rPr sz="1900">
+              <a:rPr sz="1600">
+                <a:solidFill>
+                  <a:srgbClr val="333333"/>
+                </a:solidFill>
+                <a:latin typeface="Arial"/>
+              </a:rPr>
+              <a:t>• معمارية Lakehouse / Lakehouse</a:t>
+            </a:r>
+          </a:p>
+          <a:p>
+            <a:pPr algn="r" rtl="1">
+              <a:spcBef>
+                <a:spcPts val="200"/>
+              </a:spcBef>
+              <a:spcAft>
+                <a:spcPts val="1000"/>
+              </a:spcAft>
+            </a:pPr>
+            <a:r>
+              <a:rPr sz="1600">
+                <a:solidFill>
+                  <a:srgbClr val="333333"/>
+                </a:solidFill>
+                <a:latin typeface="Arial"/>
+              </a:rPr>
+              <a:t>• منتجات البيانات وعقودها / Data Products &amp; Contracts</a:t>
+            </a:r>
+          </a:p>
+          <a:p>
+            <a:pPr algn="r" rtl="1">
+              <a:spcBef>
+                <a:spcPts val="200"/>
+              </a:spcBef>
+              <a:spcAft>
+                <a:spcPts val="1000"/>
+              </a:spcAft>
+            </a:pPr>
+            <a:r>
+              <a:rPr sz="1600">
+                <a:solidFill>
+                  <a:srgbClr val="333333"/>
+                </a:solidFill>
+                <a:latin typeface="Arial"/>
+              </a:rPr>
+              <a:t>• متى تختار كل نموذج؟ / When to Choose Which</a:t>
+            </a:r>
+          </a:p>
+          <a:p>
+            <a:pPr algn="r" rtl="1">
+              <a:spcBef>
+                <a:spcPts val="200"/>
+              </a:spcBef>
+              <a:spcAft>
+                <a:spcPts val="1000"/>
+              </a:spcAft>
+            </a:pPr>
+            <a:r>
+              <a:rPr sz="1600">
+                <a:solidFill>
+                  <a:srgbClr val="333333"/>
+                </a:solidFill>
+                <a:latin typeface="Arial"/>
+              </a:rPr>
+              <a:t>• ربط بالمقرر / Course Tie-in</a:t>
+            </a:r>
+          </a:p>
+        </p:txBody>
+      </p:sp>
+      <p:sp>
+        <p:nvSpPr>
+          <p:cNvPr id="5" name="TextBox 4"/>
+          <p:cNvSpPr txBox="1"/>
+          <p:nvPr/>
+        </p:nvSpPr>
+        <p:spPr>
+          <a:xfrm>
+            <a:off x="640080" y="6400800"/>
+            <a:ext cx="8686800" cy="320040"/>
+          </a:xfrm>
+          <a:prstGeom prst="rect">
+            <a:avLst/>
+          </a:prstGeom>
+          <a:noFill/>
+        </p:spPr>
+        <p:txBody>
+          <a:bodyPr wrap="square">
+            <a:spAutoFit/>
+          </a:bodyPr>
+          <a:lstStyle/>
+          <a:p>
+            <a:pPr algn="r" rtl="1"/>
+            <a:r>
+              <a:rPr sz="1000" b="0">
+                <a:solidFill>
+                  <a:srgbClr val="666666"/>
+                </a:solidFill>
+                <a:latin typeface="Arial"/>
+              </a:rPr>
+              <a:t>Module 02 — Data &amp; AI Engineering Track  |  الوحدة الثانية</a:t>
+            </a:r>
+          </a:p>
+        </p:txBody>
+      </p:sp>
+      <p:sp>
+        <p:nvSpPr>
+          <p:cNvPr id="6" name="TextBox 5"/>
+          <p:cNvSpPr txBox="1"/>
+          <p:nvPr/>
+        </p:nvSpPr>
+        <p:spPr>
+          <a:xfrm>
+            <a:off x="9601200" y="6400800"/>
+            <a:ext cx="1920240" cy="320040"/>
+          </a:xfrm>
+          <a:prstGeom prst="rect">
+            <a:avLst/>
+          </a:prstGeom>
+          <a:noFill/>
+        </p:spPr>
+        <p:txBody>
+          <a:bodyPr wrap="square">
+            <a:spAutoFit/>
+          </a:bodyPr>
+          <a:lstStyle/>
+          <a:p>
+            <a:pPr algn="l" rtl="0"/>
+            <a:r>
+              <a:rPr sz="1000" b="0">
                 <a:solidFill>
                   <a:srgbClr val="666666"/>
                 </a:solidFill>
                 <a:latin typeface="Calibri"/>
               </a:rPr>
-              <a:t>   Lake: schema-on-read, any format, low-cost storage.</a:t>
+              <a:t>V07  •  2/14</a:t>
+            </a:r>
+          </a:p>
+        </p:txBody>
+      </p:sp>
+      <p:sp>
+        <p:nvSpPr>
+          <p:cNvPr id="7" name="TextBox 6"/>
+          <p:cNvSpPr txBox="1"/>
+          <p:nvPr/>
+        </p:nvSpPr>
+        <p:spPr>
+          <a:xfrm>
+            <a:off x="640080" y="6400800"/>
+            <a:ext cx="8686800" cy="320040"/>
+          </a:xfrm>
+          <a:prstGeom prst="rect">
+            <a:avLst/>
+          </a:prstGeom>
+          <a:noFill/>
+        </p:spPr>
+        <p:txBody>
+          <a:bodyPr wrap="square">
+            <a:spAutoFit/>
+          </a:bodyPr>
+          <a:lstStyle/>
+          <a:p>
+            <a:pPr algn="r" rtl="1"/>
+            <a:r>
+              <a:rPr sz="1000" b="0">
+                <a:solidFill>
+                  <a:srgbClr val="666666"/>
+                </a:solidFill>
+                <a:latin typeface="Arial"/>
+              </a:rPr>
+              <a:t>Module 02 — Data &amp; AI Engineering Track  |  الوحدة الثانية</a:t>
+            </a:r>
+          </a:p>
+        </p:txBody>
+      </p:sp>
+      <p:sp>
+        <p:nvSpPr>
+          <p:cNvPr id="8" name="TextBox 7"/>
+          <p:cNvSpPr txBox="1"/>
+          <p:nvPr/>
+        </p:nvSpPr>
+        <p:spPr>
+          <a:xfrm>
+            <a:off x="9601200" y="6400800"/>
+            <a:ext cx="1920240" cy="320040"/>
+          </a:xfrm>
+          <a:prstGeom prst="rect">
+            <a:avLst/>
+          </a:prstGeom>
+          <a:noFill/>
+        </p:spPr>
+        <p:txBody>
+          <a:bodyPr wrap="square">
+            <a:spAutoFit/>
+          </a:bodyPr>
+          <a:lstStyle/>
+          <a:p>
+            <a:pPr algn="l" rtl="0"/>
+            <a:r>
+              <a:rPr sz="1000" b="0">
+                <a:solidFill>
+                  <a:srgbClr val="666666"/>
+                </a:solidFill>
+                <a:latin typeface="Calibri"/>
+              </a:rPr>
+              <a:t>07_  •  2/14</a:t>
+            </a:r>
+          </a:p>
+        </p:txBody>
+      </p:sp>
+      <p:sp>
+        <p:nvSpPr>
+          <p:cNvPr id="9" name="TextBox 8"/>
+          <p:cNvSpPr txBox="1"/>
+          <p:nvPr/>
+        </p:nvSpPr>
+        <p:spPr>
+          <a:xfrm>
+            <a:off x="640080" y="6400800"/>
+            <a:ext cx="8686800" cy="320040"/>
+          </a:xfrm>
+          <a:prstGeom prst="rect">
+            <a:avLst/>
+          </a:prstGeom>
+          <a:noFill/>
+        </p:spPr>
+        <p:txBody>
+          <a:bodyPr wrap="square">
+            <a:spAutoFit/>
+          </a:bodyPr>
+          <a:lstStyle/>
+          <a:p>
+            <a:pPr algn="r" rtl="1"/>
+            <a:r>
+              <a:rPr sz="1000" b="0">
+                <a:solidFill>
+                  <a:srgbClr val="666666"/>
+                </a:solidFill>
+                <a:latin typeface="Arial"/>
+              </a:rPr>
+              <a:t>Module 02 — Data &amp; AI Engineering Track  |  الوحدة الثانية</a:t>
+            </a:r>
+          </a:p>
+        </p:txBody>
+      </p:sp>
+      <p:sp>
+        <p:nvSpPr>
+          <p:cNvPr id="10" name="TextBox 9"/>
+          <p:cNvSpPr txBox="1"/>
+          <p:nvPr/>
+        </p:nvSpPr>
+        <p:spPr>
+          <a:xfrm>
+            <a:off x="9601200" y="6400800"/>
+            <a:ext cx="1920240" cy="320040"/>
+          </a:xfrm>
+          <a:prstGeom prst="rect">
+            <a:avLst/>
+          </a:prstGeom>
+          <a:noFill/>
+        </p:spPr>
+        <p:txBody>
+          <a:bodyPr wrap="square">
+            <a:spAutoFit/>
+          </a:bodyPr>
+          <a:lstStyle/>
+          <a:p>
+            <a:pPr algn="l" rtl="0"/>
+            <a:r>
+              <a:rPr sz="1000" b="0">
+                <a:solidFill>
+                  <a:srgbClr val="666666"/>
+                </a:solidFill>
+                <a:latin typeface="Calibri"/>
+              </a:rPr>
+              <a:t>07_  •  2/14</a:t>
             </a:r>
           </a:p>
         </p:txBody>
@@ -5176,7 +6623,7 @@
 </file>
 
 <file path=ppt/slides/slide3.xml><?xml version="1.0" encoding="utf-8"?>
-<p:sld xmlns:a="http://schemas.openxmlformats.org/drawingml/2006/main" xmlns:p="http://schemas.openxmlformats.org/presentationml/2006/main" xmlns:r="http://schemas.openxmlformats.org/officeDocument/2006/relationships">
+<p:sld xmlns:a="http://schemas.openxmlformats.org/drawingml/2006/main" xmlns:r="http://schemas.openxmlformats.org/officeDocument/2006/relationships" xmlns:p="http://schemas.openxmlformats.org/presentationml/2006/main">
   <p:cSld>
     <p:bg>
       <p:bgPr>
@@ -5192,7 +6639,14 @@
         <p:cNvGrpSpPr/>
         <p:nvPr/>
       </p:nvGrpSpPr>
-      <p:grpSpPr/>
+      <p:grpSpPr>
+        <a:xfrm>
+          <a:off x="0" y="0"/>
+          <a:ext cx="0" cy="0"/>
+          <a:chOff x="0" y="0"/>
+          <a:chExt cx="0" cy="0"/>
+        </a:xfrm>
+      </p:grpSpPr>
       <p:sp>
         <p:nvSpPr>
           <p:cNvPr id="2" name="Rectangle 1"/>
@@ -5236,6 +6690,7 @@
           <a:lstStyle/>
           <a:p>
             <a:pPr algn="ctr"/>
+            <a:endParaRPr/>
           </a:p>
         </p:txBody>
       </p:sp>
@@ -5267,9 +6722,9 @@
                 <a:solidFill>
                   <a:srgbClr val="1F3B5C"/>
                 </a:solidFill>
-                <a:latin typeface="Calibri"/>
-              </a:rPr>
-              <a:t>معمارية Lakehouse / Lakehouse</a:t>
+                <a:latin typeface="Arial"/>
+              </a:rPr>
+              <a:t>المستودع مقابل البحيرة / Warehouse vs Lake</a:t>
             </a:r>
           </a:p>
         </p:txBody>
@@ -5297,6 +6752,9 @@
           <a:lstStyle/>
           <a:p>
             <a:pPr algn="r" rtl="1">
+              <a:spcBef>
+                <a:spcPts val="200"/>
+              </a:spcBef>
               <a:spcAft>
                 <a:spcPts val="1000"/>
               </a:spcAft>
@@ -5306,29 +6764,35 @@
                 <a:solidFill>
                   <a:srgbClr val="333333"/>
                 </a:solidFill>
-                <a:latin typeface="Calibri"/>
-              </a:rPr>
-              <a:t>• تجمع مرونة البحيرة وأداء المستودع في منصة واحدة (Delta Lake, Iceberg, Hudi).</a:t>
-            </a:r>
-          </a:p>
-          <a:p>
-            <a:pPr algn="r" rtl="0">
+                <a:latin typeface="Arial"/>
+              </a:rPr>
+              <a:t>• المستودع: مخطط عند الكتابة، SQL سريع، بيانات مهيكلة فقط.</a:t>
+            </a:r>
+          </a:p>
+          <a:p>
+            <a:pPr algn="l" rtl="0">
+              <a:spcBef>
+                <a:spcPts val="200"/>
+              </a:spcBef>
               <a:spcAft>
                 <a:spcPts val="1000"/>
               </a:spcAft>
             </a:pPr>
             <a:r>
-              <a:rPr sz="1900">
+              <a:rPr sz="1600">
                 <a:solidFill>
                   <a:srgbClr val="666666"/>
                 </a:solidFill>
                 <a:latin typeface="Calibri"/>
               </a:rPr>
-              <a:t>   Combines lake flexibility with warehouse performance (Delta Lake, Iceberg, Hudi).</a:t>
+              <a:t>• Warehouse: schema-on-write, fast SQL, structured data only.</a:t>
             </a:r>
           </a:p>
           <a:p>
             <a:pPr algn="r" rtl="1">
+              <a:spcBef>
+                <a:spcPts val="200"/>
+              </a:spcBef>
               <a:spcAft>
                 <a:spcPts val="1000"/>
               </a:spcAft>
@@ -5338,25 +6802,238 @@
                 <a:solidFill>
                   <a:srgbClr val="333333"/>
                 </a:solidFill>
-                <a:latin typeface="Calibri"/>
-              </a:rPr>
-              <a:t>• طبقات معاملات ACID وفهرسة وحوكمة فوق تخزين الكائنات.</a:t>
-            </a:r>
-          </a:p>
-          <a:p>
-            <a:pPr algn="r" rtl="0">
+                <a:latin typeface="Arial"/>
+              </a:rPr>
+              <a:t>• البحيرة: مخطط عند القراءة، كل التنسيقات، تكلفة تخزين منخفضة.</a:t>
+            </a:r>
+          </a:p>
+          <a:p>
+            <a:pPr algn="l" rtl="0">
+              <a:spcBef>
+                <a:spcPts val="200"/>
+              </a:spcBef>
               <a:spcAft>
                 <a:spcPts val="1000"/>
               </a:spcAft>
             </a:pPr>
             <a:r>
-              <a:rPr sz="1900">
+              <a:rPr sz="1600">
                 <a:solidFill>
                   <a:srgbClr val="666666"/>
                 </a:solidFill>
                 <a:latin typeface="Calibri"/>
               </a:rPr>
-              <a:t>   ACID transactions, indexing, and governance layers over object storage.</a:t>
+              <a:t>• Lake: schema-on-read, any format, low-cost storage.</a:t>
+            </a:r>
+          </a:p>
+        </p:txBody>
+      </p:sp>
+      <p:sp>
+        <p:nvSpPr>
+          <p:cNvPr id="5" name="TextBox 4"/>
+          <p:cNvSpPr txBox="1"/>
+          <p:nvPr/>
+        </p:nvSpPr>
+        <p:spPr>
+          <a:xfrm>
+            <a:off x="640080" y="6400800"/>
+            <a:ext cx="8686800" cy="320040"/>
+          </a:xfrm>
+          <a:prstGeom prst="rect">
+            <a:avLst/>
+          </a:prstGeom>
+          <a:noFill/>
+        </p:spPr>
+        <p:txBody>
+          <a:bodyPr wrap="square">
+            <a:spAutoFit/>
+          </a:bodyPr>
+          <a:lstStyle/>
+          <a:p>
+            <a:pPr algn="r" rtl="1"/>
+            <a:r>
+              <a:rPr sz="1000" b="0">
+                <a:solidFill>
+                  <a:srgbClr val="666666"/>
+                </a:solidFill>
+                <a:latin typeface="Arial"/>
+              </a:rPr>
+              <a:t>Module 02 — Data &amp; AI Engineering Track  |  الوحدة الثانية</a:t>
+            </a:r>
+          </a:p>
+        </p:txBody>
+      </p:sp>
+      <p:sp>
+        <p:nvSpPr>
+          <p:cNvPr id="6" name="TextBox 5"/>
+          <p:cNvSpPr txBox="1"/>
+          <p:nvPr/>
+        </p:nvSpPr>
+        <p:spPr>
+          <a:xfrm>
+            <a:off x="9601200" y="6400800"/>
+            <a:ext cx="1920240" cy="320040"/>
+          </a:xfrm>
+          <a:prstGeom prst="rect">
+            <a:avLst/>
+          </a:prstGeom>
+          <a:noFill/>
+        </p:spPr>
+        <p:txBody>
+          <a:bodyPr wrap="square">
+            <a:spAutoFit/>
+          </a:bodyPr>
+          <a:lstStyle/>
+          <a:p>
+            <a:pPr algn="l" rtl="0"/>
+            <a:r>
+              <a:rPr sz="1000" b="0">
+                <a:solidFill>
+                  <a:srgbClr val="666666"/>
+                </a:solidFill>
+                <a:latin typeface="Calibri"/>
+              </a:rPr>
+              <a:t>V07  •  3/14</a:t>
+            </a:r>
+          </a:p>
+        </p:txBody>
+      </p:sp>
+      <p:sp>
+        <p:nvSpPr>
+          <p:cNvPr id="7" name="TextBox 6"/>
+          <p:cNvSpPr txBox="1"/>
+          <p:nvPr/>
+        </p:nvSpPr>
+        <p:spPr>
+          <a:xfrm>
+            <a:off x="640080" y="6400800"/>
+            <a:ext cx="8686800" cy="320040"/>
+          </a:xfrm>
+          <a:prstGeom prst="rect">
+            <a:avLst/>
+          </a:prstGeom>
+          <a:noFill/>
+        </p:spPr>
+        <p:txBody>
+          <a:bodyPr wrap="square">
+            <a:spAutoFit/>
+          </a:bodyPr>
+          <a:lstStyle/>
+          <a:p>
+            <a:pPr algn="r" rtl="1"/>
+            <a:r>
+              <a:rPr sz="1000" b="0">
+                <a:solidFill>
+                  <a:srgbClr val="666666"/>
+                </a:solidFill>
+                <a:latin typeface="Arial"/>
+              </a:rPr>
+              <a:t>Module 02 — Data &amp; AI Engineering Track  |  الوحدة الثانية</a:t>
+            </a:r>
+          </a:p>
+        </p:txBody>
+      </p:sp>
+      <p:sp>
+        <p:nvSpPr>
+          <p:cNvPr id="8" name="TextBox 7"/>
+          <p:cNvSpPr txBox="1"/>
+          <p:nvPr/>
+        </p:nvSpPr>
+        <p:spPr>
+          <a:xfrm>
+            <a:off x="9601200" y="6400800"/>
+            <a:ext cx="1920240" cy="320040"/>
+          </a:xfrm>
+          <a:prstGeom prst="rect">
+            <a:avLst/>
+          </a:prstGeom>
+          <a:noFill/>
+        </p:spPr>
+        <p:txBody>
+          <a:bodyPr wrap="square">
+            <a:spAutoFit/>
+          </a:bodyPr>
+          <a:lstStyle/>
+          <a:p>
+            <a:pPr algn="l" rtl="0"/>
+            <a:r>
+              <a:rPr sz="1000" b="0">
+                <a:solidFill>
+                  <a:srgbClr val="666666"/>
+                </a:solidFill>
+                <a:latin typeface="Calibri"/>
+              </a:rPr>
+              <a:t>07_  •  3/14</a:t>
+            </a:r>
+          </a:p>
+        </p:txBody>
+      </p:sp>
+      <p:sp>
+        <p:nvSpPr>
+          <p:cNvPr id="9" name="TextBox 8"/>
+          <p:cNvSpPr txBox="1"/>
+          <p:nvPr/>
+        </p:nvSpPr>
+        <p:spPr>
+          <a:xfrm>
+            <a:off x="640080" y="6400800"/>
+            <a:ext cx="8686800" cy="320040"/>
+          </a:xfrm>
+          <a:prstGeom prst="rect">
+            <a:avLst/>
+          </a:prstGeom>
+          <a:noFill/>
+        </p:spPr>
+        <p:txBody>
+          <a:bodyPr wrap="square">
+            <a:spAutoFit/>
+          </a:bodyPr>
+          <a:lstStyle/>
+          <a:p>
+            <a:pPr algn="r" rtl="1"/>
+            <a:r>
+              <a:rPr sz="1000" b="0">
+                <a:solidFill>
+                  <a:srgbClr val="666666"/>
+                </a:solidFill>
+                <a:latin typeface="Arial"/>
+              </a:rPr>
+              <a:t>Module 02 — Data &amp; AI Engineering Track  |  الوحدة الثانية</a:t>
+            </a:r>
+          </a:p>
+        </p:txBody>
+      </p:sp>
+      <p:sp>
+        <p:nvSpPr>
+          <p:cNvPr id="10" name="TextBox 9"/>
+          <p:cNvSpPr txBox="1"/>
+          <p:nvPr/>
+        </p:nvSpPr>
+        <p:spPr>
+          <a:xfrm>
+            <a:off x="9601200" y="6400800"/>
+            <a:ext cx="1920240" cy="320040"/>
+          </a:xfrm>
+          <a:prstGeom prst="rect">
+            <a:avLst/>
+          </a:prstGeom>
+          <a:noFill/>
+        </p:spPr>
+        <p:txBody>
+          <a:bodyPr wrap="square">
+            <a:spAutoFit/>
+          </a:bodyPr>
+          <a:lstStyle/>
+          <a:p>
+            <a:pPr algn="l" rtl="0"/>
+            <a:r>
+              <a:rPr sz="1000" b="0">
+                <a:solidFill>
+                  <a:srgbClr val="666666"/>
+                </a:solidFill>
+                <a:latin typeface="Calibri"/>
+              </a:rPr>
+              <a:t>07_  •  3/14</a:t>
             </a:r>
           </a:p>
         </p:txBody>
@@ -5370,7 +7047,7 @@
 </file>
 
 <file path=ppt/slides/slide4.xml><?xml version="1.0" encoding="utf-8"?>
-<p:sld xmlns:a="http://schemas.openxmlformats.org/drawingml/2006/main" xmlns:p="http://schemas.openxmlformats.org/presentationml/2006/main" xmlns:r="http://schemas.openxmlformats.org/officeDocument/2006/relationships">
+<p:sld xmlns:a="http://schemas.openxmlformats.org/drawingml/2006/main" xmlns:r="http://schemas.openxmlformats.org/officeDocument/2006/relationships" xmlns:p="http://schemas.openxmlformats.org/presentationml/2006/main">
   <p:cSld>
     <p:bg>
       <p:bgPr>
@@ -5386,60 +7063,32 @@
         <p:cNvGrpSpPr/>
         <p:nvPr/>
       </p:nvGrpSpPr>
-      <p:grpSpPr/>
-      <p:sp>
-        <p:nvSpPr>
-          <p:cNvPr id="2" name="TextBox 1"/>
-          <p:cNvSpPr txBox="1"/>
-          <p:nvPr/>
-        </p:nvSpPr>
-        <p:spPr>
-          <a:xfrm>
-            <a:off x="640080" y="137160"/>
-            <a:ext cx="10972800" cy="640080"/>
-          </a:xfrm>
-          <a:prstGeom prst="rect">
-            <a:avLst/>
-          </a:prstGeom>
-          <a:noFill/>
-        </p:spPr>
-        <p:txBody>
-          <a:bodyPr wrap="none">
-            <a:spAutoFit/>
-          </a:bodyPr>
-          <a:lstStyle/>
-          <a:p>
-            <a:pPr algn="r" rtl="1"/>
-            <a:r>
-              <a:rPr sz="3000" b="1">
-                <a:solidFill>
-                  <a:srgbClr val="1F3B5C"/>
-                </a:solidFill>
-                <a:latin typeface="Calibri"/>
-              </a:rPr>
-              <a:t>المعمارية المتدرِّجة Medallion / Medallion Layers</a:t>
-            </a:r>
-          </a:p>
-        </p:txBody>
-      </p:sp>
-      <p:sp>
-        <p:nvSpPr>
-          <p:cNvPr id="3" name="Rounded Rectangle 2"/>
+      <p:grpSpPr>
+        <a:xfrm>
+          <a:off x="0" y="0"/>
+          <a:ext cx="0" cy="0"/>
+          <a:chOff x="0" y="0"/>
+          <a:chExt cx="0" cy="0"/>
+        </a:xfrm>
+      </p:grpSpPr>
+      <p:sp>
+        <p:nvSpPr>
+          <p:cNvPr id="2" name="Rectangle 1"/>
           <p:cNvSpPr/>
           <p:nvPr/>
         </p:nvSpPr>
         <p:spPr>
           <a:xfrm>
-            <a:off x="2286000" y="1188720"/>
-            <a:ext cx="7589520" cy="1234440"/>
-          </a:xfrm>
-          <a:prstGeom prst="roundRect">
+            <a:off x="0" y="0"/>
+            <a:ext cx="12191695" cy="1005840"/>
+          </a:xfrm>
+          <a:prstGeom prst="rect">
             <a:avLst/>
           </a:prstGeom>
           <a:solidFill>
-            <a:srgbClr val="FDE9D9"/>
+            <a:srgbClr val="FFFFFF"/>
           </a:solidFill>
-          <a:ln w="12700">
+          <a:ln w="25400">
             <a:solidFill>
               <a:srgbClr val="1F4E79"/>
             </a:solidFill>
@@ -5461,293 +7110,354 @@
           </a:fontRef>
         </p:style>
         <p:txBody>
-          <a:bodyPr rtlCol="0" anchor="ctr" wrap="square"/>
-          <a:lstStyle/>
-          <a:p>
-            <a:pPr algn="ctr" rtl="1"/>
-            <a:r>
-              <a:rPr sz="1800" b="1">
+          <a:bodyPr rtlCol="0" anchor="ctr"/>
+          <a:lstStyle/>
+          <a:p>
+            <a:pPr algn="ctr"/>
+            <a:endParaRPr/>
+          </a:p>
+        </p:txBody>
+      </p:sp>
+      <p:sp>
+        <p:nvSpPr>
+          <p:cNvPr id="3" name="TextBox 2"/>
+          <p:cNvSpPr txBox="1"/>
+          <p:nvPr/>
+        </p:nvSpPr>
+        <p:spPr>
+          <a:xfrm>
+            <a:off x="640080" y="182880"/>
+            <a:ext cx="10972800" cy="640080"/>
+          </a:xfrm>
+          <a:prstGeom prst="rect">
+            <a:avLst/>
+          </a:prstGeom>
+          <a:noFill/>
+        </p:spPr>
+        <p:txBody>
+          <a:bodyPr wrap="square">
+            <a:spAutoFit/>
+          </a:bodyPr>
+          <a:lstStyle/>
+          <a:p>
+            <a:pPr algn="r" rtl="1"/>
+            <a:r>
+              <a:rPr sz="3200" b="1">
+                <a:solidFill>
+                  <a:srgbClr val="1F3B5C"/>
+                </a:solidFill>
+                <a:latin typeface="Arial"/>
+              </a:rPr>
+              <a:t>معمارية Lakehouse / Lakehouse</a:t>
+            </a:r>
+          </a:p>
+        </p:txBody>
+      </p:sp>
+      <p:sp>
+        <p:nvSpPr>
+          <p:cNvPr id="4" name="TextBox 3"/>
+          <p:cNvSpPr txBox="1"/>
+          <p:nvPr/>
+        </p:nvSpPr>
+        <p:spPr>
+          <a:xfrm>
+            <a:off x="640080" y="1280160"/>
+            <a:ext cx="10972800" cy="5212080"/>
+          </a:xfrm>
+          <a:prstGeom prst="rect">
+            <a:avLst/>
+          </a:prstGeom>
+          <a:noFill/>
+        </p:spPr>
+        <p:txBody>
+          <a:bodyPr wrap="square">
+            <a:spAutoFit/>
+          </a:bodyPr>
+          <a:lstStyle/>
+          <a:p>
+            <a:pPr algn="r" rtl="1">
+              <a:spcBef>
+                <a:spcPts val="200"/>
+              </a:spcBef>
+              <a:spcAft>
+                <a:spcPts val="1000"/>
+              </a:spcAft>
+            </a:pPr>
+            <a:r>
+              <a:rPr sz="1900">
                 <a:solidFill>
                   <a:srgbClr val="333333"/>
                 </a:solidFill>
+                <a:latin typeface="Arial"/>
+              </a:rPr>
+              <a:t>• تجمع مرونة البحيرة وأداء المستودع في منصة واحدة (Delta Lake, Iceberg, Hudi).</a:t>
+            </a:r>
+          </a:p>
+          <a:p>
+            <a:pPr algn="l" rtl="0">
+              <a:spcBef>
+                <a:spcPts val="200"/>
+              </a:spcBef>
+              <a:spcAft>
+                <a:spcPts val="1000"/>
+              </a:spcAft>
+            </a:pPr>
+            <a:r>
+              <a:rPr sz="1600">
+                <a:solidFill>
+                  <a:srgbClr val="666666"/>
+                </a:solidFill>
                 <a:latin typeface="Calibri"/>
               </a:rPr>
-              <a:t>Bronze — بيانات خام غير قابلة للتغيير</a:t>
-            </a:r>
-          </a:p>
-          <a:p>
-            <a:pPr algn="ctr" rtl="0"/>
-            <a:r>
-              <a:rPr sz="1300">
+              <a:t>• Combines lake flexibility with warehouse performance (Delta Lake, Iceberg, Hudi).</a:t>
+            </a:r>
+          </a:p>
+          <a:p>
+            <a:pPr algn="r" rtl="1">
+              <a:spcBef>
+                <a:spcPts val="200"/>
+              </a:spcBef>
+              <a:spcAft>
+                <a:spcPts val="1000"/>
+              </a:spcAft>
+            </a:pPr>
+            <a:r>
+              <a:rPr sz="1900">
+                <a:solidFill>
+                  <a:srgbClr val="333333"/>
+                </a:solidFill>
+                <a:latin typeface="Arial"/>
+              </a:rPr>
+              <a:t>• طبقات معاملات ACID وفهرسة وحوكمة فوق تخزين الكائنات.</a:t>
+            </a:r>
+          </a:p>
+          <a:p>
+            <a:pPr algn="l" rtl="0">
+              <a:spcBef>
+                <a:spcPts val="200"/>
+              </a:spcBef>
+              <a:spcAft>
+                <a:spcPts val="1000"/>
+              </a:spcAft>
+            </a:pPr>
+            <a:r>
+              <a:rPr sz="1600">
                 <a:solidFill>
                   <a:srgbClr val="666666"/>
                 </a:solidFill>
                 <a:latin typeface="Calibri"/>
               </a:rPr>
-              <a:t>Raw immutable data</a:t>
-            </a:r>
-          </a:p>
-        </p:txBody>
-      </p:sp>
-      <p:sp>
-        <p:nvSpPr>
-          <p:cNvPr id="4" name="Rounded Rectangle 3"/>
-          <p:cNvSpPr/>
-          <p:nvPr/>
-        </p:nvSpPr>
-        <p:spPr>
-          <a:xfrm>
-            <a:off x="2286000" y="2697480"/>
-            <a:ext cx="7589520" cy="1234440"/>
-          </a:xfrm>
-          <a:prstGeom prst="roundRect">
-            <a:avLst/>
-          </a:prstGeom>
-          <a:solidFill>
-            <a:srgbClr val="EDEDED"/>
-          </a:solidFill>
-          <a:ln w="12700">
-            <a:solidFill>
-              <a:srgbClr val="1F4E79"/>
-            </a:solidFill>
-          </a:ln>
-          <a:effectLst/>
-        </p:spPr>
-        <p:style>
-          <a:lnRef idx="1">
-            <a:schemeClr val="accent1"/>
-          </a:lnRef>
-          <a:fillRef idx="3">
-            <a:schemeClr val="accent1"/>
-          </a:fillRef>
-          <a:effectRef idx="2">
-            <a:schemeClr val="accent1"/>
-          </a:effectRef>
-          <a:fontRef idx="minor">
-            <a:schemeClr val="lt1"/>
-          </a:fontRef>
-        </p:style>
-        <p:txBody>
-          <a:bodyPr rtlCol="0" anchor="ctr" wrap="square"/>
-          <a:lstStyle/>
-          <a:p>
-            <a:pPr algn="ctr" rtl="1"/>
-            <a:r>
-              <a:rPr sz="1800" b="1">
-                <a:solidFill>
-                  <a:srgbClr val="333333"/>
+              <a:t>• ACID transactions, indexing, and governance layers over object storage.</a:t>
+            </a:r>
+          </a:p>
+        </p:txBody>
+      </p:sp>
+      <p:sp>
+        <p:nvSpPr>
+          <p:cNvPr id="5" name="TextBox 4"/>
+          <p:cNvSpPr txBox="1"/>
+          <p:nvPr/>
+        </p:nvSpPr>
+        <p:spPr>
+          <a:xfrm>
+            <a:off x="640080" y="6400800"/>
+            <a:ext cx="8686800" cy="320040"/>
+          </a:xfrm>
+          <a:prstGeom prst="rect">
+            <a:avLst/>
+          </a:prstGeom>
+          <a:noFill/>
+        </p:spPr>
+        <p:txBody>
+          <a:bodyPr wrap="square">
+            <a:spAutoFit/>
+          </a:bodyPr>
+          <a:lstStyle/>
+          <a:p>
+            <a:pPr algn="r" rtl="1"/>
+            <a:r>
+              <a:rPr sz="1000" b="0">
+                <a:solidFill>
+                  <a:srgbClr val="666666"/>
+                </a:solidFill>
+                <a:latin typeface="Arial"/>
+              </a:rPr>
+              <a:t>Module 02 — Data &amp; AI Engineering Track  |  الوحدة الثانية</a:t>
+            </a:r>
+          </a:p>
+        </p:txBody>
+      </p:sp>
+      <p:sp>
+        <p:nvSpPr>
+          <p:cNvPr id="6" name="TextBox 5"/>
+          <p:cNvSpPr txBox="1"/>
+          <p:nvPr/>
+        </p:nvSpPr>
+        <p:spPr>
+          <a:xfrm>
+            <a:off x="9601200" y="6400800"/>
+            <a:ext cx="1920240" cy="320040"/>
+          </a:xfrm>
+          <a:prstGeom prst="rect">
+            <a:avLst/>
+          </a:prstGeom>
+          <a:noFill/>
+        </p:spPr>
+        <p:txBody>
+          <a:bodyPr wrap="square">
+            <a:spAutoFit/>
+          </a:bodyPr>
+          <a:lstStyle/>
+          <a:p>
+            <a:pPr algn="l" rtl="0"/>
+            <a:r>
+              <a:rPr sz="1000" b="0">
+                <a:solidFill>
+                  <a:srgbClr val="666666"/>
                 </a:solidFill>
                 <a:latin typeface="Calibri"/>
               </a:rPr>
-              <a:t>Silver — بيانات منقَّاة ومنظَّمة</a:t>
-            </a:r>
-          </a:p>
-          <a:p>
-            <a:pPr algn="ctr" rtl="0"/>
-            <a:r>
-              <a:rPr sz="1300">
+              <a:t>V07  •  4/14</a:t>
+            </a:r>
+          </a:p>
+        </p:txBody>
+      </p:sp>
+      <p:sp>
+        <p:nvSpPr>
+          <p:cNvPr id="7" name="TextBox 6"/>
+          <p:cNvSpPr txBox="1"/>
+          <p:nvPr/>
+        </p:nvSpPr>
+        <p:spPr>
+          <a:xfrm>
+            <a:off x="640080" y="6400800"/>
+            <a:ext cx="8686800" cy="320040"/>
+          </a:xfrm>
+          <a:prstGeom prst="rect">
+            <a:avLst/>
+          </a:prstGeom>
+          <a:noFill/>
+        </p:spPr>
+        <p:txBody>
+          <a:bodyPr wrap="square">
+            <a:spAutoFit/>
+          </a:bodyPr>
+          <a:lstStyle/>
+          <a:p>
+            <a:pPr algn="r" rtl="1"/>
+            <a:r>
+              <a:rPr sz="1000" b="0">
+                <a:solidFill>
+                  <a:srgbClr val="666666"/>
+                </a:solidFill>
+                <a:latin typeface="Arial"/>
+              </a:rPr>
+              <a:t>Module 02 — Data &amp; AI Engineering Track  |  الوحدة الثانية</a:t>
+            </a:r>
+          </a:p>
+        </p:txBody>
+      </p:sp>
+      <p:sp>
+        <p:nvSpPr>
+          <p:cNvPr id="8" name="TextBox 7"/>
+          <p:cNvSpPr txBox="1"/>
+          <p:nvPr/>
+        </p:nvSpPr>
+        <p:spPr>
+          <a:xfrm>
+            <a:off x="9601200" y="6400800"/>
+            <a:ext cx="1920240" cy="320040"/>
+          </a:xfrm>
+          <a:prstGeom prst="rect">
+            <a:avLst/>
+          </a:prstGeom>
+          <a:noFill/>
+        </p:spPr>
+        <p:txBody>
+          <a:bodyPr wrap="square">
+            <a:spAutoFit/>
+          </a:bodyPr>
+          <a:lstStyle/>
+          <a:p>
+            <a:pPr algn="l" rtl="0"/>
+            <a:r>
+              <a:rPr sz="1000" b="0">
                 <a:solidFill>
                   <a:srgbClr val="666666"/>
                 </a:solidFill>
                 <a:latin typeface="Calibri"/>
               </a:rPr>
-              <a:t>Cleansed &amp; structured data</a:t>
-            </a:r>
-          </a:p>
-        </p:txBody>
-      </p:sp>
-      <p:sp>
-        <p:nvSpPr>
-          <p:cNvPr id="5" name="Rounded Rectangle 4"/>
-          <p:cNvSpPr/>
-          <p:nvPr/>
-        </p:nvSpPr>
-        <p:spPr>
-          <a:xfrm>
-            <a:off x="2286000" y="4206240"/>
-            <a:ext cx="7589520" cy="1234440"/>
-          </a:xfrm>
-          <a:prstGeom prst="roundRect">
-            <a:avLst/>
-          </a:prstGeom>
-          <a:solidFill>
-            <a:srgbClr val="E2EFDA"/>
-          </a:solidFill>
-          <a:ln w="12700">
-            <a:solidFill>
-              <a:srgbClr val="1F4E79"/>
-            </a:solidFill>
-          </a:ln>
-          <a:effectLst/>
-        </p:spPr>
-        <p:style>
-          <a:lnRef idx="1">
-            <a:schemeClr val="accent1"/>
-          </a:lnRef>
-          <a:fillRef idx="3">
-            <a:schemeClr val="accent1"/>
-          </a:fillRef>
-          <a:effectRef idx="2">
-            <a:schemeClr val="accent1"/>
-          </a:effectRef>
-          <a:fontRef idx="minor">
-            <a:schemeClr val="lt1"/>
-          </a:fontRef>
-        </p:style>
-        <p:txBody>
-          <a:bodyPr rtlCol="0" anchor="ctr" wrap="square"/>
-          <a:lstStyle/>
-          <a:p>
-            <a:pPr algn="ctr" rtl="1"/>
-            <a:r>
-              <a:rPr sz="1800" b="1">
-                <a:solidFill>
-                  <a:srgbClr val="333333"/>
+              <a:t>07_  •  4/14</a:t>
+            </a:r>
+          </a:p>
+        </p:txBody>
+      </p:sp>
+      <p:sp>
+        <p:nvSpPr>
+          <p:cNvPr id="9" name="TextBox 8"/>
+          <p:cNvSpPr txBox="1"/>
+          <p:nvPr/>
+        </p:nvSpPr>
+        <p:spPr>
+          <a:xfrm>
+            <a:off x="640080" y="6400800"/>
+            <a:ext cx="8686800" cy="320040"/>
+          </a:xfrm>
+          <a:prstGeom prst="rect">
+            <a:avLst/>
+          </a:prstGeom>
+          <a:noFill/>
+        </p:spPr>
+        <p:txBody>
+          <a:bodyPr wrap="square">
+            <a:spAutoFit/>
+          </a:bodyPr>
+          <a:lstStyle/>
+          <a:p>
+            <a:pPr algn="r" rtl="1"/>
+            <a:r>
+              <a:rPr sz="1000" b="0">
+                <a:solidFill>
+                  <a:srgbClr val="666666"/>
+                </a:solidFill>
+                <a:latin typeface="Arial"/>
+              </a:rPr>
+              <a:t>Module 02 — Data &amp; AI Engineering Track  |  الوحدة الثانية</a:t>
+            </a:r>
+          </a:p>
+        </p:txBody>
+      </p:sp>
+      <p:sp>
+        <p:nvSpPr>
+          <p:cNvPr id="10" name="TextBox 9"/>
+          <p:cNvSpPr txBox="1"/>
+          <p:nvPr/>
+        </p:nvSpPr>
+        <p:spPr>
+          <a:xfrm>
+            <a:off x="9601200" y="6400800"/>
+            <a:ext cx="1920240" cy="320040"/>
+          </a:xfrm>
+          <a:prstGeom prst="rect">
+            <a:avLst/>
+          </a:prstGeom>
+          <a:noFill/>
+        </p:spPr>
+        <p:txBody>
+          <a:bodyPr wrap="square">
+            <a:spAutoFit/>
+          </a:bodyPr>
+          <a:lstStyle/>
+          <a:p>
+            <a:pPr algn="l" rtl="0"/>
+            <a:r>
+              <a:rPr sz="1000" b="0">
+                <a:solidFill>
+                  <a:srgbClr val="666666"/>
                 </a:solidFill>
                 <a:latin typeface="Calibri"/>
               </a:rPr>
-              <a:t>Gold — تجميعات جاهزة للتحليل</a:t>
-            </a:r>
-          </a:p>
-          <a:p>
-            <a:pPr algn="ctr" rtl="0"/>
-            <a:r>
-              <a:rPr sz="1300">
-                <a:solidFill>
-                  <a:srgbClr val="666666"/>
-                </a:solidFill>
-                <a:latin typeface="Calibri"/>
-              </a:rPr>
-              <a:t>Analytics-ready aggregates</a:t>
-            </a:r>
-          </a:p>
-        </p:txBody>
-      </p:sp>
-      <p:sp>
-        <p:nvSpPr>
-          <p:cNvPr id="6" name="Right Arrow 5"/>
-          <p:cNvSpPr/>
-          <p:nvPr/>
-        </p:nvSpPr>
-        <p:spPr>
-          <a:xfrm>
-            <a:off x="5897880" y="2450592"/>
-            <a:ext cx="365760" cy="274320"/>
-          </a:xfrm>
-          <a:prstGeom prst="rightArrow">
-            <a:avLst/>
-          </a:prstGeom>
-          <a:solidFill>
-            <a:srgbClr val="1F4E79"/>
-          </a:solidFill>
-          <a:ln>
-            <a:noFill/>
-          </a:ln>
-          <a:effectLst/>
-        </p:spPr>
-        <p:style>
-          <a:lnRef idx="1">
-            <a:schemeClr val="accent1"/>
-          </a:lnRef>
-          <a:fillRef idx="3">
-            <a:schemeClr val="accent1"/>
-          </a:fillRef>
-          <a:effectRef idx="2">
-            <a:schemeClr val="accent1"/>
-          </a:effectRef>
-          <a:fontRef idx="minor">
-            <a:schemeClr val="lt1"/>
-          </a:fontRef>
-        </p:style>
-        <p:txBody>
-          <a:bodyPr rtlCol="0" anchor="ctr"/>
-          <a:lstStyle/>
-          <a:p>
-            <a:pPr algn="ctr"/>
-          </a:p>
-        </p:txBody>
-      </p:sp>
-      <p:sp>
-        <p:nvSpPr>
-          <p:cNvPr id="7" name="Right Arrow 6"/>
-          <p:cNvSpPr/>
-          <p:nvPr/>
-        </p:nvSpPr>
-        <p:spPr>
-          <a:xfrm>
-            <a:off x="5897880" y="3959352"/>
-            <a:ext cx="365760" cy="274320"/>
-          </a:xfrm>
-          <a:prstGeom prst="rightArrow">
-            <a:avLst/>
-          </a:prstGeom>
-          <a:solidFill>
-            <a:srgbClr val="1F4E79"/>
-          </a:solidFill>
-          <a:ln>
-            <a:noFill/>
-          </a:ln>
-          <a:effectLst/>
-        </p:spPr>
-        <p:style>
-          <a:lnRef idx="1">
-            <a:schemeClr val="accent1"/>
-          </a:lnRef>
-          <a:fillRef idx="3">
-            <a:schemeClr val="accent1"/>
-          </a:fillRef>
-          <a:effectRef idx="2">
-            <a:schemeClr val="accent1"/>
-          </a:effectRef>
-          <a:fontRef idx="minor">
-            <a:schemeClr val="lt1"/>
-          </a:fontRef>
-        </p:style>
-        <p:txBody>
-          <a:bodyPr rtlCol="0" anchor="ctr"/>
-          <a:lstStyle/>
-          <a:p>
-            <a:pPr algn="ctr"/>
-          </a:p>
-        </p:txBody>
-      </p:sp>
-      <p:sp>
-        <p:nvSpPr>
-          <p:cNvPr id="8" name="TextBox 7"/>
-          <p:cNvSpPr txBox="1"/>
-          <p:nvPr/>
-        </p:nvSpPr>
-        <p:spPr>
-          <a:xfrm>
-            <a:off x="640080" y="6126480"/>
-            <a:ext cx="10972800" cy="548640"/>
-          </a:xfrm>
-          <a:prstGeom prst="rect">
-            <a:avLst/>
-          </a:prstGeom>
-          <a:noFill/>
-        </p:spPr>
-        <p:txBody>
-          <a:bodyPr wrap="square">
-            <a:spAutoFit/>
-          </a:bodyPr>
-          <a:lstStyle/>
-          <a:p>
-            <a:pPr algn="r" rtl="1"/>
-            <a:r>
-              <a:rPr sz="1400">
-                <a:solidFill>
-                  <a:srgbClr val="666666"/>
-                </a:solidFill>
-                <a:latin typeface="Calibri"/>
-              </a:rPr>
-              <a:t>الحوكمة عبر تحسين الجودة بين الطبقات — إدارة مركزية.</a:t>
-            </a:r>
-          </a:p>
-          <a:p>
-            <a:pPr algn="r" rtl="0"/>
-            <a:r>
-              <a:t>Governance via quality improvement between layers — central ownership.</a:t>
+              <a:t>07_  •  4/14</a:t>
             </a:r>
           </a:p>
         </p:txBody>
@@ -5761,7 +7471,7 @@
 </file>
 
 <file path=ppt/slides/slide5.xml><?xml version="1.0" encoding="utf-8"?>
-<p:sld xmlns:a="http://schemas.openxmlformats.org/drawingml/2006/main" xmlns:p="http://schemas.openxmlformats.org/presentationml/2006/main" xmlns:r="http://schemas.openxmlformats.org/officeDocument/2006/relationships">
+<p:sld xmlns:a="http://schemas.openxmlformats.org/drawingml/2006/main" xmlns:r="http://schemas.openxmlformats.org/officeDocument/2006/relationships" xmlns:p="http://schemas.openxmlformats.org/presentationml/2006/main">
   <p:cSld>
     <p:bg>
       <p:bgPr>
@@ -5777,25 +7487,67 @@
         <p:cNvGrpSpPr/>
         <p:nvPr/>
       </p:nvGrpSpPr>
-      <p:grpSpPr/>
-      <p:sp>
-        <p:nvSpPr>
-          <p:cNvPr id="2" name="Rectangle 1"/>
+      <p:grpSpPr>
+        <a:xfrm>
+          <a:off x="0" y="0"/>
+          <a:ext cx="0" cy="0"/>
+          <a:chOff x="0" y="0"/>
+          <a:chExt cx="0" cy="0"/>
+        </a:xfrm>
+      </p:grpSpPr>
+      <p:sp>
+        <p:nvSpPr>
+          <p:cNvPr id="2" name="TextBox 1"/>
+          <p:cNvSpPr txBox="1"/>
+          <p:nvPr/>
+        </p:nvSpPr>
+        <p:spPr>
+          <a:xfrm>
+            <a:off x="640080" y="137160"/>
+            <a:ext cx="10972800" cy="640080"/>
+          </a:xfrm>
+          <a:prstGeom prst="rect">
+            <a:avLst/>
+          </a:prstGeom>
+          <a:noFill/>
+        </p:spPr>
+        <p:txBody>
+          <a:bodyPr wrap="none">
+            <a:spAutoFit/>
+          </a:bodyPr>
+          <a:lstStyle/>
+          <a:p>
+            <a:pPr algn="r" rtl="1"/>
+            <a:r>
+              <a:rPr sz="3000" b="1">
+                <a:solidFill>
+                  <a:srgbClr val="1F3B5C"/>
+                </a:solidFill>
+                <a:latin typeface="Arial"/>
+              </a:rPr>
+              <a:t>المعمارية المتدرِّجة Medallion / Medallion Layers</a:t>
+            </a:r>
+          </a:p>
+        </p:txBody>
+      </p:sp>
+      <p:sp>
+        <p:nvSpPr>
+          <p:cNvPr id="3" name="Rounded Rectangle 2"/>
           <p:cNvSpPr/>
           <p:nvPr/>
         </p:nvSpPr>
         <p:spPr>
           <a:xfrm>
-            <a:off x="0" y="0"/>
-            <a:ext cx="12191695" cy="1005840"/>
-          </a:xfrm>
-          <a:prstGeom prst="rect">
+            <a:off x="2286000" y="1188720"/>
+            <a:ext cx="7589520" cy="1234440"/>
+          </a:xfrm>
+          <a:prstGeom prst="roundRect">
             <a:avLst/>
           </a:prstGeom>
           <a:solidFill>
-            <a:srgbClr val="FFFFFF"/>
+            <a:srgbClr val="FDE9D9"/>
           </a:solidFill>
-          <a:ln w="25400">
+          <a:ln w="12700">
             <a:solidFill>
               <a:srgbClr val="1F4E79"/>
             </a:solidFill>
@@ -5817,23 +7569,268 @@
           </a:fontRef>
         </p:style>
         <p:txBody>
+          <a:bodyPr wrap="square" rtlCol="0" anchor="ctr"/>
+          <a:lstStyle/>
+          <a:p>
+            <a:pPr algn="ctr" rtl="1"/>
+            <a:r>
+              <a:rPr sz="1800" b="1">
+                <a:solidFill>
+                  <a:srgbClr val="333333"/>
+                </a:solidFill>
+                <a:latin typeface="Arial"/>
+              </a:rPr>
+              <a:t>Bronze — بيانات خام غير قابلة للتغيير</a:t>
+            </a:r>
+          </a:p>
+          <a:p>
+            <a:pPr algn="ctr" rtl="0"/>
+            <a:r>
+              <a:rPr sz="1300">
+                <a:solidFill>
+                  <a:srgbClr val="666666"/>
+                </a:solidFill>
+                <a:latin typeface="Calibri"/>
+              </a:rPr>
+              <a:t>Raw immutable data</a:t>
+            </a:r>
+          </a:p>
+        </p:txBody>
+      </p:sp>
+      <p:sp>
+        <p:nvSpPr>
+          <p:cNvPr id="4" name="Rounded Rectangle 3"/>
+          <p:cNvSpPr/>
+          <p:nvPr/>
+        </p:nvSpPr>
+        <p:spPr>
+          <a:xfrm>
+            <a:off x="2286000" y="2697480"/>
+            <a:ext cx="7589520" cy="1234440"/>
+          </a:xfrm>
+          <a:prstGeom prst="roundRect">
+            <a:avLst/>
+          </a:prstGeom>
+          <a:solidFill>
+            <a:srgbClr val="EDEDED"/>
+          </a:solidFill>
+          <a:ln w="12700">
+            <a:solidFill>
+              <a:srgbClr val="1F4E79"/>
+            </a:solidFill>
+          </a:ln>
+          <a:effectLst/>
+        </p:spPr>
+        <p:style>
+          <a:lnRef idx="1">
+            <a:schemeClr val="accent1"/>
+          </a:lnRef>
+          <a:fillRef idx="3">
+            <a:schemeClr val="accent1"/>
+          </a:fillRef>
+          <a:effectRef idx="2">
+            <a:schemeClr val="accent1"/>
+          </a:effectRef>
+          <a:fontRef idx="minor">
+            <a:schemeClr val="lt1"/>
+          </a:fontRef>
+        </p:style>
+        <p:txBody>
+          <a:bodyPr wrap="square" rtlCol="0" anchor="ctr"/>
+          <a:lstStyle/>
+          <a:p>
+            <a:pPr algn="ctr" rtl="1"/>
+            <a:r>
+              <a:rPr sz="1800" b="1">
+                <a:solidFill>
+                  <a:srgbClr val="333333"/>
+                </a:solidFill>
+                <a:latin typeface="Arial"/>
+              </a:rPr>
+              <a:t>Silver — بيانات منقَّاة ومنظَّمة</a:t>
+            </a:r>
+          </a:p>
+          <a:p>
+            <a:pPr algn="ctr" rtl="0"/>
+            <a:r>
+              <a:rPr sz="1300">
+                <a:solidFill>
+                  <a:srgbClr val="666666"/>
+                </a:solidFill>
+                <a:latin typeface="Calibri"/>
+              </a:rPr>
+              <a:t>Cleansed &amp; structured data</a:t>
+            </a:r>
+          </a:p>
+        </p:txBody>
+      </p:sp>
+      <p:sp>
+        <p:nvSpPr>
+          <p:cNvPr id="5" name="Rounded Rectangle 4"/>
+          <p:cNvSpPr/>
+          <p:nvPr/>
+        </p:nvSpPr>
+        <p:spPr>
+          <a:xfrm>
+            <a:off x="2286000" y="4206240"/>
+            <a:ext cx="7589520" cy="1234440"/>
+          </a:xfrm>
+          <a:prstGeom prst="roundRect">
+            <a:avLst/>
+          </a:prstGeom>
+          <a:solidFill>
+            <a:srgbClr val="E2EFDA"/>
+          </a:solidFill>
+          <a:ln w="12700">
+            <a:solidFill>
+              <a:srgbClr val="1F4E79"/>
+            </a:solidFill>
+          </a:ln>
+          <a:effectLst/>
+        </p:spPr>
+        <p:style>
+          <a:lnRef idx="1">
+            <a:schemeClr val="accent1"/>
+          </a:lnRef>
+          <a:fillRef idx="3">
+            <a:schemeClr val="accent1"/>
+          </a:fillRef>
+          <a:effectRef idx="2">
+            <a:schemeClr val="accent1"/>
+          </a:effectRef>
+          <a:fontRef idx="minor">
+            <a:schemeClr val="lt1"/>
+          </a:fontRef>
+        </p:style>
+        <p:txBody>
+          <a:bodyPr wrap="square" rtlCol="0" anchor="ctr"/>
+          <a:lstStyle/>
+          <a:p>
+            <a:pPr algn="ctr" rtl="1"/>
+            <a:r>
+              <a:rPr sz="1800" b="1">
+                <a:solidFill>
+                  <a:srgbClr val="333333"/>
+                </a:solidFill>
+                <a:latin typeface="Arial"/>
+              </a:rPr>
+              <a:t>Gold — تجميعات جاهزة للتحليل</a:t>
+            </a:r>
+          </a:p>
+          <a:p>
+            <a:pPr algn="ctr" rtl="0"/>
+            <a:r>
+              <a:rPr sz="1300">
+                <a:solidFill>
+                  <a:srgbClr val="666666"/>
+                </a:solidFill>
+                <a:latin typeface="Calibri"/>
+              </a:rPr>
+              <a:t>Analytics-ready aggregates</a:t>
+            </a:r>
+          </a:p>
+        </p:txBody>
+      </p:sp>
+      <p:sp>
+        <p:nvSpPr>
+          <p:cNvPr id="6" name="Left Arrow 5"/>
+          <p:cNvSpPr/>
+          <p:nvPr/>
+        </p:nvSpPr>
+        <p:spPr>
+          <a:xfrm>
+            <a:off x="5897880" y="2450592"/>
+            <a:ext cx="365760" cy="274320"/>
+          </a:xfrm>
+          <a:prstGeom prst="leftArrow">
+            <a:avLst/>
+          </a:prstGeom>
+          <a:solidFill>
+            <a:srgbClr val="1F4E79"/>
+          </a:solidFill>
+          <a:ln>
+            <a:noFill/>
+          </a:ln>
+          <a:effectLst/>
+        </p:spPr>
+        <p:style>
+          <a:lnRef idx="1">
+            <a:schemeClr val="accent1"/>
+          </a:lnRef>
+          <a:fillRef idx="3">
+            <a:schemeClr val="accent1"/>
+          </a:fillRef>
+          <a:effectRef idx="2">
+            <a:schemeClr val="accent1"/>
+          </a:effectRef>
+          <a:fontRef idx="minor">
+            <a:schemeClr val="lt1"/>
+          </a:fontRef>
+        </p:style>
+        <p:txBody>
           <a:bodyPr rtlCol="0" anchor="ctr"/>
           <a:lstStyle/>
           <a:p>
             <a:pPr algn="ctr"/>
-          </a:p>
-        </p:txBody>
-      </p:sp>
-      <p:sp>
-        <p:nvSpPr>
-          <p:cNvPr id="3" name="TextBox 2"/>
-          <p:cNvSpPr txBox="1"/>
-          <p:nvPr/>
-        </p:nvSpPr>
-        <p:spPr>
-          <a:xfrm>
-            <a:off x="640080" y="182880"/>
-            <a:ext cx="10972800" cy="640080"/>
+            <a:endParaRPr/>
+          </a:p>
+        </p:txBody>
+      </p:sp>
+      <p:sp>
+        <p:nvSpPr>
+          <p:cNvPr id="7" name="Left Arrow 6"/>
+          <p:cNvSpPr/>
+          <p:nvPr/>
+        </p:nvSpPr>
+        <p:spPr>
+          <a:xfrm>
+            <a:off x="5897880" y="3959352"/>
+            <a:ext cx="365760" cy="274320"/>
+          </a:xfrm>
+          <a:prstGeom prst="leftArrow">
+            <a:avLst/>
+          </a:prstGeom>
+          <a:solidFill>
+            <a:srgbClr val="1F4E79"/>
+          </a:solidFill>
+          <a:ln>
+            <a:noFill/>
+          </a:ln>
+          <a:effectLst/>
+        </p:spPr>
+        <p:style>
+          <a:lnRef idx="1">
+            <a:schemeClr val="accent1"/>
+          </a:lnRef>
+          <a:fillRef idx="3">
+            <a:schemeClr val="accent1"/>
+          </a:fillRef>
+          <a:effectRef idx="2">
+            <a:schemeClr val="accent1"/>
+          </a:effectRef>
+          <a:fontRef idx="minor">
+            <a:schemeClr val="lt1"/>
+          </a:fontRef>
+        </p:style>
+        <p:txBody>
+          <a:bodyPr rtlCol="0" anchor="ctr"/>
+          <a:lstStyle/>
+          <a:p>
+            <a:pPr algn="ctr"/>
+            <a:endParaRPr/>
+          </a:p>
+        </p:txBody>
+      </p:sp>
+      <p:sp>
+        <p:nvSpPr>
+          <p:cNvPr id="8" name="TextBox 7"/>
+          <p:cNvSpPr txBox="1"/>
+          <p:nvPr/>
+        </p:nvSpPr>
+        <p:spPr>
+          <a:xfrm>
+            <a:off x="640080" y="6126480"/>
+            <a:ext cx="10972800" cy="548640"/>
           </a:xfrm>
           <a:prstGeom prst="rect">
             <a:avLst/>
@@ -5848,100 +7845,159 @@
           <a:p>
             <a:pPr algn="r" rtl="1"/>
             <a:r>
-              <a:rPr sz="3200" b="1">
-                <a:solidFill>
-                  <a:srgbClr val="1F3B5C"/>
+              <a:rPr sz="1400">
+                <a:solidFill>
+                  <a:srgbClr val="666666"/>
+                </a:solidFill>
+                <a:latin typeface="Arial"/>
+              </a:rPr>
+              <a:t>الحوكمة عبر تحسين الجودة بين الطبقات — إدارة مركزية.</a:t>
+            </a:r>
+          </a:p>
+          <a:p>
+            <a:pPr algn="r" rtl="0"/>
+            <a:r>
+              <a:t>Governance via quality improvement between layers — central ownership.</a:t>
+            </a:r>
+          </a:p>
+        </p:txBody>
+      </p:sp>
+      <p:sp>
+        <p:nvSpPr>
+          <p:cNvPr id="9" name="TextBox 8"/>
+          <p:cNvSpPr txBox="1"/>
+          <p:nvPr/>
+        </p:nvSpPr>
+        <p:spPr>
+          <a:xfrm>
+            <a:off x="640080" y="6400800"/>
+            <a:ext cx="8686800" cy="320040"/>
+          </a:xfrm>
+          <a:prstGeom prst="rect">
+            <a:avLst/>
+          </a:prstGeom>
+          <a:noFill/>
+        </p:spPr>
+        <p:txBody>
+          <a:bodyPr wrap="square">
+            <a:spAutoFit/>
+          </a:bodyPr>
+          <a:lstStyle/>
+          <a:p>
+            <a:pPr algn="r" rtl="1"/>
+            <a:r>
+              <a:rPr sz="1000" b="0">
+                <a:solidFill>
+                  <a:srgbClr val="666666"/>
+                </a:solidFill>
+                <a:latin typeface="Arial"/>
+              </a:rPr>
+              <a:t>Module 02 — Data &amp; AI Engineering Track  |  الوحدة الثانية</a:t>
+            </a:r>
+          </a:p>
+        </p:txBody>
+      </p:sp>
+      <p:sp>
+        <p:nvSpPr>
+          <p:cNvPr id="10" name="TextBox 9"/>
+          <p:cNvSpPr txBox="1"/>
+          <p:nvPr/>
+        </p:nvSpPr>
+        <p:spPr>
+          <a:xfrm>
+            <a:off x="9601200" y="6400800"/>
+            <a:ext cx="1920240" cy="320040"/>
+          </a:xfrm>
+          <a:prstGeom prst="rect">
+            <a:avLst/>
+          </a:prstGeom>
+          <a:noFill/>
+        </p:spPr>
+        <p:txBody>
+          <a:bodyPr wrap="square">
+            <a:spAutoFit/>
+          </a:bodyPr>
+          <a:lstStyle/>
+          <a:p>
+            <a:pPr algn="l" rtl="0"/>
+            <a:r>
+              <a:rPr sz="1000" b="0">
+                <a:solidFill>
+                  <a:srgbClr val="666666"/>
                 </a:solidFill>
                 <a:latin typeface="Calibri"/>
               </a:rPr>
-              <a:t>منتجات البيانات وعقودها / Data Products &amp; Contracts</a:t>
-            </a:r>
-          </a:p>
-        </p:txBody>
-      </p:sp>
-      <p:sp>
-        <p:nvSpPr>
-          <p:cNvPr id="4" name="TextBox 3"/>
-          <p:cNvSpPr txBox="1"/>
-          <p:nvPr/>
-        </p:nvSpPr>
-        <p:spPr>
-          <a:xfrm>
-            <a:off x="640080" y="1280160"/>
-            <a:ext cx="10972800" cy="5212080"/>
-          </a:xfrm>
-          <a:prstGeom prst="rect">
-            <a:avLst/>
-          </a:prstGeom>
-          <a:noFill/>
-        </p:spPr>
-        <p:txBody>
-          <a:bodyPr wrap="square">
-            <a:spAutoFit/>
-          </a:bodyPr>
-          <a:lstStyle/>
-          <a:p>
-            <a:pPr algn="r" rtl="1">
-              <a:spcAft>
-                <a:spcPts val="1000"/>
-              </a:spcAft>
-            </a:pPr>
-            <a:r>
-              <a:rPr sz="1900">
-                <a:solidFill>
-                  <a:srgbClr val="333333"/>
+              <a:t>07_  •  5/14</a:t>
+            </a:r>
+          </a:p>
+        </p:txBody>
+      </p:sp>
+      <p:sp>
+        <p:nvSpPr>
+          <p:cNvPr id="11" name="TextBox 10"/>
+          <p:cNvSpPr txBox="1"/>
+          <p:nvPr/>
+        </p:nvSpPr>
+        <p:spPr>
+          <a:xfrm>
+            <a:off x="640080" y="6400800"/>
+            <a:ext cx="8686800" cy="320040"/>
+          </a:xfrm>
+          <a:prstGeom prst="rect">
+            <a:avLst/>
+          </a:prstGeom>
+          <a:noFill/>
+        </p:spPr>
+        <p:txBody>
+          <a:bodyPr wrap="square">
+            <a:spAutoFit/>
+          </a:bodyPr>
+          <a:lstStyle/>
+          <a:p>
+            <a:pPr algn="r" rtl="1"/>
+            <a:r>
+              <a:rPr sz="1000" b="0">
+                <a:solidFill>
+                  <a:srgbClr val="666666"/>
+                </a:solidFill>
+                <a:latin typeface="Arial"/>
+              </a:rPr>
+              <a:t>Module 02 — Data &amp; AI Engineering Track  |  الوحدة الثانية</a:t>
+            </a:r>
+          </a:p>
+        </p:txBody>
+      </p:sp>
+      <p:sp>
+        <p:nvSpPr>
+          <p:cNvPr id="12" name="TextBox 11"/>
+          <p:cNvSpPr txBox="1"/>
+          <p:nvPr/>
+        </p:nvSpPr>
+        <p:spPr>
+          <a:xfrm>
+            <a:off x="9601200" y="6400800"/>
+            <a:ext cx="1920240" cy="320040"/>
+          </a:xfrm>
+          <a:prstGeom prst="rect">
+            <a:avLst/>
+          </a:prstGeom>
+          <a:noFill/>
+        </p:spPr>
+        <p:txBody>
+          <a:bodyPr wrap="square">
+            <a:spAutoFit/>
+          </a:bodyPr>
+          <a:lstStyle/>
+          <a:p>
+            <a:pPr algn="l" rtl="0"/>
+            <a:r>
+              <a:rPr sz="1000" b="0">
+                <a:solidFill>
+                  <a:srgbClr val="666666"/>
                 </a:solidFill>
                 <a:latin typeface="Calibri"/>
               </a:rPr>
-              <a:t>• منتج البيانات: مجموعة بيانات موثوقة موثّقة قابلة للاكتشاف تُدار كمنتج حقيقي.</a:t>
-            </a:r>
-          </a:p>
-          <a:p>
-            <a:pPr algn="r" rtl="0">
-              <a:spcAft>
-                <a:spcPts val="1000"/>
-              </a:spcAft>
-            </a:pPr>
-            <a:r>
-              <a:rPr sz="1900">
-                <a:solidFill>
-                  <a:srgbClr val="666666"/>
-                </a:solidFill>
-                <a:latin typeface="Calibri"/>
-              </a:rPr>
-              <a:t>   Data product: a trusted, documented, discoverable dataset managed like a product.</a:t>
-            </a:r>
-          </a:p>
-          <a:p>
-            <a:pPr algn="r" rtl="1">
-              <a:spcAft>
-                <a:spcPts val="1000"/>
-              </a:spcAft>
-            </a:pPr>
-            <a:r>
-              <a:rPr sz="1900">
-                <a:solidFill>
-                  <a:srgbClr val="333333"/>
-                </a:solidFill>
-                <a:latin typeface="Calibri"/>
-              </a:rPr>
-              <a:t>• عقد البيانات: المخطط والأمان ومستوى الخدمة SLA — وحدة التسليم الحديثة.</a:t>
-            </a:r>
-          </a:p>
-          <a:p>
-            <a:pPr algn="r" rtl="0">
-              <a:spcAft>
-                <a:spcPts val="1000"/>
-              </a:spcAft>
-            </a:pPr>
-            <a:r>
-              <a:rPr sz="1900">
-                <a:solidFill>
-                  <a:srgbClr val="666666"/>
-                </a:solidFill>
-                <a:latin typeface="Calibri"/>
-              </a:rPr>
-              <a:t>   Data contract: schema + security + SLA — the modern delivery unit.</a:t>
+              <a:t>07_  •  5/14</a:t>
             </a:r>
           </a:p>
         </p:txBody>
@@ -5955,7 +8011,7 @@
 </file>
 
 <file path=ppt/slides/slide6.xml><?xml version="1.0" encoding="utf-8"?>
-<p:sld xmlns:a="http://schemas.openxmlformats.org/drawingml/2006/main" xmlns:p="http://schemas.openxmlformats.org/presentationml/2006/main" xmlns:r="http://schemas.openxmlformats.org/officeDocument/2006/relationships">
+<p:sld xmlns:a="http://schemas.openxmlformats.org/drawingml/2006/main" xmlns:r="http://schemas.openxmlformats.org/officeDocument/2006/relationships" xmlns:p="http://schemas.openxmlformats.org/presentationml/2006/main">
   <p:cSld>
     <p:bg>
       <p:bgPr>
@@ -5971,60 +8027,32 @@
         <p:cNvGrpSpPr/>
         <p:nvPr/>
       </p:nvGrpSpPr>
-      <p:grpSpPr/>
-      <p:sp>
-        <p:nvSpPr>
-          <p:cNvPr id="2" name="TextBox 1"/>
-          <p:cNvSpPr txBox="1"/>
-          <p:nvPr/>
-        </p:nvSpPr>
-        <p:spPr>
-          <a:xfrm>
-            <a:off x="640080" y="137160"/>
-            <a:ext cx="10972800" cy="640080"/>
-          </a:xfrm>
-          <a:prstGeom prst="rect">
-            <a:avLst/>
-          </a:prstGeom>
-          <a:noFill/>
-        </p:spPr>
-        <p:txBody>
-          <a:bodyPr wrap="none">
-            <a:spAutoFit/>
-          </a:bodyPr>
-          <a:lstStyle/>
-          <a:p>
-            <a:pPr algn="r" rtl="1"/>
-            <a:r>
-              <a:rPr sz="3000" b="1">
-                <a:solidFill>
-                  <a:srgbClr val="1F3B5C"/>
-                </a:solidFill>
-                <a:latin typeface="Calibri"/>
-              </a:rPr>
-              <a:t>منتج البيانات وعقد البيانات / Data Product &amp; Contract</a:t>
-            </a:r>
-          </a:p>
-        </p:txBody>
-      </p:sp>
-      <p:sp>
-        <p:nvSpPr>
-          <p:cNvPr id="3" name="Rounded Rectangle 2"/>
+      <p:grpSpPr>
+        <a:xfrm>
+          <a:off x="0" y="0"/>
+          <a:ext cx="0" cy="0"/>
+          <a:chOff x="0" y="0"/>
+          <a:chExt cx="0" cy="0"/>
+        </a:xfrm>
+      </p:grpSpPr>
+      <p:sp>
+        <p:nvSpPr>
+          <p:cNvPr id="2" name="Rectangle 1"/>
           <p:cNvSpPr/>
           <p:nvPr/>
         </p:nvSpPr>
         <p:spPr>
           <a:xfrm>
-            <a:off x="822960" y="1645920"/>
-            <a:ext cx="4206240" cy="3108960"/>
-          </a:xfrm>
-          <a:prstGeom prst="roundRect">
+            <a:off x="0" y="0"/>
+            <a:ext cx="12191695" cy="1005840"/>
+          </a:xfrm>
+          <a:prstGeom prst="rect">
             <a:avLst/>
           </a:prstGeom>
           <a:solidFill>
-            <a:srgbClr val="DCE6F1"/>
+            <a:srgbClr val="FFFFFF"/>
           </a:solidFill>
-          <a:ln w="12700">
+          <a:ln w="25400">
             <a:solidFill>
               <a:srgbClr val="1F4E79"/>
             </a:solidFill>
@@ -6046,347 +8074,354 @@
           </a:fontRef>
         </p:style>
         <p:txBody>
-          <a:bodyPr rtlCol="0" anchor="ctr" wrap="square"/>
-          <a:lstStyle/>
-          <a:p>
-            <a:pPr algn="ctr" rtl="1"/>
-            <a:r>
-              <a:rPr sz="2000" b="1">
+          <a:bodyPr rtlCol="0" anchor="ctr"/>
+          <a:lstStyle/>
+          <a:p>
+            <a:pPr algn="ctr"/>
+            <a:endParaRPr/>
+          </a:p>
+        </p:txBody>
+      </p:sp>
+      <p:sp>
+        <p:nvSpPr>
+          <p:cNvPr id="3" name="TextBox 2"/>
+          <p:cNvSpPr txBox="1"/>
+          <p:nvPr/>
+        </p:nvSpPr>
+        <p:spPr>
+          <a:xfrm>
+            <a:off x="640080" y="182880"/>
+            <a:ext cx="10972800" cy="640080"/>
+          </a:xfrm>
+          <a:prstGeom prst="rect">
+            <a:avLst/>
+          </a:prstGeom>
+          <a:noFill/>
+        </p:spPr>
+        <p:txBody>
+          <a:bodyPr wrap="square">
+            <a:spAutoFit/>
+          </a:bodyPr>
+          <a:lstStyle/>
+          <a:p>
+            <a:pPr algn="r" rtl="1"/>
+            <a:r>
+              <a:rPr sz="3200" b="1">
+                <a:solidFill>
+                  <a:srgbClr val="1F3B5C"/>
+                </a:solidFill>
+                <a:latin typeface="Arial"/>
+              </a:rPr>
+              <a:t>منتجات البيانات وعقودها / Data Products &amp; Contracts</a:t>
+            </a:r>
+          </a:p>
+        </p:txBody>
+      </p:sp>
+      <p:sp>
+        <p:nvSpPr>
+          <p:cNvPr id="4" name="TextBox 3"/>
+          <p:cNvSpPr txBox="1"/>
+          <p:nvPr/>
+        </p:nvSpPr>
+        <p:spPr>
+          <a:xfrm>
+            <a:off x="640080" y="1280160"/>
+            <a:ext cx="10972800" cy="5212080"/>
+          </a:xfrm>
+          <a:prstGeom prst="rect">
+            <a:avLst/>
+          </a:prstGeom>
+          <a:noFill/>
+        </p:spPr>
+        <p:txBody>
+          <a:bodyPr wrap="square">
+            <a:spAutoFit/>
+          </a:bodyPr>
+          <a:lstStyle/>
+          <a:p>
+            <a:pPr algn="r" rtl="1">
+              <a:spcBef>
+                <a:spcPts val="200"/>
+              </a:spcBef>
+              <a:spcAft>
+                <a:spcPts val="1000"/>
+              </a:spcAft>
+            </a:pPr>
+            <a:r>
+              <a:rPr sz="1900">
                 <a:solidFill>
                   <a:srgbClr val="333333"/>
                 </a:solidFill>
+                <a:latin typeface="Arial"/>
+              </a:rPr>
+              <a:t>• منتج البيانات: مجموعة بيانات موثوقة موثّقة قابلة للاكتشاف تُدار كمنتج حقيقي.</a:t>
+            </a:r>
+          </a:p>
+          <a:p>
+            <a:pPr algn="l" rtl="0">
+              <a:spcBef>
+                <a:spcPts val="200"/>
+              </a:spcBef>
+              <a:spcAft>
+                <a:spcPts val="1000"/>
+              </a:spcAft>
+            </a:pPr>
+            <a:r>
+              <a:rPr sz="1600">
+                <a:solidFill>
+                  <a:srgbClr val="666666"/>
+                </a:solidFill>
                 <a:latin typeface="Calibri"/>
               </a:rPr>
-              <a:t>منتج البيانات</a:t>
-            </a:r>
-          </a:p>
-          <a:p>
-            <a:pPr algn="ctr" rtl="0"/>
-            <a:r>
-              <a:rPr sz="1400">
+              <a:t>• Data product: a trusted, documented, discoverable dataset managed like a product.</a:t>
+            </a:r>
+          </a:p>
+          <a:p>
+            <a:pPr algn="r" rtl="1">
+              <a:spcBef>
+                <a:spcPts val="200"/>
+              </a:spcBef>
+              <a:spcAft>
+                <a:spcPts val="1000"/>
+              </a:spcAft>
+            </a:pPr>
+            <a:r>
+              <a:rPr sz="1900">
+                <a:solidFill>
+                  <a:srgbClr val="333333"/>
+                </a:solidFill>
+                <a:latin typeface="Arial"/>
+              </a:rPr>
+              <a:t>• عقد البيانات: المخطط والأمان ومستوى الخدمة SLA — وحدة التسليم الحديثة.</a:t>
+            </a:r>
+          </a:p>
+          <a:p>
+            <a:pPr algn="l" rtl="0">
+              <a:spcBef>
+                <a:spcPts val="200"/>
+              </a:spcBef>
+              <a:spcAft>
+                <a:spcPts val="1000"/>
+              </a:spcAft>
+            </a:pPr>
+            <a:r>
+              <a:rPr sz="1600">
                 <a:solidFill>
                   <a:srgbClr val="666666"/>
                 </a:solidFill>
                 <a:latin typeface="Calibri"/>
               </a:rPr>
-              <a:t>Data Product — موثوق • موثّق • قابل للاكتشاف</a:t>
-            </a:r>
-          </a:p>
-        </p:txBody>
-      </p:sp>
-      <p:sp>
-        <p:nvSpPr>
-          <p:cNvPr id="4" name="Rounded Rectangle 3"/>
-          <p:cNvSpPr/>
-          <p:nvPr/>
-        </p:nvSpPr>
-        <p:spPr>
-          <a:xfrm>
-            <a:off x="7223760" y="1645920"/>
-            <a:ext cx="4206240" cy="914400"/>
-          </a:xfrm>
-          <a:prstGeom prst="roundRect">
-            <a:avLst/>
-          </a:prstGeom>
-          <a:solidFill>
-            <a:srgbClr val="E2EFDA"/>
-          </a:solidFill>
-          <a:ln w="12700">
-            <a:solidFill>
-              <a:srgbClr val="1F4E79"/>
-            </a:solidFill>
-          </a:ln>
-          <a:effectLst/>
-        </p:spPr>
-        <p:style>
-          <a:lnRef idx="1">
-            <a:schemeClr val="accent1"/>
-          </a:lnRef>
-          <a:fillRef idx="3">
-            <a:schemeClr val="accent1"/>
-          </a:fillRef>
-          <a:effectRef idx="2">
-            <a:schemeClr val="accent1"/>
-          </a:effectRef>
-          <a:fontRef idx="minor">
-            <a:schemeClr val="lt1"/>
-          </a:fontRef>
-        </p:style>
-        <p:txBody>
-          <a:bodyPr rtlCol="0" anchor="ctr" wrap="square"/>
-          <a:lstStyle/>
-          <a:p>
-            <a:pPr algn="ctr" rtl="1"/>
-            <a:r>
-              <a:rPr sz="2000" b="1">
-                <a:solidFill>
-                  <a:srgbClr val="333333"/>
+              <a:t>• Data contract: schema + security + SLA — the modern delivery unit.</a:t>
+            </a:r>
+          </a:p>
+        </p:txBody>
+      </p:sp>
+      <p:sp>
+        <p:nvSpPr>
+          <p:cNvPr id="5" name="TextBox 4"/>
+          <p:cNvSpPr txBox="1"/>
+          <p:nvPr/>
+        </p:nvSpPr>
+        <p:spPr>
+          <a:xfrm>
+            <a:off x="640080" y="6400800"/>
+            <a:ext cx="8686800" cy="320040"/>
+          </a:xfrm>
+          <a:prstGeom prst="rect">
+            <a:avLst/>
+          </a:prstGeom>
+          <a:noFill/>
+        </p:spPr>
+        <p:txBody>
+          <a:bodyPr wrap="square">
+            <a:spAutoFit/>
+          </a:bodyPr>
+          <a:lstStyle/>
+          <a:p>
+            <a:pPr algn="r" rtl="1"/>
+            <a:r>
+              <a:rPr sz="1000" b="0">
+                <a:solidFill>
+                  <a:srgbClr val="666666"/>
+                </a:solidFill>
+                <a:latin typeface="Arial"/>
+              </a:rPr>
+              <a:t>Module 02 — Data &amp; AI Engineering Track  |  الوحدة الثانية</a:t>
+            </a:r>
+          </a:p>
+        </p:txBody>
+      </p:sp>
+      <p:sp>
+        <p:nvSpPr>
+          <p:cNvPr id="6" name="TextBox 5"/>
+          <p:cNvSpPr txBox="1"/>
+          <p:nvPr/>
+        </p:nvSpPr>
+        <p:spPr>
+          <a:xfrm>
+            <a:off x="9601200" y="6400800"/>
+            <a:ext cx="1920240" cy="320040"/>
+          </a:xfrm>
+          <a:prstGeom prst="rect">
+            <a:avLst/>
+          </a:prstGeom>
+          <a:noFill/>
+        </p:spPr>
+        <p:txBody>
+          <a:bodyPr wrap="square">
+            <a:spAutoFit/>
+          </a:bodyPr>
+          <a:lstStyle/>
+          <a:p>
+            <a:pPr algn="l" rtl="0"/>
+            <a:r>
+              <a:rPr sz="1000" b="0">
+                <a:solidFill>
+                  <a:srgbClr val="666666"/>
                 </a:solidFill>
                 <a:latin typeface="Calibri"/>
               </a:rPr>
-              <a:t>عقد البيانات</a:t>
-            </a:r>
-          </a:p>
-          <a:p>
-            <a:pPr algn="ctr" rtl="0"/>
-            <a:r>
-              <a:rPr sz="1400">
+              <a:t>V07  •  5/14</a:t>
+            </a:r>
+          </a:p>
+        </p:txBody>
+      </p:sp>
+      <p:sp>
+        <p:nvSpPr>
+          <p:cNvPr id="7" name="TextBox 6"/>
+          <p:cNvSpPr txBox="1"/>
+          <p:nvPr/>
+        </p:nvSpPr>
+        <p:spPr>
+          <a:xfrm>
+            <a:off x="640080" y="6400800"/>
+            <a:ext cx="8686800" cy="320040"/>
+          </a:xfrm>
+          <a:prstGeom prst="rect">
+            <a:avLst/>
+          </a:prstGeom>
+          <a:noFill/>
+        </p:spPr>
+        <p:txBody>
+          <a:bodyPr wrap="square">
+            <a:spAutoFit/>
+          </a:bodyPr>
+          <a:lstStyle/>
+          <a:p>
+            <a:pPr algn="r" rtl="1"/>
+            <a:r>
+              <a:rPr sz="1000" b="0">
+                <a:solidFill>
+                  <a:srgbClr val="666666"/>
+                </a:solidFill>
+                <a:latin typeface="Arial"/>
+              </a:rPr>
+              <a:t>Module 02 — Data &amp; AI Engineering Track  |  الوحدة الثانية</a:t>
+            </a:r>
+          </a:p>
+        </p:txBody>
+      </p:sp>
+      <p:sp>
+        <p:nvSpPr>
+          <p:cNvPr id="8" name="TextBox 7"/>
+          <p:cNvSpPr txBox="1"/>
+          <p:nvPr/>
+        </p:nvSpPr>
+        <p:spPr>
+          <a:xfrm>
+            <a:off x="9601200" y="6400800"/>
+            <a:ext cx="1920240" cy="320040"/>
+          </a:xfrm>
+          <a:prstGeom prst="rect">
+            <a:avLst/>
+          </a:prstGeom>
+          <a:noFill/>
+        </p:spPr>
+        <p:txBody>
+          <a:bodyPr wrap="square">
+            <a:spAutoFit/>
+          </a:bodyPr>
+          <a:lstStyle/>
+          <a:p>
+            <a:pPr algn="l" rtl="0"/>
+            <a:r>
+              <a:rPr sz="1000" b="0">
                 <a:solidFill>
                   <a:srgbClr val="666666"/>
                 </a:solidFill>
                 <a:latin typeface="Calibri"/>
               </a:rPr>
-              <a:t>Data Contract</a:t>
-            </a:r>
-          </a:p>
-        </p:txBody>
-      </p:sp>
-      <p:sp>
-        <p:nvSpPr>
-          <p:cNvPr id="5" name="Rounded Rectangle 4"/>
-          <p:cNvSpPr/>
-          <p:nvPr/>
-        </p:nvSpPr>
-        <p:spPr>
-          <a:xfrm>
-            <a:off x="7589520" y="2743200"/>
-            <a:ext cx="3474720" cy="594360"/>
-          </a:xfrm>
-          <a:prstGeom prst="roundRect">
-            <a:avLst/>
-          </a:prstGeom>
-          <a:solidFill>
-            <a:srgbClr val="EDEDED"/>
-          </a:solidFill>
-          <a:ln w="12700">
-            <a:solidFill>
-              <a:srgbClr val="1F4E79"/>
-            </a:solidFill>
-          </a:ln>
-          <a:effectLst/>
-        </p:spPr>
-        <p:style>
-          <a:lnRef idx="1">
-            <a:schemeClr val="accent1"/>
-          </a:lnRef>
-          <a:fillRef idx="3">
-            <a:schemeClr val="accent1"/>
-          </a:fillRef>
-          <a:effectRef idx="2">
-            <a:schemeClr val="accent1"/>
-          </a:effectRef>
-          <a:fontRef idx="minor">
-            <a:schemeClr val="lt1"/>
-          </a:fontRef>
-        </p:style>
-        <p:txBody>
-          <a:bodyPr rtlCol="0" anchor="ctr" wrap="square"/>
-          <a:lstStyle/>
-          <a:p>
-            <a:pPr algn="ctr" rtl="1"/>
-            <a:r>
-              <a:rPr sz="1400" b="1">
-                <a:solidFill>
-                  <a:srgbClr val="333333"/>
+              <a:t>07_  •  6/14</a:t>
+            </a:r>
+          </a:p>
+        </p:txBody>
+      </p:sp>
+      <p:sp>
+        <p:nvSpPr>
+          <p:cNvPr id="9" name="TextBox 8"/>
+          <p:cNvSpPr txBox="1"/>
+          <p:nvPr/>
+        </p:nvSpPr>
+        <p:spPr>
+          <a:xfrm>
+            <a:off x="640080" y="6400800"/>
+            <a:ext cx="8686800" cy="320040"/>
+          </a:xfrm>
+          <a:prstGeom prst="rect">
+            <a:avLst/>
+          </a:prstGeom>
+          <a:noFill/>
+        </p:spPr>
+        <p:txBody>
+          <a:bodyPr wrap="square">
+            <a:spAutoFit/>
+          </a:bodyPr>
+          <a:lstStyle/>
+          <a:p>
+            <a:pPr algn="r" rtl="1"/>
+            <a:r>
+              <a:rPr sz="1000" b="0">
+                <a:solidFill>
+                  <a:srgbClr val="666666"/>
+                </a:solidFill>
+                <a:latin typeface="Arial"/>
+              </a:rPr>
+              <a:t>Module 02 — Data &amp; AI Engineering Track  |  الوحدة الثانية</a:t>
+            </a:r>
+          </a:p>
+        </p:txBody>
+      </p:sp>
+      <p:sp>
+        <p:nvSpPr>
+          <p:cNvPr id="10" name="TextBox 9"/>
+          <p:cNvSpPr txBox="1"/>
+          <p:nvPr/>
+        </p:nvSpPr>
+        <p:spPr>
+          <a:xfrm>
+            <a:off x="9601200" y="6400800"/>
+            <a:ext cx="1920240" cy="320040"/>
+          </a:xfrm>
+          <a:prstGeom prst="rect">
+            <a:avLst/>
+          </a:prstGeom>
+          <a:noFill/>
+        </p:spPr>
+        <p:txBody>
+          <a:bodyPr wrap="square">
+            <a:spAutoFit/>
+          </a:bodyPr>
+          <a:lstStyle/>
+          <a:p>
+            <a:pPr algn="l" rtl="0"/>
+            <a:r>
+              <a:rPr sz="1000" b="0">
+                <a:solidFill>
+                  <a:srgbClr val="666666"/>
                 </a:solidFill>
                 <a:latin typeface="Calibri"/>
               </a:rPr>
-              <a:t>المخطط / Schema</a:t>
-            </a:r>
-          </a:p>
-        </p:txBody>
-      </p:sp>
-      <p:sp>
-        <p:nvSpPr>
-          <p:cNvPr id="6" name="Rounded Rectangle 5"/>
-          <p:cNvSpPr/>
-          <p:nvPr/>
-        </p:nvSpPr>
-        <p:spPr>
-          <a:xfrm>
-            <a:off x="7589520" y="668904631200"/>
-            <a:ext cx="3474720" cy="594360"/>
-          </a:xfrm>
-          <a:prstGeom prst="roundRect">
-            <a:avLst/>
-          </a:prstGeom>
-          <a:solidFill>
-            <a:srgbClr val="EDEDED"/>
-          </a:solidFill>
-          <a:ln w="12700">
-            <a:solidFill>
-              <a:srgbClr val="1F4E79"/>
-            </a:solidFill>
-          </a:ln>
-          <a:effectLst/>
-        </p:spPr>
-        <p:style>
-          <a:lnRef idx="1">
-            <a:schemeClr val="accent1"/>
-          </a:lnRef>
-          <a:fillRef idx="3">
-            <a:schemeClr val="accent1"/>
-          </a:fillRef>
-          <a:effectRef idx="2">
-            <a:schemeClr val="accent1"/>
-          </a:effectRef>
-          <a:fontRef idx="minor">
-            <a:schemeClr val="lt1"/>
-          </a:fontRef>
-        </p:style>
-        <p:txBody>
-          <a:bodyPr rtlCol="0" anchor="ctr" wrap="square"/>
-          <a:lstStyle/>
-          <a:p>
-            <a:pPr algn="ctr" rtl="1"/>
-            <a:r>
-              <a:rPr sz="1400" b="1">
-                <a:solidFill>
-                  <a:srgbClr val="333333"/>
-                </a:solidFill>
-                <a:latin typeface="Calibri"/>
-              </a:rPr>
-              <a:t>الأمان / Security</a:t>
-            </a:r>
-          </a:p>
-        </p:txBody>
-      </p:sp>
-      <p:sp>
-        <p:nvSpPr>
-          <p:cNvPr id="7" name="Rounded Rectangle 6"/>
-          <p:cNvSpPr/>
-          <p:nvPr/>
-        </p:nvSpPr>
-        <p:spPr>
-          <a:xfrm>
-            <a:off x="7589520" y="1337806519200"/>
-            <a:ext cx="3474720" cy="594360"/>
-          </a:xfrm>
-          <a:prstGeom prst="roundRect">
-            <a:avLst/>
-          </a:prstGeom>
-          <a:solidFill>
-            <a:srgbClr val="EDEDED"/>
-          </a:solidFill>
-          <a:ln w="12700">
-            <a:solidFill>
-              <a:srgbClr val="1F4E79"/>
-            </a:solidFill>
-          </a:ln>
-          <a:effectLst/>
-        </p:spPr>
-        <p:style>
-          <a:lnRef idx="1">
-            <a:schemeClr val="accent1"/>
-          </a:lnRef>
-          <a:fillRef idx="3">
-            <a:schemeClr val="accent1"/>
-          </a:fillRef>
-          <a:effectRef idx="2">
-            <a:schemeClr val="accent1"/>
-          </a:effectRef>
-          <a:fontRef idx="minor">
-            <a:schemeClr val="lt1"/>
-          </a:fontRef>
-        </p:style>
-        <p:txBody>
-          <a:bodyPr rtlCol="0" anchor="ctr" wrap="square"/>
-          <a:lstStyle/>
-          <a:p>
-            <a:pPr algn="ctr" rtl="1"/>
-            <a:r>
-              <a:rPr sz="1400" b="1">
-                <a:solidFill>
-                  <a:srgbClr val="333333"/>
-                </a:solidFill>
-                <a:latin typeface="Calibri"/>
-              </a:rPr>
-              <a:t>مستوى الخدمة / SLA</a:t>
-            </a:r>
-          </a:p>
-        </p:txBody>
-      </p:sp>
-      <p:sp>
-        <p:nvSpPr>
-          <p:cNvPr id="8" name="Right Arrow 7"/>
-          <p:cNvSpPr/>
-          <p:nvPr/>
-        </p:nvSpPr>
-        <p:spPr>
-          <a:xfrm>
-            <a:off x="5257800" y="3017520"/>
-            <a:ext cx="1737360" cy="365760"/>
-          </a:xfrm>
-          <a:prstGeom prst="rightArrow">
-            <a:avLst/>
-          </a:prstGeom>
-          <a:solidFill>
-            <a:srgbClr val="1F4E79"/>
-          </a:solidFill>
-          <a:ln>
-            <a:noFill/>
-          </a:ln>
-          <a:effectLst/>
-        </p:spPr>
-        <p:style>
-          <a:lnRef idx="1">
-            <a:schemeClr val="accent1"/>
-          </a:lnRef>
-          <a:fillRef idx="3">
-            <a:schemeClr val="accent1"/>
-          </a:fillRef>
-          <a:effectRef idx="2">
-            <a:schemeClr val="accent1"/>
-          </a:effectRef>
-          <a:fontRef idx="minor">
-            <a:schemeClr val="lt1"/>
-          </a:fontRef>
-        </p:style>
-        <p:txBody>
-          <a:bodyPr rtlCol="0" anchor="ctr"/>
-          <a:lstStyle/>
-          <a:p>
-            <a:pPr algn="ctr"/>
-          </a:p>
-        </p:txBody>
-      </p:sp>
-      <p:sp>
-        <p:nvSpPr>
-          <p:cNvPr id="9" name="TextBox 8"/>
-          <p:cNvSpPr txBox="1"/>
-          <p:nvPr/>
-        </p:nvSpPr>
-        <p:spPr>
-          <a:xfrm>
-            <a:off x="640080" y="6126480"/>
-            <a:ext cx="10972800" cy="548640"/>
-          </a:xfrm>
-          <a:prstGeom prst="rect">
-            <a:avLst/>
-          </a:prstGeom>
-          <a:noFill/>
-        </p:spPr>
-        <p:txBody>
-          <a:bodyPr wrap="square">
-            <a:spAutoFit/>
-          </a:bodyPr>
-          <a:lstStyle/>
-          <a:p>
-            <a:pPr algn="r" rtl="1"/>
-            <a:r>
-              <a:rPr sz="1400">
-                <a:solidFill>
-                  <a:srgbClr val="666666"/>
-                </a:solidFill>
-                <a:latin typeface="Calibri"/>
-              </a:rPr>
-              <a:t>وحدة التسليم الحديثة في هندسة البيانات.</a:t>
-            </a:r>
-          </a:p>
-          <a:p>
-            <a:pPr algn="r" rtl="0"/>
-            <a:r>
-              <a:t>The modern delivery unit in data engineering.</a:t>
+              <a:t>07_  •  6/14</a:t>
             </a:r>
           </a:p>
         </p:txBody>
@@ -6400,7 +8435,7 @@
 </file>
 
 <file path=ppt/slides/slide7.xml><?xml version="1.0" encoding="utf-8"?>
-<p:sld xmlns:a="http://schemas.openxmlformats.org/drawingml/2006/main" xmlns:p="http://schemas.openxmlformats.org/presentationml/2006/main" xmlns:r="http://schemas.openxmlformats.org/officeDocument/2006/relationships">
+<p:sld xmlns:a="http://schemas.openxmlformats.org/drawingml/2006/main" xmlns:r="http://schemas.openxmlformats.org/officeDocument/2006/relationships" xmlns:p="http://schemas.openxmlformats.org/presentationml/2006/main">
   <p:cSld>
     <p:bg>
       <p:bgPr>
@@ -6416,25 +8451,67 @@
         <p:cNvGrpSpPr/>
         <p:nvPr/>
       </p:nvGrpSpPr>
-      <p:grpSpPr/>
-      <p:sp>
-        <p:nvSpPr>
-          <p:cNvPr id="2" name="Rectangle 1"/>
+      <p:grpSpPr>
+        <a:xfrm>
+          <a:off x="0" y="0"/>
+          <a:ext cx="0" cy="0"/>
+          <a:chOff x="0" y="0"/>
+          <a:chExt cx="0" cy="0"/>
+        </a:xfrm>
+      </p:grpSpPr>
+      <p:sp>
+        <p:nvSpPr>
+          <p:cNvPr id="2" name="TextBox 1"/>
+          <p:cNvSpPr txBox="1"/>
+          <p:nvPr/>
+        </p:nvSpPr>
+        <p:spPr>
+          <a:xfrm>
+            <a:off x="640080" y="137160"/>
+            <a:ext cx="10972800" cy="640080"/>
+          </a:xfrm>
+          <a:prstGeom prst="rect">
+            <a:avLst/>
+          </a:prstGeom>
+          <a:noFill/>
+        </p:spPr>
+        <p:txBody>
+          <a:bodyPr wrap="none">
+            <a:spAutoFit/>
+          </a:bodyPr>
+          <a:lstStyle/>
+          <a:p>
+            <a:pPr algn="r" rtl="1"/>
+            <a:r>
+              <a:rPr sz="3000" b="1">
+                <a:solidFill>
+                  <a:srgbClr val="1F3B5C"/>
+                </a:solidFill>
+                <a:latin typeface="Arial"/>
+              </a:rPr>
+              <a:t>منتج البيانات وعقد البيانات / Data Product &amp; Contract</a:t>
+            </a:r>
+          </a:p>
+        </p:txBody>
+      </p:sp>
+      <p:sp>
+        <p:nvSpPr>
+          <p:cNvPr id="3" name="Rounded Rectangle 2"/>
           <p:cNvSpPr/>
           <p:nvPr/>
         </p:nvSpPr>
         <p:spPr>
           <a:xfrm>
-            <a:off x="0" y="0"/>
-            <a:ext cx="12191695" cy="1005840"/>
-          </a:xfrm>
-          <a:prstGeom prst="rect">
+            <a:off x="822960" y="1645920"/>
+            <a:ext cx="4206240" cy="3108960"/>
+          </a:xfrm>
+          <a:prstGeom prst="roundRect">
             <a:avLst/>
           </a:prstGeom>
           <a:solidFill>
-            <a:srgbClr val="FFFFFF"/>
+            <a:srgbClr val="DCE6F1"/>
           </a:solidFill>
-          <a:ln w="25400">
+          <a:ln w="12700">
             <a:solidFill>
               <a:srgbClr val="1F4E79"/>
             </a:solidFill>
@@ -6456,23 +8533,321 @@
           </a:fontRef>
         </p:style>
         <p:txBody>
+          <a:bodyPr wrap="square" rtlCol="0" anchor="ctr"/>
+          <a:lstStyle/>
+          <a:p>
+            <a:pPr algn="ctr" rtl="1"/>
+            <a:r>
+              <a:rPr sz="2000" b="1">
+                <a:solidFill>
+                  <a:srgbClr val="333333"/>
+                </a:solidFill>
+                <a:latin typeface="Arial"/>
+              </a:rPr>
+              <a:t>منتج البيانات</a:t>
+            </a:r>
+          </a:p>
+          <a:p>
+            <a:pPr algn="ctr" rtl="0"/>
+            <a:r>
+              <a:rPr sz="1400">
+                <a:solidFill>
+                  <a:srgbClr val="666666"/>
+                </a:solidFill>
+                <a:latin typeface="Calibri"/>
+              </a:rPr>
+              <a:t>Data Product — موثوق • موثّق • قابل للاكتشاف</a:t>
+            </a:r>
+          </a:p>
+        </p:txBody>
+      </p:sp>
+      <p:sp>
+        <p:nvSpPr>
+          <p:cNvPr id="4" name="Rounded Rectangle 3"/>
+          <p:cNvSpPr/>
+          <p:nvPr/>
+        </p:nvSpPr>
+        <p:spPr>
+          <a:xfrm>
+            <a:off x="7223760" y="1645920"/>
+            <a:ext cx="4206240" cy="914400"/>
+          </a:xfrm>
+          <a:prstGeom prst="roundRect">
+            <a:avLst/>
+          </a:prstGeom>
+          <a:solidFill>
+            <a:srgbClr val="E2EFDA"/>
+          </a:solidFill>
+          <a:ln w="12700">
+            <a:solidFill>
+              <a:srgbClr val="1F4E79"/>
+            </a:solidFill>
+          </a:ln>
+          <a:effectLst/>
+        </p:spPr>
+        <p:style>
+          <a:lnRef idx="1">
+            <a:schemeClr val="accent1"/>
+          </a:lnRef>
+          <a:fillRef idx="3">
+            <a:schemeClr val="accent1"/>
+          </a:fillRef>
+          <a:effectRef idx="2">
+            <a:schemeClr val="accent1"/>
+          </a:effectRef>
+          <a:fontRef idx="minor">
+            <a:schemeClr val="lt1"/>
+          </a:fontRef>
+        </p:style>
+        <p:txBody>
+          <a:bodyPr wrap="square" rtlCol="0" anchor="ctr"/>
+          <a:lstStyle/>
+          <a:p>
+            <a:pPr algn="ctr" rtl="1"/>
+            <a:r>
+              <a:rPr sz="2000" b="1">
+                <a:solidFill>
+                  <a:srgbClr val="333333"/>
+                </a:solidFill>
+                <a:latin typeface="Arial"/>
+              </a:rPr>
+              <a:t>عقد البيانات</a:t>
+            </a:r>
+          </a:p>
+          <a:p>
+            <a:pPr algn="ctr" rtl="0"/>
+            <a:r>
+              <a:rPr sz="1400">
+                <a:solidFill>
+                  <a:srgbClr val="666666"/>
+                </a:solidFill>
+                <a:latin typeface="Calibri"/>
+              </a:rPr>
+              <a:t>Data Contract</a:t>
+            </a:r>
+          </a:p>
+        </p:txBody>
+      </p:sp>
+      <p:sp>
+        <p:nvSpPr>
+          <p:cNvPr id="5" name="Rounded Rectangle 4"/>
+          <p:cNvSpPr/>
+          <p:nvPr/>
+        </p:nvSpPr>
+        <p:spPr>
+          <a:xfrm>
+            <a:off x="7589520" y="2743200"/>
+            <a:ext cx="3474720" cy="594360"/>
+          </a:xfrm>
+          <a:prstGeom prst="roundRect">
+            <a:avLst/>
+          </a:prstGeom>
+          <a:solidFill>
+            <a:srgbClr val="EDEDED"/>
+          </a:solidFill>
+          <a:ln w="12700">
+            <a:solidFill>
+              <a:srgbClr val="1F4E79"/>
+            </a:solidFill>
+          </a:ln>
+          <a:effectLst/>
+        </p:spPr>
+        <p:style>
+          <a:lnRef idx="1">
+            <a:schemeClr val="accent1"/>
+          </a:lnRef>
+          <a:fillRef idx="3">
+            <a:schemeClr val="accent1"/>
+          </a:fillRef>
+          <a:effectRef idx="2">
+            <a:schemeClr val="accent1"/>
+          </a:effectRef>
+          <a:fontRef idx="minor">
+            <a:schemeClr val="lt1"/>
+          </a:fontRef>
+        </p:style>
+        <p:txBody>
+          <a:bodyPr wrap="square" rtlCol="0" anchor="ctr"/>
+          <a:lstStyle/>
+          <a:p>
+            <a:pPr algn="ctr" rtl="1"/>
+            <a:r>
+              <a:rPr sz="1400" b="1">
+                <a:solidFill>
+                  <a:srgbClr val="333333"/>
+                </a:solidFill>
+                <a:latin typeface="Arial"/>
+              </a:rPr>
+              <a:t>المخطط / Schema</a:t>
+            </a:r>
+          </a:p>
+        </p:txBody>
+      </p:sp>
+      <p:sp>
+        <p:nvSpPr>
+          <p:cNvPr id="6" name="Rounded Rectangle 5"/>
+          <p:cNvSpPr/>
+          <p:nvPr/>
+        </p:nvSpPr>
+        <p:spPr>
+          <a:xfrm>
+            <a:off x="7589520" y="0"/>
+            <a:ext cx="3474720" cy="594360"/>
+          </a:xfrm>
+          <a:prstGeom prst="roundRect">
+            <a:avLst/>
+          </a:prstGeom>
+          <a:solidFill>
+            <a:srgbClr val="EDEDED"/>
+          </a:solidFill>
+          <a:ln w="12700">
+            <a:solidFill>
+              <a:srgbClr val="1F4E79"/>
+            </a:solidFill>
+          </a:ln>
+          <a:effectLst/>
+        </p:spPr>
+        <p:style>
+          <a:lnRef idx="1">
+            <a:schemeClr val="accent1"/>
+          </a:lnRef>
+          <a:fillRef idx="3">
+            <a:schemeClr val="accent1"/>
+          </a:fillRef>
+          <a:effectRef idx="2">
+            <a:schemeClr val="accent1"/>
+          </a:effectRef>
+          <a:fontRef idx="minor">
+            <a:schemeClr val="lt1"/>
+          </a:fontRef>
+        </p:style>
+        <p:txBody>
+          <a:bodyPr wrap="square" rtlCol="0" anchor="ctr"/>
+          <a:lstStyle/>
+          <a:p>
+            <a:pPr algn="ctr" rtl="1"/>
+            <a:r>
+              <a:rPr sz="1400" b="1">
+                <a:solidFill>
+                  <a:srgbClr val="333333"/>
+                </a:solidFill>
+                <a:latin typeface="Arial"/>
+              </a:rPr>
+              <a:t>الأمان / Security</a:t>
+            </a:r>
+          </a:p>
+        </p:txBody>
+      </p:sp>
+      <p:sp>
+        <p:nvSpPr>
+          <p:cNvPr id="7" name="Rounded Rectangle 6"/>
+          <p:cNvSpPr/>
+          <p:nvPr/>
+        </p:nvSpPr>
+        <p:spPr>
+          <a:xfrm>
+            <a:off x="7589520" y="0"/>
+            <a:ext cx="3474720" cy="594360"/>
+          </a:xfrm>
+          <a:prstGeom prst="roundRect">
+            <a:avLst/>
+          </a:prstGeom>
+          <a:solidFill>
+            <a:srgbClr val="EDEDED"/>
+          </a:solidFill>
+          <a:ln w="12700">
+            <a:solidFill>
+              <a:srgbClr val="1F4E79"/>
+            </a:solidFill>
+          </a:ln>
+          <a:effectLst/>
+        </p:spPr>
+        <p:style>
+          <a:lnRef idx="1">
+            <a:schemeClr val="accent1"/>
+          </a:lnRef>
+          <a:fillRef idx="3">
+            <a:schemeClr val="accent1"/>
+          </a:fillRef>
+          <a:effectRef idx="2">
+            <a:schemeClr val="accent1"/>
+          </a:effectRef>
+          <a:fontRef idx="minor">
+            <a:schemeClr val="lt1"/>
+          </a:fontRef>
+        </p:style>
+        <p:txBody>
+          <a:bodyPr wrap="square" rtlCol="0" anchor="ctr"/>
+          <a:lstStyle/>
+          <a:p>
+            <a:pPr algn="ctr" rtl="1"/>
+            <a:r>
+              <a:rPr sz="1400" b="1">
+                <a:solidFill>
+                  <a:srgbClr val="333333"/>
+                </a:solidFill>
+                <a:latin typeface="Arial"/>
+              </a:rPr>
+              <a:t>مستوى الخدمة / SLA</a:t>
+            </a:r>
+          </a:p>
+        </p:txBody>
+      </p:sp>
+      <p:sp>
+        <p:nvSpPr>
+          <p:cNvPr id="8" name="Left Arrow 7"/>
+          <p:cNvSpPr/>
+          <p:nvPr/>
+        </p:nvSpPr>
+        <p:spPr>
+          <a:xfrm>
+            <a:off x="5257800" y="3017520"/>
+            <a:ext cx="1737360" cy="365760"/>
+          </a:xfrm>
+          <a:prstGeom prst="leftArrow">
+            <a:avLst/>
+          </a:prstGeom>
+          <a:solidFill>
+            <a:srgbClr val="1F4E79"/>
+          </a:solidFill>
+          <a:ln>
+            <a:noFill/>
+          </a:ln>
+          <a:effectLst/>
+        </p:spPr>
+        <p:style>
+          <a:lnRef idx="1">
+            <a:schemeClr val="accent1"/>
+          </a:lnRef>
+          <a:fillRef idx="3">
+            <a:schemeClr val="accent1"/>
+          </a:fillRef>
+          <a:effectRef idx="2">
+            <a:schemeClr val="accent1"/>
+          </a:effectRef>
+          <a:fontRef idx="minor">
+            <a:schemeClr val="lt1"/>
+          </a:fontRef>
+        </p:style>
+        <p:txBody>
           <a:bodyPr rtlCol="0" anchor="ctr"/>
           <a:lstStyle/>
           <a:p>
             <a:pPr algn="ctr"/>
-          </a:p>
-        </p:txBody>
-      </p:sp>
-      <p:sp>
-        <p:nvSpPr>
-          <p:cNvPr id="3" name="TextBox 2"/>
-          <p:cNvSpPr txBox="1"/>
-          <p:nvPr/>
-        </p:nvSpPr>
-        <p:spPr>
-          <a:xfrm>
-            <a:off x="640080" y="182880"/>
-            <a:ext cx="10972800" cy="640080"/>
+            <a:endParaRPr/>
+          </a:p>
+        </p:txBody>
+      </p:sp>
+      <p:sp>
+        <p:nvSpPr>
+          <p:cNvPr id="9" name="TextBox 8"/>
+          <p:cNvSpPr txBox="1"/>
+          <p:nvPr/>
+        </p:nvSpPr>
+        <p:spPr>
+          <a:xfrm>
+            <a:off x="640080" y="6126480"/>
+            <a:ext cx="10972800" cy="548640"/>
           </a:xfrm>
           <a:prstGeom prst="rect">
             <a:avLst/>
@@ -6487,68 +8862,159 @@
           <a:p>
             <a:pPr algn="r" rtl="1"/>
             <a:r>
-              <a:rPr sz="3200" b="1">
-                <a:solidFill>
-                  <a:srgbClr val="1F3B5C"/>
+              <a:rPr sz="1400">
+                <a:solidFill>
+                  <a:srgbClr val="666666"/>
+                </a:solidFill>
+                <a:latin typeface="Arial"/>
+              </a:rPr>
+              <a:t>وحدة التسليم الحديثة في هندسة البيانات.</a:t>
+            </a:r>
+          </a:p>
+          <a:p>
+            <a:pPr algn="r" rtl="0"/>
+            <a:r>
+              <a:t>The modern delivery unit in data engineering.</a:t>
+            </a:r>
+          </a:p>
+        </p:txBody>
+      </p:sp>
+      <p:sp>
+        <p:nvSpPr>
+          <p:cNvPr id="10" name="TextBox 9"/>
+          <p:cNvSpPr txBox="1"/>
+          <p:nvPr/>
+        </p:nvSpPr>
+        <p:spPr>
+          <a:xfrm>
+            <a:off x="640080" y="6400800"/>
+            <a:ext cx="8686800" cy="320040"/>
+          </a:xfrm>
+          <a:prstGeom prst="rect">
+            <a:avLst/>
+          </a:prstGeom>
+          <a:noFill/>
+        </p:spPr>
+        <p:txBody>
+          <a:bodyPr wrap="square">
+            <a:spAutoFit/>
+          </a:bodyPr>
+          <a:lstStyle/>
+          <a:p>
+            <a:pPr algn="r" rtl="1"/>
+            <a:r>
+              <a:rPr sz="1000" b="0">
+                <a:solidFill>
+                  <a:srgbClr val="666666"/>
+                </a:solidFill>
+                <a:latin typeface="Arial"/>
+              </a:rPr>
+              <a:t>Module 02 — Data &amp; AI Engineering Track  |  الوحدة الثانية</a:t>
+            </a:r>
+          </a:p>
+        </p:txBody>
+      </p:sp>
+      <p:sp>
+        <p:nvSpPr>
+          <p:cNvPr id="11" name="TextBox 10"/>
+          <p:cNvSpPr txBox="1"/>
+          <p:nvPr/>
+        </p:nvSpPr>
+        <p:spPr>
+          <a:xfrm>
+            <a:off x="9601200" y="6400800"/>
+            <a:ext cx="1920240" cy="320040"/>
+          </a:xfrm>
+          <a:prstGeom prst="rect">
+            <a:avLst/>
+          </a:prstGeom>
+          <a:noFill/>
+        </p:spPr>
+        <p:txBody>
+          <a:bodyPr wrap="square">
+            <a:spAutoFit/>
+          </a:bodyPr>
+          <a:lstStyle/>
+          <a:p>
+            <a:pPr algn="l" rtl="0"/>
+            <a:r>
+              <a:rPr sz="1000" b="0">
+                <a:solidFill>
+                  <a:srgbClr val="666666"/>
                 </a:solidFill>
                 <a:latin typeface="Calibri"/>
               </a:rPr>
-              <a:t>متى تختار كل نموذج؟ / When to Choose Which</a:t>
-            </a:r>
-          </a:p>
-        </p:txBody>
-      </p:sp>
-      <p:sp>
-        <p:nvSpPr>
-          <p:cNvPr id="4" name="TextBox 3"/>
-          <p:cNvSpPr txBox="1"/>
-          <p:nvPr/>
-        </p:nvSpPr>
-        <p:spPr>
-          <a:xfrm>
-            <a:off x="640080" y="1280160"/>
-            <a:ext cx="10972800" cy="5212080"/>
-          </a:xfrm>
-          <a:prstGeom prst="rect">
-            <a:avLst/>
-          </a:prstGeom>
-          <a:noFill/>
-        </p:spPr>
-        <p:txBody>
-          <a:bodyPr wrap="square">
-            <a:spAutoFit/>
-          </a:bodyPr>
-          <a:lstStyle/>
-          <a:p>
-            <a:pPr algn="r" rtl="1">
-              <a:spcAft>
-                <a:spcPts val="1000"/>
-              </a:spcAft>
-            </a:pPr>
-            <a:r>
-              <a:rPr sz="1900">
-                <a:solidFill>
-                  <a:srgbClr val="333333"/>
+              <a:t>07_  •  7/14</a:t>
+            </a:r>
+          </a:p>
+        </p:txBody>
+      </p:sp>
+      <p:sp>
+        <p:nvSpPr>
+          <p:cNvPr id="12" name="TextBox 11"/>
+          <p:cNvSpPr txBox="1"/>
+          <p:nvPr/>
+        </p:nvSpPr>
+        <p:spPr>
+          <a:xfrm>
+            <a:off x="640080" y="6400800"/>
+            <a:ext cx="8686800" cy="320040"/>
+          </a:xfrm>
+          <a:prstGeom prst="rect">
+            <a:avLst/>
+          </a:prstGeom>
+          <a:noFill/>
+        </p:spPr>
+        <p:txBody>
+          <a:bodyPr wrap="square">
+            <a:spAutoFit/>
+          </a:bodyPr>
+          <a:lstStyle/>
+          <a:p>
+            <a:pPr algn="r" rtl="1"/>
+            <a:r>
+              <a:rPr sz="1000" b="0">
+                <a:solidFill>
+                  <a:srgbClr val="666666"/>
+                </a:solidFill>
+                <a:latin typeface="Arial"/>
+              </a:rPr>
+              <a:t>Module 02 — Data &amp; AI Engineering Track  |  الوحدة الثانية</a:t>
+            </a:r>
+          </a:p>
+        </p:txBody>
+      </p:sp>
+      <p:sp>
+        <p:nvSpPr>
+          <p:cNvPr id="13" name="TextBox 12"/>
+          <p:cNvSpPr txBox="1"/>
+          <p:nvPr/>
+        </p:nvSpPr>
+        <p:spPr>
+          <a:xfrm>
+            <a:off x="9601200" y="6400800"/>
+            <a:ext cx="1920240" cy="320040"/>
+          </a:xfrm>
+          <a:prstGeom prst="rect">
+            <a:avLst/>
+          </a:prstGeom>
+          <a:noFill/>
+        </p:spPr>
+        <p:txBody>
+          <a:bodyPr wrap="square">
+            <a:spAutoFit/>
+          </a:bodyPr>
+          <a:lstStyle/>
+          <a:p>
+            <a:pPr algn="l" rtl="0"/>
+            <a:r>
+              <a:rPr sz="1000" b="0">
+                <a:solidFill>
+                  <a:srgbClr val="666666"/>
                 </a:solidFill>
                 <a:latin typeface="Calibri"/>
               </a:rPr>
-              <a:t>• فريق مركزي وتحليلات → Medallion على Lakehouse؛ تقارير صارمة → مستودع؛ مؤسسة كبيرة بفرق مستقلة → Data Mesh.</a:t>
-            </a:r>
-          </a:p>
-          <a:p>
-            <a:pPr algn="r" rtl="0">
-              <a:spcAft>
-                <a:spcPts val="1000"/>
-              </a:spcAft>
-            </a:pPr>
-            <a:r>
-              <a:rPr sz="1900">
-                <a:solidFill>
-                  <a:srgbClr val="666666"/>
-                </a:solidFill>
-                <a:latin typeface="Calibri"/>
-              </a:rPr>
-              <a:t>   Central team + analytics → Medallion; strict BI → warehouse; large independent teams → data mesh.</a:t>
+              <a:t>07_  •  7/14</a:t>
             </a:r>
           </a:p>
         </p:txBody>
@@ -6562,7 +9028,7 @@
 </file>
 
 <file path=ppt/slides/slide8.xml><?xml version="1.0" encoding="utf-8"?>
-<p:sld xmlns:a="http://schemas.openxmlformats.org/drawingml/2006/main" xmlns:p="http://schemas.openxmlformats.org/presentationml/2006/main" xmlns:r="http://schemas.openxmlformats.org/officeDocument/2006/relationships">
+<p:sld xmlns:a="http://schemas.openxmlformats.org/drawingml/2006/main" xmlns:r="http://schemas.openxmlformats.org/officeDocument/2006/relationships" xmlns:p="http://schemas.openxmlformats.org/presentationml/2006/main">
   <p:cSld>
     <p:bg>
       <p:bgPr>
@@ -6578,60 +9044,32 @@
         <p:cNvGrpSpPr/>
         <p:nvPr/>
       </p:nvGrpSpPr>
-      <p:grpSpPr/>
-      <p:sp>
-        <p:nvSpPr>
-          <p:cNvPr id="2" name="TextBox 1"/>
-          <p:cNvSpPr txBox="1"/>
-          <p:nvPr/>
-        </p:nvSpPr>
-        <p:spPr>
-          <a:xfrm>
-            <a:off x="640080" y="137160"/>
-            <a:ext cx="10972800" cy="640080"/>
-          </a:xfrm>
-          <a:prstGeom prst="rect">
-            <a:avLst/>
-          </a:prstGeom>
-          <a:noFill/>
-        </p:spPr>
-        <p:txBody>
-          <a:bodyPr wrap="none">
-            <a:spAutoFit/>
-          </a:bodyPr>
-          <a:lstStyle/>
-          <a:p>
-            <a:pPr algn="r" rtl="1"/>
-            <a:r>
-              <a:rPr sz="3000" b="1">
-                <a:solidFill>
-                  <a:srgbClr val="1F3B5C"/>
-                </a:solidFill>
-                <a:latin typeface="Calibri"/>
-              </a:rPr>
-              <a:t>أنماط معالجة البيانات الثلاثة / Three Data Patterns</a:t>
-            </a:r>
-          </a:p>
-        </p:txBody>
-      </p:sp>
-      <p:sp>
-        <p:nvSpPr>
-          <p:cNvPr id="3" name="Rounded Rectangle 2"/>
+      <p:grpSpPr>
+        <a:xfrm>
+          <a:off x="0" y="0"/>
+          <a:ext cx="0" cy="0"/>
+          <a:chOff x="0" y="0"/>
+          <a:chExt cx="0" cy="0"/>
+        </a:xfrm>
+      </p:grpSpPr>
+      <p:sp>
+        <p:nvSpPr>
+          <p:cNvPr id="2" name="Rectangle 1"/>
           <p:cNvSpPr/>
           <p:nvPr/>
         </p:nvSpPr>
         <p:spPr>
           <a:xfrm>
-            <a:off x="640080" y="1371600"/>
-            <a:ext cx="3566160" cy="914400"/>
-          </a:xfrm>
-          <a:prstGeom prst="roundRect">
+            <a:off x="0" y="0"/>
+            <a:ext cx="12191695" cy="1005840"/>
+          </a:xfrm>
+          <a:prstGeom prst="rect">
             <a:avLst/>
           </a:prstGeom>
           <a:solidFill>
-            <a:srgbClr val="DCE6F1"/>
+            <a:srgbClr val="FFFFFF"/>
           </a:solidFill>
-          <a:ln w="12700">
+          <a:ln w="25400">
             <a:solidFill>
               <a:srgbClr val="1F4E79"/>
             </a:solidFill>
@@ -6653,370 +9091,316 @@
           </a:fontRef>
         </p:style>
         <p:txBody>
-          <a:bodyPr rtlCol="0" anchor="ctr" wrap="square"/>
-          <a:lstStyle/>
-          <a:p>
-            <a:pPr algn="ctr" rtl="1"/>
-            <a:r>
-              <a:rPr sz="1800" b="1">
+          <a:bodyPr rtlCol="0" anchor="ctr"/>
+          <a:lstStyle/>
+          <a:p>
+            <a:pPr algn="ctr"/>
+            <a:endParaRPr/>
+          </a:p>
+        </p:txBody>
+      </p:sp>
+      <p:sp>
+        <p:nvSpPr>
+          <p:cNvPr id="3" name="TextBox 2"/>
+          <p:cNvSpPr txBox="1"/>
+          <p:nvPr/>
+        </p:nvSpPr>
+        <p:spPr>
+          <a:xfrm>
+            <a:off x="640080" y="182880"/>
+            <a:ext cx="10972800" cy="640080"/>
+          </a:xfrm>
+          <a:prstGeom prst="rect">
+            <a:avLst/>
+          </a:prstGeom>
+          <a:noFill/>
+        </p:spPr>
+        <p:txBody>
+          <a:bodyPr wrap="square">
+            <a:spAutoFit/>
+          </a:bodyPr>
+          <a:lstStyle/>
+          <a:p>
+            <a:pPr algn="r" rtl="1"/>
+            <a:r>
+              <a:rPr sz="3200" b="1">
+                <a:solidFill>
+                  <a:srgbClr val="1F3B5C"/>
+                </a:solidFill>
+                <a:latin typeface="Arial"/>
+              </a:rPr>
+              <a:t>متى تختار كل نموذج؟ / When to Choose Which</a:t>
+            </a:r>
+          </a:p>
+        </p:txBody>
+      </p:sp>
+      <p:sp>
+        <p:nvSpPr>
+          <p:cNvPr id="4" name="TextBox 3"/>
+          <p:cNvSpPr txBox="1"/>
+          <p:nvPr/>
+        </p:nvSpPr>
+        <p:spPr>
+          <a:xfrm>
+            <a:off x="640080" y="1280160"/>
+            <a:ext cx="10972800" cy="5212080"/>
+          </a:xfrm>
+          <a:prstGeom prst="rect">
+            <a:avLst/>
+          </a:prstGeom>
+          <a:noFill/>
+        </p:spPr>
+        <p:txBody>
+          <a:bodyPr wrap="square">
+            <a:spAutoFit/>
+          </a:bodyPr>
+          <a:lstStyle/>
+          <a:p>
+            <a:pPr algn="r" rtl="1">
+              <a:spcBef>
+                <a:spcPts val="200"/>
+              </a:spcBef>
+              <a:spcAft>
+                <a:spcPts val="1000"/>
+              </a:spcAft>
+            </a:pPr>
+            <a:r>
+              <a:rPr sz="1900">
                 <a:solidFill>
                   <a:srgbClr val="333333"/>
                 </a:solidFill>
+                <a:latin typeface="Arial"/>
+              </a:rPr>
+              <a:t>• فريق مركزي وتحليلات → Medallion على Lakehouse؛ تقارير صارمة → مستودع؛ مؤسسة كبيرة بفرق مستقلة → Data Mesh.</a:t>
+            </a:r>
+          </a:p>
+          <a:p>
+            <a:pPr algn="l" rtl="0">
+              <a:spcBef>
+                <a:spcPts val="200"/>
+              </a:spcBef>
+              <a:spcAft>
+                <a:spcPts val="1000"/>
+              </a:spcAft>
+            </a:pPr>
+            <a:r>
+              <a:rPr sz="1600">
+                <a:solidFill>
+                  <a:srgbClr val="666666"/>
+                </a:solidFill>
                 <a:latin typeface="Calibri"/>
               </a:rPr>
-              <a:t>المعمارية المتدرِّجة</a:t>
-            </a:r>
-          </a:p>
-          <a:p>
-            <a:pPr algn="ctr" rtl="0"/>
-            <a:r>
-              <a:rPr sz="1300">
+              <a:t>• Central team + analytics → Medallion; strict BI → warehouse; large independent teams → data mesh.</a:t>
+            </a:r>
+          </a:p>
+        </p:txBody>
+      </p:sp>
+      <p:sp>
+        <p:nvSpPr>
+          <p:cNvPr id="5" name="TextBox 4"/>
+          <p:cNvSpPr txBox="1"/>
+          <p:nvPr/>
+        </p:nvSpPr>
+        <p:spPr>
+          <a:xfrm>
+            <a:off x="640080" y="6400800"/>
+            <a:ext cx="8686800" cy="320040"/>
+          </a:xfrm>
+          <a:prstGeom prst="rect">
+            <a:avLst/>
+          </a:prstGeom>
+          <a:noFill/>
+        </p:spPr>
+        <p:txBody>
+          <a:bodyPr wrap="square">
+            <a:spAutoFit/>
+          </a:bodyPr>
+          <a:lstStyle/>
+          <a:p>
+            <a:pPr algn="r" rtl="1"/>
+            <a:r>
+              <a:rPr sz="1000" b="0">
+                <a:solidFill>
+                  <a:srgbClr val="666666"/>
+                </a:solidFill>
+                <a:latin typeface="Arial"/>
+              </a:rPr>
+              <a:t>Module 02 — Data &amp; AI Engineering Track  |  الوحدة الثانية</a:t>
+            </a:r>
+          </a:p>
+        </p:txBody>
+      </p:sp>
+      <p:sp>
+        <p:nvSpPr>
+          <p:cNvPr id="6" name="TextBox 5"/>
+          <p:cNvSpPr txBox="1"/>
+          <p:nvPr/>
+        </p:nvSpPr>
+        <p:spPr>
+          <a:xfrm>
+            <a:off x="9601200" y="6400800"/>
+            <a:ext cx="1920240" cy="320040"/>
+          </a:xfrm>
+          <a:prstGeom prst="rect">
+            <a:avLst/>
+          </a:prstGeom>
+          <a:noFill/>
+        </p:spPr>
+        <p:txBody>
+          <a:bodyPr wrap="square">
+            <a:spAutoFit/>
+          </a:bodyPr>
+          <a:lstStyle/>
+          <a:p>
+            <a:pPr algn="l" rtl="0"/>
+            <a:r>
+              <a:rPr sz="1000" b="0">
                 <a:solidFill>
                   <a:srgbClr val="666666"/>
                 </a:solidFill>
                 <a:latin typeface="Calibri"/>
               </a:rPr>
-              <a:t>Medallion</a:t>
-            </a:r>
-          </a:p>
-        </p:txBody>
-      </p:sp>
-      <p:sp>
-        <p:nvSpPr>
-          <p:cNvPr id="4" name="Rounded Rectangle 3"/>
-          <p:cNvSpPr/>
-          <p:nvPr/>
-        </p:nvSpPr>
-        <p:spPr>
-          <a:xfrm>
-            <a:off x="640080" y="2468880"/>
-            <a:ext cx="3566160" cy="2560320"/>
-          </a:xfrm>
-          <a:prstGeom prst="roundRect">
-            <a:avLst/>
-          </a:prstGeom>
-          <a:solidFill>
-            <a:srgbClr val="EDEDED"/>
-          </a:solidFill>
-          <a:ln w="12700">
-            <a:solidFill>
-              <a:srgbClr val="1F4E79"/>
-            </a:solidFill>
-          </a:ln>
-          <a:effectLst/>
-        </p:spPr>
-        <p:style>
-          <a:lnRef idx="1">
-            <a:schemeClr val="accent1"/>
-          </a:lnRef>
-          <a:fillRef idx="3">
-            <a:schemeClr val="accent1"/>
-          </a:fillRef>
-          <a:effectRef idx="2">
-            <a:schemeClr val="accent1"/>
-          </a:effectRef>
-          <a:fontRef idx="minor">
-            <a:schemeClr val="lt1"/>
-          </a:fontRef>
-        </p:style>
-        <p:txBody>
-          <a:bodyPr rtlCol="0" anchor="ctr" wrap="square"/>
-          <a:lstStyle/>
-          <a:p>
-            <a:pPr algn="ctr" rtl="1"/>
-            <a:r>
-              <a:rPr sz="1500" b="1">
-                <a:solidFill>
-                  <a:srgbClr val="333333"/>
+              <a:t>V07  •  6/14</a:t>
+            </a:r>
+          </a:p>
+        </p:txBody>
+      </p:sp>
+      <p:sp>
+        <p:nvSpPr>
+          <p:cNvPr id="7" name="TextBox 6"/>
+          <p:cNvSpPr txBox="1"/>
+          <p:nvPr/>
+        </p:nvSpPr>
+        <p:spPr>
+          <a:xfrm>
+            <a:off x="640080" y="6400800"/>
+            <a:ext cx="8686800" cy="320040"/>
+          </a:xfrm>
+          <a:prstGeom prst="rect">
+            <a:avLst/>
+          </a:prstGeom>
+          <a:noFill/>
+        </p:spPr>
+        <p:txBody>
+          <a:bodyPr wrap="square">
+            <a:spAutoFit/>
+          </a:bodyPr>
+          <a:lstStyle/>
+          <a:p>
+            <a:pPr algn="r" rtl="1"/>
+            <a:r>
+              <a:rPr sz="1000" b="0">
+                <a:solidFill>
+                  <a:srgbClr val="666666"/>
+                </a:solidFill>
+                <a:latin typeface="Arial"/>
+              </a:rPr>
+              <a:t>Module 02 — Data &amp; AI Engineering Track  |  الوحدة الثانية</a:t>
+            </a:r>
+          </a:p>
+        </p:txBody>
+      </p:sp>
+      <p:sp>
+        <p:nvSpPr>
+          <p:cNvPr id="8" name="TextBox 7"/>
+          <p:cNvSpPr txBox="1"/>
+          <p:nvPr/>
+        </p:nvSpPr>
+        <p:spPr>
+          <a:xfrm>
+            <a:off x="9601200" y="6400800"/>
+            <a:ext cx="1920240" cy="320040"/>
+          </a:xfrm>
+          <a:prstGeom prst="rect">
+            <a:avLst/>
+          </a:prstGeom>
+          <a:noFill/>
+        </p:spPr>
+        <p:txBody>
+          <a:bodyPr wrap="square">
+            <a:spAutoFit/>
+          </a:bodyPr>
+          <a:lstStyle/>
+          <a:p>
+            <a:pPr algn="l" rtl="0"/>
+            <a:r>
+              <a:rPr sz="1000" b="0">
+                <a:solidFill>
+                  <a:srgbClr val="666666"/>
                 </a:solidFill>
                 <a:latin typeface="Calibri"/>
               </a:rPr>
-              <a:t>فريق مركزي — تحليلات وAI/ML/RAG</a:t>
-            </a:r>
-          </a:p>
-        </p:txBody>
-      </p:sp>
-      <p:sp>
-        <p:nvSpPr>
-          <p:cNvPr id="5" name="Rounded Rectangle 4"/>
-          <p:cNvSpPr/>
-          <p:nvPr/>
-        </p:nvSpPr>
-        <p:spPr>
-          <a:xfrm>
-            <a:off x="4389119" y="1371600"/>
-            <a:ext cx="3566160" cy="914400"/>
-          </a:xfrm>
-          <a:prstGeom prst="roundRect">
-            <a:avLst/>
-          </a:prstGeom>
-          <a:solidFill>
-            <a:srgbClr val="E2EFDA"/>
-          </a:solidFill>
-          <a:ln w="12700">
-            <a:solidFill>
-              <a:srgbClr val="1F4E79"/>
-            </a:solidFill>
-          </a:ln>
-          <a:effectLst/>
-        </p:spPr>
-        <p:style>
-          <a:lnRef idx="1">
-            <a:schemeClr val="accent1"/>
-          </a:lnRef>
-          <a:fillRef idx="3">
-            <a:schemeClr val="accent1"/>
-          </a:fillRef>
-          <a:effectRef idx="2">
-            <a:schemeClr val="accent1"/>
-          </a:effectRef>
-          <a:fontRef idx="minor">
-            <a:schemeClr val="lt1"/>
-          </a:fontRef>
-        </p:style>
-        <p:txBody>
-          <a:bodyPr rtlCol="0" anchor="ctr" wrap="square"/>
-          <a:lstStyle/>
-          <a:p>
-            <a:pPr algn="ctr" rtl="1"/>
-            <a:r>
-              <a:rPr sz="1800" b="1">
-                <a:solidFill>
-                  <a:srgbClr val="333333"/>
+              <a:t>07_  •  8/14</a:t>
+            </a:r>
+          </a:p>
+        </p:txBody>
+      </p:sp>
+      <p:sp>
+        <p:nvSpPr>
+          <p:cNvPr id="9" name="TextBox 8"/>
+          <p:cNvSpPr txBox="1"/>
+          <p:nvPr/>
+        </p:nvSpPr>
+        <p:spPr>
+          <a:xfrm>
+            <a:off x="640080" y="6400800"/>
+            <a:ext cx="8686800" cy="320040"/>
+          </a:xfrm>
+          <a:prstGeom prst="rect">
+            <a:avLst/>
+          </a:prstGeom>
+          <a:noFill/>
+        </p:spPr>
+        <p:txBody>
+          <a:bodyPr wrap="square">
+            <a:spAutoFit/>
+          </a:bodyPr>
+          <a:lstStyle/>
+          <a:p>
+            <a:pPr algn="r" rtl="1"/>
+            <a:r>
+              <a:rPr sz="1000" b="0">
+                <a:solidFill>
+                  <a:srgbClr val="666666"/>
+                </a:solidFill>
+                <a:latin typeface="Arial"/>
+              </a:rPr>
+              <a:t>Module 02 — Data &amp; AI Engineering Track  |  الوحدة الثانية</a:t>
+            </a:r>
+          </a:p>
+        </p:txBody>
+      </p:sp>
+      <p:sp>
+        <p:nvSpPr>
+          <p:cNvPr id="10" name="TextBox 9"/>
+          <p:cNvSpPr txBox="1"/>
+          <p:nvPr/>
+        </p:nvSpPr>
+        <p:spPr>
+          <a:xfrm>
+            <a:off x="9601200" y="6400800"/>
+            <a:ext cx="1920240" cy="320040"/>
+          </a:xfrm>
+          <a:prstGeom prst="rect">
+            <a:avLst/>
+          </a:prstGeom>
+          <a:noFill/>
+        </p:spPr>
+        <p:txBody>
+          <a:bodyPr wrap="square">
+            <a:spAutoFit/>
+          </a:bodyPr>
+          <a:lstStyle/>
+          <a:p>
+            <a:pPr algn="l" rtl="0"/>
+            <a:r>
+              <a:rPr sz="1000" b="0">
+                <a:solidFill>
+                  <a:srgbClr val="666666"/>
                 </a:solidFill>
                 <a:latin typeface="Calibri"/>
               </a:rPr>
-              <a:t>مستودع البيانات</a:t>
-            </a:r>
-          </a:p>
-          <a:p>
-            <a:pPr algn="ctr" rtl="0"/>
-            <a:r>
-              <a:rPr sz="1300">
-                <a:solidFill>
-                  <a:srgbClr val="666666"/>
-                </a:solidFill>
-                <a:latin typeface="Calibri"/>
-              </a:rPr>
-              <a:t>Data Warehouse</a:t>
-            </a:r>
-          </a:p>
-        </p:txBody>
-      </p:sp>
-      <p:sp>
-        <p:nvSpPr>
-          <p:cNvPr id="6" name="Rounded Rectangle 5"/>
-          <p:cNvSpPr/>
-          <p:nvPr/>
-        </p:nvSpPr>
-        <p:spPr>
-          <a:xfrm>
-            <a:off x="4389119" y="2468880"/>
-            <a:ext cx="3566160" cy="2560320"/>
-          </a:xfrm>
-          <a:prstGeom prst="roundRect">
-            <a:avLst/>
-          </a:prstGeom>
-          <a:solidFill>
-            <a:srgbClr val="EDEDED"/>
-          </a:solidFill>
-          <a:ln w="12700">
-            <a:solidFill>
-              <a:srgbClr val="1F4E79"/>
-            </a:solidFill>
-          </a:ln>
-          <a:effectLst/>
-        </p:spPr>
-        <p:style>
-          <a:lnRef idx="1">
-            <a:schemeClr val="accent1"/>
-          </a:lnRef>
-          <a:fillRef idx="3">
-            <a:schemeClr val="accent1"/>
-          </a:fillRef>
-          <a:effectRef idx="2">
-            <a:schemeClr val="accent1"/>
-          </a:effectRef>
-          <a:fontRef idx="minor">
-            <a:schemeClr val="lt1"/>
-          </a:fontRef>
-        </p:style>
-        <p:txBody>
-          <a:bodyPr rtlCol="0" anchor="ctr" wrap="square"/>
-          <a:lstStyle/>
-          <a:p>
-            <a:pPr algn="ctr" rtl="1"/>
-            <a:r>
-              <a:rPr sz="1500" b="1">
-                <a:solidFill>
-                  <a:srgbClr val="333333"/>
-                </a:solidFill>
-                <a:latin typeface="Calibri"/>
-              </a:rPr>
-              <a:t>فرق BI — تقارير وذكاء أعمال</a:t>
-            </a:r>
-          </a:p>
-        </p:txBody>
-      </p:sp>
-      <p:sp>
-        <p:nvSpPr>
-          <p:cNvPr id="7" name="Rounded Rectangle 6"/>
-          <p:cNvSpPr/>
-          <p:nvPr/>
-        </p:nvSpPr>
-        <p:spPr>
-          <a:xfrm>
-            <a:off x="8138158" y="1371600"/>
-            <a:ext cx="3566160" cy="914400"/>
-          </a:xfrm>
-          <a:prstGeom prst="roundRect">
-            <a:avLst/>
-          </a:prstGeom>
-          <a:solidFill>
-            <a:srgbClr val="FDE9D9"/>
-          </a:solidFill>
-          <a:ln w="12700">
-            <a:solidFill>
-              <a:srgbClr val="1F4E79"/>
-            </a:solidFill>
-          </a:ln>
-          <a:effectLst/>
-        </p:spPr>
-        <p:style>
-          <a:lnRef idx="1">
-            <a:schemeClr val="accent1"/>
-          </a:lnRef>
-          <a:fillRef idx="3">
-            <a:schemeClr val="accent1"/>
-          </a:fillRef>
-          <a:effectRef idx="2">
-            <a:schemeClr val="accent1"/>
-          </a:effectRef>
-          <a:fontRef idx="minor">
-            <a:schemeClr val="lt1"/>
-          </a:fontRef>
-        </p:style>
-        <p:txBody>
-          <a:bodyPr rtlCol="0" anchor="ctr" wrap="square"/>
-          <a:lstStyle/>
-          <a:p>
-            <a:pPr algn="ctr" rtl="1"/>
-            <a:r>
-              <a:rPr sz="1800" b="1">
-                <a:solidFill>
-                  <a:srgbClr val="333333"/>
-                </a:solidFill>
-                <a:latin typeface="Calibri"/>
-              </a:rPr>
-              <a:t>شبكة البيانات</a:t>
-            </a:r>
-          </a:p>
-          <a:p>
-            <a:pPr algn="ctr" rtl="0"/>
-            <a:r>
-              <a:rPr sz="1300">
-                <a:solidFill>
-                  <a:srgbClr val="666666"/>
-                </a:solidFill>
-                <a:latin typeface="Calibri"/>
-              </a:rPr>
-              <a:t>Data Mesh</a:t>
-            </a:r>
-          </a:p>
-        </p:txBody>
-      </p:sp>
-      <p:sp>
-        <p:nvSpPr>
-          <p:cNvPr id="8" name="Rounded Rectangle 7"/>
-          <p:cNvSpPr/>
-          <p:nvPr/>
-        </p:nvSpPr>
-        <p:spPr>
-          <a:xfrm>
-            <a:off x="8138158" y="2468880"/>
-            <a:ext cx="3566160" cy="2560320"/>
-          </a:xfrm>
-          <a:prstGeom prst="roundRect">
-            <a:avLst/>
-          </a:prstGeom>
-          <a:solidFill>
-            <a:srgbClr val="EDEDED"/>
-          </a:solidFill>
-          <a:ln w="12700">
-            <a:solidFill>
-              <a:srgbClr val="1F4E79"/>
-            </a:solidFill>
-          </a:ln>
-          <a:effectLst/>
-        </p:spPr>
-        <p:style>
-          <a:lnRef idx="1">
-            <a:schemeClr val="accent1"/>
-          </a:lnRef>
-          <a:fillRef idx="3">
-            <a:schemeClr val="accent1"/>
-          </a:fillRef>
-          <a:effectRef idx="2">
-            <a:schemeClr val="accent1"/>
-          </a:effectRef>
-          <a:fontRef idx="minor">
-            <a:schemeClr val="lt1"/>
-          </a:fontRef>
-        </p:style>
-        <p:txBody>
-          <a:bodyPr rtlCol="0" anchor="ctr" wrap="square"/>
-          <a:lstStyle/>
-          <a:p>
-            <a:pPr algn="ctr" rtl="1"/>
-            <a:r>
-              <a:rPr sz="1500" b="1">
-                <a:solidFill>
-                  <a:srgbClr val="333333"/>
-                </a:solidFill>
-                <a:latin typeface="Calibri"/>
-              </a:rPr>
-              <a:t>فرق المجالات — مؤسسات كبيرة</a:t>
-            </a:r>
-          </a:p>
-        </p:txBody>
-      </p:sp>
-      <p:sp>
-        <p:nvSpPr>
-          <p:cNvPr id="9" name="TextBox 8"/>
-          <p:cNvSpPr txBox="1"/>
-          <p:nvPr/>
-        </p:nvSpPr>
-        <p:spPr>
-          <a:xfrm>
-            <a:off x="640080" y="6126480"/>
-            <a:ext cx="10972800" cy="548640"/>
-          </a:xfrm>
-          <a:prstGeom prst="rect">
-            <a:avLst/>
-          </a:prstGeom>
-          <a:noFill/>
-        </p:spPr>
-        <p:txBody>
-          <a:bodyPr wrap="square">
-            <a:spAutoFit/>
-          </a:bodyPr>
-          <a:lstStyle/>
-          <a:p>
-            <a:pPr algn="r" rtl="1"/>
-            <a:r>
-              <a:rPr sz="1400">
-                <a:solidFill>
-                  <a:srgbClr val="666666"/>
-                </a:solidFill>
-                <a:latin typeface="Calibri"/>
-              </a:rPr>
-              <a:t>المعايير: الفكرة الجوهرية / المالك / الحوكمة / حالة الاستخدام المثلى.</a:t>
-            </a:r>
-          </a:p>
-          <a:p>
-            <a:pPr algn="r" rtl="0"/>
-            <a:r>
-              <a:t>Criteria: core idea / ownership / governance / best use case.</a:t>
+              <a:t>07_  •  8/14</a:t>
             </a:r>
           </a:p>
         </p:txBody>
@@ -7030,7 +9414,7 @@
 </file>
 
 <file path=ppt/slides/slide9.xml><?xml version="1.0" encoding="utf-8"?>
-<p:sld xmlns:a="http://schemas.openxmlformats.org/drawingml/2006/main" xmlns:p="http://schemas.openxmlformats.org/presentationml/2006/main" xmlns:r="http://schemas.openxmlformats.org/officeDocument/2006/relationships">
+<p:sld xmlns:a="http://schemas.openxmlformats.org/drawingml/2006/main" xmlns:r="http://schemas.openxmlformats.org/officeDocument/2006/relationships" xmlns:p="http://schemas.openxmlformats.org/presentationml/2006/main">
   <p:cSld>
     <p:bg>
       <p:bgPr>
@@ -7046,7 +9430,14 @@
         <p:cNvGrpSpPr/>
         <p:nvPr/>
       </p:nvGrpSpPr>
-      <p:grpSpPr/>
+      <p:grpSpPr>
+        <a:xfrm>
+          <a:off x="0" y="0"/>
+          <a:ext cx="0" cy="0"/>
+          <a:chOff x="0" y="0"/>
+          <a:chExt cx="0" cy="0"/>
+        </a:xfrm>
+      </p:grpSpPr>
       <p:sp>
         <p:nvSpPr>
           <p:cNvPr id="2" name="Rectangle 1"/>
@@ -7090,6 +9481,7 @@
           <a:lstStyle/>
           <a:p>
             <a:pPr algn="ctr"/>
+            <a:endParaRPr/>
           </a:p>
         </p:txBody>
       </p:sp>
@@ -7121,7 +9513,7 @@
                 <a:solidFill>
                   <a:srgbClr val="1F3B5C"/>
                 </a:solidFill>
-                <a:latin typeface="Calibri"/>
+                <a:latin typeface="Arial"/>
               </a:rPr>
               <a:t>ربط بالمقرر / Course Tie-in</a:t>
             </a:r>
@@ -7151,6 +9543,9 @@
           <a:lstStyle/>
           <a:p>
             <a:pPr algn="r" rtl="1">
+              <a:spcBef>
+                <a:spcPts val="200"/>
+              </a:spcBef>
               <a:spcAft>
                 <a:spcPts val="1000"/>
               </a:spcAft>
@@ -7160,25 +9555,238 @@
                 <a:solidFill>
                   <a:srgbClr val="333333"/>
                 </a:solidFill>
-                <a:latin typeface="Calibri"/>
+                <a:latin typeface="Arial"/>
               </a:rPr>
               <a:t>• مسار عملي: Bronze → Silver → Gold ينتهي في فهرس متجهي يغذّي تطبيق RAG (مختبر L03).</a:t>
             </a:r>
           </a:p>
           <a:p>
-            <a:pPr algn="r" rtl="0">
+            <a:pPr algn="l" rtl="0">
+              <a:spcBef>
+                <a:spcPts val="200"/>
+              </a:spcBef>
               <a:spcAft>
                 <a:spcPts val="1000"/>
               </a:spcAft>
             </a:pPr>
             <a:r>
-              <a:rPr sz="1900">
+              <a:rPr sz="1600">
                 <a:solidFill>
                   <a:srgbClr val="666666"/>
                 </a:solidFill>
                 <a:latin typeface="Calibri"/>
               </a:rPr>
-              <a:t>   Hands-on path: Bronze → Silver → Gold ending in a vector index feeding a RAG app (lab L03).</a:t>
+              <a:t>• Hands-on path: Bronze → Silver → Gold ending in a vector index feeding a RAG app (lab L03).</a:t>
+            </a:r>
+          </a:p>
+        </p:txBody>
+      </p:sp>
+      <p:sp>
+        <p:nvSpPr>
+          <p:cNvPr id="5" name="TextBox 4"/>
+          <p:cNvSpPr txBox="1"/>
+          <p:nvPr/>
+        </p:nvSpPr>
+        <p:spPr>
+          <a:xfrm>
+            <a:off x="640080" y="6400800"/>
+            <a:ext cx="8686800" cy="320040"/>
+          </a:xfrm>
+          <a:prstGeom prst="rect">
+            <a:avLst/>
+          </a:prstGeom>
+          <a:noFill/>
+        </p:spPr>
+        <p:txBody>
+          <a:bodyPr wrap="square">
+            <a:spAutoFit/>
+          </a:bodyPr>
+          <a:lstStyle/>
+          <a:p>
+            <a:pPr algn="r" rtl="1"/>
+            <a:r>
+              <a:rPr sz="1000" b="0">
+                <a:solidFill>
+                  <a:srgbClr val="666666"/>
+                </a:solidFill>
+                <a:latin typeface="Arial"/>
+              </a:rPr>
+              <a:t>Module 02 — Data &amp; AI Engineering Track  |  الوحدة الثانية</a:t>
+            </a:r>
+          </a:p>
+        </p:txBody>
+      </p:sp>
+      <p:sp>
+        <p:nvSpPr>
+          <p:cNvPr id="6" name="TextBox 5"/>
+          <p:cNvSpPr txBox="1"/>
+          <p:nvPr/>
+        </p:nvSpPr>
+        <p:spPr>
+          <a:xfrm>
+            <a:off x="9601200" y="6400800"/>
+            <a:ext cx="1920240" cy="320040"/>
+          </a:xfrm>
+          <a:prstGeom prst="rect">
+            <a:avLst/>
+          </a:prstGeom>
+          <a:noFill/>
+        </p:spPr>
+        <p:txBody>
+          <a:bodyPr wrap="square">
+            <a:spAutoFit/>
+          </a:bodyPr>
+          <a:lstStyle/>
+          <a:p>
+            <a:pPr algn="l" rtl="0"/>
+            <a:r>
+              <a:rPr sz="1000" b="0">
+                <a:solidFill>
+                  <a:srgbClr val="666666"/>
+                </a:solidFill>
+                <a:latin typeface="Calibri"/>
+              </a:rPr>
+              <a:t>V07  •  7/14</a:t>
+            </a:r>
+          </a:p>
+        </p:txBody>
+      </p:sp>
+      <p:sp>
+        <p:nvSpPr>
+          <p:cNvPr id="7" name="TextBox 6"/>
+          <p:cNvSpPr txBox="1"/>
+          <p:nvPr/>
+        </p:nvSpPr>
+        <p:spPr>
+          <a:xfrm>
+            <a:off x="640080" y="6400800"/>
+            <a:ext cx="8686800" cy="320040"/>
+          </a:xfrm>
+          <a:prstGeom prst="rect">
+            <a:avLst/>
+          </a:prstGeom>
+          <a:noFill/>
+        </p:spPr>
+        <p:txBody>
+          <a:bodyPr wrap="square">
+            <a:spAutoFit/>
+          </a:bodyPr>
+          <a:lstStyle/>
+          <a:p>
+            <a:pPr algn="r" rtl="1"/>
+            <a:r>
+              <a:rPr sz="1000" b="0">
+                <a:solidFill>
+                  <a:srgbClr val="666666"/>
+                </a:solidFill>
+                <a:latin typeface="Arial"/>
+              </a:rPr>
+              <a:t>Module 02 — Data &amp; AI Engineering Track  |  الوحدة الثانية</a:t>
+            </a:r>
+          </a:p>
+        </p:txBody>
+      </p:sp>
+      <p:sp>
+        <p:nvSpPr>
+          <p:cNvPr id="8" name="TextBox 7"/>
+          <p:cNvSpPr txBox="1"/>
+          <p:nvPr/>
+        </p:nvSpPr>
+        <p:spPr>
+          <a:xfrm>
+            <a:off x="9601200" y="6400800"/>
+            <a:ext cx="1920240" cy="320040"/>
+          </a:xfrm>
+          <a:prstGeom prst="rect">
+            <a:avLst/>
+          </a:prstGeom>
+          <a:noFill/>
+        </p:spPr>
+        <p:txBody>
+          <a:bodyPr wrap="square">
+            <a:spAutoFit/>
+          </a:bodyPr>
+          <a:lstStyle/>
+          <a:p>
+            <a:pPr algn="l" rtl="0"/>
+            <a:r>
+              <a:rPr sz="1000" b="0">
+                <a:solidFill>
+                  <a:srgbClr val="666666"/>
+                </a:solidFill>
+                <a:latin typeface="Calibri"/>
+              </a:rPr>
+              <a:t>07_  •  9/14</a:t>
+            </a:r>
+          </a:p>
+        </p:txBody>
+      </p:sp>
+      <p:sp>
+        <p:nvSpPr>
+          <p:cNvPr id="9" name="TextBox 8"/>
+          <p:cNvSpPr txBox="1"/>
+          <p:nvPr/>
+        </p:nvSpPr>
+        <p:spPr>
+          <a:xfrm>
+            <a:off x="640080" y="6400800"/>
+            <a:ext cx="8686800" cy="320040"/>
+          </a:xfrm>
+          <a:prstGeom prst="rect">
+            <a:avLst/>
+          </a:prstGeom>
+          <a:noFill/>
+        </p:spPr>
+        <p:txBody>
+          <a:bodyPr wrap="square">
+            <a:spAutoFit/>
+          </a:bodyPr>
+          <a:lstStyle/>
+          <a:p>
+            <a:pPr algn="r" rtl="1"/>
+            <a:r>
+              <a:rPr sz="1000" b="0">
+                <a:solidFill>
+                  <a:srgbClr val="666666"/>
+                </a:solidFill>
+                <a:latin typeface="Arial"/>
+              </a:rPr>
+              <a:t>Module 02 — Data &amp; AI Engineering Track  |  الوحدة الثانية</a:t>
+            </a:r>
+          </a:p>
+        </p:txBody>
+      </p:sp>
+      <p:sp>
+        <p:nvSpPr>
+          <p:cNvPr id="10" name="TextBox 9"/>
+          <p:cNvSpPr txBox="1"/>
+          <p:nvPr/>
+        </p:nvSpPr>
+        <p:spPr>
+          <a:xfrm>
+            <a:off x="9601200" y="6400800"/>
+            <a:ext cx="1920240" cy="320040"/>
+          </a:xfrm>
+          <a:prstGeom prst="rect">
+            <a:avLst/>
+          </a:prstGeom>
+          <a:noFill/>
+        </p:spPr>
+        <p:txBody>
+          <a:bodyPr wrap="square">
+            <a:spAutoFit/>
+          </a:bodyPr>
+          <a:lstStyle/>
+          <a:p>
+            <a:pPr algn="l" rtl="0"/>
+            <a:r>
+              <a:rPr sz="1000" b="0">
+                <a:solidFill>
+                  <a:srgbClr val="666666"/>
+                </a:solidFill>
+                <a:latin typeface="Calibri"/>
+              </a:rPr>
+              <a:t>07_  •  9/14</a:t>
             </a:r>
           </a:p>
         </p:txBody>

--- a/output/Module02_V07_Updated.pptx
+++ b/output/Module02_V07_Updated.pptx
@@ -3133,13 +3133,15 @@
           </a:bodyPr>
           <a:lstStyle/>
           <a:p>
-            <a:pPr algn="l" rtl="0"/>
+            <a:pPr algn="r" rtl="0"/>
             <a:r>
               <a:rPr sz="2800" b="1">
                 <a:solidFill>
                   <a:srgbClr val="1F4E79"/>
                 </a:solidFill>
                 <a:latin typeface="Calibri"/>
+                <a:cs typeface="Arial"/>
+                <a:ea typeface="Calibri"/>
               </a:rPr>
               <a:t>Module 02  |  V07</a:t>
             </a:r>
@@ -3175,6 +3177,8 @@
                   <a:srgbClr val="1F3B5C"/>
                 </a:solidFill>
                 <a:latin typeface="Arial"/>
+                <a:cs typeface="Arial"/>
+                <a:ea typeface="Calibri"/>
               </a:rPr>
               <a:t>المستودعات والبحيرات ومعمارية Lakehouse</a:t>
             </a:r>
@@ -3203,13 +3207,15 @@
           </a:bodyPr>
           <a:lstStyle/>
           <a:p>
-            <a:pPr algn="l" rtl="0"/>
+            <a:pPr algn="r" rtl="0"/>
             <a:r>
               <a:rPr sz="3000" b="0">
                 <a:solidFill>
                   <a:srgbClr val="333333"/>
                 </a:solidFill>
                 <a:latin typeface="Calibri"/>
+                <a:cs typeface="Arial"/>
+                <a:ea typeface="Calibri"/>
               </a:rPr>
               <a:t>Warehouses, Data Lakes &amp; Lakehouse</a:t>
             </a:r>
@@ -3245,6 +3251,8 @@
                   <a:srgbClr val="666666"/>
                 </a:solidFill>
                 <a:latin typeface="Arial"/>
+                <a:cs typeface="Arial"/>
+                <a:ea typeface="Calibri"/>
               </a:rPr>
               <a:t>Module 02 — Data &amp; AI Engineering Track  |  الوحدة الثانية</a:t>
             </a:r>
@@ -3273,13 +3281,15 @@
           </a:bodyPr>
           <a:lstStyle/>
           <a:p>
-            <a:pPr algn="l" rtl="0"/>
+            <a:pPr algn="r" rtl="0"/>
             <a:r>
               <a:rPr sz="1400" b="0">
                 <a:solidFill>
                   <a:srgbClr val="666666"/>
                 </a:solidFill>
                 <a:latin typeface="Calibri"/>
+                <a:cs typeface="Arial"/>
+                <a:ea typeface="Calibri"/>
               </a:rPr>
               <a:t>Light theme  |  Bilingual AR/EN  |  Ready to present</a:t>
             </a:r>
@@ -3315,6 +3325,8 @@
                   <a:srgbClr val="666666"/>
                 </a:solidFill>
                 <a:latin typeface="Arial"/>
+                <a:cs typeface="Arial"/>
+                <a:ea typeface="Calibri"/>
               </a:rPr>
               <a:t>Module 02 — Data &amp; AI Engineering Track  |  الوحدة الثانية</a:t>
             </a:r>
@@ -3350,6 +3362,8 @@
                   <a:srgbClr val="666666"/>
                 </a:solidFill>
                 <a:latin typeface="Calibri"/>
+                <a:cs typeface="Arial"/>
+                <a:ea typeface="Calibri"/>
               </a:rPr>
               <a:t>V07  •  1/14</a:t>
             </a:r>
@@ -3385,6 +3399,8 @@
                   <a:srgbClr val="666666"/>
                 </a:solidFill>
                 <a:latin typeface="Arial"/>
+                <a:cs typeface="Arial"/>
+                <a:ea typeface="Calibri"/>
               </a:rPr>
               <a:t>Module 02 — Data &amp; AI Engineering Track  |  الوحدة الثانية</a:t>
             </a:r>
@@ -3420,6 +3436,8 @@
                   <a:srgbClr val="666666"/>
                 </a:solidFill>
                 <a:latin typeface="Calibri"/>
+                <a:cs typeface="Arial"/>
+                <a:ea typeface="Calibri"/>
               </a:rPr>
               <a:t>07_  •  1/14</a:t>
             </a:r>
@@ -3455,6 +3473,8 @@
                   <a:srgbClr val="666666"/>
                 </a:solidFill>
                 <a:latin typeface="Arial"/>
+                <a:cs typeface="Arial"/>
+                <a:ea typeface="Calibri"/>
               </a:rPr>
               <a:t>Module 02 — Data &amp; AI Engineering Track  |  الوحدة الثانية</a:t>
             </a:r>
@@ -3490,6 +3510,8 @@
                   <a:srgbClr val="666666"/>
                 </a:solidFill>
                 <a:latin typeface="Calibri"/>
+                <a:cs typeface="Arial"/>
+                <a:ea typeface="Calibri"/>
               </a:rPr>
               <a:t>07_  •  1/14</a:t>
             </a:r>
@@ -3605,6 +3627,8 @@
                   <a:srgbClr val="1F3B5C"/>
                 </a:solidFill>
                 <a:latin typeface="Arial"/>
+                <a:cs typeface="Arial"/>
+                <a:ea typeface="Calibri"/>
               </a:rPr>
               <a:t>متى تختار كل نموذج؟ / Decision Matrix</a:t>
             </a:r>
@@ -3661,10 +3685,9 @@
                       <a:pPr algn="ctr" rtl="1"/>
                       <a:r>
                         <a:rPr sz="1400" b="1">
-                          <a:solidFill>
-                            <a:srgbClr val="FFFFFF"/>
-                          </a:solidFill>
                           <a:latin typeface="Arial"/>
+                          <a:cs typeface="Arial"/>
+                          <a:ea typeface="Calibri"/>
                         </a:rPr>
                         <a:t>الحالة</a:t>
                       </a:r>
@@ -3684,10 +3707,9 @@
                       <a:pPr algn="ctr" rtl="1"/>
                       <a:r>
                         <a:rPr sz="1400" b="1">
-                          <a:solidFill>
-                            <a:srgbClr val="FFFFFF"/>
-                          </a:solidFill>
                           <a:latin typeface="Arial"/>
+                          <a:cs typeface="Arial"/>
+                          <a:ea typeface="Calibri"/>
                         </a:rPr>
                         <a:t>الاختيار</a:t>
                       </a:r>
@@ -3707,10 +3729,9 @@
                       <a:pPr algn="ctr" rtl="1"/>
                       <a:r>
                         <a:rPr sz="1400" b="1">
-                          <a:solidFill>
-                            <a:srgbClr val="FFFFFF"/>
-                          </a:solidFill>
                           <a:latin typeface="Arial"/>
+                          <a:cs typeface="Arial"/>
+                          <a:ea typeface="Calibri"/>
                         </a:rPr>
                         <a:t>السبب</a:t>
                       </a:r>
@@ -3736,11 +3757,10 @@
                     <a:p>
                       <a:pPr algn="ctr" rtl="1"/>
                       <a:r>
-                        <a:rPr sz="1200">
-                          <a:solidFill>
-                            <a:srgbClr val="333333"/>
-                          </a:solidFill>
+                        <a:rPr sz="1200" b="0">
                           <a:latin typeface="Arial"/>
+                          <a:cs typeface="Arial"/>
+                          <a:ea typeface="Calibri"/>
                         </a:rPr>
                         <a:t>فريق مركزي + تحليلات</a:t>
                       </a:r>
@@ -3757,13 +3777,12 @@
                     <a:bodyPr/>
                     <a:lstStyle/>
                     <a:p>
-                      <a:pPr algn="ctr" rtl="1"/>
+                      <a:pPr algn="ctr" rtl="0"/>
                       <a:r>
-                        <a:rPr sz="1200">
-                          <a:solidFill>
-                            <a:srgbClr val="333333"/>
-                          </a:solidFill>
-                          <a:latin typeface="Arial"/>
+                        <a:rPr sz="1200" b="0">
+                          <a:latin typeface="Calibri"/>
+                          <a:cs typeface="Arial"/>
+                          <a:ea typeface="Calibri"/>
                         </a:rPr>
                         <a:t>Medallion / Lakehouse</a:t>
                       </a:r>
@@ -3782,11 +3801,10 @@
                     <a:p>
                       <a:pPr algn="ctr" rtl="1"/>
                       <a:r>
-                        <a:rPr sz="1200">
-                          <a:solidFill>
-                            <a:srgbClr val="333333"/>
-                          </a:solidFill>
+                        <a:rPr sz="1200" b="0">
                           <a:latin typeface="Arial"/>
+                          <a:cs typeface="Arial"/>
+                          <a:ea typeface="Calibri"/>
                         </a:rPr>
                         <a:t>مرونة + حوكمة طبقية</a:t>
                       </a:r>
@@ -3812,11 +3830,10 @@
                     <a:p>
                       <a:pPr algn="ctr" rtl="1"/>
                       <a:r>
-                        <a:rPr sz="1200">
-                          <a:solidFill>
-                            <a:srgbClr val="333333"/>
-                          </a:solidFill>
+                        <a:rPr sz="1200" b="0">
                           <a:latin typeface="Arial"/>
+                          <a:cs typeface="Arial"/>
+                          <a:ea typeface="Calibri"/>
                         </a:rPr>
                         <a:t>تقارير صارمة</a:t>
                       </a:r>
@@ -3833,13 +3850,12 @@
                     <a:bodyPr/>
                     <a:lstStyle/>
                     <a:p>
-                      <a:pPr algn="ctr" rtl="1"/>
+                      <a:pPr algn="ctr" rtl="0"/>
                       <a:r>
-                        <a:rPr sz="1200">
-                          <a:solidFill>
-                            <a:srgbClr val="333333"/>
-                          </a:solidFill>
-                          <a:latin typeface="Arial"/>
+                        <a:rPr sz="1200" b="0">
+                          <a:latin typeface="Calibri"/>
+                          <a:cs typeface="Arial"/>
+                          <a:ea typeface="Calibri"/>
                         </a:rPr>
                         <a:t>Warehouse</a:t>
                       </a:r>
@@ -3858,11 +3874,10 @@
                     <a:p>
                       <a:pPr algn="ctr" rtl="1"/>
                       <a:r>
-                        <a:rPr sz="1200">
-                          <a:solidFill>
-                            <a:srgbClr val="333333"/>
-                          </a:solidFill>
+                        <a:rPr sz="1200" b="0">
                           <a:latin typeface="Arial"/>
+                          <a:cs typeface="Arial"/>
+                          <a:ea typeface="Calibri"/>
                         </a:rPr>
                         <a:t>SQL سريع + مخطط ثابت</a:t>
                       </a:r>
@@ -3888,11 +3903,10 @@
                     <a:p>
                       <a:pPr algn="ctr" rtl="1"/>
                       <a:r>
-                        <a:rPr sz="1200">
-                          <a:solidFill>
-                            <a:srgbClr val="333333"/>
-                          </a:solidFill>
+                        <a:rPr sz="1200" b="0">
                           <a:latin typeface="Arial"/>
+                          <a:cs typeface="Arial"/>
+                          <a:ea typeface="Calibri"/>
                         </a:rPr>
                         <a:t>فرق مستقلة كبيرة</a:t>
                       </a:r>
@@ -3909,13 +3923,12 @@
                     <a:bodyPr/>
                     <a:lstStyle/>
                     <a:p>
-                      <a:pPr algn="ctr" rtl="1"/>
+                      <a:pPr algn="ctr" rtl="0"/>
                       <a:r>
-                        <a:rPr sz="1200">
-                          <a:solidFill>
-                            <a:srgbClr val="333333"/>
-                          </a:solidFill>
-                          <a:latin typeface="Arial"/>
+                        <a:rPr sz="1200" b="0">
+                          <a:latin typeface="Calibri"/>
+                          <a:cs typeface="Arial"/>
+                          <a:ea typeface="Calibri"/>
                         </a:rPr>
                         <a:t>Data Mesh</a:t>
                       </a:r>
@@ -3934,11 +3947,10 @@
                     <a:p>
                       <a:pPr algn="ctr" rtl="1"/>
                       <a:r>
-                        <a:rPr sz="1200">
-                          <a:solidFill>
-                            <a:srgbClr val="333333"/>
-                          </a:solidFill>
+                        <a:rPr sz="1200" b="0">
                           <a:latin typeface="Arial"/>
+                          <a:cs typeface="Arial"/>
+                          <a:ea typeface="Calibri"/>
                         </a:rPr>
                         <a:t>ملكية لامركزية + عقود</a:t>
                       </a:r>
@@ -3989,6 +4001,8 @@
                   <a:srgbClr val="666666"/>
                 </a:solidFill>
                 <a:latin typeface="Arial"/>
+                <a:cs typeface="Arial"/>
+                <a:ea typeface="Calibri"/>
               </a:rPr>
               <a:t>Module 02 — Data &amp; AI Engineering Track  |  الوحدة الثانية</a:t>
             </a:r>
@@ -4024,6 +4038,8 @@
                   <a:srgbClr val="666666"/>
                 </a:solidFill>
                 <a:latin typeface="Calibri"/>
+                <a:cs typeface="Arial"/>
+                <a:ea typeface="Calibri"/>
               </a:rPr>
               <a:t>V07  •  8/14</a:t>
             </a:r>
@@ -4059,6 +4075,8 @@
                   <a:srgbClr val="666666"/>
                 </a:solidFill>
                 <a:latin typeface="Arial"/>
+                <a:cs typeface="Arial"/>
+                <a:ea typeface="Calibri"/>
               </a:rPr>
               <a:t>Module 02 — Data &amp; AI Engineering Track  |  الوحدة الثانية</a:t>
             </a:r>
@@ -4094,6 +4112,8 @@
                   <a:srgbClr val="666666"/>
                 </a:solidFill>
                 <a:latin typeface="Calibri"/>
+                <a:cs typeface="Arial"/>
+                <a:ea typeface="Calibri"/>
               </a:rPr>
               <a:t>07_  •  10/14</a:t>
             </a:r>
@@ -4129,6 +4149,8 @@
                   <a:srgbClr val="666666"/>
                 </a:solidFill>
                 <a:latin typeface="Arial"/>
+                <a:cs typeface="Arial"/>
+                <a:ea typeface="Calibri"/>
               </a:rPr>
               <a:t>Module 02 — Data &amp; AI Engineering Track  |  الوحدة الثانية</a:t>
             </a:r>
@@ -4164,6 +4186,8 @@
                   <a:srgbClr val="666666"/>
                 </a:solidFill>
                 <a:latin typeface="Calibri"/>
+                <a:cs typeface="Arial"/>
+                <a:ea typeface="Calibri"/>
               </a:rPr>
               <a:t>07_  •  10/14</a:t>
             </a:r>
@@ -4232,6 +4256,8 @@
                   <a:srgbClr val="1F3B5C"/>
                 </a:solidFill>
                 <a:latin typeface="Arial"/>
+                <a:cs typeface="Arial"/>
+                <a:ea typeface="Calibri"/>
               </a:rPr>
               <a:t>أنماط معالجة البيانات الثلاثة / Three Data Patterns</a:t>
             </a:r>
@@ -4287,6 +4313,8 @@
                   <a:srgbClr val="333333"/>
                 </a:solidFill>
                 <a:latin typeface="Arial"/>
+                <a:cs typeface="Arial"/>
+                <a:ea typeface="Calibri"/>
               </a:rPr>
               <a:t>المعمارية المتدرِّجة</a:t>
             </a:r>
@@ -4299,6 +4327,8 @@
                   <a:srgbClr val="666666"/>
                 </a:solidFill>
                 <a:latin typeface="Calibri"/>
+                <a:cs typeface="Arial"/>
+                <a:ea typeface="Calibri"/>
               </a:rPr>
               <a:t>Medallion</a:t>
             </a:r>
@@ -4354,6 +4384,8 @@
                   <a:srgbClr val="333333"/>
                 </a:solidFill>
                 <a:latin typeface="Arial"/>
+                <a:cs typeface="Arial"/>
+                <a:ea typeface="Calibri"/>
               </a:rPr>
               <a:t>فريق مركزي — تحليلات وAI/ML/RAG</a:t>
             </a:r>
@@ -4409,6 +4441,8 @@
                   <a:srgbClr val="333333"/>
                 </a:solidFill>
                 <a:latin typeface="Arial"/>
+                <a:cs typeface="Arial"/>
+                <a:ea typeface="Calibri"/>
               </a:rPr>
               <a:t>مستودع البيانات</a:t>
             </a:r>
@@ -4421,6 +4455,8 @@
                   <a:srgbClr val="666666"/>
                 </a:solidFill>
                 <a:latin typeface="Calibri"/>
+                <a:cs typeface="Arial"/>
+                <a:ea typeface="Calibri"/>
               </a:rPr>
               <a:t>Data Warehouse</a:t>
             </a:r>
@@ -4476,6 +4512,8 @@
                   <a:srgbClr val="333333"/>
                 </a:solidFill>
                 <a:latin typeface="Arial"/>
+                <a:cs typeface="Arial"/>
+                <a:ea typeface="Calibri"/>
               </a:rPr>
               <a:t>فرق BI — تقارير وذكاء أعمال</a:t>
             </a:r>
@@ -4531,6 +4569,8 @@
                   <a:srgbClr val="333333"/>
                 </a:solidFill>
                 <a:latin typeface="Arial"/>
+                <a:cs typeface="Arial"/>
+                <a:ea typeface="Calibri"/>
               </a:rPr>
               <a:t>شبكة البيانات</a:t>
             </a:r>
@@ -4543,6 +4583,8 @@
                   <a:srgbClr val="666666"/>
                 </a:solidFill>
                 <a:latin typeface="Calibri"/>
+                <a:cs typeface="Arial"/>
+                <a:ea typeface="Calibri"/>
               </a:rPr>
               <a:t>Data Mesh</a:t>
             </a:r>
@@ -4598,6 +4640,8 @@
                   <a:srgbClr val="333333"/>
                 </a:solidFill>
                 <a:latin typeface="Arial"/>
+                <a:cs typeface="Arial"/>
+                <a:ea typeface="Calibri"/>
               </a:rPr>
               <a:t>فرق المجالات — مؤسسات كبيرة</a:t>
             </a:r>
@@ -4633,6 +4677,8 @@
                   <a:srgbClr val="666666"/>
                 </a:solidFill>
                 <a:latin typeface="Arial"/>
+                <a:cs typeface="Arial"/>
+                <a:ea typeface="Calibri"/>
               </a:rPr>
               <a:t>المعايير: الفكرة الجوهرية / المالك / الحوكمة / حالة الاستخدام المثلى.</a:t>
             </a:r>
@@ -4640,6 +4686,11 @@
           <a:p>
             <a:pPr algn="r" rtl="0"/>
             <a:r>
+              <a:rPr>
+                <a:latin typeface="Calibri"/>
+                <a:cs typeface="Arial"/>
+                <a:ea typeface="Calibri"/>
+              </a:rPr>
               <a:t>Criteria: core idea / ownership / governance / best use case.</a:t>
             </a:r>
           </a:p>
@@ -4674,6 +4725,8 @@
                   <a:srgbClr val="666666"/>
                 </a:solidFill>
                 <a:latin typeface="Arial"/>
+                <a:cs typeface="Arial"/>
+                <a:ea typeface="Calibri"/>
               </a:rPr>
               <a:t>Module 02 — Data &amp; AI Engineering Track  |  الوحدة الثانية</a:t>
             </a:r>
@@ -4709,6 +4762,8 @@
                   <a:srgbClr val="666666"/>
                 </a:solidFill>
                 <a:latin typeface="Calibri"/>
+                <a:cs typeface="Arial"/>
+                <a:ea typeface="Calibri"/>
               </a:rPr>
               <a:t>07_  •  11/14</a:t>
             </a:r>
@@ -4744,6 +4799,8 @@
                   <a:srgbClr val="666666"/>
                 </a:solidFill>
                 <a:latin typeface="Arial"/>
+                <a:cs typeface="Arial"/>
+                <a:ea typeface="Calibri"/>
               </a:rPr>
               <a:t>Module 02 — Data &amp; AI Engineering Track  |  الوحدة الثانية</a:t>
             </a:r>
@@ -4779,6 +4836,8 @@
                   <a:srgbClr val="666666"/>
                 </a:solidFill>
                 <a:latin typeface="Calibri"/>
+                <a:cs typeface="Arial"/>
+                <a:ea typeface="Calibri"/>
               </a:rPr>
               <a:t>07_  •  11/14</a:t>
             </a:r>
@@ -4894,6 +4953,8 @@
                   <a:srgbClr val="1F3B5C"/>
                 </a:solidFill>
                 <a:latin typeface="Arial"/>
+                <a:cs typeface="Arial"/>
+                <a:ea typeface="Calibri"/>
               </a:rPr>
               <a:t>اختبار قصير / Quick Quiz</a:t>
             </a:r>
@@ -4936,12 +4997,14 @@
                   <a:srgbClr val="333333"/>
                 </a:solidFill>
                 <a:latin typeface="Arial"/>
+                <a:cs typeface="Arial"/>
+                <a:ea typeface="Calibri"/>
               </a:rPr>
               <a:t>• 1. ما معنى «مخطط عند القراءة»؟</a:t>
             </a:r>
           </a:p>
           <a:p>
-            <a:pPr algn="l" rtl="0">
+            <a:pPr algn="r" rtl="0">
               <a:spcBef>
                 <a:spcPts val="200"/>
               </a:spcBef>
@@ -4955,6 +5018,8 @@
                   <a:srgbClr val="666666"/>
                 </a:solidFill>
                 <a:latin typeface="Calibri"/>
+                <a:cs typeface="Arial"/>
+                <a:ea typeface="Calibri"/>
               </a:rPr>
               <a:t>• What does 'schema-on-read' mean?</a:t>
             </a:r>
@@ -4974,12 +5039,14 @@
                   <a:srgbClr val="333333"/>
                 </a:solidFill>
                 <a:latin typeface="Arial"/>
+                <a:cs typeface="Arial"/>
+                <a:ea typeface="Calibri"/>
               </a:rPr>
               <a:t>• 2. ما مكونات عقد البيانات الثلاثة؟</a:t>
             </a:r>
           </a:p>
           <a:p>
-            <a:pPr algn="l" rtl="0">
+            <a:pPr algn="r" rtl="0">
               <a:spcBef>
                 <a:spcPts val="200"/>
               </a:spcBef>
@@ -4993,6 +5060,8 @@
                   <a:srgbClr val="666666"/>
                 </a:solidFill>
                 <a:latin typeface="Calibri"/>
+                <a:cs typeface="Arial"/>
+                <a:ea typeface="Calibri"/>
               </a:rPr>
               <a:t>• What are the three components of a data contract?</a:t>
             </a:r>
@@ -5012,12 +5081,14 @@
                   <a:srgbClr val="333333"/>
                 </a:solidFill>
                 <a:latin typeface="Arial"/>
+                <a:cs typeface="Arial"/>
+                <a:ea typeface="Calibri"/>
               </a:rPr>
               <a:t>• 3. ماذا يضيف Lakehouse عن البحيرة المجردة؟</a:t>
             </a:r>
           </a:p>
           <a:p>
-            <a:pPr algn="l" rtl="0">
+            <a:pPr algn="r" rtl="0">
               <a:spcBef>
                 <a:spcPts val="200"/>
               </a:spcBef>
@@ -5031,6 +5102,8 @@
                   <a:srgbClr val="666666"/>
                 </a:solidFill>
                 <a:latin typeface="Calibri"/>
+                <a:cs typeface="Arial"/>
+                <a:ea typeface="Calibri"/>
               </a:rPr>
               <a:t>• What does a lakehouse add over a raw lake?</a:t>
             </a:r>
@@ -5066,6 +5139,8 @@
                   <a:srgbClr val="666666"/>
                 </a:solidFill>
                 <a:latin typeface="Arial"/>
+                <a:cs typeface="Arial"/>
+                <a:ea typeface="Calibri"/>
               </a:rPr>
               <a:t>Module 02 — Data &amp; AI Engineering Track  |  الوحدة الثانية</a:t>
             </a:r>
@@ -5101,6 +5176,8 @@
                   <a:srgbClr val="666666"/>
                 </a:solidFill>
                 <a:latin typeface="Calibri"/>
+                <a:cs typeface="Arial"/>
+                <a:ea typeface="Calibri"/>
               </a:rPr>
               <a:t>V07  •  9/14</a:t>
             </a:r>
@@ -5136,6 +5213,8 @@
                   <a:srgbClr val="666666"/>
                 </a:solidFill>
                 <a:latin typeface="Arial"/>
+                <a:cs typeface="Arial"/>
+                <a:ea typeface="Calibri"/>
               </a:rPr>
               <a:t>Module 02 — Data &amp; AI Engineering Track  |  الوحدة الثانية</a:t>
             </a:r>
@@ -5171,6 +5250,8 @@
                   <a:srgbClr val="666666"/>
                 </a:solidFill>
                 <a:latin typeface="Calibri"/>
+                <a:cs typeface="Arial"/>
+                <a:ea typeface="Calibri"/>
               </a:rPr>
               <a:t>07_  •  12/14</a:t>
             </a:r>
@@ -5206,6 +5287,8 @@
                   <a:srgbClr val="666666"/>
                 </a:solidFill>
                 <a:latin typeface="Arial"/>
+                <a:cs typeface="Arial"/>
+                <a:ea typeface="Calibri"/>
               </a:rPr>
               <a:t>Module 02 — Data &amp; AI Engineering Track  |  الوحدة الثانية</a:t>
             </a:r>
@@ -5241,6 +5324,8 @@
                   <a:srgbClr val="666666"/>
                 </a:solidFill>
                 <a:latin typeface="Calibri"/>
+                <a:cs typeface="Arial"/>
+                <a:ea typeface="Calibri"/>
               </a:rPr>
               <a:t>07_  •  12/14</a:t>
             </a:r>
@@ -5356,6 +5441,8 @@
                   <a:srgbClr val="1F3B5C"/>
                 </a:solidFill>
                 <a:latin typeface="Arial"/>
+                <a:cs typeface="Arial"/>
+                <a:ea typeface="Calibri"/>
               </a:rPr>
               <a:t>إجابات الاختبار / Quiz Answers</a:t>
             </a:r>
@@ -5398,12 +5485,14 @@
                   <a:srgbClr val="333333"/>
                 </a:solidFill>
                 <a:latin typeface="Arial"/>
+                <a:cs typeface="Arial"/>
+                <a:ea typeface="Calibri"/>
               </a:rPr>
               <a:t>• 1. لا يُفرض المخطط عند الكتابة بل عند القراءة — سمة البحيرات.</a:t>
             </a:r>
           </a:p>
           <a:p>
-            <a:pPr algn="l" rtl="0">
+            <a:pPr algn="r" rtl="0">
               <a:spcBef>
                 <a:spcPts val="200"/>
               </a:spcBef>
@@ -5417,6 +5506,8 @@
                   <a:srgbClr val="666666"/>
                 </a:solidFill>
                 <a:latin typeface="Calibri"/>
+                <a:cs typeface="Arial"/>
+                <a:ea typeface="Calibri"/>
               </a:rPr>
               <a:t>• Schema is enforced at read time, not write time — a lake trait.</a:t>
             </a:r>
@@ -5436,12 +5527,14 @@
                   <a:srgbClr val="333333"/>
                 </a:solidFill>
                 <a:latin typeface="Arial"/>
+                <a:cs typeface="Arial"/>
+                <a:ea typeface="Calibri"/>
               </a:rPr>
               <a:t>• 2. المخطط، الأمان، مستوى الخدمة SLA.</a:t>
             </a:r>
           </a:p>
           <a:p>
-            <a:pPr algn="l" rtl="0">
+            <a:pPr algn="r" rtl="0">
               <a:spcBef>
                 <a:spcPts val="200"/>
               </a:spcBef>
@@ -5455,6 +5548,8 @@
                   <a:srgbClr val="666666"/>
                 </a:solidFill>
                 <a:latin typeface="Calibri"/>
+                <a:cs typeface="Arial"/>
+                <a:ea typeface="Calibri"/>
               </a:rPr>
               <a:t>• Schema, security, and SLA.</a:t>
             </a:r>
@@ -5474,12 +5569,14 @@
                   <a:srgbClr val="333333"/>
                 </a:solidFill>
                 <a:latin typeface="Arial"/>
+                <a:cs typeface="Arial"/>
+                <a:ea typeface="Calibri"/>
               </a:rPr>
               <a:t>• 3. معاملات ACID وأداء SQL وحوكمة.</a:t>
             </a:r>
           </a:p>
           <a:p>
-            <a:pPr algn="l" rtl="0">
+            <a:pPr algn="r" rtl="0">
               <a:spcBef>
                 <a:spcPts val="200"/>
               </a:spcBef>
@@ -5493,6 +5590,8 @@
                   <a:srgbClr val="666666"/>
                 </a:solidFill>
                 <a:latin typeface="Calibri"/>
+                <a:cs typeface="Arial"/>
+                <a:ea typeface="Calibri"/>
               </a:rPr>
               <a:t>• ACID transactions, SQL performance, and governance.</a:t>
             </a:r>
@@ -5528,6 +5627,8 @@
                   <a:srgbClr val="666666"/>
                 </a:solidFill>
                 <a:latin typeface="Arial"/>
+                <a:cs typeface="Arial"/>
+                <a:ea typeface="Calibri"/>
               </a:rPr>
               <a:t>Module 02 — Data &amp; AI Engineering Track  |  الوحدة الثانية</a:t>
             </a:r>
@@ -5563,6 +5664,8 @@
                   <a:srgbClr val="666666"/>
                 </a:solidFill>
                 <a:latin typeface="Calibri"/>
+                <a:cs typeface="Arial"/>
+                <a:ea typeface="Calibri"/>
               </a:rPr>
               <a:t>V07  •  10/14</a:t>
             </a:r>
@@ -5598,6 +5701,8 @@
                   <a:srgbClr val="666666"/>
                 </a:solidFill>
                 <a:latin typeface="Arial"/>
+                <a:cs typeface="Arial"/>
+                <a:ea typeface="Calibri"/>
               </a:rPr>
               <a:t>Module 02 — Data &amp; AI Engineering Track  |  الوحدة الثانية</a:t>
             </a:r>
@@ -5633,6 +5738,8 @@
                   <a:srgbClr val="666666"/>
                 </a:solidFill>
                 <a:latin typeface="Calibri"/>
+                <a:cs typeface="Arial"/>
+                <a:ea typeface="Calibri"/>
               </a:rPr>
               <a:t>07_  •  13/14</a:t>
             </a:r>
@@ -5668,6 +5775,8 @@
                   <a:srgbClr val="666666"/>
                 </a:solidFill>
                 <a:latin typeface="Arial"/>
+                <a:cs typeface="Arial"/>
+                <a:ea typeface="Calibri"/>
               </a:rPr>
               <a:t>Module 02 — Data &amp; AI Engineering Track  |  الوحدة الثانية</a:t>
             </a:r>
@@ -5703,6 +5812,8 @@
                   <a:srgbClr val="666666"/>
                 </a:solidFill>
                 <a:latin typeface="Calibri"/>
+                <a:cs typeface="Arial"/>
+                <a:ea typeface="Calibri"/>
               </a:rPr>
               <a:t>07_  •  13/14</a:t>
             </a:r>
@@ -5818,6 +5929,8 @@
                   <a:srgbClr val="1F3B5C"/>
                 </a:solidFill>
                 <a:latin typeface="Arial"/>
+                <a:cs typeface="Arial"/>
+                <a:ea typeface="Calibri"/>
               </a:rPr>
               <a:t>للاستزادة / Further Reading</a:t>
             </a:r>
@@ -5860,12 +5973,14 @@
                   <a:srgbClr val="333333"/>
                 </a:solidFill>
                 <a:latin typeface="Arial"/>
+                <a:cs typeface="Arial"/>
+                <a:ea typeface="Calibri"/>
               </a:rPr>
               <a:t>• توثيق Delta Lake وApache Iceberg.</a:t>
             </a:r>
           </a:p>
           <a:p>
-            <a:pPr algn="l" rtl="0">
+            <a:pPr algn="r" rtl="0">
               <a:spcBef>
                 <a:spcPts val="200"/>
               </a:spcBef>
@@ -5879,6 +5994,8 @@
                   <a:srgbClr val="666666"/>
                 </a:solidFill>
                 <a:latin typeface="Calibri"/>
+                <a:cs typeface="Arial"/>
+                <a:ea typeface="Calibri"/>
               </a:rPr>
               <a:t>• Delta Lake and Apache Iceberg docs.</a:t>
             </a:r>
@@ -5898,12 +6015,14 @@
                   <a:srgbClr val="333333"/>
                 </a:solidFill>
                 <a:latin typeface="Arial"/>
+                <a:cs typeface="Arial"/>
+                <a:ea typeface="Calibri"/>
               </a:rPr>
               <a:t>• مقالات Data Contracts (Chad Sanderson).</a:t>
             </a:r>
           </a:p>
           <a:p>
-            <a:pPr algn="l" rtl="0">
+            <a:pPr algn="r" rtl="0">
               <a:spcBef>
                 <a:spcPts val="200"/>
               </a:spcBef>
@@ -5917,6 +6036,8 @@
                   <a:srgbClr val="666666"/>
                 </a:solidFill>
                 <a:latin typeface="Calibri"/>
+                <a:cs typeface="Arial"/>
+                <a:ea typeface="Calibri"/>
               </a:rPr>
               <a:t>• Data contracts articles (Chad Sanderson).</a:t>
             </a:r>
@@ -5952,6 +6073,8 @@
                   <a:srgbClr val="666666"/>
                 </a:solidFill>
                 <a:latin typeface="Arial"/>
+                <a:cs typeface="Arial"/>
+                <a:ea typeface="Calibri"/>
               </a:rPr>
               <a:t>Module 02 — Data &amp; AI Engineering Track  |  الوحدة الثانية</a:t>
             </a:r>
@@ -5987,6 +6110,8 @@
                   <a:srgbClr val="666666"/>
                 </a:solidFill>
                 <a:latin typeface="Calibri"/>
+                <a:cs typeface="Arial"/>
+                <a:ea typeface="Calibri"/>
               </a:rPr>
               <a:t>V07  •  11/14</a:t>
             </a:r>
@@ -6022,6 +6147,8 @@
                   <a:srgbClr val="666666"/>
                 </a:solidFill>
                 <a:latin typeface="Arial"/>
+                <a:cs typeface="Arial"/>
+                <a:ea typeface="Calibri"/>
               </a:rPr>
               <a:t>Module 02 — Data &amp; AI Engineering Track  |  الوحدة الثانية</a:t>
             </a:r>
@@ -6057,6 +6184,8 @@
                   <a:srgbClr val="666666"/>
                 </a:solidFill>
                 <a:latin typeface="Calibri"/>
+                <a:cs typeface="Arial"/>
+                <a:ea typeface="Calibri"/>
               </a:rPr>
               <a:t>07_  •  14/14</a:t>
             </a:r>
@@ -6092,6 +6221,8 @@
                   <a:srgbClr val="666666"/>
                 </a:solidFill>
                 <a:latin typeface="Arial"/>
+                <a:cs typeface="Arial"/>
+                <a:ea typeface="Calibri"/>
               </a:rPr>
               <a:t>Module 02 — Data &amp; AI Engineering Track  |  الوحدة الثانية</a:t>
             </a:r>
@@ -6127,6 +6258,8 @@
                   <a:srgbClr val="666666"/>
                 </a:solidFill>
                 <a:latin typeface="Calibri"/>
+                <a:cs typeface="Arial"/>
+                <a:ea typeface="Calibri"/>
               </a:rPr>
               <a:t>07_  •  14/14</a:t>
             </a:r>
@@ -6242,6 +6375,8 @@
                   <a:srgbClr val="1F3B5C"/>
                 </a:solidFill>
                 <a:latin typeface="Arial"/>
+                <a:cs typeface="Arial"/>
+                <a:ea typeface="Calibri"/>
               </a:rPr>
               <a:t>أجندة العرض / Agenda</a:t>
             </a:r>
@@ -6284,12 +6419,14 @@
                   <a:srgbClr val="333333"/>
                 </a:solidFill>
                 <a:latin typeface="Arial"/>
+                <a:cs typeface="Arial"/>
+                <a:ea typeface="Calibri"/>
               </a:rPr>
               <a:t>• V07 — المستودعات والبحيرات ومعمارية Lakehouse</a:t>
             </a:r>
           </a:p>
           <a:p>
-            <a:pPr algn="l" rtl="0">
+            <a:pPr algn="r" rtl="0">
               <a:spcBef>
                 <a:spcPts val="200"/>
               </a:spcBef>
@@ -6303,6 +6440,8 @@
                   <a:srgbClr val="666666"/>
                 </a:solidFill>
                 <a:latin typeface="Calibri"/>
+                <a:cs typeface="Arial"/>
+                <a:ea typeface="Calibri"/>
               </a:rPr>
               <a:t>• V07 — Warehouses, Data Lakes &amp; Lakehouse</a:t>
             </a:r>
@@ -6322,6 +6461,8 @@
                   <a:srgbClr val="333333"/>
                 </a:solidFill>
                 <a:latin typeface="Arial"/>
+                <a:cs typeface="Arial"/>
+                <a:ea typeface="Calibri"/>
               </a:rPr>
               <a:t>• المستودع مقابل البحيرة / Warehouse vs Lake</a:t>
             </a:r>
@@ -6341,6 +6482,8 @@
                   <a:srgbClr val="333333"/>
                 </a:solidFill>
                 <a:latin typeface="Arial"/>
+                <a:cs typeface="Arial"/>
+                <a:ea typeface="Calibri"/>
               </a:rPr>
               <a:t>• معمارية Lakehouse / Lakehouse</a:t>
             </a:r>
@@ -6360,6 +6503,8 @@
                   <a:srgbClr val="333333"/>
                 </a:solidFill>
                 <a:latin typeface="Arial"/>
+                <a:cs typeface="Arial"/>
+                <a:ea typeface="Calibri"/>
               </a:rPr>
               <a:t>• منتجات البيانات وعقودها / Data Products &amp; Contracts</a:t>
             </a:r>
@@ -6379,6 +6524,8 @@
                   <a:srgbClr val="333333"/>
                 </a:solidFill>
                 <a:latin typeface="Arial"/>
+                <a:cs typeface="Arial"/>
+                <a:ea typeface="Calibri"/>
               </a:rPr>
               <a:t>• متى تختار كل نموذج؟ / When to Choose Which</a:t>
             </a:r>
@@ -6398,6 +6545,8 @@
                   <a:srgbClr val="333333"/>
                 </a:solidFill>
                 <a:latin typeface="Arial"/>
+                <a:cs typeface="Arial"/>
+                <a:ea typeface="Calibri"/>
               </a:rPr>
               <a:t>• ربط بالمقرر / Course Tie-in</a:t>
             </a:r>
@@ -6433,6 +6582,8 @@
                   <a:srgbClr val="666666"/>
                 </a:solidFill>
                 <a:latin typeface="Arial"/>
+                <a:cs typeface="Arial"/>
+                <a:ea typeface="Calibri"/>
               </a:rPr>
               <a:t>Module 02 — Data &amp; AI Engineering Track  |  الوحدة الثانية</a:t>
             </a:r>
@@ -6468,6 +6619,8 @@
                   <a:srgbClr val="666666"/>
                 </a:solidFill>
                 <a:latin typeface="Calibri"/>
+                <a:cs typeface="Arial"/>
+                <a:ea typeface="Calibri"/>
               </a:rPr>
               <a:t>V07  •  2/14</a:t>
             </a:r>
@@ -6503,6 +6656,8 @@
                   <a:srgbClr val="666666"/>
                 </a:solidFill>
                 <a:latin typeface="Arial"/>
+                <a:cs typeface="Arial"/>
+                <a:ea typeface="Calibri"/>
               </a:rPr>
               <a:t>Module 02 — Data &amp; AI Engineering Track  |  الوحدة الثانية</a:t>
             </a:r>
@@ -6538,6 +6693,8 @@
                   <a:srgbClr val="666666"/>
                 </a:solidFill>
                 <a:latin typeface="Calibri"/>
+                <a:cs typeface="Arial"/>
+                <a:ea typeface="Calibri"/>
               </a:rPr>
               <a:t>07_  •  2/14</a:t>
             </a:r>
@@ -6573,6 +6730,8 @@
                   <a:srgbClr val="666666"/>
                 </a:solidFill>
                 <a:latin typeface="Arial"/>
+                <a:cs typeface="Arial"/>
+                <a:ea typeface="Calibri"/>
               </a:rPr>
               <a:t>Module 02 — Data &amp; AI Engineering Track  |  الوحدة الثانية</a:t>
             </a:r>
@@ -6608,6 +6767,8 @@
                   <a:srgbClr val="666666"/>
                 </a:solidFill>
                 <a:latin typeface="Calibri"/>
+                <a:cs typeface="Arial"/>
+                <a:ea typeface="Calibri"/>
               </a:rPr>
               <a:t>07_  •  2/14</a:t>
             </a:r>
@@ -6723,6 +6884,8 @@
                   <a:srgbClr val="1F3B5C"/>
                 </a:solidFill>
                 <a:latin typeface="Arial"/>
+                <a:cs typeface="Arial"/>
+                <a:ea typeface="Calibri"/>
               </a:rPr>
               <a:t>المستودع مقابل البحيرة / Warehouse vs Lake</a:t>
             </a:r>
@@ -6765,12 +6928,14 @@
                   <a:srgbClr val="333333"/>
                 </a:solidFill>
                 <a:latin typeface="Arial"/>
+                <a:cs typeface="Arial"/>
+                <a:ea typeface="Calibri"/>
               </a:rPr>
               <a:t>• المستودع: مخطط عند الكتابة، SQL سريع، بيانات مهيكلة فقط.</a:t>
             </a:r>
           </a:p>
           <a:p>
-            <a:pPr algn="l" rtl="0">
+            <a:pPr algn="r" rtl="0">
               <a:spcBef>
                 <a:spcPts val="200"/>
               </a:spcBef>
@@ -6784,6 +6949,8 @@
                   <a:srgbClr val="666666"/>
                 </a:solidFill>
                 <a:latin typeface="Calibri"/>
+                <a:cs typeface="Arial"/>
+                <a:ea typeface="Calibri"/>
               </a:rPr>
               <a:t>• Warehouse: schema-on-write, fast SQL, structured data only.</a:t>
             </a:r>
@@ -6803,12 +6970,14 @@
                   <a:srgbClr val="333333"/>
                 </a:solidFill>
                 <a:latin typeface="Arial"/>
+                <a:cs typeface="Arial"/>
+                <a:ea typeface="Calibri"/>
               </a:rPr>
               <a:t>• البحيرة: مخطط عند القراءة، كل التنسيقات، تكلفة تخزين منخفضة.</a:t>
             </a:r>
           </a:p>
           <a:p>
-            <a:pPr algn="l" rtl="0">
+            <a:pPr algn="r" rtl="0">
               <a:spcBef>
                 <a:spcPts val="200"/>
               </a:spcBef>
@@ -6822,6 +6991,8 @@
                   <a:srgbClr val="666666"/>
                 </a:solidFill>
                 <a:latin typeface="Calibri"/>
+                <a:cs typeface="Arial"/>
+                <a:ea typeface="Calibri"/>
               </a:rPr>
               <a:t>• Lake: schema-on-read, any format, low-cost storage.</a:t>
             </a:r>
@@ -6857,6 +7028,8 @@
                   <a:srgbClr val="666666"/>
                 </a:solidFill>
                 <a:latin typeface="Arial"/>
+                <a:cs typeface="Arial"/>
+                <a:ea typeface="Calibri"/>
               </a:rPr>
               <a:t>Module 02 — Data &amp; AI Engineering Track  |  الوحدة الثانية</a:t>
             </a:r>
@@ -6892,6 +7065,8 @@
                   <a:srgbClr val="666666"/>
                 </a:solidFill>
                 <a:latin typeface="Calibri"/>
+                <a:cs typeface="Arial"/>
+                <a:ea typeface="Calibri"/>
               </a:rPr>
               <a:t>V07  •  3/14</a:t>
             </a:r>
@@ -6927,6 +7102,8 @@
                   <a:srgbClr val="666666"/>
                 </a:solidFill>
                 <a:latin typeface="Arial"/>
+                <a:cs typeface="Arial"/>
+                <a:ea typeface="Calibri"/>
               </a:rPr>
               <a:t>Module 02 — Data &amp; AI Engineering Track  |  الوحدة الثانية</a:t>
             </a:r>
@@ -6962,6 +7139,8 @@
                   <a:srgbClr val="666666"/>
                 </a:solidFill>
                 <a:latin typeface="Calibri"/>
+                <a:cs typeface="Arial"/>
+                <a:ea typeface="Calibri"/>
               </a:rPr>
               <a:t>07_  •  3/14</a:t>
             </a:r>
@@ -6997,6 +7176,8 @@
                   <a:srgbClr val="666666"/>
                 </a:solidFill>
                 <a:latin typeface="Arial"/>
+                <a:cs typeface="Arial"/>
+                <a:ea typeface="Calibri"/>
               </a:rPr>
               <a:t>Module 02 — Data &amp; AI Engineering Track  |  الوحدة الثانية</a:t>
             </a:r>
@@ -7032,6 +7213,8 @@
                   <a:srgbClr val="666666"/>
                 </a:solidFill>
                 <a:latin typeface="Calibri"/>
+                <a:cs typeface="Arial"/>
+                <a:ea typeface="Calibri"/>
               </a:rPr>
               <a:t>07_  •  3/14</a:t>
             </a:r>
@@ -7147,6 +7330,8 @@
                   <a:srgbClr val="1F3B5C"/>
                 </a:solidFill>
                 <a:latin typeface="Arial"/>
+                <a:cs typeface="Arial"/>
+                <a:ea typeface="Calibri"/>
               </a:rPr>
               <a:t>معمارية Lakehouse / Lakehouse</a:t>
             </a:r>
@@ -7189,12 +7374,14 @@
                   <a:srgbClr val="333333"/>
                 </a:solidFill>
                 <a:latin typeface="Arial"/>
+                <a:cs typeface="Arial"/>
+                <a:ea typeface="Calibri"/>
               </a:rPr>
               <a:t>• تجمع مرونة البحيرة وأداء المستودع في منصة واحدة (Delta Lake, Iceberg, Hudi).</a:t>
             </a:r>
           </a:p>
           <a:p>
-            <a:pPr algn="l" rtl="0">
+            <a:pPr algn="r" rtl="0">
               <a:spcBef>
                 <a:spcPts val="200"/>
               </a:spcBef>
@@ -7208,6 +7395,8 @@
                   <a:srgbClr val="666666"/>
                 </a:solidFill>
                 <a:latin typeface="Calibri"/>
+                <a:cs typeface="Arial"/>
+                <a:ea typeface="Calibri"/>
               </a:rPr>
               <a:t>• Combines lake flexibility with warehouse performance (Delta Lake, Iceberg, Hudi).</a:t>
             </a:r>
@@ -7227,12 +7416,14 @@
                   <a:srgbClr val="333333"/>
                 </a:solidFill>
                 <a:latin typeface="Arial"/>
+                <a:cs typeface="Arial"/>
+                <a:ea typeface="Calibri"/>
               </a:rPr>
               <a:t>• طبقات معاملات ACID وفهرسة وحوكمة فوق تخزين الكائنات.</a:t>
             </a:r>
           </a:p>
           <a:p>
-            <a:pPr algn="l" rtl="0">
+            <a:pPr algn="r" rtl="0">
               <a:spcBef>
                 <a:spcPts val="200"/>
               </a:spcBef>
@@ -7246,6 +7437,8 @@
                   <a:srgbClr val="666666"/>
                 </a:solidFill>
                 <a:latin typeface="Calibri"/>
+                <a:cs typeface="Arial"/>
+                <a:ea typeface="Calibri"/>
               </a:rPr>
               <a:t>• ACID transactions, indexing, and governance layers over object storage.</a:t>
             </a:r>
@@ -7281,6 +7474,8 @@
                   <a:srgbClr val="666666"/>
                 </a:solidFill>
                 <a:latin typeface="Arial"/>
+                <a:cs typeface="Arial"/>
+                <a:ea typeface="Calibri"/>
               </a:rPr>
               <a:t>Module 02 — Data &amp; AI Engineering Track  |  الوحدة الثانية</a:t>
             </a:r>
@@ -7316,6 +7511,8 @@
                   <a:srgbClr val="666666"/>
                 </a:solidFill>
                 <a:latin typeface="Calibri"/>
+                <a:cs typeface="Arial"/>
+                <a:ea typeface="Calibri"/>
               </a:rPr>
               <a:t>V07  •  4/14</a:t>
             </a:r>
@@ -7351,6 +7548,8 @@
                   <a:srgbClr val="666666"/>
                 </a:solidFill>
                 <a:latin typeface="Arial"/>
+                <a:cs typeface="Arial"/>
+                <a:ea typeface="Calibri"/>
               </a:rPr>
               <a:t>Module 02 — Data &amp; AI Engineering Track  |  الوحدة الثانية</a:t>
             </a:r>
@@ -7386,6 +7585,8 @@
                   <a:srgbClr val="666666"/>
                 </a:solidFill>
                 <a:latin typeface="Calibri"/>
+                <a:cs typeface="Arial"/>
+                <a:ea typeface="Calibri"/>
               </a:rPr>
               <a:t>07_  •  4/14</a:t>
             </a:r>
@@ -7421,6 +7622,8 @@
                   <a:srgbClr val="666666"/>
                 </a:solidFill>
                 <a:latin typeface="Arial"/>
+                <a:cs typeface="Arial"/>
+                <a:ea typeface="Calibri"/>
               </a:rPr>
               <a:t>Module 02 — Data &amp; AI Engineering Track  |  الوحدة الثانية</a:t>
             </a:r>
@@ -7456,6 +7659,8 @@
                   <a:srgbClr val="666666"/>
                 </a:solidFill>
                 <a:latin typeface="Calibri"/>
+                <a:cs typeface="Arial"/>
+                <a:ea typeface="Calibri"/>
               </a:rPr>
               <a:t>07_  •  4/14</a:t>
             </a:r>
@@ -7524,6 +7729,8 @@
                   <a:srgbClr val="1F3B5C"/>
                 </a:solidFill>
                 <a:latin typeface="Arial"/>
+                <a:cs typeface="Arial"/>
+                <a:ea typeface="Calibri"/>
               </a:rPr>
               <a:t>المعمارية المتدرِّجة Medallion / Medallion Layers</a:t>
             </a:r>
@@ -7579,6 +7786,8 @@
                   <a:srgbClr val="333333"/>
                 </a:solidFill>
                 <a:latin typeface="Arial"/>
+                <a:cs typeface="Arial"/>
+                <a:ea typeface="Calibri"/>
               </a:rPr>
               <a:t>Bronze — بيانات خام غير قابلة للتغيير</a:t>
             </a:r>
@@ -7591,6 +7800,8 @@
                   <a:srgbClr val="666666"/>
                 </a:solidFill>
                 <a:latin typeface="Calibri"/>
+                <a:cs typeface="Arial"/>
+                <a:ea typeface="Calibri"/>
               </a:rPr>
               <a:t>Raw immutable data</a:t>
             </a:r>
@@ -7646,6 +7857,8 @@
                   <a:srgbClr val="333333"/>
                 </a:solidFill>
                 <a:latin typeface="Arial"/>
+                <a:cs typeface="Arial"/>
+                <a:ea typeface="Calibri"/>
               </a:rPr>
               <a:t>Silver — بيانات منقَّاة ومنظَّمة</a:t>
             </a:r>
@@ -7658,6 +7871,8 @@
                   <a:srgbClr val="666666"/>
                 </a:solidFill>
                 <a:latin typeface="Calibri"/>
+                <a:cs typeface="Arial"/>
+                <a:ea typeface="Calibri"/>
               </a:rPr>
               <a:t>Cleansed &amp; structured data</a:t>
             </a:r>
@@ -7713,6 +7928,8 @@
                   <a:srgbClr val="333333"/>
                 </a:solidFill>
                 <a:latin typeface="Arial"/>
+                <a:cs typeface="Arial"/>
+                <a:ea typeface="Calibri"/>
               </a:rPr>
               <a:t>Gold — تجميعات جاهزة للتحليل</a:t>
             </a:r>
@@ -7725,6 +7942,8 @@
                   <a:srgbClr val="666666"/>
                 </a:solidFill>
                 <a:latin typeface="Calibri"/>
+                <a:cs typeface="Arial"/>
+                <a:ea typeface="Calibri"/>
               </a:rPr>
               <a:t>Analytics-ready aggregates</a:t>
             </a:r>
@@ -7850,6 +8069,8 @@
                   <a:srgbClr val="666666"/>
                 </a:solidFill>
                 <a:latin typeface="Arial"/>
+                <a:cs typeface="Arial"/>
+                <a:ea typeface="Calibri"/>
               </a:rPr>
               <a:t>الحوكمة عبر تحسين الجودة بين الطبقات — إدارة مركزية.</a:t>
             </a:r>
@@ -7857,6 +8078,11 @@
           <a:p>
             <a:pPr algn="r" rtl="0"/>
             <a:r>
+              <a:rPr>
+                <a:latin typeface="Calibri"/>
+                <a:cs typeface="Arial"/>
+                <a:ea typeface="Calibri"/>
+              </a:rPr>
               <a:t>Governance via quality improvement between layers — central ownership.</a:t>
             </a:r>
           </a:p>
@@ -7891,6 +8117,8 @@
                   <a:srgbClr val="666666"/>
                 </a:solidFill>
                 <a:latin typeface="Arial"/>
+                <a:cs typeface="Arial"/>
+                <a:ea typeface="Calibri"/>
               </a:rPr>
               <a:t>Module 02 — Data &amp; AI Engineering Track  |  الوحدة الثانية</a:t>
             </a:r>
@@ -7926,6 +8154,8 @@
                   <a:srgbClr val="666666"/>
                 </a:solidFill>
                 <a:latin typeface="Calibri"/>
+                <a:cs typeface="Arial"/>
+                <a:ea typeface="Calibri"/>
               </a:rPr>
               <a:t>07_  •  5/14</a:t>
             </a:r>
@@ -7961,6 +8191,8 @@
                   <a:srgbClr val="666666"/>
                 </a:solidFill>
                 <a:latin typeface="Arial"/>
+                <a:cs typeface="Arial"/>
+                <a:ea typeface="Calibri"/>
               </a:rPr>
               <a:t>Module 02 — Data &amp; AI Engineering Track  |  الوحدة الثانية</a:t>
             </a:r>
@@ -7996,6 +8228,8 @@
                   <a:srgbClr val="666666"/>
                 </a:solidFill>
                 <a:latin typeface="Calibri"/>
+                <a:cs typeface="Arial"/>
+                <a:ea typeface="Calibri"/>
               </a:rPr>
               <a:t>07_  •  5/14</a:t>
             </a:r>
@@ -8111,6 +8345,8 @@
                   <a:srgbClr val="1F3B5C"/>
                 </a:solidFill>
                 <a:latin typeface="Arial"/>
+                <a:cs typeface="Arial"/>
+                <a:ea typeface="Calibri"/>
               </a:rPr>
               <a:t>منتجات البيانات وعقودها / Data Products &amp; Contracts</a:t>
             </a:r>
@@ -8153,12 +8389,14 @@
                   <a:srgbClr val="333333"/>
                 </a:solidFill>
                 <a:latin typeface="Arial"/>
+                <a:cs typeface="Arial"/>
+                <a:ea typeface="Calibri"/>
               </a:rPr>
               <a:t>• منتج البيانات: مجموعة بيانات موثوقة موثّقة قابلة للاكتشاف تُدار كمنتج حقيقي.</a:t>
             </a:r>
           </a:p>
           <a:p>
-            <a:pPr algn="l" rtl="0">
+            <a:pPr algn="r" rtl="0">
               <a:spcBef>
                 <a:spcPts val="200"/>
               </a:spcBef>
@@ -8172,6 +8410,8 @@
                   <a:srgbClr val="666666"/>
                 </a:solidFill>
                 <a:latin typeface="Calibri"/>
+                <a:cs typeface="Arial"/>
+                <a:ea typeface="Calibri"/>
               </a:rPr>
               <a:t>• Data product: a trusted, documented, discoverable dataset managed like a product.</a:t>
             </a:r>
@@ -8191,12 +8431,14 @@
                   <a:srgbClr val="333333"/>
                 </a:solidFill>
                 <a:latin typeface="Arial"/>
+                <a:cs typeface="Arial"/>
+                <a:ea typeface="Calibri"/>
               </a:rPr>
               <a:t>• عقد البيانات: المخطط والأمان ومستوى الخدمة SLA — وحدة التسليم الحديثة.</a:t>
             </a:r>
           </a:p>
           <a:p>
-            <a:pPr algn="l" rtl="0">
+            <a:pPr algn="r" rtl="0">
               <a:spcBef>
                 <a:spcPts val="200"/>
               </a:spcBef>
@@ -8210,6 +8452,8 @@
                   <a:srgbClr val="666666"/>
                 </a:solidFill>
                 <a:latin typeface="Calibri"/>
+                <a:cs typeface="Arial"/>
+                <a:ea typeface="Calibri"/>
               </a:rPr>
               <a:t>• Data contract: schema + security + SLA — the modern delivery unit.</a:t>
             </a:r>
@@ -8245,6 +8489,8 @@
                   <a:srgbClr val="666666"/>
                 </a:solidFill>
                 <a:latin typeface="Arial"/>
+                <a:cs typeface="Arial"/>
+                <a:ea typeface="Calibri"/>
               </a:rPr>
               <a:t>Module 02 — Data &amp; AI Engineering Track  |  الوحدة الثانية</a:t>
             </a:r>
@@ -8280,6 +8526,8 @@
                   <a:srgbClr val="666666"/>
                 </a:solidFill>
                 <a:latin typeface="Calibri"/>
+                <a:cs typeface="Arial"/>
+                <a:ea typeface="Calibri"/>
               </a:rPr>
               <a:t>V07  •  5/14</a:t>
             </a:r>
@@ -8315,6 +8563,8 @@
                   <a:srgbClr val="666666"/>
                 </a:solidFill>
                 <a:latin typeface="Arial"/>
+                <a:cs typeface="Arial"/>
+                <a:ea typeface="Calibri"/>
               </a:rPr>
               <a:t>Module 02 — Data &amp; AI Engineering Track  |  الوحدة الثانية</a:t>
             </a:r>
@@ -8350,6 +8600,8 @@
                   <a:srgbClr val="666666"/>
                 </a:solidFill>
                 <a:latin typeface="Calibri"/>
+                <a:cs typeface="Arial"/>
+                <a:ea typeface="Calibri"/>
               </a:rPr>
               <a:t>07_  •  6/14</a:t>
             </a:r>
@@ -8385,6 +8637,8 @@
                   <a:srgbClr val="666666"/>
                 </a:solidFill>
                 <a:latin typeface="Arial"/>
+                <a:cs typeface="Arial"/>
+                <a:ea typeface="Calibri"/>
               </a:rPr>
               <a:t>Module 02 — Data &amp; AI Engineering Track  |  الوحدة الثانية</a:t>
             </a:r>
@@ -8420,6 +8674,8 @@
                   <a:srgbClr val="666666"/>
                 </a:solidFill>
                 <a:latin typeface="Calibri"/>
+                <a:cs typeface="Arial"/>
+                <a:ea typeface="Calibri"/>
               </a:rPr>
               <a:t>07_  •  6/14</a:t>
             </a:r>
@@ -8488,6 +8744,8 @@
                   <a:srgbClr val="1F3B5C"/>
                 </a:solidFill>
                 <a:latin typeface="Arial"/>
+                <a:cs typeface="Arial"/>
+                <a:ea typeface="Calibri"/>
               </a:rPr>
               <a:t>منتج البيانات وعقد البيانات / Data Product &amp; Contract</a:t>
             </a:r>
@@ -8543,18 +8801,22 @@
                   <a:srgbClr val="333333"/>
                 </a:solidFill>
                 <a:latin typeface="Arial"/>
+                <a:cs typeface="Arial"/>
+                <a:ea typeface="Calibri"/>
               </a:rPr>
               <a:t>منتج البيانات</a:t>
             </a:r>
           </a:p>
           <a:p>
-            <a:pPr algn="ctr" rtl="0"/>
+            <a:pPr algn="ctr" rtl="1"/>
             <a:r>
               <a:rPr sz="1400">
                 <a:solidFill>
                   <a:srgbClr val="666666"/>
                 </a:solidFill>
-                <a:latin typeface="Calibri"/>
+                <a:latin typeface="Arial"/>
+                <a:cs typeface="Arial"/>
+                <a:ea typeface="Calibri"/>
               </a:rPr>
               <a:t>Data Product — موثوق • موثّق • قابل للاكتشاف</a:t>
             </a:r>
@@ -8610,6 +8872,8 @@
                   <a:srgbClr val="333333"/>
                 </a:solidFill>
                 <a:latin typeface="Arial"/>
+                <a:cs typeface="Arial"/>
+                <a:ea typeface="Calibri"/>
               </a:rPr>
               <a:t>عقد البيانات</a:t>
             </a:r>
@@ -8622,6 +8886,8 @@
                   <a:srgbClr val="666666"/>
                 </a:solidFill>
                 <a:latin typeface="Calibri"/>
+                <a:cs typeface="Arial"/>
+                <a:ea typeface="Calibri"/>
               </a:rPr>
               <a:t>Data Contract</a:t>
             </a:r>
@@ -8677,6 +8943,8 @@
                   <a:srgbClr val="333333"/>
                 </a:solidFill>
                 <a:latin typeface="Arial"/>
+                <a:cs typeface="Arial"/>
+                <a:ea typeface="Calibri"/>
               </a:rPr>
               <a:t>المخطط / Schema</a:t>
             </a:r>
@@ -8732,6 +9000,8 @@
                   <a:srgbClr val="333333"/>
                 </a:solidFill>
                 <a:latin typeface="Arial"/>
+                <a:cs typeface="Arial"/>
+                <a:ea typeface="Calibri"/>
               </a:rPr>
               <a:t>الأمان / Security</a:t>
             </a:r>
@@ -8787,6 +9057,8 @@
                   <a:srgbClr val="333333"/>
                 </a:solidFill>
                 <a:latin typeface="Arial"/>
+                <a:cs typeface="Arial"/>
+                <a:ea typeface="Calibri"/>
               </a:rPr>
               <a:t>مستوى الخدمة / SLA</a:t>
             </a:r>
@@ -8867,6 +9139,8 @@
                   <a:srgbClr val="666666"/>
                 </a:solidFill>
                 <a:latin typeface="Arial"/>
+                <a:cs typeface="Arial"/>
+                <a:ea typeface="Calibri"/>
               </a:rPr>
               <a:t>وحدة التسليم الحديثة في هندسة البيانات.</a:t>
             </a:r>
@@ -8874,6 +9148,11 @@
           <a:p>
             <a:pPr algn="r" rtl="0"/>
             <a:r>
+              <a:rPr>
+                <a:latin typeface="Calibri"/>
+                <a:cs typeface="Arial"/>
+                <a:ea typeface="Calibri"/>
+              </a:rPr>
               <a:t>The modern delivery unit in data engineering.</a:t>
             </a:r>
           </a:p>
@@ -8908,6 +9187,8 @@
                   <a:srgbClr val="666666"/>
                 </a:solidFill>
                 <a:latin typeface="Arial"/>
+                <a:cs typeface="Arial"/>
+                <a:ea typeface="Calibri"/>
               </a:rPr>
               <a:t>Module 02 — Data &amp; AI Engineering Track  |  الوحدة الثانية</a:t>
             </a:r>
@@ -8943,6 +9224,8 @@
                   <a:srgbClr val="666666"/>
                 </a:solidFill>
                 <a:latin typeface="Calibri"/>
+                <a:cs typeface="Arial"/>
+                <a:ea typeface="Calibri"/>
               </a:rPr>
               <a:t>07_  •  7/14</a:t>
             </a:r>
@@ -8978,6 +9261,8 @@
                   <a:srgbClr val="666666"/>
                 </a:solidFill>
                 <a:latin typeface="Arial"/>
+                <a:cs typeface="Arial"/>
+                <a:ea typeface="Calibri"/>
               </a:rPr>
               <a:t>Module 02 — Data &amp; AI Engineering Track  |  الوحدة الثانية</a:t>
             </a:r>
@@ -9013,6 +9298,8 @@
                   <a:srgbClr val="666666"/>
                 </a:solidFill>
                 <a:latin typeface="Calibri"/>
+                <a:cs typeface="Arial"/>
+                <a:ea typeface="Calibri"/>
               </a:rPr>
               <a:t>07_  •  7/14</a:t>
             </a:r>
@@ -9128,6 +9415,8 @@
                   <a:srgbClr val="1F3B5C"/>
                 </a:solidFill>
                 <a:latin typeface="Arial"/>
+                <a:cs typeface="Arial"/>
+                <a:ea typeface="Calibri"/>
               </a:rPr>
               <a:t>متى تختار كل نموذج؟ / When to Choose Which</a:t>
             </a:r>
@@ -9170,12 +9459,14 @@
                   <a:srgbClr val="333333"/>
                 </a:solidFill>
                 <a:latin typeface="Arial"/>
+                <a:cs typeface="Arial"/>
+                <a:ea typeface="Calibri"/>
               </a:rPr>
               <a:t>• فريق مركزي وتحليلات → Medallion على Lakehouse؛ تقارير صارمة → مستودع؛ مؤسسة كبيرة بفرق مستقلة → Data Mesh.</a:t>
             </a:r>
           </a:p>
           <a:p>
-            <a:pPr algn="l" rtl="0">
+            <a:pPr algn="r" rtl="0">
               <a:spcBef>
                 <a:spcPts val="200"/>
               </a:spcBef>
@@ -9189,6 +9480,8 @@
                   <a:srgbClr val="666666"/>
                 </a:solidFill>
                 <a:latin typeface="Calibri"/>
+                <a:cs typeface="Arial"/>
+                <a:ea typeface="Calibri"/>
               </a:rPr>
               <a:t>• Central team + analytics → Medallion; strict BI → warehouse; large independent teams → data mesh.</a:t>
             </a:r>
@@ -9224,6 +9517,8 @@
                   <a:srgbClr val="666666"/>
                 </a:solidFill>
                 <a:latin typeface="Arial"/>
+                <a:cs typeface="Arial"/>
+                <a:ea typeface="Calibri"/>
               </a:rPr>
               <a:t>Module 02 — Data &amp; AI Engineering Track  |  الوحدة الثانية</a:t>
             </a:r>
@@ -9259,6 +9554,8 @@
                   <a:srgbClr val="666666"/>
                 </a:solidFill>
                 <a:latin typeface="Calibri"/>
+                <a:cs typeface="Arial"/>
+                <a:ea typeface="Calibri"/>
               </a:rPr>
               <a:t>V07  •  6/14</a:t>
             </a:r>
@@ -9294,6 +9591,8 @@
                   <a:srgbClr val="666666"/>
                 </a:solidFill>
                 <a:latin typeface="Arial"/>
+                <a:cs typeface="Arial"/>
+                <a:ea typeface="Calibri"/>
               </a:rPr>
               <a:t>Module 02 — Data &amp; AI Engineering Track  |  الوحدة الثانية</a:t>
             </a:r>
@@ -9329,6 +9628,8 @@
                   <a:srgbClr val="666666"/>
                 </a:solidFill>
                 <a:latin typeface="Calibri"/>
+                <a:cs typeface="Arial"/>
+                <a:ea typeface="Calibri"/>
               </a:rPr>
               <a:t>07_  •  8/14</a:t>
             </a:r>
@@ -9364,6 +9665,8 @@
                   <a:srgbClr val="666666"/>
                 </a:solidFill>
                 <a:latin typeface="Arial"/>
+                <a:cs typeface="Arial"/>
+                <a:ea typeface="Calibri"/>
               </a:rPr>
               <a:t>Module 02 — Data &amp; AI Engineering Track  |  الوحدة الثانية</a:t>
             </a:r>
@@ -9399,6 +9702,8 @@
                   <a:srgbClr val="666666"/>
                 </a:solidFill>
                 <a:latin typeface="Calibri"/>
+                <a:cs typeface="Arial"/>
+                <a:ea typeface="Calibri"/>
               </a:rPr>
               <a:t>07_  •  8/14</a:t>
             </a:r>
@@ -9514,6 +9819,8 @@
                   <a:srgbClr val="1F3B5C"/>
                 </a:solidFill>
                 <a:latin typeface="Arial"/>
+                <a:cs typeface="Arial"/>
+                <a:ea typeface="Calibri"/>
               </a:rPr>
               <a:t>ربط بالمقرر / Course Tie-in</a:t>
             </a:r>
@@ -9556,12 +9863,14 @@
                   <a:srgbClr val="333333"/>
                 </a:solidFill>
                 <a:latin typeface="Arial"/>
+                <a:cs typeface="Arial"/>
+                <a:ea typeface="Calibri"/>
               </a:rPr>
               <a:t>• مسار عملي: Bronze → Silver → Gold ينتهي في فهرس متجهي يغذّي تطبيق RAG (مختبر L03).</a:t>
             </a:r>
           </a:p>
           <a:p>
-            <a:pPr algn="l" rtl="0">
+            <a:pPr algn="r" rtl="0">
               <a:spcBef>
                 <a:spcPts val="200"/>
               </a:spcBef>
@@ -9575,6 +9884,8 @@
                   <a:srgbClr val="666666"/>
                 </a:solidFill>
                 <a:latin typeface="Calibri"/>
+                <a:cs typeface="Arial"/>
+                <a:ea typeface="Calibri"/>
               </a:rPr>
               <a:t>• Hands-on path: Bronze → Silver → Gold ending in a vector index feeding a RAG app (lab L03).</a:t>
             </a:r>
@@ -9610,6 +9921,8 @@
                   <a:srgbClr val="666666"/>
                 </a:solidFill>
                 <a:latin typeface="Arial"/>
+                <a:cs typeface="Arial"/>
+                <a:ea typeface="Calibri"/>
               </a:rPr>
               <a:t>Module 02 — Data &amp; AI Engineering Track  |  الوحدة الثانية</a:t>
             </a:r>
@@ -9645,6 +9958,8 @@
                   <a:srgbClr val="666666"/>
                 </a:solidFill>
                 <a:latin typeface="Calibri"/>
+                <a:cs typeface="Arial"/>
+                <a:ea typeface="Calibri"/>
               </a:rPr>
               <a:t>V07  •  7/14</a:t>
             </a:r>
@@ -9680,6 +9995,8 @@
                   <a:srgbClr val="666666"/>
                 </a:solidFill>
                 <a:latin typeface="Arial"/>
+                <a:cs typeface="Arial"/>
+                <a:ea typeface="Calibri"/>
               </a:rPr>
               <a:t>Module 02 — Data &amp; AI Engineering Track  |  الوحدة الثانية</a:t>
             </a:r>
@@ -9715,6 +10032,8 @@
                   <a:srgbClr val="666666"/>
                 </a:solidFill>
                 <a:latin typeface="Calibri"/>
+                <a:cs typeface="Arial"/>
+                <a:ea typeface="Calibri"/>
               </a:rPr>
               <a:t>07_  •  9/14</a:t>
             </a:r>
@@ -9750,6 +10069,8 @@
                   <a:srgbClr val="666666"/>
                 </a:solidFill>
                 <a:latin typeface="Arial"/>
+                <a:cs typeface="Arial"/>
+                <a:ea typeface="Calibri"/>
               </a:rPr>
               <a:t>Module 02 — Data &amp; AI Engineering Track  |  الوحدة الثانية</a:t>
             </a:r>
@@ -9785,6 +10106,8 @@
                   <a:srgbClr val="666666"/>
                 </a:solidFill>
                 <a:latin typeface="Calibri"/>
+                <a:cs typeface="Arial"/>
+                <a:ea typeface="Calibri"/>
               </a:rPr>
               <a:t>07_  •  9/14</a:t>
             </a:r>

--- a/output/Module02_V07_Updated.pptx
+++ b/output/Module02_V07_Updated.pptx
@@ -5,22 +5,23 @@
     <p:sldMasterId id="2147483648" r:id="rId1"/>
   </p:sldMasterIdLst>
   <p:sldIdLst>
-    <p:sldId id="256" r:id="rId7"/>
-    <p:sldId id="257" r:id="rId8"/>
-    <p:sldId id="258" r:id="rId9"/>
-    <p:sldId id="259" r:id="rId10"/>
-    <p:sldId id="267" r:id="rId18"/>
-    <p:sldId id="260" r:id="rId11"/>
-    <p:sldId id="268" r:id="rId19"/>
-    <p:sldId id="261" r:id="rId12"/>
-    <p:sldId id="262" r:id="rId13"/>
-    <p:sldId id="263" r:id="rId14"/>
-    <p:sldId id="269" r:id="rId20"/>
-    <p:sldId id="264" r:id="rId15"/>
-    <p:sldId id="265" r:id="rId16"/>
-    <p:sldId id="266" r:id="rId17"/>
+    <p:sldId id="256" r:id="rId2"/>
+    <p:sldId id="257" r:id="rId3"/>
+    <p:sldId id="258" r:id="rId4"/>
+    <p:sldId id="267" r:id="rId5"/>
+    <p:sldId id="259" r:id="rId6"/>
+    <p:sldId id="268" r:id="rId7"/>
+    <p:sldId id="260" r:id="rId8"/>
+    <p:sldId id="269" r:id="rId9"/>
+    <p:sldId id="261" r:id="rId10"/>
+    <p:sldId id="262" r:id="rId11"/>
+    <p:sldId id="263" r:id="rId12"/>
+    <p:sldId id="270" r:id="rId13"/>
+    <p:sldId id="264" r:id="rId14"/>
+    <p:sldId id="265" r:id="rId15"/>
+    <p:sldId id="266" r:id="rId16"/>
   </p:sldIdLst>
-  <p:sldSz cx="12191695" cy="6858000" type="screen4x3"/>
+  <p:sldSz cx="12192000" cy="6858000"/>
   <p:notesSz cx="6858000" cy="9144000"/>
   <p:defaultTextStyle>
     <a:defPPr>
@@ -117,6 +118,22 @@
       </a:defRPr>
     </a:lvl9pPr>
   </p:defaultTextStyle>
+  <p:extLst>
+    <p:ext uri="{EFAFB233-063F-42B5-8137-9DF3F51BA10A}">
+      <p15:sldGuideLst xmlns:p15="http://schemas.microsoft.com/office/powerpoint/2012/main">
+        <p15:guide id="1" orient="horz" pos="2160">
+          <p15:clr>
+            <a:srgbClr val="A4A3A4"/>
+          </p15:clr>
+        </p15:guide>
+        <p15:guide id="2" pos="2880">
+          <p15:clr>
+            <a:srgbClr val="A4A3A4"/>
+          </p15:clr>
+        </p15:guide>
+      </p15:sldGuideLst>
+    </p:ext>
+  </p:extLst>
 </p:presentation>
 </file>
 
@@ -158,10 +175,9 @@
           <a:lstStyle/>
           <a:p>
             <a:r>
-              <a:rPr lang="en-US" smtClean="0"/>
+              <a:rPr lang="en-US"/>
               <a:t>Click to edit Master title style</a:t>
             </a:r>
-            <a:endParaRPr lang="en-US"/>
           </a:p>
         </p:txBody>
       </p:sp>
@@ -277,10 +293,9 @@
           </a:lstStyle>
           <a:p>
             <a:r>
-              <a:rPr lang="en-US" smtClean="0"/>
+              <a:rPr lang="en-US"/>
               <a:t>Click to edit Master subtitle style</a:t>
             </a:r>
-            <a:endParaRPr lang="en-US"/>
           </a:p>
         </p:txBody>
       </p:sp>
@@ -301,7 +316,7 @@
           <a:p>
             <a:fld id="{5BCAD085-E8A6-8845-BD4E-CB4CCA059FC4}" type="datetimeFigureOut">
               <a:rPr lang="en-US" smtClean="0"/>
-              <a:t>1/27/13</a:t>
+              <a:t>9/9/26</a:t>
             </a:fld>
             <a:endParaRPr lang="en-US"/>
           </a:p>
@@ -395,10 +410,9 @@
           <a:lstStyle/>
           <a:p>
             <a:r>
-              <a:rPr lang="en-US" smtClean="0"/>
+              <a:rPr lang="en-US"/>
               <a:t>Click to edit Master title style</a:t>
             </a:r>
-            <a:endParaRPr lang="en-US"/>
           </a:p>
         </p:txBody>
       </p:sp>
@@ -419,38 +433,37 @@
           <a:p>
             <a:pPr lvl="0"/>
             <a:r>
-              <a:rPr lang="en-US" smtClean="0"/>
+              <a:rPr lang="en-US"/>
               <a:t>Click to edit Master text styles</a:t>
             </a:r>
           </a:p>
           <a:p>
             <a:pPr lvl="1"/>
             <a:r>
-              <a:rPr lang="en-US" smtClean="0"/>
+              <a:rPr lang="en-US"/>
               <a:t>Second level</a:t>
             </a:r>
           </a:p>
           <a:p>
             <a:pPr lvl="2"/>
             <a:r>
-              <a:rPr lang="en-US" smtClean="0"/>
+              <a:rPr lang="en-US"/>
               <a:t>Third level</a:t>
             </a:r>
           </a:p>
           <a:p>
             <a:pPr lvl="3"/>
             <a:r>
-              <a:rPr lang="en-US" smtClean="0"/>
+              <a:rPr lang="en-US"/>
               <a:t>Fourth level</a:t>
             </a:r>
           </a:p>
           <a:p>
             <a:pPr lvl="4"/>
             <a:r>
-              <a:rPr lang="en-US" smtClean="0"/>
+              <a:rPr lang="en-US"/>
               <a:t>Fifth level</a:t>
             </a:r>
-            <a:endParaRPr lang="en-US"/>
           </a:p>
         </p:txBody>
       </p:sp>
@@ -471,7 +484,7 @@
           <a:p>
             <a:fld id="{5BCAD085-E8A6-8845-BD4E-CB4CCA059FC4}" type="datetimeFigureOut">
               <a:rPr lang="en-US" smtClean="0"/>
-              <a:t>1/27/13</a:t>
+              <a:t>9/9/26</a:t>
             </a:fld>
             <a:endParaRPr lang="en-US"/>
           </a:p>
@@ -570,10 +583,9 @@
           <a:lstStyle/>
           <a:p>
             <a:r>
-              <a:rPr lang="en-US" smtClean="0"/>
+              <a:rPr lang="en-US"/>
               <a:t>Click to edit Master title style</a:t>
             </a:r>
-            <a:endParaRPr lang="en-US"/>
           </a:p>
         </p:txBody>
       </p:sp>
@@ -599,38 +611,37 @@
           <a:p>
             <a:pPr lvl="0"/>
             <a:r>
-              <a:rPr lang="en-US" smtClean="0"/>
+              <a:rPr lang="en-US"/>
               <a:t>Click to edit Master text styles</a:t>
             </a:r>
           </a:p>
           <a:p>
             <a:pPr lvl="1"/>
             <a:r>
-              <a:rPr lang="en-US" smtClean="0"/>
+              <a:rPr lang="en-US"/>
               <a:t>Second level</a:t>
             </a:r>
           </a:p>
           <a:p>
             <a:pPr lvl="2"/>
             <a:r>
-              <a:rPr lang="en-US" smtClean="0"/>
+              <a:rPr lang="en-US"/>
               <a:t>Third level</a:t>
             </a:r>
           </a:p>
           <a:p>
             <a:pPr lvl="3"/>
             <a:r>
-              <a:rPr lang="en-US" smtClean="0"/>
+              <a:rPr lang="en-US"/>
               <a:t>Fourth level</a:t>
             </a:r>
           </a:p>
           <a:p>
             <a:pPr lvl="4"/>
             <a:r>
-              <a:rPr lang="en-US" smtClean="0"/>
+              <a:rPr lang="en-US"/>
               <a:t>Fifth level</a:t>
             </a:r>
-            <a:endParaRPr lang="en-US"/>
           </a:p>
         </p:txBody>
       </p:sp>
@@ -651,7 +662,7 @@
           <a:p>
             <a:fld id="{5BCAD085-E8A6-8845-BD4E-CB4CCA059FC4}" type="datetimeFigureOut">
               <a:rPr lang="en-US" smtClean="0"/>
-              <a:t>1/27/13</a:t>
+              <a:t>9/9/26</a:t>
             </a:fld>
             <a:endParaRPr lang="en-US"/>
           </a:p>
@@ -745,10 +756,9 @@
           <a:lstStyle/>
           <a:p>
             <a:r>
-              <a:rPr lang="en-US" smtClean="0"/>
+              <a:rPr lang="en-US"/>
               <a:t>Click to edit Master title style</a:t>
             </a:r>
-            <a:endParaRPr lang="en-US"/>
           </a:p>
         </p:txBody>
       </p:sp>
@@ -769,38 +779,37 @@
           <a:p>
             <a:pPr lvl="0"/>
             <a:r>
-              <a:rPr lang="en-US" smtClean="0"/>
+              <a:rPr lang="en-US"/>
               <a:t>Click to edit Master text styles</a:t>
             </a:r>
           </a:p>
           <a:p>
             <a:pPr lvl="1"/>
             <a:r>
-              <a:rPr lang="en-US" smtClean="0"/>
+              <a:rPr lang="en-US"/>
               <a:t>Second level</a:t>
             </a:r>
           </a:p>
           <a:p>
             <a:pPr lvl="2"/>
             <a:r>
-              <a:rPr lang="en-US" smtClean="0"/>
+              <a:rPr lang="en-US"/>
               <a:t>Third level</a:t>
             </a:r>
           </a:p>
           <a:p>
             <a:pPr lvl="3"/>
             <a:r>
-              <a:rPr lang="en-US" smtClean="0"/>
+              <a:rPr lang="en-US"/>
               <a:t>Fourth level</a:t>
             </a:r>
           </a:p>
           <a:p>
             <a:pPr lvl="4"/>
             <a:r>
-              <a:rPr lang="en-US" smtClean="0"/>
+              <a:rPr lang="en-US"/>
               <a:t>Fifth level</a:t>
             </a:r>
-            <a:endParaRPr lang="en-US"/>
           </a:p>
         </p:txBody>
       </p:sp>
@@ -821,7 +830,7 @@
           <a:p>
             <a:fld id="{5BCAD085-E8A6-8845-BD4E-CB4CCA059FC4}" type="datetimeFigureOut">
               <a:rPr lang="en-US" smtClean="0"/>
-              <a:t>1/27/13</a:t>
+              <a:t>9/9/26</a:t>
             </a:fld>
             <a:endParaRPr lang="en-US"/>
           </a:p>
@@ -924,10 +933,9 @@
           </a:lstStyle>
           <a:p>
             <a:r>
-              <a:rPr lang="en-US" smtClean="0"/>
+              <a:rPr lang="en-US"/>
               <a:t>Click to edit Master title style</a:t>
             </a:r>
-            <a:endParaRPr lang="en-US"/>
           </a:p>
         </p:txBody>
       </p:sp>
@@ -1044,7 +1052,7 @@
           <a:p>
             <a:pPr lvl="0"/>
             <a:r>
-              <a:rPr lang="en-US" smtClean="0"/>
+              <a:rPr lang="en-US"/>
               <a:t>Click to edit Master text styles</a:t>
             </a:r>
           </a:p>
@@ -1067,7 +1075,7 @@
           <a:p>
             <a:fld id="{5BCAD085-E8A6-8845-BD4E-CB4CCA059FC4}" type="datetimeFigureOut">
               <a:rPr lang="en-US" smtClean="0"/>
-              <a:t>1/27/13</a:t>
+              <a:t>9/9/26</a:t>
             </a:fld>
             <a:endParaRPr lang="en-US"/>
           </a:p>
@@ -1161,10 +1169,9 @@
           <a:lstStyle/>
           <a:p>
             <a:r>
-              <a:rPr lang="en-US" smtClean="0"/>
+              <a:rPr lang="en-US"/>
               <a:t>Click to edit Master title style</a:t>
             </a:r>
-            <a:endParaRPr lang="en-US"/>
           </a:p>
         </p:txBody>
       </p:sp>
@@ -1218,38 +1225,37 @@
           <a:p>
             <a:pPr lvl="0"/>
             <a:r>
-              <a:rPr lang="en-US" smtClean="0"/>
+              <a:rPr lang="en-US"/>
               <a:t>Click to edit Master text styles</a:t>
             </a:r>
           </a:p>
           <a:p>
             <a:pPr lvl="1"/>
             <a:r>
-              <a:rPr lang="en-US" smtClean="0"/>
+              <a:rPr lang="en-US"/>
               <a:t>Second level</a:t>
             </a:r>
           </a:p>
           <a:p>
             <a:pPr lvl="2"/>
             <a:r>
-              <a:rPr lang="en-US" smtClean="0"/>
+              <a:rPr lang="en-US"/>
               <a:t>Third level</a:t>
             </a:r>
           </a:p>
           <a:p>
             <a:pPr lvl="3"/>
             <a:r>
-              <a:rPr lang="en-US" smtClean="0"/>
+              <a:rPr lang="en-US"/>
               <a:t>Fourth level</a:t>
             </a:r>
           </a:p>
           <a:p>
             <a:pPr lvl="4"/>
             <a:r>
-              <a:rPr lang="en-US" smtClean="0"/>
+              <a:rPr lang="en-US"/>
               <a:t>Fifth level</a:t>
             </a:r>
-            <a:endParaRPr lang="en-US"/>
           </a:p>
         </p:txBody>
       </p:sp>
@@ -1303,38 +1309,37 @@
           <a:p>
             <a:pPr lvl="0"/>
             <a:r>
-              <a:rPr lang="en-US" smtClean="0"/>
+              <a:rPr lang="en-US"/>
               <a:t>Click to edit Master text styles</a:t>
             </a:r>
           </a:p>
           <a:p>
             <a:pPr lvl="1"/>
             <a:r>
-              <a:rPr lang="en-US" smtClean="0"/>
+              <a:rPr lang="en-US"/>
               <a:t>Second level</a:t>
             </a:r>
           </a:p>
           <a:p>
             <a:pPr lvl="2"/>
             <a:r>
-              <a:rPr lang="en-US" smtClean="0"/>
+              <a:rPr lang="en-US"/>
               <a:t>Third level</a:t>
             </a:r>
           </a:p>
           <a:p>
             <a:pPr lvl="3"/>
             <a:r>
-              <a:rPr lang="en-US" smtClean="0"/>
+              <a:rPr lang="en-US"/>
               <a:t>Fourth level</a:t>
             </a:r>
           </a:p>
           <a:p>
             <a:pPr lvl="4"/>
             <a:r>
-              <a:rPr lang="en-US" smtClean="0"/>
+              <a:rPr lang="en-US"/>
               <a:t>Fifth level</a:t>
             </a:r>
-            <a:endParaRPr lang="en-US"/>
           </a:p>
         </p:txBody>
       </p:sp>
@@ -1355,7 +1360,7 @@
           <a:p>
             <a:fld id="{5BCAD085-E8A6-8845-BD4E-CB4CCA059FC4}" type="datetimeFigureOut">
               <a:rPr lang="en-US" smtClean="0"/>
-              <a:t>1/27/13</a:t>
+              <a:t>9/9/26</a:t>
             </a:fld>
             <a:endParaRPr lang="en-US"/>
           </a:p>
@@ -1453,10 +1458,9 @@
           </a:lstStyle>
           <a:p>
             <a:r>
-              <a:rPr lang="en-US" smtClean="0"/>
+              <a:rPr lang="en-US"/>
               <a:t>Click to edit Master title style</a:t>
             </a:r>
-            <a:endParaRPr lang="en-US"/>
           </a:p>
         </p:txBody>
       </p:sp>
@@ -1519,7 +1523,7 @@
           <a:p>
             <a:pPr lvl="0"/>
             <a:r>
-              <a:rPr lang="en-US" smtClean="0"/>
+              <a:rPr lang="en-US"/>
               <a:t>Click to edit Master text styles</a:t>
             </a:r>
           </a:p>
@@ -1575,38 +1579,37 @@
           <a:p>
             <a:pPr lvl="0"/>
             <a:r>
-              <a:rPr lang="en-US" smtClean="0"/>
+              <a:rPr lang="en-US"/>
               <a:t>Click to edit Master text styles</a:t>
             </a:r>
           </a:p>
           <a:p>
             <a:pPr lvl="1"/>
             <a:r>
-              <a:rPr lang="en-US" smtClean="0"/>
+              <a:rPr lang="en-US"/>
               <a:t>Second level</a:t>
             </a:r>
           </a:p>
           <a:p>
             <a:pPr lvl="2"/>
             <a:r>
-              <a:rPr lang="en-US" smtClean="0"/>
+              <a:rPr lang="en-US"/>
               <a:t>Third level</a:t>
             </a:r>
           </a:p>
           <a:p>
             <a:pPr lvl="3"/>
             <a:r>
-              <a:rPr lang="en-US" smtClean="0"/>
+              <a:rPr lang="en-US"/>
               <a:t>Fourth level</a:t>
             </a:r>
           </a:p>
           <a:p>
             <a:pPr lvl="4"/>
             <a:r>
-              <a:rPr lang="en-US" smtClean="0"/>
+              <a:rPr lang="en-US"/>
               <a:t>Fifth level</a:t>
             </a:r>
-            <a:endParaRPr lang="en-US"/>
           </a:p>
         </p:txBody>
       </p:sp>
@@ -1669,7 +1672,7 @@
           <a:p>
             <a:pPr lvl="0"/>
             <a:r>
-              <a:rPr lang="en-US" smtClean="0"/>
+              <a:rPr lang="en-US"/>
               <a:t>Click to edit Master text styles</a:t>
             </a:r>
           </a:p>
@@ -1725,38 +1728,37 @@
           <a:p>
             <a:pPr lvl="0"/>
             <a:r>
-              <a:rPr lang="en-US" smtClean="0"/>
+              <a:rPr lang="en-US"/>
               <a:t>Click to edit Master text styles</a:t>
             </a:r>
           </a:p>
           <a:p>
             <a:pPr lvl="1"/>
             <a:r>
-              <a:rPr lang="en-US" smtClean="0"/>
+              <a:rPr lang="en-US"/>
               <a:t>Second level</a:t>
             </a:r>
           </a:p>
           <a:p>
             <a:pPr lvl="2"/>
             <a:r>
-              <a:rPr lang="en-US" smtClean="0"/>
+              <a:rPr lang="en-US"/>
               <a:t>Third level</a:t>
             </a:r>
           </a:p>
           <a:p>
             <a:pPr lvl="3"/>
             <a:r>
-              <a:rPr lang="en-US" smtClean="0"/>
+              <a:rPr lang="en-US"/>
               <a:t>Fourth level</a:t>
             </a:r>
           </a:p>
           <a:p>
             <a:pPr lvl="4"/>
             <a:r>
-              <a:rPr lang="en-US" smtClean="0"/>
+              <a:rPr lang="en-US"/>
               <a:t>Fifth level</a:t>
             </a:r>
-            <a:endParaRPr lang="en-US"/>
           </a:p>
         </p:txBody>
       </p:sp>
@@ -1777,7 +1779,7 @@
           <a:p>
             <a:fld id="{5BCAD085-E8A6-8845-BD4E-CB4CCA059FC4}" type="datetimeFigureOut">
               <a:rPr lang="en-US" smtClean="0"/>
-              <a:t>1/27/13</a:t>
+              <a:t>9/9/26</a:t>
             </a:fld>
             <a:endParaRPr lang="en-US"/>
           </a:p>
@@ -1871,10 +1873,9 @@
           <a:lstStyle/>
           <a:p>
             <a:r>
-              <a:rPr lang="en-US" smtClean="0"/>
+              <a:rPr lang="en-US"/>
               <a:t>Click to edit Master title style</a:t>
             </a:r>
-            <a:endParaRPr lang="en-US"/>
           </a:p>
         </p:txBody>
       </p:sp>
@@ -1895,7 +1896,7 @@
           <a:p>
             <a:fld id="{5BCAD085-E8A6-8845-BD4E-CB4CCA059FC4}" type="datetimeFigureOut">
               <a:rPr lang="en-US" smtClean="0"/>
-              <a:t>1/27/13</a:t>
+              <a:t>9/9/26</a:t>
             </a:fld>
             <a:endParaRPr lang="en-US"/>
           </a:p>
@@ -1990,7 +1991,7 @@
           <a:p>
             <a:fld id="{5BCAD085-E8A6-8845-BD4E-CB4CCA059FC4}" type="datetimeFigureOut">
               <a:rPr lang="en-US" smtClean="0"/>
-              <a:t>1/27/13</a:t>
+              <a:t>9/9/26</a:t>
             </a:fld>
             <a:endParaRPr lang="en-US"/>
           </a:p>
@@ -2093,10 +2094,9 @@
           </a:lstStyle>
           <a:p>
             <a:r>
-              <a:rPr lang="en-US" smtClean="0"/>
+              <a:rPr lang="en-US"/>
               <a:t>Click to edit Master title style</a:t>
             </a:r>
-            <a:endParaRPr lang="en-US"/>
           </a:p>
         </p:txBody>
       </p:sp>
@@ -2150,38 +2150,37 @@
           <a:p>
             <a:pPr lvl="0"/>
             <a:r>
-              <a:rPr lang="en-US" smtClean="0"/>
+              <a:rPr lang="en-US"/>
               <a:t>Click to edit Master text styles</a:t>
             </a:r>
           </a:p>
           <a:p>
             <a:pPr lvl="1"/>
             <a:r>
-              <a:rPr lang="en-US" smtClean="0"/>
+              <a:rPr lang="en-US"/>
               <a:t>Second level</a:t>
             </a:r>
           </a:p>
           <a:p>
             <a:pPr lvl="2"/>
             <a:r>
-              <a:rPr lang="en-US" smtClean="0"/>
+              <a:rPr lang="en-US"/>
               <a:t>Third level</a:t>
             </a:r>
           </a:p>
           <a:p>
             <a:pPr lvl="3"/>
             <a:r>
-              <a:rPr lang="en-US" smtClean="0"/>
+              <a:rPr lang="en-US"/>
               <a:t>Fourth level</a:t>
             </a:r>
           </a:p>
           <a:p>
             <a:pPr lvl="4"/>
             <a:r>
-              <a:rPr lang="en-US" smtClean="0"/>
+              <a:rPr lang="en-US"/>
               <a:t>Fifth level</a:t>
             </a:r>
-            <a:endParaRPr lang="en-US"/>
           </a:p>
         </p:txBody>
       </p:sp>
@@ -2244,7 +2243,7 @@
           <a:p>
             <a:pPr lvl="0"/>
             <a:r>
-              <a:rPr lang="en-US" smtClean="0"/>
+              <a:rPr lang="en-US"/>
               <a:t>Click to edit Master text styles</a:t>
             </a:r>
           </a:p>
@@ -2267,7 +2266,7 @@
           <a:p>
             <a:fld id="{5BCAD085-E8A6-8845-BD4E-CB4CCA059FC4}" type="datetimeFigureOut">
               <a:rPr lang="en-US" smtClean="0"/>
-              <a:t>1/27/13</a:t>
+              <a:t>9/9/26</a:t>
             </a:fld>
             <a:endParaRPr lang="en-US"/>
           </a:p>
@@ -2370,10 +2369,9 @@
           </a:lstStyle>
           <a:p>
             <a:r>
-              <a:rPr lang="en-US" smtClean="0"/>
+              <a:rPr lang="en-US"/>
               <a:t>Click to edit Master title style</a:t>
             </a:r>
-            <a:endParaRPr lang="en-US"/>
           </a:p>
         </p:txBody>
       </p:sp>
@@ -2497,7 +2495,7 @@
           <a:p>
             <a:pPr lvl="0"/>
             <a:r>
-              <a:rPr lang="en-US" smtClean="0"/>
+              <a:rPr lang="en-US"/>
               <a:t>Click to edit Master text styles</a:t>
             </a:r>
           </a:p>
@@ -2520,7 +2518,7 @@
           <a:p>
             <a:fld id="{5BCAD085-E8A6-8845-BD4E-CB4CCA059FC4}" type="datetimeFigureOut">
               <a:rPr lang="en-US" smtClean="0"/>
-              <a:t>1/27/13</a:t>
+              <a:t>9/9/26</a:t>
             </a:fld>
             <a:endParaRPr lang="en-US"/>
           </a:p>
@@ -2629,10 +2627,9 @@
           <a:lstStyle/>
           <a:p>
             <a:r>
-              <a:rPr lang="en-US" smtClean="0"/>
+              <a:rPr lang="en-US"/>
               <a:t>Click to edit Master title style</a:t>
             </a:r>
-            <a:endParaRPr lang="en-US"/>
           </a:p>
         </p:txBody>
       </p:sp>
@@ -2663,38 +2660,37 @@
           <a:p>
             <a:pPr lvl="0"/>
             <a:r>
-              <a:rPr lang="en-US" smtClean="0"/>
+              <a:rPr lang="en-US"/>
               <a:t>Click to edit Master text styles</a:t>
             </a:r>
           </a:p>
           <a:p>
             <a:pPr lvl="1"/>
             <a:r>
-              <a:rPr lang="en-US" smtClean="0"/>
+              <a:rPr lang="en-US"/>
               <a:t>Second level</a:t>
             </a:r>
           </a:p>
           <a:p>
             <a:pPr lvl="2"/>
             <a:r>
-              <a:rPr lang="en-US" smtClean="0"/>
+              <a:rPr lang="en-US"/>
               <a:t>Third level</a:t>
             </a:r>
           </a:p>
           <a:p>
             <a:pPr lvl="3"/>
             <a:r>
-              <a:rPr lang="en-US" smtClean="0"/>
+              <a:rPr lang="en-US"/>
               <a:t>Fourth level</a:t>
             </a:r>
           </a:p>
           <a:p>
             <a:pPr lvl="4"/>
             <a:r>
-              <a:rPr lang="en-US" smtClean="0"/>
+              <a:rPr lang="en-US"/>
               <a:t>Fifth level</a:t>
             </a:r>
-            <a:endParaRPr lang="en-US"/>
           </a:p>
         </p:txBody>
       </p:sp>
@@ -2733,7 +2729,7 @@
           <a:p>
             <a:fld id="{5BCAD085-E8A6-8845-BD4E-CB4CCA059FC4}" type="datetimeFigureOut">
               <a:rPr lang="en-US" smtClean="0"/>
-              <a:t>1/27/13</a:t>
+              <a:t>9/9/26</a:t>
             </a:fld>
             <a:endParaRPr lang="en-US"/>
           </a:p>
@@ -3092,7 +3088,7 @@
 </file>
 
 <file path=ppt/slides/slide1.xml><?xml version="1.0" encoding="utf-8"?>
-<p:sld xmlns:a="http://schemas.openxmlformats.org/drawingml/2006/main" xmlns:p="http://schemas.openxmlformats.org/presentationml/2006/main" xmlns:r="http://schemas.openxmlformats.org/officeDocument/2006/relationships">
+<p:sld xmlns:a="http://schemas.openxmlformats.org/drawingml/2006/main" xmlns:r="http://schemas.openxmlformats.org/officeDocument/2006/relationships" xmlns:p="http://schemas.openxmlformats.org/presentationml/2006/main">
   <p:cSld>
     <p:bg>
       <p:bgPr>
@@ -3108,7 +3104,14 @@
         <p:cNvGrpSpPr/>
         <p:nvPr/>
       </p:nvGrpSpPr>
-      <p:grpSpPr/>
+      <p:grpSpPr>
+        <a:xfrm>
+          <a:off x="0" y="0"/>
+          <a:ext cx="0" cy="0"/>
+          <a:chOff x="0" y="0"/>
+          <a:chExt cx="0" cy="0"/>
+        </a:xfrm>
+      </p:grpSpPr>
       <p:sp>
         <p:nvSpPr>
           <p:cNvPr id="2" name="TextBox 1"/>
@@ -3314,7 +3317,7 @@
                 </a:solidFill>
                 <a:latin typeface="Calibri"/>
               </a:rPr>
-              <a:t>V07  •  1/14</a:t>
+              <a:t>V07  •  1/15</a:t>
             </a:r>
           </a:p>
         </p:txBody>
@@ -3328,7 +3331,7 @@
 </file>
 
 <file path=ppt/slides/slide10.xml><?xml version="1.0" encoding="utf-8"?>
-<p:sld xmlns:a="http://schemas.openxmlformats.org/drawingml/2006/main" xmlns:p="http://schemas.openxmlformats.org/presentationml/2006/main" xmlns:r="http://schemas.openxmlformats.org/officeDocument/2006/relationships">
+<p:sld xmlns:a="http://schemas.openxmlformats.org/drawingml/2006/main" xmlns:r="http://schemas.openxmlformats.org/officeDocument/2006/relationships" xmlns:p="http://schemas.openxmlformats.org/presentationml/2006/main">
   <p:cSld>
     <p:bg>
       <p:bgPr>
@@ -3344,7 +3347,14 @@
         <p:cNvGrpSpPr/>
         <p:nvPr/>
       </p:nvGrpSpPr>
-      <p:grpSpPr/>
+      <p:grpSpPr>
+        <a:xfrm>
+          <a:off x="0" y="0"/>
+          <a:ext cx="0" cy="0"/>
+          <a:chOff x="0" y="0"/>
+          <a:chExt cx="0" cy="0"/>
+        </a:xfrm>
+      </p:grpSpPr>
       <p:sp>
         <p:nvSpPr>
           <p:cNvPr id="2" name="Rectangle 1"/>
@@ -3388,6 +3398,7 @@
           <a:lstStyle/>
           <a:p>
             <a:pPr algn="ctr"/>
+            <a:endParaRPr/>
           </a:p>
         </p:txBody>
       </p:sp>
@@ -3421,7 +3432,7 @@
                 </a:solidFill>
                 <a:latin typeface="Arial"/>
               </a:rPr>
-              <a:t>إجابات الاختبار / Quiz Answers</a:t>
+              <a:t>ربط بالمقرر / Course Tie-in</a:t>
             </a:r>
           </a:p>
         </p:txBody>
@@ -3457,13 +3468,13 @@
               </a:spcAft>
             </a:pPr>
             <a:r>
-              <a:rPr sz="1800">
+              <a:rPr sz="1900">
                 <a:solidFill>
                   <a:srgbClr val="333333"/>
                 </a:solidFill>
                 <a:latin typeface="Arial"/>
               </a:rPr>
-              <a:t>• 1. لا يُفرض المخطط عند الكتابة بل عند القراءة — سمة البحيرات.</a:t>
+              <a:t>• مسار عملي: Bronze → Silver → Gold ينتهي في فهرس متجهي يغذّي تطبيق RAG (مختبر L03).</a:t>
             </a:r>
           </a:p>
           <a:p>
@@ -3476,89 +3487,13 @@
               </a:spcAft>
             </a:pPr>
             <a:r>
-              <a:rPr sz="1500">
+              <a:rPr sz="1600">
                 <a:solidFill>
                   <a:srgbClr val="666666"/>
                 </a:solidFill>
                 <a:latin typeface="Calibri"/>
               </a:rPr>
-              <a:t>• Schema is enforced at read time, not write time — a lake trait.</a:t>
-            </a:r>
-          </a:p>
-          <a:p>
-            <a:pPr algn="r" rtl="1">
-              <a:spcBef>
-                <a:spcPts val="200"/>
-              </a:spcBef>
-              <a:spcAft>
-                <a:spcPts val="1000"/>
-              </a:spcAft>
-            </a:pPr>
-            <a:r>
-              <a:rPr sz="1800">
-                <a:solidFill>
-                  <a:srgbClr val="333333"/>
-                </a:solidFill>
-                <a:latin typeface="Arial"/>
-              </a:rPr>
-              <a:t>• 2. المخطط، الأمان، مستوى الخدمة SLA.</a:t>
-            </a:r>
-          </a:p>
-          <a:p>
-            <a:pPr algn="l" rtl="0">
-              <a:spcBef>
-                <a:spcPts val="200"/>
-              </a:spcBef>
-              <a:spcAft>
-                <a:spcPts val="1000"/>
-              </a:spcAft>
-            </a:pPr>
-            <a:r>
-              <a:rPr sz="1500">
-                <a:solidFill>
-                  <a:srgbClr val="666666"/>
-                </a:solidFill>
-                <a:latin typeface="Calibri"/>
-              </a:rPr>
-              <a:t>• Schema, security, and SLA.</a:t>
-            </a:r>
-          </a:p>
-          <a:p>
-            <a:pPr algn="r" rtl="1">
-              <a:spcBef>
-                <a:spcPts val="200"/>
-              </a:spcBef>
-              <a:spcAft>
-                <a:spcPts val="1000"/>
-              </a:spcAft>
-            </a:pPr>
-            <a:r>
-              <a:rPr sz="1800">
-                <a:solidFill>
-                  <a:srgbClr val="333333"/>
-                </a:solidFill>
-                <a:latin typeface="Arial"/>
-              </a:rPr>
-              <a:t>• 3. معاملات ACID وأداء SQL وحوكمة.</a:t>
-            </a:r>
-          </a:p>
-          <a:p>
-            <a:pPr algn="l" rtl="0">
-              <a:spcBef>
-                <a:spcPts val="200"/>
-              </a:spcBef>
-              <a:spcAft>
-                <a:spcPts val="1000"/>
-              </a:spcAft>
-            </a:pPr>
-            <a:r>
-              <a:rPr sz="1500">
-                <a:solidFill>
-                  <a:srgbClr val="666666"/>
-                </a:solidFill>
-                <a:latin typeface="Calibri"/>
-              </a:rPr>
-              <a:t>• ACID transactions, SQL performance, and governance.</a:t>
+              <a:t>• Hands-on path: Bronze → Silver → Gold ending in a vector index feeding a RAG app (lab L03).</a:t>
             </a:r>
           </a:p>
         </p:txBody>
@@ -3628,7 +3563,7 @@
                 </a:solidFill>
                 <a:latin typeface="Calibri"/>
               </a:rPr>
-              <a:t>V07  •  13/14</a:t>
+              <a:t>V07  •  10/15</a:t>
             </a:r>
           </a:p>
         </p:txBody>
@@ -3642,7 +3577,7 @@
 </file>
 
 <file path=ppt/slides/slide11.xml><?xml version="1.0" encoding="utf-8"?>
-<p:sld xmlns:a="http://schemas.openxmlformats.org/drawingml/2006/main" xmlns:p="http://schemas.openxmlformats.org/presentationml/2006/main" xmlns:r="http://schemas.openxmlformats.org/officeDocument/2006/relationships">
+<p:sld xmlns:a="http://schemas.openxmlformats.org/drawingml/2006/main" xmlns:r="http://schemas.openxmlformats.org/officeDocument/2006/relationships" xmlns:p="http://schemas.openxmlformats.org/presentationml/2006/main">
   <p:cSld>
     <p:bg>
       <p:bgPr>
@@ -3658,7 +3593,14 @@
         <p:cNvGrpSpPr/>
         <p:nvPr/>
       </p:nvGrpSpPr>
-      <p:grpSpPr/>
+      <p:grpSpPr>
+        <a:xfrm>
+          <a:off x="0" y="0"/>
+          <a:ext cx="0" cy="0"/>
+          <a:chOff x="0" y="0"/>
+          <a:chExt cx="0" cy="0"/>
+        </a:xfrm>
+      </p:grpSpPr>
       <p:sp>
         <p:nvSpPr>
           <p:cNvPr id="2" name="Rectangle 1"/>
@@ -3702,3433 +3644,7 @@
           <a:lstStyle/>
           <a:p>
             <a:pPr algn="ctr"/>
-          </a:p>
-        </p:txBody>
-      </p:sp>
-      <p:sp>
-        <p:nvSpPr>
-          <p:cNvPr id="3" name="TextBox 2"/>
-          <p:cNvSpPr txBox="1"/>
-          <p:nvPr/>
-        </p:nvSpPr>
-        <p:spPr>
-          <a:xfrm>
-            <a:off x="640080" y="182880"/>
-            <a:ext cx="10972800" cy="640080"/>
-          </a:xfrm>
-          <a:prstGeom prst="rect">
-            <a:avLst/>
-          </a:prstGeom>
-          <a:noFill/>
-        </p:spPr>
-        <p:txBody>
-          <a:bodyPr wrap="square">
-            <a:spAutoFit/>
-          </a:bodyPr>
-          <a:lstStyle/>
-          <a:p>
-            <a:pPr algn="r" rtl="1"/>
-            <a:r>
-              <a:rPr sz="3200" b="1">
-                <a:solidFill>
-                  <a:srgbClr val="1F3B5C"/>
-                </a:solidFill>
-                <a:latin typeface="Arial"/>
-              </a:rPr>
-              <a:t>للاستزادة / Further Reading</a:t>
-            </a:r>
-          </a:p>
-        </p:txBody>
-      </p:sp>
-      <p:sp>
-        <p:nvSpPr>
-          <p:cNvPr id="4" name="TextBox 3"/>
-          <p:cNvSpPr txBox="1"/>
-          <p:nvPr/>
-        </p:nvSpPr>
-        <p:spPr>
-          <a:xfrm>
-            <a:off x="640080" y="1280160"/>
-            <a:ext cx="10972800" cy="5212080"/>
-          </a:xfrm>
-          <a:prstGeom prst="rect">
-            <a:avLst/>
-          </a:prstGeom>
-          <a:noFill/>
-        </p:spPr>
-        <p:txBody>
-          <a:bodyPr wrap="square">
-            <a:spAutoFit/>
-          </a:bodyPr>
-          <a:lstStyle/>
-          <a:p>
-            <a:pPr algn="r" rtl="1">
-              <a:spcBef>
-                <a:spcPts val="200"/>
-              </a:spcBef>
-              <a:spcAft>
-                <a:spcPts val="1000"/>
-              </a:spcAft>
-            </a:pPr>
-            <a:r>
-              <a:rPr sz="2000">
-                <a:solidFill>
-                  <a:srgbClr val="333333"/>
-                </a:solidFill>
-                <a:latin typeface="Arial"/>
-              </a:rPr>
-              <a:t>• توثيق Delta Lake وApache Iceberg.</a:t>
-            </a:r>
-          </a:p>
-          <a:p>
-            <a:pPr algn="l" rtl="0">
-              <a:spcBef>
-                <a:spcPts val="200"/>
-              </a:spcBef>
-              <a:spcAft>
-                <a:spcPts val="1000"/>
-              </a:spcAft>
-            </a:pPr>
-            <a:r>
-              <a:rPr sz="1700">
-                <a:solidFill>
-                  <a:srgbClr val="666666"/>
-                </a:solidFill>
-                <a:latin typeface="Calibri"/>
-              </a:rPr>
-              <a:t>• Delta Lake and Apache Iceberg docs.</a:t>
-            </a:r>
-          </a:p>
-          <a:p>
-            <a:pPr algn="r" rtl="1">
-              <a:spcBef>
-                <a:spcPts val="200"/>
-              </a:spcBef>
-              <a:spcAft>
-                <a:spcPts val="1000"/>
-              </a:spcAft>
-            </a:pPr>
-            <a:r>
-              <a:rPr sz="2000">
-                <a:solidFill>
-                  <a:srgbClr val="333333"/>
-                </a:solidFill>
-                <a:latin typeface="Arial"/>
-              </a:rPr>
-              <a:t>• مقالات Data Contracts (Chad Sanderson).</a:t>
-            </a:r>
-          </a:p>
-          <a:p>
-            <a:pPr algn="l" rtl="0">
-              <a:spcBef>
-                <a:spcPts val="200"/>
-              </a:spcBef>
-              <a:spcAft>
-                <a:spcPts val="1000"/>
-              </a:spcAft>
-            </a:pPr>
-            <a:r>
-              <a:rPr sz="1700">
-                <a:solidFill>
-                  <a:srgbClr val="666666"/>
-                </a:solidFill>
-                <a:latin typeface="Calibri"/>
-              </a:rPr>
-              <a:t>• Data contracts articles (Chad Sanderson).</a:t>
-            </a:r>
-          </a:p>
-        </p:txBody>
-      </p:sp>
-      <p:sp>
-        <p:nvSpPr>
-          <p:cNvPr id="5" name="TextBox 4"/>
-          <p:cNvSpPr txBox="1"/>
-          <p:nvPr/>
-        </p:nvSpPr>
-        <p:spPr>
-          <a:xfrm>
-            <a:off x="640080" y="6400800"/>
-            <a:ext cx="8686800" cy="320040"/>
-          </a:xfrm>
-          <a:prstGeom prst="rect">
-            <a:avLst/>
-          </a:prstGeom>
-          <a:noFill/>
-        </p:spPr>
-        <p:txBody>
-          <a:bodyPr wrap="square">
-            <a:spAutoFit/>
-          </a:bodyPr>
-          <a:lstStyle/>
-          <a:p>
-            <a:pPr algn="r" rtl="1"/>
-            <a:r>
-              <a:rPr sz="1000" b="0">
-                <a:solidFill>
-                  <a:srgbClr val="666666"/>
-                </a:solidFill>
-                <a:latin typeface="Arial"/>
-              </a:rPr>
-              <a:t>Module 02 — Data &amp; AI Engineering Track  |  الوحدة الثانية</a:t>
-            </a:r>
-          </a:p>
-        </p:txBody>
-      </p:sp>
-      <p:sp>
-        <p:nvSpPr>
-          <p:cNvPr id="6" name="TextBox 5"/>
-          <p:cNvSpPr txBox="1"/>
-          <p:nvPr/>
-        </p:nvSpPr>
-        <p:spPr>
-          <a:xfrm>
-            <a:off x="9601200" y="6400800"/>
-            <a:ext cx="1920240" cy="320040"/>
-          </a:xfrm>
-          <a:prstGeom prst="rect">
-            <a:avLst/>
-          </a:prstGeom>
-          <a:noFill/>
-        </p:spPr>
-        <p:txBody>
-          <a:bodyPr wrap="square">
-            <a:spAutoFit/>
-          </a:bodyPr>
-          <a:lstStyle/>
-          <a:p>
-            <a:pPr algn="l" rtl="0"/>
-            <a:r>
-              <a:rPr sz="1000" b="0">
-                <a:solidFill>
-                  <a:srgbClr val="666666"/>
-                </a:solidFill>
-                <a:latin typeface="Calibri"/>
-              </a:rPr>
-              <a:t>V07  •  14/14</a:t>
-            </a:r>
-          </a:p>
-        </p:txBody>
-      </p:sp>
-    </p:spTree>
-  </p:cSld>
-  <p:clrMapOvr>
-    <a:masterClrMapping/>
-  </p:clrMapOvr>
-</p:sld>
-</file>
-
-<file path=ppt/slides/slide12.xml><?xml version="1.0" encoding="utf-8"?>
-<p:sld xmlns:a="http://schemas.openxmlformats.org/drawingml/2006/main" xmlns:p="http://schemas.openxmlformats.org/presentationml/2006/main" xmlns:r="http://schemas.openxmlformats.org/officeDocument/2006/relationships">
-  <p:cSld>
-    <p:bg>
-      <p:bgPr>
-        <a:solidFill>
-          <a:srgbClr val="FFFFFF"/>
-        </a:solidFill>
-        <a:effectLst/>
-      </p:bgPr>
-    </p:bg>
-    <p:spTree>
-      <p:nvGrpSpPr>
-        <p:cNvPr id="1" name=""/>
-        <p:cNvGrpSpPr/>
-        <p:nvPr/>
-      </p:nvGrpSpPr>
-      <p:grpSpPr/>
-      <p:sp>
-        <p:nvSpPr>
-          <p:cNvPr id="2" name="TextBox 1"/>
-          <p:cNvSpPr txBox="1"/>
-          <p:nvPr/>
-        </p:nvSpPr>
-        <p:spPr>
-          <a:xfrm>
-            <a:off x="640080" y="137160"/>
-            <a:ext cx="10972800" cy="640080"/>
-          </a:xfrm>
-          <a:prstGeom prst="rect">
-            <a:avLst/>
-          </a:prstGeom>
-          <a:noFill/>
-        </p:spPr>
-        <p:txBody>
-          <a:bodyPr wrap="none">
-            <a:spAutoFit/>
-          </a:bodyPr>
-          <a:lstStyle/>
-          <a:p>
-            <a:pPr algn="r" rtl="1"/>
-            <a:r>
-              <a:rPr sz="3000" b="1">
-                <a:solidFill>
-                  <a:srgbClr val="1F3B5C"/>
-                </a:solidFill>
-                <a:latin typeface="Arial"/>
-              </a:rPr>
-              <a:t>المعمارية المتدرِّجة Medallion / Medallion Layers</a:t>
-            </a:r>
-          </a:p>
-        </p:txBody>
-      </p:sp>
-      <p:sp>
-        <p:nvSpPr>
-          <p:cNvPr id="3" name="Rounded Rectangle 2"/>
-          <p:cNvSpPr/>
-          <p:nvPr/>
-        </p:nvSpPr>
-        <p:spPr>
-          <a:xfrm>
-            <a:off x="2286000" y="1188720"/>
-            <a:ext cx="7589520" cy="1234440"/>
-          </a:xfrm>
-          <a:prstGeom prst="roundRect">
-            <a:avLst/>
-          </a:prstGeom>
-          <a:solidFill>
-            <a:srgbClr val="FDE9D9"/>
-          </a:solidFill>
-          <a:ln w="12700">
-            <a:solidFill>
-              <a:srgbClr val="1F4E79"/>
-            </a:solidFill>
-          </a:ln>
-          <a:effectLst/>
-        </p:spPr>
-        <p:style>
-          <a:lnRef idx="1">
-            <a:schemeClr val="accent1"/>
-          </a:lnRef>
-          <a:fillRef idx="3">
-            <a:schemeClr val="accent1"/>
-          </a:fillRef>
-          <a:effectRef idx="2">
-            <a:schemeClr val="accent1"/>
-          </a:effectRef>
-          <a:fontRef idx="minor">
-            <a:schemeClr val="lt1"/>
-          </a:fontRef>
-        </p:style>
-        <p:txBody>
-          <a:bodyPr rtlCol="0" anchor="ctr" wrap="square"/>
-          <a:lstStyle/>
-          <a:p>
-            <a:pPr algn="ctr" rtl="1"/>
-            <a:r>
-              <a:rPr sz="1800" b="1">
-                <a:solidFill>
-                  <a:srgbClr val="333333"/>
-                </a:solidFill>
-                <a:latin typeface="Arial"/>
-              </a:rPr>
-              <a:t>Bronze — بيانات خام غير قابلة للتغيير</a:t>
-            </a:r>
-          </a:p>
-          <a:p>
-            <a:pPr algn="ctr" rtl="0"/>
-            <a:r>
-              <a:rPr sz="1300">
-                <a:solidFill>
-                  <a:srgbClr val="666666"/>
-                </a:solidFill>
-                <a:latin typeface="Calibri"/>
-              </a:rPr>
-              <a:t>Raw immutable data</a:t>
-            </a:r>
-          </a:p>
-        </p:txBody>
-      </p:sp>
-      <p:sp>
-        <p:nvSpPr>
-          <p:cNvPr id="4" name="Rounded Rectangle 3"/>
-          <p:cNvSpPr/>
-          <p:nvPr/>
-        </p:nvSpPr>
-        <p:spPr>
-          <a:xfrm>
-            <a:off x="2286000" y="2697480"/>
-            <a:ext cx="7589520" cy="1234440"/>
-          </a:xfrm>
-          <a:prstGeom prst="roundRect">
-            <a:avLst/>
-          </a:prstGeom>
-          <a:solidFill>
-            <a:srgbClr val="EDEDED"/>
-          </a:solidFill>
-          <a:ln w="12700">
-            <a:solidFill>
-              <a:srgbClr val="1F4E79"/>
-            </a:solidFill>
-          </a:ln>
-          <a:effectLst/>
-        </p:spPr>
-        <p:style>
-          <a:lnRef idx="1">
-            <a:schemeClr val="accent1"/>
-          </a:lnRef>
-          <a:fillRef idx="3">
-            <a:schemeClr val="accent1"/>
-          </a:fillRef>
-          <a:effectRef idx="2">
-            <a:schemeClr val="accent1"/>
-          </a:effectRef>
-          <a:fontRef idx="minor">
-            <a:schemeClr val="lt1"/>
-          </a:fontRef>
-        </p:style>
-        <p:txBody>
-          <a:bodyPr rtlCol="0" anchor="ctr" wrap="square"/>
-          <a:lstStyle/>
-          <a:p>
-            <a:pPr algn="ctr" rtl="1"/>
-            <a:r>
-              <a:rPr sz="1800" b="1">
-                <a:solidFill>
-                  <a:srgbClr val="333333"/>
-                </a:solidFill>
-                <a:latin typeface="Arial"/>
-              </a:rPr>
-              <a:t>Silver — بيانات منقَّاة ومنظَّمة</a:t>
-            </a:r>
-          </a:p>
-          <a:p>
-            <a:pPr algn="ctr" rtl="0"/>
-            <a:r>
-              <a:rPr sz="1300">
-                <a:solidFill>
-                  <a:srgbClr val="666666"/>
-                </a:solidFill>
-                <a:latin typeface="Calibri"/>
-              </a:rPr>
-              <a:t>Cleansed &amp; structured data</a:t>
-            </a:r>
-          </a:p>
-        </p:txBody>
-      </p:sp>
-      <p:sp>
-        <p:nvSpPr>
-          <p:cNvPr id="5" name="Rounded Rectangle 4"/>
-          <p:cNvSpPr/>
-          <p:nvPr/>
-        </p:nvSpPr>
-        <p:spPr>
-          <a:xfrm>
-            <a:off x="2286000" y="4206240"/>
-            <a:ext cx="7589520" cy="1234440"/>
-          </a:xfrm>
-          <a:prstGeom prst="roundRect">
-            <a:avLst/>
-          </a:prstGeom>
-          <a:solidFill>
-            <a:srgbClr val="E2EFDA"/>
-          </a:solidFill>
-          <a:ln w="12700">
-            <a:solidFill>
-              <a:srgbClr val="1F4E79"/>
-            </a:solidFill>
-          </a:ln>
-          <a:effectLst/>
-        </p:spPr>
-        <p:style>
-          <a:lnRef idx="1">
-            <a:schemeClr val="accent1"/>
-          </a:lnRef>
-          <a:fillRef idx="3">
-            <a:schemeClr val="accent1"/>
-          </a:fillRef>
-          <a:effectRef idx="2">
-            <a:schemeClr val="accent1"/>
-          </a:effectRef>
-          <a:fontRef idx="minor">
-            <a:schemeClr val="lt1"/>
-          </a:fontRef>
-        </p:style>
-        <p:txBody>
-          <a:bodyPr rtlCol="0" anchor="ctr" wrap="square"/>
-          <a:lstStyle/>
-          <a:p>
-            <a:pPr algn="ctr" rtl="1"/>
-            <a:r>
-              <a:rPr sz="1800" b="1">
-                <a:solidFill>
-                  <a:srgbClr val="333333"/>
-                </a:solidFill>
-                <a:latin typeface="Arial"/>
-              </a:rPr>
-              <a:t>Gold — تجميعات جاهزة للتحليل</a:t>
-            </a:r>
-          </a:p>
-          <a:p>
-            <a:pPr algn="ctr" rtl="0"/>
-            <a:r>
-              <a:rPr sz="1300">
-                <a:solidFill>
-                  <a:srgbClr val="666666"/>
-                </a:solidFill>
-                <a:latin typeface="Calibri"/>
-              </a:rPr>
-              <a:t>Analytics-ready aggregates</a:t>
-            </a:r>
-          </a:p>
-        </p:txBody>
-      </p:sp>
-      <p:sp>
-        <p:nvSpPr>
-          <p:cNvPr id="6" name="Left Arrow 5"/>
-          <p:cNvSpPr/>
-          <p:nvPr/>
-        </p:nvSpPr>
-        <p:spPr>
-          <a:xfrm>
-            <a:off x="5897880" y="2450592"/>
-            <a:ext cx="365760" cy="274320"/>
-          </a:xfrm>
-          <a:prstGeom prst="leftArrow">
-            <a:avLst/>
-          </a:prstGeom>
-          <a:solidFill>
-            <a:srgbClr val="1F4E79"/>
-          </a:solidFill>
-          <a:ln>
-            <a:noFill/>
-          </a:ln>
-          <a:effectLst/>
-        </p:spPr>
-        <p:style>
-          <a:lnRef idx="1">
-            <a:schemeClr val="accent1"/>
-          </a:lnRef>
-          <a:fillRef idx="3">
-            <a:schemeClr val="accent1"/>
-          </a:fillRef>
-          <a:effectRef idx="2">
-            <a:schemeClr val="accent1"/>
-          </a:effectRef>
-          <a:fontRef idx="minor">
-            <a:schemeClr val="lt1"/>
-          </a:fontRef>
-        </p:style>
-        <p:txBody>
-          <a:bodyPr rtlCol="0" anchor="ctr"/>
-          <a:lstStyle/>
-          <a:p>
-            <a:pPr algn="ctr"/>
-          </a:p>
-        </p:txBody>
-      </p:sp>
-      <p:sp>
-        <p:nvSpPr>
-          <p:cNvPr id="7" name="Left Arrow 6"/>
-          <p:cNvSpPr/>
-          <p:nvPr/>
-        </p:nvSpPr>
-        <p:spPr>
-          <a:xfrm>
-            <a:off x="5897880" y="3959352"/>
-            <a:ext cx="365760" cy="274320"/>
-          </a:xfrm>
-          <a:prstGeom prst="leftArrow">
-            <a:avLst/>
-          </a:prstGeom>
-          <a:solidFill>
-            <a:srgbClr val="1F4E79"/>
-          </a:solidFill>
-          <a:ln>
-            <a:noFill/>
-          </a:ln>
-          <a:effectLst/>
-        </p:spPr>
-        <p:style>
-          <a:lnRef idx="1">
-            <a:schemeClr val="accent1"/>
-          </a:lnRef>
-          <a:fillRef idx="3">
-            <a:schemeClr val="accent1"/>
-          </a:fillRef>
-          <a:effectRef idx="2">
-            <a:schemeClr val="accent1"/>
-          </a:effectRef>
-          <a:fontRef idx="minor">
-            <a:schemeClr val="lt1"/>
-          </a:fontRef>
-        </p:style>
-        <p:txBody>
-          <a:bodyPr rtlCol="0" anchor="ctr"/>
-          <a:lstStyle/>
-          <a:p>
-            <a:pPr algn="ctr"/>
-          </a:p>
-        </p:txBody>
-      </p:sp>
-      <p:sp>
-        <p:nvSpPr>
-          <p:cNvPr id="8" name="TextBox 7"/>
-          <p:cNvSpPr txBox="1"/>
-          <p:nvPr/>
-        </p:nvSpPr>
-        <p:spPr>
-          <a:xfrm>
-            <a:off x="640080" y="6126480"/>
-            <a:ext cx="10972800" cy="548640"/>
-          </a:xfrm>
-          <a:prstGeom prst="rect">
-            <a:avLst/>
-          </a:prstGeom>
-          <a:noFill/>
-        </p:spPr>
-        <p:txBody>
-          <a:bodyPr wrap="square">
-            <a:spAutoFit/>
-          </a:bodyPr>
-          <a:lstStyle/>
-          <a:p>
-            <a:pPr algn="r" rtl="1"/>
-            <a:r>
-              <a:rPr sz="1400">
-                <a:solidFill>
-                  <a:srgbClr val="666666"/>
-                </a:solidFill>
-                <a:latin typeface="Arial"/>
-              </a:rPr>
-              <a:t>الحوكمة عبر تحسين الجودة بين الطبقات — إدارة مركزية.</a:t>
-            </a:r>
-          </a:p>
-          <a:p>
-            <a:pPr algn="r" rtl="0"/>
-            <a:r>
-              <a:t>Governance via quality improvement between layers — central ownership.</a:t>
-            </a:r>
-          </a:p>
-        </p:txBody>
-      </p:sp>
-      <p:sp>
-        <p:nvSpPr>
-          <p:cNvPr id="9" name="TextBox 8"/>
-          <p:cNvSpPr txBox="1"/>
-          <p:nvPr/>
-        </p:nvSpPr>
-        <p:spPr>
-          <a:xfrm>
-            <a:off x="640080" y="6400800"/>
-            <a:ext cx="8686800" cy="320040"/>
-          </a:xfrm>
-          <a:prstGeom prst="rect">
-            <a:avLst/>
-          </a:prstGeom>
-          <a:noFill/>
-        </p:spPr>
-        <p:txBody>
-          <a:bodyPr wrap="square">
-            <a:spAutoFit/>
-          </a:bodyPr>
-          <a:lstStyle/>
-          <a:p>
-            <a:pPr algn="r" rtl="1"/>
-            <a:r>
-              <a:rPr sz="1000" b="0">
-                <a:solidFill>
-                  <a:srgbClr val="666666"/>
-                </a:solidFill>
-                <a:latin typeface="Arial"/>
-              </a:rPr>
-              <a:t>Module 02 — Data &amp; AI Engineering Track  |  الوحدة الثانية</a:t>
-            </a:r>
-          </a:p>
-        </p:txBody>
-      </p:sp>
-      <p:sp>
-        <p:nvSpPr>
-          <p:cNvPr id="10" name="TextBox 9"/>
-          <p:cNvSpPr txBox="1"/>
-          <p:nvPr/>
-        </p:nvSpPr>
-        <p:spPr>
-          <a:xfrm>
-            <a:off x="9601200" y="6400800"/>
-            <a:ext cx="1920240" cy="320040"/>
-          </a:xfrm>
-          <a:prstGeom prst="rect">
-            <a:avLst/>
-          </a:prstGeom>
-          <a:noFill/>
-        </p:spPr>
-        <p:txBody>
-          <a:bodyPr wrap="square">
-            <a:spAutoFit/>
-          </a:bodyPr>
-          <a:lstStyle/>
-          <a:p>
-            <a:pPr algn="l" rtl="0"/>
-            <a:r>
-              <a:rPr sz="1000" b="0">
-                <a:solidFill>
-                  <a:srgbClr val="666666"/>
-                </a:solidFill>
-                <a:latin typeface="Calibri"/>
-              </a:rPr>
-              <a:t>V07  •  5/14</a:t>
-            </a:r>
-          </a:p>
-        </p:txBody>
-      </p:sp>
-    </p:spTree>
-  </p:cSld>
-  <p:clrMapOvr>
-    <a:masterClrMapping/>
-  </p:clrMapOvr>
-</p:sld>
-</file>
-
-<file path=ppt/slides/slide13.xml><?xml version="1.0" encoding="utf-8"?>
-<p:sld xmlns:a="http://schemas.openxmlformats.org/drawingml/2006/main" xmlns:p="http://schemas.openxmlformats.org/presentationml/2006/main" xmlns:r="http://schemas.openxmlformats.org/officeDocument/2006/relationships">
-  <p:cSld>
-    <p:bg>
-      <p:bgPr>
-        <a:solidFill>
-          <a:srgbClr val="FFFFFF"/>
-        </a:solidFill>
-        <a:effectLst/>
-      </p:bgPr>
-    </p:bg>
-    <p:spTree>
-      <p:nvGrpSpPr>
-        <p:cNvPr id="1" name=""/>
-        <p:cNvGrpSpPr/>
-        <p:nvPr/>
-      </p:nvGrpSpPr>
-      <p:grpSpPr/>
-      <p:sp>
-        <p:nvSpPr>
-          <p:cNvPr id="2" name="TextBox 1"/>
-          <p:cNvSpPr txBox="1"/>
-          <p:nvPr/>
-        </p:nvSpPr>
-        <p:spPr>
-          <a:xfrm>
-            <a:off x="640080" y="137160"/>
-            <a:ext cx="10972800" cy="640080"/>
-          </a:xfrm>
-          <a:prstGeom prst="rect">
-            <a:avLst/>
-          </a:prstGeom>
-          <a:noFill/>
-        </p:spPr>
-        <p:txBody>
-          <a:bodyPr wrap="none">
-            <a:spAutoFit/>
-          </a:bodyPr>
-          <a:lstStyle/>
-          <a:p>
-            <a:pPr algn="r" rtl="1"/>
-            <a:r>
-              <a:rPr sz="3000" b="1">
-                <a:solidFill>
-                  <a:srgbClr val="1F3B5C"/>
-                </a:solidFill>
-                <a:latin typeface="Arial"/>
-              </a:rPr>
-              <a:t>منتج البيانات وعقد البيانات / Data Product &amp; Contract</a:t>
-            </a:r>
-          </a:p>
-        </p:txBody>
-      </p:sp>
-      <p:sp>
-        <p:nvSpPr>
-          <p:cNvPr id="3" name="Rounded Rectangle 2"/>
-          <p:cNvSpPr/>
-          <p:nvPr/>
-        </p:nvSpPr>
-        <p:spPr>
-          <a:xfrm>
-            <a:off x="822960" y="1645920"/>
-            <a:ext cx="4206240" cy="3108960"/>
-          </a:xfrm>
-          <a:prstGeom prst="roundRect">
-            <a:avLst/>
-          </a:prstGeom>
-          <a:solidFill>
-            <a:srgbClr val="DCE6F1"/>
-          </a:solidFill>
-          <a:ln w="12700">
-            <a:solidFill>
-              <a:srgbClr val="1F4E79"/>
-            </a:solidFill>
-          </a:ln>
-          <a:effectLst/>
-        </p:spPr>
-        <p:style>
-          <a:lnRef idx="1">
-            <a:schemeClr val="accent1"/>
-          </a:lnRef>
-          <a:fillRef idx="3">
-            <a:schemeClr val="accent1"/>
-          </a:fillRef>
-          <a:effectRef idx="2">
-            <a:schemeClr val="accent1"/>
-          </a:effectRef>
-          <a:fontRef idx="minor">
-            <a:schemeClr val="lt1"/>
-          </a:fontRef>
-        </p:style>
-        <p:txBody>
-          <a:bodyPr rtlCol="0" anchor="ctr" wrap="square"/>
-          <a:lstStyle/>
-          <a:p>
-            <a:pPr algn="ctr" rtl="1"/>
-            <a:r>
-              <a:rPr sz="2000" b="1">
-                <a:solidFill>
-                  <a:srgbClr val="333333"/>
-                </a:solidFill>
-                <a:latin typeface="Arial"/>
-              </a:rPr>
-              <a:t>منتج البيانات</a:t>
-            </a:r>
-          </a:p>
-          <a:p>
-            <a:pPr algn="ctr" rtl="0"/>
-            <a:r>
-              <a:rPr sz="1400">
-                <a:solidFill>
-                  <a:srgbClr val="666666"/>
-                </a:solidFill>
-                <a:latin typeface="Calibri"/>
-              </a:rPr>
-              <a:t>Data Product — موثوق • موثّق • قابل للاكتشاف</a:t>
-            </a:r>
-          </a:p>
-        </p:txBody>
-      </p:sp>
-      <p:sp>
-        <p:nvSpPr>
-          <p:cNvPr id="4" name="Rounded Rectangle 3"/>
-          <p:cNvSpPr/>
-          <p:nvPr/>
-        </p:nvSpPr>
-        <p:spPr>
-          <a:xfrm>
-            <a:off x="7223760" y="1645920"/>
-            <a:ext cx="4206240" cy="914400"/>
-          </a:xfrm>
-          <a:prstGeom prst="roundRect">
-            <a:avLst/>
-          </a:prstGeom>
-          <a:solidFill>
-            <a:srgbClr val="E2EFDA"/>
-          </a:solidFill>
-          <a:ln w="12700">
-            <a:solidFill>
-              <a:srgbClr val="1F4E79"/>
-            </a:solidFill>
-          </a:ln>
-          <a:effectLst/>
-        </p:spPr>
-        <p:style>
-          <a:lnRef idx="1">
-            <a:schemeClr val="accent1"/>
-          </a:lnRef>
-          <a:fillRef idx="3">
-            <a:schemeClr val="accent1"/>
-          </a:fillRef>
-          <a:effectRef idx="2">
-            <a:schemeClr val="accent1"/>
-          </a:effectRef>
-          <a:fontRef idx="minor">
-            <a:schemeClr val="lt1"/>
-          </a:fontRef>
-        </p:style>
-        <p:txBody>
-          <a:bodyPr rtlCol="0" anchor="ctr" wrap="square"/>
-          <a:lstStyle/>
-          <a:p>
-            <a:pPr algn="ctr" rtl="1"/>
-            <a:r>
-              <a:rPr sz="2000" b="1">
-                <a:solidFill>
-                  <a:srgbClr val="333333"/>
-                </a:solidFill>
-                <a:latin typeface="Arial"/>
-              </a:rPr>
-              <a:t>عقد البيانات</a:t>
-            </a:r>
-          </a:p>
-          <a:p>
-            <a:pPr algn="ctr" rtl="0"/>
-            <a:r>
-              <a:rPr sz="1400">
-                <a:solidFill>
-                  <a:srgbClr val="666666"/>
-                </a:solidFill>
-                <a:latin typeface="Calibri"/>
-              </a:rPr>
-              <a:t>Data Contract</a:t>
-            </a:r>
-          </a:p>
-        </p:txBody>
-      </p:sp>
-      <p:sp>
-        <p:nvSpPr>
-          <p:cNvPr id="5" name="Rounded Rectangle 4"/>
-          <p:cNvSpPr/>
-          <p:nvPr/>
-        </p:nvSpPr>
-        <p:spPr>
-          <a:xfrm>
-            <a:off x="7589520" y="2743200"/>
-            <a:ext cx="3474720" cy="594360"/>
-          </a:xfrm>
-          <a:prstGeom prst="roundRect">
-            <a:avLst/>
-          </a:prstGeom>
-          <a:solidFill>
-            <a:srgbClr val="EDEDED"/>
-          </a:solidFill>
-          <a:ln w="12700">
-            <a:solidFill>
-              <a:srgbClr val="1F4E79"/>
-            </a:solidFill>
-          </a:ln>
-          <a:effectLst/>
-        </p:spPr>
-        <p:style>
-          <a:lnRef idx="1">
-            <a:schemeClr val="accent1"/>
-          </a:lnRef>
-          <a:fillRef idx="3">
-            <a:schemeClr val="accent1"/>
-          </a:fillRef>
-          <a:effectRef idx="2">
-            <a:schemeClr val="accent1"/>
-          </a:effectRef>
-          <a:fontRef idx="minor">
-            <a:schemeClr val="lt1"/>
-          </a:fontRef>
-        </p:style>
-        <p:txBody>
-          <a:bodyPr rtlCol="0" anchor="ctr" wrap="square"/>
-          <a:lstStyle/>
-          <a:p>
-            <a:pPr algn="ctr" rtl="1"/>
-            <a:r>
-              <a:rPr sz="1400" b="1">
-                <a:solidFill>
-                  <a:srgbClr val="333333"/>
-                </a:solidFill>
-                <a:latin typeface="Arial"/>
-              </a:rPr>
-              <a:t>المخطط / Schema</a:t>
-            </a:r>
-          </a:p>
-        </p:txBody>
-      </p:sp>
-      <p:sp>
-        <p:nvSpPr>
-          <p:cNvPr id="6" name="Rounded Rectangle 5"/>
-          <p:cNvSpPr/>
-          <p:nvPr/>
-        </p:nvSpPr>
-        <p:spPr>
-          <a:xfrm>
-            <a:off x="7589520" y="668904631200"/>
-            <a:ext cx="3474720" cy="594360"/>
-          </a:xfrm>
-          <a:prstGeom prst="roundRect">
-            <a:avLst/>
-          </a:prstGeom>
-          <a:solidFill>
-            <a:srgbClr val="EDEDED"/>
-          </a:solidFill>
-          <a:ln w="12700">
-            <a:solidFill>
-              <a:srgbClr val="1F4E79"/>
-            </a:solidFill>
-          </a:ln>
-          <a:effectLst/>
-        </p:spPr>
-        <p:style>
-          <a:lnRef idx="1">
-            <a:schemeClr val="accent1"/>
-          </a:lnRef>
-          <a:fillRef idx="3">
-            <a:schemeClr val="accent1"/>
-          </a:fillRef>
-          <a:effectRef idx="2">
-            <a:schemeClr val="accent1"/>
-          </a:effectRef>
-          <a:fontRef idx="minor">
-            <a:schemeClr val="lt1"/>
-          </a:fontRef>
-        </p:style>
-        <p:txBody>
-          <a:bodyPr rtlCol="0" anchor="ctr" wrap="square"/>
-          <a:lstStyle/>
-          <a:p>
-            <a:pPr algn="ctr" rtl="1"/>
-            <a:r>
-              <a:rPr sz="1400" b="1">
-                <a:solidFill>
-                  <a:srgbClr val="333333"/>
-                </a:solidFill>
-                <a:latin typeface="Arial"/>
-              </a:rPr>
-              <a:t>الأمان / Security</a:t>
-            </a:r>
-          </a:p>
-        </p:txBody>
-      </p:sp>
-      <p:sp>
-        <p:nvSpPr>
-          <p:cNvPr id="7" name="Rounded Rectangle 6"/>
-          <p:cNvSpPr/>
-          <p:nvPr/>
-        </p:nvSpPr>
-        <p:spPr>
-          <a:xfrm>
-            <a:off x="7589520" y="1337806519200"/>
-            <a:ext cx="3474720" cy="594360"/>
-          </a:xfrm>
-          <a:prstGeom prst="roundRect">
-            <a:avLst/>
-          </a:prstGeom>
-          <a:solidFill>
-            <a:srgbClr val="EDEDED"/>
-          </a:solidFill>
-          <a:ln w="12700">
-            <a:solidFill>
-              <a:srgbClr val="1F4E79"/>
-            </a:solidFill>
-          </a:ln>
-          <a:effectLst/>
-        </p:spPr>
-        <p:style>
-          <a:lnRef idx="1">
-            <a:schemeClr val="accent1"/>
-          </a:lnRef>
-          <a:fillRef idx="3">
-            <a:schemeClr val="accent1"/>
-          </a:fillRef>
-          <a:effectRef idx="2">
-            <a:schemeClr val="accent1"/>
-          </a:effectRef>
-          <a:fontRef idx="minor">
-            <a:schemeClr val="lt1"/>
-          </a:fontRef>
-        </p:style>
-        <p:txBody>
-          <a:bodyPr rtlCol="0" anchor="ctr" wrap="square"/>
-          <a:lstStyle/>
-          <a:p>
-            <a:pPr algn="ctr" rtl="1"/>
-            <a:r>
-              <a:rPr sz="1400" b="1">
-                <a:solidFill>
-                  <a:srgbClr val="333333"/>
-                </a:solidFill>
-                <a:latin typeface="Arial"/>
-              </a:rPr>
-              <a:t>مستوى الخدمة / SLA</a:t>
-            </a:r>
-          </a:p>
-        </p:txBody>
-      </p:sp>
-      <p:sp>
-        <p:nvSpPr>
-          <p:cNvPr id="8" name="Left Arrow 7"/>
-          <p:cNvSpPr/>
-          <p:nvPr/>
-        </p:nvSpPr>
-        <p:spPr>
-          <a:xfrm>
-            <a:off x="5257800" y="3017520"/>
-            <a:ext cx="1737360" cy="365760"/>
-          </a:xfrm>
-          <a:prstGeom prst="leftArrow">
-            <a:avLst/>
-          </a:prstGeom>
-          <a:solidFill>
-            <a:srgbClr val="1F4E79"/>
-          </a:solidFill>
-          <a:ln>
-            <a:noFill/>
-          </a:ln>
-          <a:effectLst/>
-        </p:spPr>
-        <p:style>
-          <a:lnRef idx="1">
-            <a:schemeClr val="accent1"/>
-          </a:lnRef>
-          <a:fillRef idx="3">
-            <a:schemeClr val="accent1"/>
-          </a:fillRef>
-          <a:effectRef idx="2">
-            <a:schemeClr val="accent1"/>
-          </a:effectRef>
-          <a:fontRef idx="minor">
-            <a:schemeClr val="lt1"/>
-          </a:fontRef>
-        </p:style>
-        <p:txBody>
-          <a:bodyPr rtlCol="0" anchor="ctr"/>
-          <a:lstStyle/>
-          <a:p>
-            <a:pPr algn="ctr"/>
-          </a:p>
-        </p:txBody>
-      </p:sp>
-      <p:sp>
-        <p:nvSpPr>
-          <p:cNvPr id="9" name="TextBox 8"/>
-          <p:cNvSpPr txBox="1"/>
-          <p:nvPr/>
-        </p:nvSpPr>
-        <p:spPr>
-          <a:xfrm>
-            <a:off x="640080" y="6126480"/>
-            <a:ext cx="10972800" cy="548640"/>
-          </a:xfrm>
-          <a:prstGeom prst="rect">
-            <a:avLst/>
-          </a:prstGeom>
-          <a:noFill/>
-        </p:spPr>
-        <p:txBody>
-          <a:bodyPr wrap="square">
-            <a:spAutoFit/>
-          </a:bodyPr>
-          <a:lstStyle/>
-          <a:p>
-            <a:pPr algn="r" rtl="1"/>
-            <a:r>
-              <a:rPr sz="1400">
-                <a:solidFill>
-                  <a:srgbClr val="666666"/>
-                </a:solidFill>
-                <a:latin typeface="Arial"/>
-              </a:rPr>
-              <a:t>وحدة التسليم الحديثة في هندسة البيانات.</a:t>
-            </a:r>
-          </a:p>
-          <a:p>
-            <a:pPr algn="r" rtl="0"/>
-            <a:r>
-              <a:t>The modern delivery unit in data engineering.</a:t>
-            </a:r>
-          </a:p>
-        </p:txBody>
-      </p:sp>
-      <p:sp>
-        <p:nvSpPr>
-          <p:cNvPr id="10" name="TextBox 9"/>
-          <p:cNvSpPr txBox="1"/>
-          <p:nvPr/>
-        </p:nvSpPr>
-        <p:spPr>
-          <a:xfrm>
-            <a:off x="640080" y="6400800"/>
-            <a:ext cx="8686800" cy="320040"/>
-          </a:xfrm>
-          <a:prstGeom prst="rect">
-            <a:avLst/>
-          </a:prstGeom>
-          <a:noFill/>
-        </p:spPr>
-        <p:txBody>
-          <a:bodyPr wrap="square">
-            <a:spAutoFit/>
-          </a:bodyPr>
-          <a:lstStyle/>
-          <a:p>
-            <a:pPr algn="r" rtl="1"/>
-            <a:r>
-              <a:rPr sz="1000" b="0">
-                <a:solidFill>
-                  <a:srgbClr val="666666"/>
-                </a:solidFill>
-                <a:latin typeface="Arial"/>
-              </a:rPr>
-              <a:t>Module 02 — Data &amp; AI Engineering Track  |  الوحدة الثانية</a:t>
-            </a:r>
-          </a:p>
-        </p:txBody>
-      </p:sp>
-      <p:sp>
-        <p:nvSpPr>
-          <p:cNvPr id="11" name="TextBox 10"/>
-          <p:cNvSpPr txBox="1"/>
-          <p:nvPr/>
-        </p:nvSpPr>
-        <p:spPr>
-          <a:xfrm>
-            <a:off x="9601200" y="6400800"/>
-            <a:ext cx="1920240" cy="320040"/>
-          </a:xfrm>
-          <a:prstGeom prst="rect">
-            <a:avLst/>
-          </a:prstGeom>
-          <a:noFill/>
-        </p:spPr>
-        <p:txBody>
-          <a:bodyPr wrap="square">
-            <a:spAutoFit/>
-          </a:bodyPr>
-          <a:lstStyle/>
-          <a:p>
-            <a:pPr algn="l" rtl="0"/>
-            <a:r>
-              <a:rPr sz="1000" b="0">
-                <a:solidFill>
-                  <a:srgbClr val="666666"/>
-                </a:solidFill>
-                <a:latin typeface="Calibri"/>
-              </a:rPr>
-              <a:t>V07  •  7/14</a:t>
-            </a:r>
-          </a:p>
-        </p:txBody>
-      </p:sp>
-    </p:spTree>
-  </p:cSld>
-  <p:clrMapOvr>
-    <a:masterClrMapping/>
-  </p:clrMapOvr>
-</p:sld>
-</file>
-
-<file path=ppt/slides/slide14.xml><?xml version="1.0" encoding="utf-8"?>
-<p:sld xmlns:a="http://schemas.openxmlformats.org/drawingml/2006/main" xmlns:p="http://schemas.openxmlformats.org/presentationml/2006/main" xmlns:r="http://schemas.openxmlformats.org/officeDocument/2006/relationships">
-  <p:cSld>
-    <p:bg>
-      <p:bgPr>
-        <a:solidFill>
-          <a:srgbClr val="FFFFFF"/>
-        </a:solidFill>
-        <a:effectLst/>
-      </p:bgPr>
-    </p:bg>
-    <p:spTree>
-      <p:nvGrpSpPr>
-        <p:cNvPr id="1" name=""/>
-        <p:cNvGrpSpPr/>
-        <p:nvPr/>
-      </p:nvGrpSpPr>
-      <p:grpSpPr/>
-      <p:sp>
-        <p:nvSpPr>
-          <p:cNvPr id="2" name="TextBox 1"/>
-          <p:cNvSpPr txBox="1"/>
-          <p:nvPr/>
-        </p:nvSpPr>
-        <p:spPr>
-          <a:xfrm>
-            <a:off x="640080" y="137160"/>
-            <a:ext cx="10972800" cy="640080"/>
-          </a:xfrm>
-          <a:prstGeom prst="rect">
-            <a:avLst/>
-          </a:prstGeom>
-          <a:noFill/>
-        </p:spPr>
-        <p:txBody>
-          <a:bodyPr wrap="none">
-            <a:spAutoFit/>
-          </a:bodyPr>
-          <a:lstStyle/>
-          <a:p>
-            <a:pPr algn="r" rtl="1"/>
-            <a:r>
-              <a:rPr sz="3000" b="1">
-                <a:solidFill>
-                  <a:srgbClr val="1F3B5C"/>
-                </a:solidFill>
-                <a:latin typeface="Arial"/>
-              </a:rPr>
-              <a:t>أنماط معالجة البيانات الثلاثة / Three Data Patterns</a:t>
-            </a:r>
-          </a:p>
-        </p:txBody>
-      </p:sp>
-      <p:sp>
-        <p:nvSpPr>
-          <p:cNvPr id="3" name="Rounded Rectangle 2"/>
-          <p:cNvSpPr/>
-          <p:nvPr/>
-        </p:nvSpPr>
-        <p:spPr>
-          <a:xfrm>
-            <a:off x="640080" y="1371600"/>
-            <a:ext cx="3566160" cy="914400"/>
-          </a:xfrm>
-          <a:prstGeom prst="roundRect">
-            <a:avLst/>
-          </a:prstGeom>
-          <a:solidFill>
-            <a:srgbClr val="DCE6F1"/>
-          </a:solidFill>
-          <a:ln w="12700">
-            <a:solidFill>
-              <a:srgbClr val="1F4E79"/>
-            </a:solidFill>
-          </a:ln>
-          <a:effectLst/>
-        </p:spPr>
-        <p:style>
-          <a:lnRef idx="1">
-            <a:schemeClr val="accent1"/>
-          </a:lnRef>
-          <a:fillRef idx="3">
-            <a:schemeClr val="accent1"/>
-          </a:fillRef>
-          <a:effectRef idx="2">
-            <a:schemeClr val="accent1"/>
-          </a:effectRef>
-          <a:fontRef idx="minor">
-            <a:schemeClr val="lt1"/>
-          </a:fontRef>
-        </p:style>
-        <p:txBody>
-          <a:bodyPr rtlCol="0" anchor="ctr" wrap="square"/>
-          <a:lstStyle/>
-          <a:p>
-            <a:pPr algn="ctr" rtl="1"/>
-            <a:r>
-              <a:rPr sz="1800" b="1">
-                <a:solidFill>
-                  <a:srgbClr val="333333"/>
-                </a:solidFill>
-                <a:latin typeface="Arial"/>
-              </a:rPr>
-              <a:t>المعمارية المتدرِّجة</a:t>
-            </a:r>
-          </a:p>
-          <a:p>
-            <a:pPr algn="ctr" rtl="0"/>
-            <a:r>
-              <a:rPr sz="1300">
-                <a:solidFill>
-                  <a:srgbClr val="666666"/>
-                </a:solidFill>
-                <a:latin typeface="Calibri"/>
-              </a:rPr>
-              <a:t>Medallion</a:t>
-            </a:r>
-          </a:p>
-        </p:txBody>
-      </p:sp>
-      <p:sp>
-        <p:nvSpPr>
-          <p:cNvPr id="4" name="Rounded Rectangle 3"/>
-          <p:cNvSpPr/>
-          <p:nvPr/>
-        </p:nvSpPr>
-        <p:spPr>
-          <a:xfrm>
-            <a:off x="640080" y="2468880"/>
-            <a:ext cx="3566160" cy="2560320"/>
-          </a:xfrm>
-          <a:prstGeom prst="roundRect">
-            <a:avLst/>
-          </a:prstGeom>
-          <a:solidFill>
-            <a:srgbClr val="EDEDED"/>
-          </a:solidFill>
-          <a:ln w="12700">
-            <a:solidFill>
-              <a:srgbClr val="1F4E79"/>
-            </a:solidFill>
-          </a:ln>
-          <a:effectLst/>
-        </p:spPr>
-        <p:style>
-          <a:lnRef idx="1">
-            <a:schemeClr val="accent1"/>
-          </a:lnRef>
-          <a:fillRef idx="3">
-            <a:schemeClr val="accent1"/>
-          </a:fillRef>
-          <a:effectRef idx="2">
-            <a:schemeClr val="accent1"/>
-          </a:effectRef>
-          <a:fontRef idx="minor">
-            <a:schemeClr val="lt1"/>
-          </a:fontRef>
-        </p:style>
-        <p:txBody>
-          <a:bodyPr rtlCol="0" anchor="ctr" wrap="square"/>
-          <a:lstStyle/>
-          <a:p>
-            <a:pPr algn="ctr" rtl="1"/>
-            <a:r>
-              <a:rPr sz="1500" b="1">
-                <a:solidFill>
-                  <a:srgbClr val="333333"/>
-                </a:solidFill>
-                <a:latin typeface="Arial"/>
-              </a:rPr>
-              <a:t>فريق مركزي — تحليلات وAI/ML/RAG</a:t>
-            </a:r>
-          </a:p>
-        </p:txBody>
-      </p:sp>
-      <p:sp>
-        <p:nvSpPr>
-          <p:cNvPr id="5" name="Rounded Rectangle 4"/>
-          <p:cNvSpPr/>
-          <p:nvPr/>
-        </p:nvSpPr>
-        <p:spPr>
-          <a:xfrm>
-            <a:off x="4389119" y="1371600"/>
-            <a:ext cx="3566160" cy="914400"/>
-          </a:xfrm>
-          <a:prstGeom prst="roundRect">
-            <a:avLst/>
-          </a:prstGeom>
-          <a:solidFill>
-            <a:srgbClr val="E2EFDA"/>
-          </a:solidFill>
-          <a:ln w="12700">
-            <a:solidFill>
-              <a:srgbClr val="1F4E79"/>
-            </a:solidFill>
-          </a:ln>
-          <a:effectLst/>
-        </p:spPr>
-        <p:style>
-          <a:lnRef idx="1">
-            <a:schemeClr val="accent1"/>
-          </a:lnRef>
-          <a:fillRef idx="3">
-            <a:schemeClr val="accent1"/>
-          </a:fillRef>
-          <a:effectRef idx="2">
-            <a:schemeClr val="accent1"/>
-          </a:effectRef>
-          <a:fontRef idx="minor">
-            <a:schemeClr val="lt1"/>
-          </a:fontRef>
-        </p:style>
-        <p:txBody>
-          <a:bodyPr rtlCol="0" anchor="ctr" wrap="square"/>
-          <a:lstStyle/>
-          <a:p>
-            <a:pPr algn="ctr" rtl="1"/>
-            <a:r>
-              <a:rPr sz="1800" b="1">
-                <a:solidFill>
-                  <a:srgbClr val="333333"/>
-                </a:solidFill>
-                <a:latin typeface="Arial"/>
-              </a:rPr>
-              <a:t>مستودع البيانات</a:t>
-            </a:r>
-          </a:p>
-          <a:p>
-            <a:pPr algn="ctr" rtl="0"/>
-            <a:r>
-              <a:rPr sz="1300">
-                <a:solidFill>
-                  <a:srgbClr val="666666"/>
-                </a:solidFill>
-                <a:latin typeface="Calibri"/>
-              </a:rPr>
-              <a:t>Data Warehouse</a:t>
-            </a:r>
-          </a:p>
-        </p:txBody>
-      </p:sp>
-      <p:sp>
-        <p:nvSpPr>
-          <p:cNvPr id="6" name="Rounded Rectangle 5"/>
-          <p:cNvSpPr/>
-          <p:nvPr/>
-        </p:nvSpPr>
-        <p:spPr>
-          <a:xfrm>
-            <a:off x="4389119" y="2468880"/>
-            <a:ext cx="3566160" cy="2560320"/>
-          </a:xfrm>
-          <a:prstGeom prst="roundRect">
-            <a:avLst/>
-          </a:prstGeom>
-          <a:solidFill>
-            <a:srgbClr val="EDEDED"/>
-          </a:solidFill>
-          <a:ln w="12700">
-            <a:solidFill>
-              <a:srgbClr val="1F4E79"/>
-            </a:solidFill>
-          </a:ln>
-          <a:effectLst/>
-        </p:spPr>
-        <p:style>
-          <a:lnRef idx="1">
-            <a:schemeClr val="accent1"/>
-          </a:lnRef>
-          <a:fillRef idx="3">
-            <a:schemeClr val="accent1"/>
-          </a:fillRef>
-          <a:effectRef idx="2">
-            <a:schemeClr val="accent1"/>
-          </a:effectRef>
-          <a:fontRef idx="minor">
-            <a:schemeClr val="lt1"/>
-          </a:fontRef>
-        </p:style>
-        <p:txBody>
-          <a:bodyPr rtlCol="0" anchor="ctr" wrap="square"/>
-          <a:lstStyle/>
-          <a:p>
-            <a:pPr algn="ctr" rtl="1"/>
-            <a:r>
-              <a:rPr sz="1500" b="1">
-                <a:solidFill>
-                  <a:srgbClr val="333333"/>
-                </a:solidFill>
-                <a:latin typeface="Arial"/>
-              </a:rPr>
-              <a:t>فرق BI — تقارير وذكاء أعمال</a:t>
-            </a:r>
-          </a:p>
-        </p:txBody>
-      </p:sp>
-      <p:sp>
-        <p:nvSpPr>
-          <p:cNvPr id="7" name="Rounded Rectangle 6"/>
-          <p:cNvSpPr/>
-          <p:nvPr/>
-        </p:nvSpPr>
-        <p:spPr>
-          <a:xfrm>
-            <a:off x="8138158" y="1371600"/>
-            <a:ext cx="3566160" cy="914400"/>
-          </a:xfrm>
-          <a:prstGeom prst="roundRect">
-            <a:avLst/>
-          </a:prstGeom>
-          <a:solidFill>
-            <a:srgbClr val="FDE9D9"/>
-          </a:solidFill>
-          <a:ln w="12700">
-            <a:solidFill>
-              <a:srgbClr val="1F4E79"/>
-            </a:solidFill>
-          </a:ln>
-          <a:effectLst/>
-        </p:spPr>
-        <p:style>
-          <a:lnRef idx="1">
-            <a:schemeClr val="accent1"/>
-          </a:lnRef>
-          <a:fillRef idx="3">
-            <a:schemeClr val="accent1"/>
-          </a:fillRef>
-          <a:effectRef idx="2">
-            <a:schemeClr val="accent1"/>
-          </a:effectRef>
-          <a:fontRef idx="minor">
-            <a:schemeClr val="lt1"/>
-          </a:fontRef>
-        </p:style>
-        <p:txBody>
-          <a:bodyPr rtlCol="0" anchor="ctr" wrap="square"/>
-          <a:lstStyle/>
-          <a:p>
-            <a:pPr algn="ctr" rtl="1"/>
-            <a:r>
-              <a:rPr sz="1800" b="1">
-                <a:solidFill>
-                  <a:srgbClr val="333333"/>
-                </a:solidFill>
-                <a:latin typeface="Arial"/>
-              </a:rPr>
-              <a:t>شبكة البيانات</a:t>
-            </a:r>
-          </a:p>
-          <a:p>
-            <a:pPr algn="ctr" rtl="0"/>
-            <a:r>
-              <a:rPr sz="1300">
-                <a:solidFill>
-                  <a:srgbClr val="666666"/>
-                </a:solidFill>
-                <a:latin typeface="Calibri"/>
-              </a:rPr>
-              <a:t>Data Mesh</a:t>
-            </a:r>
-          </a:p>
-        </p:txBody>
-      </p:sp>
-      <p:sp>
-        <p:nvSpPr>
-          <p:cNvPr id="8" name="Rounded Rectangle 7"/>
-          <p:cNvSpPr/>
-          <p:nvPr/>
-        </p:nvSpPr>
-        <p:spPr>
-          <a:xfrm>
-            <a:off x="8138158" y="2468880"/>
-            <a:ext cx="3566160" cy="2560320"/>
-          </a:xfrm>
-          <a:prstGeom prst="roundRect">
-            <a:avLst/>
-          </a:prstGeom>
-          <a:solidFill>
-            <a:srgbClr val="EDEDED"/>
-          </a:solidFill>
-          <a:ln w="12700">
-            <a:solidFill>
-              <a:srgbClr val="1F4E79"/>
-            </a:solidFill>
-          </a:ln>
-          <a:effectLst/>
-        </p:spPr>
-        <p:style>
-          <a:lnRef idx="1">
-            <a:schemeClr val="accent1"/>
-          </a:lnRef>
-          <a:fillRef idx="3">
-            <a:schemeClr val="accent1"/>
-          </a:fillRef>
-          <a:effectRef idx="2">
-            <a:schemeClr val="accent1"/>
-          </a:effectRef>
-          <a:fontRef idx="minor">
-            <a:schemeClr val="lt1"/>
-          </a:fontRef>
-        </p:style>
-        <p:txBody>
-          <a:bodyPr rtlCol="0" anchor="ctr" wrap="square"/>
-          <a:lstStyle/>
-          <a:p>
-            <a:pPr algn="ctr" rtl="1"/>
-            <a:r>
-              <a:rPr sz="1500" b="1">
-                <a:solidFill>
-                  <a:srgbClr val="333333"/>
-                </a:solidFill>
-                <a:latin typeface="Arial"/>
-              </a:rPr>
-              <a:t>فرق المجالات — مؤسسات كبيرة</a:t>
-            </a:r>
-          </a:p>
-        </p:txBody>
-      </p:sp>
-      <p:sp>
-        <p:nvSpPr>
-          <p:cNvPr id="9" name="TextBox 8"/>
-          <p:cNvSpPr txBox="1"/>
-          <p:nvPr/>
-        </p:nvSpPr>
-        <p:spPr>
-          <a:xfrm>
-            <a:off x="640080" y="6126480"/>
-            <a:ext cx="10972800" cy="548640"/>
-          </a:xfrm>
-          <a:prstGeom prst="rect">
-            <a:avLst/>
-          </a:prstGeom>
-          <a:noFill/>
-        </p:spPr>
-        <p:txBody>
-          <a:bodyPr wrap="square">
-            <a:spAutoFit/>
-          </a:bodyPr>
-          <a:lstStyle/>
-          <a:p>
-            <a:pPr algn="r" rtl="1"/>
-            <a:r>
-              <a:rPr sz="1400">
-                <a:solidFill>
-                  <a:srgbClr val="666666"/>
-                </a:solidFill>
-                <a:latin typeface="Arial"/>
-              </a:rPr>
-              <a:t>المعايير: الفكرة الجوهرية / المالك / الحوكمة / حالة الاستخدام المثلى.</a:t>
-            </a:r>
-          </a:p>
-          <a:p>
-            <a:pPr algn="r" rtl="0"/>
-            <a:r>
-              <a:t>Criteria: core idea / ownership / governance / best use case.</a:t>
-            </a:r>
-          </a:p>
-        </p:txBody>
-      </p:sp>
-      <p:sp>
-        <p:nvSpPr>
-          <p:cNvPr id="10" name="TextBox 9"/>
-          <p:cNvSpPr txBox="1"/>
-          <p:nvPr/>
-        </p:nvSpPr>
-        <p:spPr>
-          <a:xfrm>
-            <a:off x="640080" y="6400800"/>
-            <a:ext cx="8686800" cy="320040"/>
-          </a:xfrm>
-          <a:prstGeom prst="rect">
-            <a:avLst/>
-          </a:prstGeom>
-          <a:noFill/>
-        </p:spPr>
-        <p:txBody>
-          <a:bodyPr wrap="square">
-            <a:spAutoFit/>
-          </a:bodyPr>
-          <a:lstStyle/>
-          <a:p>
-            <a:pPr algn="r" rtl="1"/>
-            <a:r>
-              <a:rPr sz="1000" b="0">
-                <a:solidFill>
-                  <a:srgbClr val="666666"/>
-                </a:solidFill>
-                <a:latin typeface="Arial"/>
-              </a:rPr>
-              <a:t>Module 02 — Data &amp; AI Engineering Track  |  الوحدة الثانية</a:t>
-            </a:r>
-          </a:p>
-        </p:txBody>
-      </p:sp>
-      <p:sp>
-        <p:nvSpPr>
-          <p:cNvPr id="11" name="TextBox 10"/>
-          <p:cNvSpPr txBox="1"/>
-          <p:nvPr/>
-        </p:nvSpPr>
-        <p:spPr>
-          <a:xfrm>
-            <a:off x="9601200" y="6400800"/>
-            <a:ext cx="1920240" cy="320040"/>
-          </a:xfrm>
-          <a:prstGeom prst="rect">
-            <a:avLst/>
-          </a:prstGeom>
-          <a:noFill/>
-        </p:spPr>
-        <p:txBody>
-          <a:bodyPr wrap="square">
-            <a:spAutoFit/>
-          </a:bodyPr>
-          <a:lstStyle/>
-          <a:p>
-            <a:pPr algn="l" rtl="0"/>
-            <a:r>
-              <a:rPr sz="1000" b="0">
-                <a:solidFill>
-                  <a:srgbClr val="666666"/>
-                </a:solidFill>
-                <a:latin typeface="Calibri"/>
-              </a:rPr>
-              <a:t>V07  •  11/14</a:t>
-            </a:r>
-          </a:p>
-        </p:txBody>
-      </p:sp>
-    </p:spTree>
-  </p:cSld>
-  <p:clrMapOvr>
-    <a:masterClrMapping/>
-  </p:clrMapOvr>
-</p:sld>
-</file>
-
-<file path=ppt/slides/slide2.xml><?xml version="1.0" encoding="utf-8"?>
-<p:sld xmlns:a="http://schemas.openxmlformats.org/drawingml/2006/main" xmlns:p="http://schemas.openxmlformats.org/presentationml/2006/main" xmlns:r="http://schemas.openxmlformats.org/officeDocument/2006/relationships">
-  <p:cSld>
-    <p:bg>
-      <p:bgPr>
-        <a:solidFill>
-          <a:srgbClr val="FFFFFF"/>
-        </a:solidFill>
-        <a:effectLst/>
-      </p:bgPr>
-    </p:bg>
-    <p:spTree>
-      <p:nvGrpSpPr>
-        <p:cNvPr id="1" name=""/>
-        <p:cNvGrpSpPr/>
-        <p:nvPr/>
-      </p:nvGrpSpPr>
-      <p:grpSpPr/>
-      <p:sp>
-        <p:nvSpPr>
-          <p:cNvPr id="2" name="Rectangle 1"/>
-          <p:cNvSpPr/>
-          <p:nvPr/>
-        </p:nvSpPr>
-        <p:spPr>
-          <a:xfrm>
-            <a:off x="0" y="0"/>
-            <a:ext cx="12191695" cy="1005840"/>
-          </a:xfrm>
-          <a:prstGeom prst="rect">
-            <a:avLst/>
-          </a:prstGeom>
-          <a:solidFill>
-            <a:srgbClr val="FFFFFF"/>
-          </a:solidFill>
-          <a:ln w="25400">
-            <a:solidFill>
-              <a:srgbClr val="1F4E79"/>
-            </a:solidFill>
-          </a:ln>
-          <a:effectLst/>
-        </p:spPr>
-        <p:style>
-          <a:lnRef idx="1">
-            <a:schemeClr val="accent1"/>
-          </a:lnRef>
-          <a:fillRef idx="3">
-            <a:schemeClr val="accent1"/>
-          </a:fillRef>
-          <a:effectRef idx="2">
-            <a:schemeClr val="accent1"/>
-          </a:effectRef>
-          <a:fontRef idx="minor">
-            <a:schemeClr val="lt1"/>
-          </a:fontRef>
-        </p:style>
-        <p:txBody>
-          <a:bodyPr rtlCol="0" anchor="ctr"/>
-          <a:lstStyle/>
-          <a:p>
-            <a:pPr algn="ctr"/>
-          </a:p>
-        </p:txBody>
-      </p:sp>
-      <p:sp>
-        <p:nvSpPr>
-          <p:cNvPr id="3" name="TextBox 2"/>
-          <p:cNvSpPr txBox="1"/>
-          <p:nvPr/>
-        </p:nvSpPr>
-        <p:spPr>
-          <a:xfrm>
-            <a:off x="640080" y="182880"/>
-            <a:ext cx="10972800" cy="640080"/>
-          </a:xfrm>
-          <a:prstGeom prst="rect">
-            <a:avLst/>
-          </a:prstGeom>
-          <a:noFill/>
-        </p:spPr>
-        <p:txBody>
-          <a:bodyPr wrap="square">
-            <a:spAutoFit/>
-          </a:bodyPr>
-          <a:lstStyle/>
-          <a:p>
-            <a:pPr algn="r" rtl="1"/>
-            <a:r>
-              <a:rPr sz="3200" b="1">
-                <a:solidFill>
-                  <a:srgbClr val="1F3B5C"/>
-                </a:solidFill>
-                <a:latin typeface="Arial"/>
-              </a:rPr>
-              <a:t>أجندة العرض / Agenda</a:t>
-            </a:r>
-          </a:p>
-        </p:txBody>
-      </p:sp>
-      <p:sp>
-        <p:nvSpPr>
-          <p:cNvPr id="4" name="TextBox 3"/>
-          <p:cNvSpPr txBox="1"/>
-          <p:nvPr/>
-        </p:nvSpPr>
-        <p:spPr>
-          <a:xfrm>
-            <a:off x="640080" y="1280160"/>
-            <a:ext cx="10972800" cy="5212080"/>
-          </a:xfrm>
-          <a:prstGeom prst="rect">
-            <a:avLst/>
-          </a:prstGeom>
-          <a:noFill/>
-        </p:spPr>
-        <p:txBody>
-          <a:bodyPr wrap="square">
-            <a:spAutoFit/>
-          </a:bodyPr>
-          <a:lstStyle/>
-          <a:p>
-            <a:pPr algn="r" rtl="1">
-              <a:spcBef>
-                <a:spcPts val="200"/>
-              </a:spcBef>
-              <a:spcAft>
-                <a:spcPts val="1000"/>
-              </a:spcAft>
-            </a:pPr>
-            <a:r>
-              <a:rPr sz="1600">
-                <a:solidFill>
-                  <a:srgbClr val="333333"/>
-                </a:solidFill>
-                <a:latin typeface="Arial"/>
-              </a:rPr>
-              <a:t>• V07 — المستودعات والبحيرات ومعمارية Lakehouse</a:t>
-            </a:r>
-          </a:p>
-          <a:p>
-            <a:pPr algn="l" rtl="0">
-              <a:spcBef>
-                <a:spcPts val="200"/>
-              </a:spcBef>
-              <a:spcAft>
-                <a:spcPts val="1000"/>
-              </a:spcAft>
-            </a:pPr>
-            <a:r>
-              <a:rPr sz="1300">
-                <a:solidFill>
-                  <a:srgbClr val="666666"/>
-                </a:solidFill>
-                <a:latin typeface="Calibri"/>
-              </a:rPr>
-              <a:t>• V07 — Warehouses, Data Lakes &amp; Lakehouse</a:t>
-            </a:r>
-          </a:p>
-          <a:p>
-            <a:pPr algn="r" rtl="1">
-              <a:spcBef>
-                <a:spcPts val="200"/>
-              </a:spcBef>
-              <a:spcAft>
-                <a:spcPts val="1000"/>
-              </a:spcAft>
-            </a:pPr>
-            <a:r>
-              <a:rPr sz="1600">
-                <a:solidFill>
-                  <a:srgbClr val="333333"/>
-                </a:solidFill>
-                <a:latin typeface="Arial"/>
-              </a:rPr>
-              <a:t>• المستودع مقابل البحيرة / Warehouse vs Lake</a:t>
-            </a:r>
-          </a:p>
-          <a:p>
-            <a:pPr algn="r" rtl="1">
-              <a:spcBef>
-                <a:spcPts val="200"/>
-              </a:spcBef>
-              <a:spcAft>
-                <a:spcPts val="1000"/>
-              </a:spcAft>
-            </a:pPr>
-            <a:r>
-              <a:rPr sz="1600">
-                <a:solidFill>
-                  <a:srgbClr val="333333"/>
-                </a:solidFill>
-                <a:latin typeface="Arial"/>
-              </a:rPr>
-              <a:t>• معمارية Lakehouse / Lakehouse</a:t>
-            </a:r>
-          </a:p>
-          <a:p>
-            <a:pPr algn="r" rtl="1">
-              <a:spcBef>
-                <a:spcPts val="200"/>
-              </a:spcBef>
-              <a:spcAft>
-                <a:spcPts val="1000"/>
-              </a:spcAft>
-            </a:pPr>
-            <a:r>
-              <a:rPr sz="1600">
-                <a:solidFill>
-                  <a:srgbClr val="333333"/>
-                </a:solidFill>
-                <a:latin typeface="Arial"/>
-              </a:rPr>
-              <a:t>• منتجات البيانات وعقودها / Data Products &amp; Contracts</a:t>
-            </a:r>
-          </a:p>
-          <a:p>
-            <a:pPr algn="r" rtl="1">
-              <a:spcBef>
-                <a:spcPts val="200"/>
-              </a:spcBef>
-              <a:spcAft>
-                <a:spcPts val="1000"/>
-              </a:spcAft>
-            </a:pPr>
-            <a:r>
-              <a:rPr sz="1600">
-                <a:solidFill>
-                  <a:srgbClr val="333333"/>
-                </a:solidFill>
-                <a:latin typeface="Arial"/>
-              </a:rPr>
-              <a:t>• متى تختار كل نموذج؟ / When to Choose Which</a:t>
-            </a:r>
-          </a:p>
-          <a:p>
-            <a:pPr algn="r" rtl="1">
-              <a:spcBef>
-                <a:spcPts val="200"/>
-              </a:spcBef>
-              <a:spcAft>
-                <a:spcPts val="1000"/>
-              </a:spcAft>
-            </a:pPr>
-            <a:r>
-              <a:rPr sz="1600">
-                <a:solidFill>
-                  <a:srgbClr val="333333"/>
-                </a:solidFill>
-                <a:latin typeface="Arial"/>
-              </a:rPr>
-              <a:t>• ربط بالمقرر / Course Tie-in</a:t>
-            </a:r>
-          </a:p>
-        </p:txBody>
-      </p:sp>
-      <p:sp>
-        <p:nvSpPr>
-          <p:cNvPr id="5" name="TextBox 4"/>
-          <p:cNvSpPr txBox="1"/>
-          <p:nvPr/>
-        </p:nvSpPr>
-        <p:spPr>
-          <a:xfrm>
-            <a:off x="640080" y="6400800"/>
-            <a:ext cx="8686800" cy="320040"/>
-          </a:xfrm>
-          <a:prstGeom prst="rect">
-            <a:avLst/>
-          </a:prstGeom>
-          <a:noFill/>
-        </p:spPr>
-        <p:txBody>
-          <a:bodyPr wrap="square">
-            <a:spAutoFit/>
-          </a:bodyPr>
-          <a:lstStyle/>
-          <a:p>
-            <a:pPr algn="r" rtl="1"/>
-            <a:r>
-              <a:rPr sz="1000" b="0">
-                <a:solidFill>
-                  <a:srgbClr val="666666"/>
-                </a:solidFill>
-                <a:latin typeface="Arial"/>
-              </a:rPr>
-              <a:t>Module 02 — Data &amp; AI Engineering Track  |  الوحدة الثانية</a:t>
-            </a:r>
-          </a:p>
-        </p:txBody>
-      </p:sp>
-      <p:sp>
-        <p:nvSpPr>
-          <p:cNvPr id="6" name="TextBox 5"/>
-          <p:cNvSpPr txBox="1"/>
-          <p:nvPr/>
-        </p:nvSpPr>
-        <p:spPr>
-          <a:xfrm>
-            <a:off x="9601200" y="6400800"/>
-            <a:ext cx="1920240" cy="320040"/>
-          </a:xfrm>
-          <a:prstGeom prst="rect">
-            <a:avLst/>
-          </a:prstGeom>
-          <a:noFill/>
-        </p:spPr>
-        <p:txBody>
-          <a:bodyPr wrap="square">
-            <a:spAutoFit/>
-          </a:bodyPr>
-          <a:lstStyle/>
-          <a:p>
-            <a:pPr algn="l" rtl="0"/>
-            <a:r>
-              <a:rPr sz="1000" b="0">
-                <a:solidFill>
-                  <a:srgbClr val="666666"/>
-                </a:solidFill>
-                <a:latin typeface="Calibri"/>
-              </a:rPr>
-              <a:t>V07  •  2/14</a:t>
-            </a:r>
-          </a:p>
-        </p:txBody>
-      </p:sp>
-    </p:spTree>
-  </p:cSld>
-  <p:clrMapOvr>
-    <a:masterClrMapping/>
-  </p:clrMapOvr>
-</p:sld>
-</file>
-
-<file path=ppt/slides/slide3.xml><?xml version="1.0" encoding="utf-8"?>
-<p:sld xmlns:a="http://schemas.openxmlformats.org/drawingml/2006/main" xmlns:p="http://schemas.openxmlformats.org/presentationml/2006/main" xmlns:r="http://schemas.openxmlformats.org/officeDocument/2006/relationships">
-  <p:cSld>
-    <p:bg>
-      <p:bgPr>
-        <a:solidFill>
-          <a:srgbClr val="FFFFFF"/>
-        </a:solidFill>
-        <a:effectLst/>
-      </p:bgPr>
-    </p:bg>
-    <p:spTree>
-      <p:nvGrpSpPr>
-        <p:cNvPr id="1" name=""/>
-        <p:cNvGrpSpPr/>
-        <p:nvPr/>
-      </p:nvGrpSpPr>
-      <p:grpSpPr/>
-      <p:sp>
-        <p:nvSpPr>
-          <p:cNvPr id="2" name="Rectangle 1"/>
-          <p:cNvSpPr/>
-          <p:nvPr/>
-        </p:nvSpPr>
-        <p:spPr>
-          <a:xfrm>
-            <a:off x="0" y="0"/>
-            <a:ext cx="12191695" cy="1005840"/>
-          </a:xfrm>
-          <a:prstGeom prst="rect">
-            <a:avLst/>
-          </a:prstGeom>
-          <a:solidFill>
-            <a:srgbClr val="FFFFFF"/>
-          </a:solidFill>
-          <a:ln w="25400">
-            <a:solidFill>
-              <a:srgbClr val="1F4E79"/>
-            </a:solidFill>
-          </a:ln>
-          <a:effectLst/>
-        </p:spPr>
-        <p:style>
-          <a:lnRef idx="1">
-            <a:schemeClr val="accent1"/>
-          </a:lnRef>
-          <a:fillRef idx="3">
-            <a:schemeClr val="accent1"/>
-          </a:fillRef>
-          <a:effectRef idx="2">
-            <a:schemeClr val="accent1"/>
-          </a:effectRef>
-          <a:fontRef idx="minor">
-            <a:schemeClr val="lt1"/>
-          </a:fontRef>
-        </p:style>
-        <p:txBody>
-          <a:bodyPr rtlCol="0" anchor="ctr"/>
-          <a:lstStyle/>
-          <a:p>
-            <a:pPr algn="ctr"/>
-          </a:p>
-        </p:txBody>
-      </p:sp>
-      <p:sp>
-        <p:nvSpPr>
-          <p:cNvPr id="3" name="TextBox 2"/>
-          <p:cNvSpPr txBox="1"/>
-          <p:nvPr/>
-        </p:nvSpPr>
-        <p:spPr>
-          <a:xfrm>
-            <a:off x="640080" y="182880"/>
-            <a:ext cx="10972800" cy="640080"/>
-          </a:xfrm>
-          <a:prstGeom prst="rect">
-            <a:avLst/>
-          </a:prstGeom>
-          <a:noFill/>
-        </p:spPr>
-        <p:txBody>
-          <a:bodyPr wrap="square">
-            <a:spAutoFit/>
-          </a:bodyPr>
-          <a:lstStyle/>
-          <a:p>
-            <a:pPr algn="r" rtl="1"/>
-            <a:r>
-              <a:rPr sz="3200" b="1">
-                <a:solidFill>
-                  <a:srgbClr val="1F3B5C"/>
-                </a:solidFill>
-                <a:latin typeface="Arial"/>
-              </a:rPr>
-              <a:t>المستودع مقابل البحيرة / Warehouse vs Lake</a:t>
-            </a:r>
-          </a:p>
-        </p:txBody>
-      </p:sp>
-      <p:sp>
-        <p:nvSpPr>
-          <p:cNvPr id="4" name="TextBox 3"/>
-          <p:cNvSpPr txBox="1"/>
-          <p:nvPr/>
-        </p:nvSpPr>
-        <p:spPr>
-          <a:xfrm>
-            <a:off x="640080" y="1280160"/>
-            <a:ext cx="10972800" cy="5212080"/>
-          </a:xfrm>
-          <a:prstGeom prst="rect">
-            <a:avLst/>
-          </a:prstGeom>
-          <a:noFill/>
-        </p:spPr>
-        <p:txBody>
-          <a:bodyPr wrap="square">
-            <a:spAutoFit/>
-          </a:bodyPr>
-          <a:lstStyle/>
-          <a:p>
-            <a:pPr algn="r" rtl="1">
-              <a:spcBef>
-                <a:spcPts val="200"/>
-              </a:spcBef>
-              <a:spcAft>
-                <a:spcPts val="1000"/>
-              </a:spcAft>
-            </a:pPr>
-            <a:r>
-              <a:rPr sz="1900">
-                <a:solidFill>
-                  <a:srgbClr val="333333"/>
-                </a:solidFill>
-                <a:latin typeface="Arial"/>
-              </a:rPr>
-              <a:t>• المستودع: مخطط عند الكتابة، SQL سريع، بيانات مهيكلة فقط.</a:t>
-            </a:r>
-          </a:p>
-          <a:p>
-            <a:pPr algn="l" rtl="0">
-              <a:spcBef>
-                <a:spcPts val="200"/>
-              </a:spcBef>
-              <a:spcAft>
-                <a:spcPts val="1000"/>
-              </a:spcAft>
-            </a:pPr>
-            <a:r>
-              <a:rPr sz="1600">
-                <a:solidFill>
-                  <a:srgbClr val="666666"/>
-                </a:solidFill>
-                <a:latin typeface="Calibri"/>
-              </a:rPr>
-              <a:t>• Warehouse: schema-on-write, fast SQL, structured data only.</a:t>
-            </a:r>
-          </a:p>
-          <a:p>
-            <a:pPr algn="r" rtl="1">
-              <a:spcBef>
-                <a:spcPts val="200"/>
-              </a:spcBef>
-              <a:spcAft>
-                <a:spcPts val="1000"/>
-              </a:spcAft>
-            </a:pPr>
-            <a:r>
-              <a:rPr sz="1900">
-                <a:solidFill>
-                  <a:srgbClr val="333333"/>
-                </a:solidFill>
-                <a:latin typeface="Arial"/>
-              </a:rPr>
-              <a:t>• البحيرة: مخطط عند القراءة، كل التنسيقات، تكلفة تخزين منخفضة.</a:t>
-            </a:r>
-          </a:p>
-          <a:p>
-            <a:pPr algn="l" rtl="0">
-              <a:spcBef>
-                <a:spcPts val="200"/>
-              </a:spcBef>
-              <a:spcAft>
-                <a:spcPts val="1000"/>
-              </a:spcAft>
-            </a:pPr>
-            <a:r>
-              <a:rPr sz="1600">
-                <a:solidFill>
-                  <a:srgbClr val="666666"/>
-                </a:solidFill>
-                <a:latin typeface="Calibri"/>
-              </a:rPr>
-              <a:t>• Lake: schema-on-read, any format, low-cost storage.</a:t>
-            </a:r>
-          </a:p>
-        </p:txBody>
-      </p:sp>
-      <p:sp>
-        <p:nvSpPr>
-          <p:cNvPr id="5" name="TextBox 4"/>
-          <p:cNvSpPr txBox="1"/>
-          <p:nvPr/>
-        </p:nvSpPr>
-        <p:spPr>
-          <a:xfrm>
-            <a:off x="640080" y="6400800"/>
-            <a:ext cx="8686800" cy="320040"/>
-          </a:xfrm>
-          <a:prstGeom prst="rect">
-            <a:avLst/>
-          </a:prstGeom>
-          <a:noFill/>
-        </p:spPr>
-        <p:txBody>
-          <a:bodyPr wrap="square">
-            <a:spAutoFit/>
-          </a:bodyPr>
-          <a:lstStyle/>
-          <a:p>
-            <a:pPr algn="r" rtl="1"/>
-            <a:r>
-              <a:rPr sz="1000" b="0">
-                <a:solidFill>
-                  <a:srgbClr val="666666"/>
-                </a:solidFill>
-                <a:latin typeface="Arial"/>
-              </a:rPr>
-              <a:t>Module 02 — Data &amp; AI Engineering Track  |  الوحدة الثانية</a:t>
-            </a:r>
-          </a:p>
-        </p:txBody>
-      </p:sp>
-      <p:sp>
-        <p:nvSpPr>
-          <p:cNvPr id="6" name="TextBox 5"/>
-          <p:cNvSpPr txBox="1"/>
-          <p:nvPr/>
-        </p:nvSpPr>
-        <p:spPr>
-          <a:xfrm>
-            <a:off x="9601200" y="6400800"/>
-            <a:ext cx="1920240" cy="320040"/>
-          </a:xfrm>
-          <a:prstGeom prst="rect">
-            <a:avLst/>
-          </a:prstGeom>
-          <a:noFill/>
-        </p:spPr>
-        <p:txBody>
-          <a:bodyPr wrap="square">
-            <a:spAutoFit/>
-          </a:bodyPr>
-          <a:lstStyle/>
-          <a:p>
-            <a:pPr algn="l" rtl="0"/>
-            <a:r>
-              <a:rPr sz="1000" b="0">
-                <a:solidFill>
-                  <a:srgbClr val="666666"/>
-                </a:solidFill>
-                <a:latin typeface="Calibri"/>
-              </a:rPr>
-              <a:t>V07  •  3/14</a:t>
-            </a:r>
-          </a:p>
-        </p:txBody>
-      </p:sp>
-    </p:spTree>
-  </p:cSld>
-  <p:clrMapOvr>
-    <a:masterClrMapping/>
-  </p:clrMapOvr>
-</p:sld>
-</file>
-
-<file path=ppt/slides/slide4.xml><?xml version="1.0" encoding="utf-8"?>
-<p:sld xmlns:a="http://schemas.openxmlformats.org/drawingml/2006/main" xmlns:p="http://schemas.openxmlformats.org/presentationml/2006/main" xmlns:r="http://schemas.openxmlformats.org/officeDocument/2006/relationships">
-  <p:cSld>
-    <p:bg>
-      <p:bgPr>
-        <a:solidFill>
-          <a:srgbClr val="FFFFFF"/>
-        </a:solidFill>
-        <a:effectLst/>
-      </p:bgPr>
-    </p:bg>
-    <p:spTree>
-      <p:nvGrpSpPr>
-        <p:cNvPr id="1" name=""/>
-        <p:cNvGrpSpPr/>
-        <p:nvPr/>
-      </p:nvGrpSpPr>
-      <p:grpSpPr/>
-      <p:sp>
-        <p:nvSpPr>
-          <p:cNvPr id="2" name="Rectangle 1"/>
-          <p:cNvSpPr/>
-          <p:nvPr/>
-        </p:nvSpPr>
-        <p:spPr>
-          <a:xfrm>
-            <a:off x="0" y="0"/>
-            <a:ext cx="12191695" cy="1005840"/>
-          </a:xfrm>
-          <a:prstGeom prst="rect">
-            <a:avLst/>
-          </a:prstGeom>
-          <a:solidFill>
-            <a:srgbClr val="FFFFFF"/>
-          </a:solidFill>
-          <a:ln w="25400">
-            <a:solidFill>
-              <a:srgbClr val="1F4E79"/>
-            </a:solidFill>
-          </a:ln>
-          <a:effectLst/>
-        </p:spPr>
-        <p:style>
-          <a:lnRef idx="1">
-            <a:schemeClr val="accent1"/>
-          </a:lnRef>
-          <a:fillRef idx="3">
-            <a:schemeClr val="accent1"/>
-          </a:fillRef>
-          <a:effectRef idx="2">
-            <a:schemeClr val="accent1"/>
-          </a:effectRef>
-          <a:fontRef idx="minor">
-            <a:schemeClr val="lt1"/>
-          </a:fontRef>
-        </p:style>
-        <p:txBody>
-          <a:bodyPr rtlCol="0" anchor="ctr"/>
-          <a:lstStyle/>
-          <a:p>
-            <a:pPr algn="ctr"/>
-          </a:p>
-        </p:txBody>
-      </p:sp>
-      <p:sp>
-        <p:nvSpPr>
-          <p:cNvPr id="3" name="TextBox 2"/>
-          <p:cNvSpPr txBox="1"/>
-          <p:nvPr/>
-        </p:nvSpPr>
-        <p:spPr>
-          <a:xfrm>
-            <a:off x="640080" y="182880"/>
-            <a:ext cx="10972800" cy="640080"/>
-          </a:xfrm>
-          <a:prstGeom prst="rect">
-            <a:avLst/>
-          </a:prstGeom>
-          <a:noFill/>
-        </p:spPr>
-        <p:txBody>
-          <a:bodyPr wrap="square">
-            <a:spAutoFit/>
-          </a:bodyPr>
-          <a:lstStyle/>
-          <a:p>
-            <a:pPr algn="r" rtl="1"/>
-            <a:r>
-              <a:rPr sz="3200" b="1">
-                <a:solidFill>
-                  <a:srgbClr val="1F3B5C"/>
-                </a:solidFill>
-                <a:latin typeface="Arial"/>
-              </a:rPr>
-              <a:t>معمارية Lakehouse / Lakehouse</a:t>
-            </a:r>
-          </a:p>
-        </p:txBody>
-      </p:sp>
-      <p:sp>
-        <p:nvSpPr>
-          <p:cNvPr id="4" name="TextBox 3"/>
-          <p:cNvSpPr txBox="1"/>
-          <p:nvPr/>
-        </p:nvSpPr>
-        <p:spPr>
-          <a:xfrm>
-            <a:off x="640080" y="1280160"/>
-            <a:ext cx="10972800" cy="5212080"/>
-          </a:xfrm>
-          <a:prstGeom prst="rect">
-            <a:avLst/>
-          </a:prstGeom>
-          <a:noFill/>
-        </p:spPr>
-        <p:txBody>
-          <a:bodyPr wrap="square">
-            <a:spAutoFit/>
-          </a:bodyPr>
-          <a:lstStyle/>
-          <a:p>
-            <a:pPr algn="r" rtl="1">
-              <a:spcBef>
-                <a:spcPts val="200"/>
-              </a:spcBef>
-              <a:spcAft>
-                <a:spcPts val="1000"/>
-              </a:spcAft>
-            </a:pPr>
-            <a:r>
-              <a:rPr sz="1900">
-                <a:solidFill>
-                  <a:srgbClr val="333333"/>
-                </a:solidFill>
-                <a:latin typeface="Arial"/>
-              </a:rPr>
-              <a:t>• تجمع مرونة البحيرة وأداء المستودع في منصة واحدة (Delta Lake, Iceberg, Hudi).</a:t>
-            </a:r>
-          </a:p>
-          <a:p>
-            <a:pPr algn="l" rtl="0">
-              <a:spcBef>
-                <a:spcPts val="200"/>
-              </a:spcBef>
-              <a:spcAft>
-                <a:spcPts val="1000"/>
-              </a:spcAft>
-            </a:pPr>
-            <a:r>
-              <a:rPr sz="1600">
-                <a:solidFill>
-                  <a:srgbClr val="666666"/>
-                </a:solidFill>
-                <a:latin typeface="Calibri"/>
-              </a:rPr>
-              <a:t>• Combines lake flexibility with warehouse performance (Delta Lake, Iceberg, Hudi).</a:t>
-            </a:r>
-          </a:p>
-          <a:p>
-            <a:pPr algn="r" rtl="1">
-              <a:spcBef>
-                <a:spcPts val="200"/>
-              </a:spcBef>
-              <a:spcAft>
-                <a:spcPts val="1000"/>
-              </a:spcAft>
-            </a:pPr>
-            <a:r>
-              <a:rPr sz="1900">
-                <a:solidFill>
-                  <a:srgbClr val="333333"/>
-                </a:solidFill>
-                <a:latin typeface="Arial"/>
-              </a:rPr>
-              <a:t>• طبقات معاملات ACID وفهرسة وحوكمة فوق تخزين الكائنات.</a:t>
-            </a:r>
-          </a:p>
-          <a:p>
-            <a:pPr algn="l" rtl="0">
-              <a:spcBef>
-                <a:spcPts val="200"/>
-              </a:spcBef>
-              <a:spcAft>
-                <a:spcPts val="1000"/>
-              </a:spcAft>
-            </a:pPr>
-            <a:r>
-              <a:rPr sz="1600">
-                <a:solidFill>
-                  <a:srgbClr val="666666"/>
-                </a:solidFill>
-                <a:latin typeface="Calibri"/>
-              </a:rPr>
-              <a:t>• ACID transactions, indexing, and governance layers over object storage.</a:t>
-            </a:r>
-          </a:p>
-        </p:txBody>
-      </p:sp>
-      <p:sp>
-        <p:nvSpPr>
-          <p:cNvPr id="5" name="TextBox 4"/>
-          <p:cNvSpPr txBox="1"/>
-          <p:nvPr/>
-        </p:nvSpPr>
-        <p:spPr>
-          <a:xfrm>
-            <a:off x="640080" y="6400800"/>
-            <a:ext cx="8686800" cy="320040"/>
-          </a:xfrm>
-          <a:prstGeom prst="rect">
-            <a:avLst/>
-          </a:prstGeom>
-          <a:noFill/>
-        </p:spPr>
-        <p:txBody>
-          <a:bodyPr wrap="square">
-            <a:spAutoFit/>
-          </a:bodyPr>
-          <a:lstStyle/>
-          <a:p>
-            <a:pPr algn="r" rtl="1"/>
-            <a:r>
-              <a:rPr sz="1000" b="0">
-                <a:solidFill>
-                  <a:srgbClr val="666666"/>
-                </a:solidFill>
-                <a:latin typeface="Arial"/>
-              </a:rPr>
-              <a:t>Module 02 — Data &amp; AI Engineering Track  |  الوحدة الثانية</a:t>
-            </a:r>
-          </a:p>
-        </p:txBody>
-      </p:sp>
-      <p:sp>
-        <p:nvSpPr>
-          <p:cNvPr id="6" name="TextBox 5"/>
-          <p:cNvSpPr txBox="1"/>
-          <p:nvPr/>
-        </p:nvSpPr>
-        <p:spPr>
-          <a:xfrm>
-            <a:off x="9601200" y="6400800"/>
-            <a:ext cx="1920240" cy="320040"/>
-          </a:xfrm>
-          <a:prstGeom prst="rect">
-            <a:avLst/>
-          </a:prstGeom>
-          <a:noFill/>
-        </p:spPr>
-        <p:txBody>
-          <a:bodyPr wrap="square">
-            <a:spAutoFit/>
-          </a:bodyPr>
-          <a:lstStyle/>
-          <a:p>
-            <a:pPr algn="l" rtl="0"/>
-            <a:r>
-              <a:rPr sz="1000" b="0">
-                <a:solidFill>
-                  <a:srgbClr val="666666"/>
-                </a:solidFill>
-                <a:latin typeface="Calibri"/>
-              </a:rPr>
-              <a:t>V07  •  4/14</a:t>
-            </a:r>
-          </a:p>
-        </p:txBody>
-      </p:sp>
-    </p:spTree>
-  </p:cSld>
-  <p:clrMapOvr>
-    <a:masterClrMapping/>
-  </p:clrMapOvr>
-</p:sld>
-</file>
-
-<file path=ppt/slides/slide5.xml><?xml version="1.0" encoding="utf-8"?>
-<p:sld xmlns:a="http://schemas.openxmlformats.org/drawingml/2006/main" xmlns:p="http://schemas.openxmlformats.org/presentationml/2006/main" xmlns:r="http://schemas.openxmlformats.org/officeDocument/2006/relationships">
-  <p:cSld>
-    <p:bg>
-      <p:bgPr>
-        <a:solidFill>
-          <a:srgbClr val="FFFFFF"/>
-        </a:solidFill>
-        <a:effectLst/>
-      </p:bgPr>
-    </p:bg>
-    <p:spTree>
-      <p:nvGrpSpPr>
-        <p:cNvPr id="1" name=""/>
-        <p:cNvGrpSpPr/>
-        <p:nvPr/>
-      </p:nvGrpSpPr>
-      <p:grpSpPr/>
-      <p:sp>
-        <p:nvSpPr>
-          <p:cNvPr id="2" name="Rectangle 1"/>
-          <p:cNvSpPr/>
-          <p:nvPr/>
-        </p:nvSpPr>
-        <p:spPr>
-          <a:xfrm>
-            <a:off x="0" y="0"/>
-            <a:ext cx="12191695" cy="1005840"/>
-          </a:xfrm>
-          <a:prstGeom prst="rect">
-            <a:avLst/>
-          </a:prstGeom>
-          <a:solidFill>
-            <a:srgbClr val="FFFFFF"/>
-          </a:solidFill>
-          <a:ln w="25400">
-            <a:solidFill>
-              <a:srgbClr val="1F4E79"/>
-            </a:solidFill>
-          </a:ln>
-          <a:effectLst/>
-        </p:spPr>
-        <p:style>
-          <a:lnRef idx="1">
-            <a:schemeClr val="accent1"/>
-          </a:lnRef>
-          <a:fillRef idx="3">
-            <a:schemeClr val="accent1"/>
-          </a:fillRef>
-          <a:effectRef idx="2">
-            <a:schemeClr val="accent1"/>
-          </a:effectRef>
-          <a:fontRef idx="minor">
-            <a:schemeClr val="lt1"/>
-          </a:fontRef>
-        </p:style>
-        <p:txBody>
-          <a:bodyPr rtlCol="0" anchor="ctr"/>
-          <a:lstStyle/>
-          <a:p>
-            <a:pPr algn="ctr"/>
-          </a:p>
-        </p:txBody>
-      </p:sp>
-      <p:sp>
-        <p:nvSpPr>
-          <p:cNvPr id="3" name="TextBox 2"/>
-          <p:cNvSpPr txBox="1"/>
-          <p:nvPr/>
-        </p:nvSpPr>
-        <p:spPr>
-          <a:xfrm>
-            <a:off x="640080" y="182880"/>
-            <a:ext cx="10972800" cy="640080"/>
-          </a:xfrm>
-          <a:prstGeom prst="rect">
-            <a:avLst/>
-          </a:prstGeom>
-          <a:noFill/>
-        </p:spPr>
-        <p:txBody>
-          <a:bodyPr wrap="square">
-            <a:spAutoFit/>
-          </a:bodyPr>
-          <a:lstStyle/>
-          <a:p>
-            <a:pPr algn="r" rtl="1"/>
-            <a:r>
-              <a:rPr sz="3200" b="1">
-                <a:solidFill>
-                  <a:srgbClr val="1F3B5C"/>
-                </a:solidFill>
-                <a:latin typeface="Arial"/>
-              </a:rPr>
-              <a:t>منتجات البيانات وعقودها / Data Products &amp; Contracts</a:t>
-            </a:r>
-          </a:p>
-        </p:txBody>
-      </p:sp>
-      <p:sp>
-        <p:nvSpPr>
-          <p:cNvPr id="4" name="TextBox 3"/>
-          <p:cNvSpPr txBox="1"/>
-          <p:nvPr/>
-        </p:nvSpPr>
-        <p:spPr>
-          <a:xfrm>
-            <a:off x="640080" y="1280160"/>
-            <a:ext cx="10972800" cy="5212080"/>
-          </a:xfrm>
-          <a:prstGeom prst="rect">
-            <a:avLst/>
-          </a:prstGeom>
-          <a:noFill/>
-        </p:spPr>
-        <p:txBody>
-          <a:bodyPr wrap="square">
-            <a:spAutoFit/>
-          </a:bodyPr>
-          <a:lstStyle/>
-          <a:p>
-            <a:pPr algn="r" rtl="1">
-              <a:spcBef>
-                <a:spcPts val="200"/>
-              </a:spcBef>
-              <a:spcAft>
-                <a:spcPts val="1000"/>
-              </a:spcAft>
-            </a:pPr>
-            <a:r>
-              <a:rPr sz="1900">
-                <a:solidFill>
-                  <a:srgbClr val="333333"/>
-                </a:solidFill>
-                <a:latin typeface="Arial"/>
-              </a:rPr>
-              <a:t>• منتج البيانات: مجموعة بيانات موثوقة موثّقة قابلة للاكتشاف تُدار كمنتج حقيقي.</a:t>
-            </a:r>
-          </a:p>
-          <a:p>
-            <a:pPr algn="l" rtl="0">
-              <a:spcBef>
-                <a:spcPts val="200"/>
-              </a:spcBef>
-              <a:spcAft>
-                <a:spcPts val="1000"/>
-              </a:spcAft>
-            </a:pPr>
-            <a:r>
-              <a:rPr sz="1600">
-                <a:solidFill>
-                  <a:srgbClr val="666666"/>
-                </a:solidFill>
-                <a:latin typeface="Calibri"/>
-              </a:rPr>
-              <a:t>• Data product: a trusted, documented, discoverable dataset managed like a product.</a:t>
-            </a:r>
-          </a:p>
-          <a:p>
-            <a:pPr algn="r" rtl="1">
-              <a:spcBef>
-                <a:spcPts val="200"/>
-              </a:spcBef>
-              <a:spcAft>
-                <a:spcPts val="1000"/>
-              </a:spcAft>
-            </a:pPr>
-            <a:r>
-              <a:rPr sz="1900">
-                <a:solidFill>
-                  <a:srgbClr val="333333"/>
-                </a:solidFill>
-                <a:latin typeface="Arial"/>
-              </a:rPr>
-              <a:t>• عقد البيانات: المخطط والأمان ومستوى الخدمة SLA — وحدة التسليم الحديثة.</a:t>
-            </a:r>
-          </a:p>
-          <a:p>
-            <a:pPr algn="l" rtl="0">
-              <a:spcBef>
-                <a:spcPts val="200"/>
-              </a:spcBef>
-              <a:spcAft>
-                <a:spcPts val="1000"/>
-              </a:spcAft>
-            </a:pPr>
-            <a:r>
-              <a:rPr sz="1600">
-                <a:solidFill>
-                  <a:srgbClr val="666666"/>
-                </a:solidFill>
-                <a:latin typeface="Calibri"/>
-              </a:rPr>
-              <a:t>• Data contract: schema + security + SLA — the modern delivery unit.</a:t>
-            </a:r>
-          </a:p>
-        </p:txBody>
-      </p:sp>
-      <p:sp>
-        <p:nvSpPr>
-          <p:cNvPr id="5" name="TextBox 4"/>
-          <p:cNvSpPr txBox="1"/>
-          <p:nvPr/>
-        </p:nvSpPr>
-        <p:spPr>
-          <a:xfrm>
-            <a:off x="640080" y="6400800"/>
-            <a:ext cx="8686800" cy="320040"/>
-          </a:xfrm>
-          <a:prstGeom prst="rect">
-            <a:avLst/>
-          </a:prstGeom>
-          <a:noFill/>
-        </p:spPr>
-        <p:txBody>
-          <a:bodyPr wrap="square">
-            <a:spAutoFit/>
-          </a:bodyPr>
-          <a:lstStyle/>
-          <a:p>
-            <a:pPr algn="r" rtl="1"/>
-            <a:r>
-              <a:rPr sz="1000" b="0">
-                <a:solidFill>
-                  <a:srgbClr val="666666"/>
-                </a:solidFill>
-                <a:latin typeface="Arial"/>
-              </a:rPr>
-              <a:t>Module 02 — Data &amp; AI Engineering Track  |  الوحدة الثانية</a:t>
-            </a:r>
-          </a:p>
-        </p:txBody>
-      </p:sp>
-      <p:sp>
-        <p:nvSpPr>
-          <p:cNvPr id="6" name="TextBox 5"/>
-          <p:cNvSpPr txBox="1"/>
-          <p:nvPr/>
-        </p:nvSpPr>
-        <p:spPr>
-          <a:xfrm>
-            <a:off x="9601200" y="6400800"/>
-            <a:ext cx="1920240" cy="320040"/>
-          </a:xfrm>
-          <a:prstGeom prst="rect">
-            <a:avLst/>
-          </a:prstGeom>
-          <a:noFill/>
-        </p:spPr>
-        <p:txBody>
-          <a:bodyPr wrap="square">
-            <a:spAutoFit/>
-          </a:bodyPr>
-          <a:lstStyle/>
-          <a:p>
-            <a:pPr algn="l" rtl="0"/>
-            <a:r>
-              <a:rPr sz="1000" b="0">
-                <a:solidFill>
-                  <a:srgbClr val="666666"/>
-                </a:solidFill>
-                <a:latin typeface="Calibri"/>
-              </a:rPr>
-              <a:t>V07  •  6/14</a:t>
-            </a:r>
-          </a:p>
-        </p:txBody>
-      </p:sp>
-    </p:spTree>
-  </p:cSld>
-  <p:clrMapOvr>
-    <a:masterClrMapping/>
-  </p:clrMapOvr>
-</p:sld>
-</file>
-
-<file path=ppt/slides/slide6.xml><?xml version="1.0" encoding="utf-8"?>
-<p:sld xmlns:a="http://schemas.openxmlformats.org/drawingml/2006/main" xmlns:p="http://schemas.openxmlformats.org/presentationml/2006/main" xmlns:r="http://schemas.openxmlformats.org/officeDocument/2006/relationships">
-  <p:cSld>
-    <p:bg>
-      <p:bgPr>
-        <a:solidFill>
-          <a:srgbClr val="FFFFFF"/>
-        </a:solidFill>
-        <a:effectLst/>
-      </p:bgPr>
-    </p:bg>
-    <p:spTree>
-      <p:nvGrpSpPr>
-        <p:cNvPr id="1" name=""/>
-        <p:cNvGrpSpPr/>
-        <p:nvPr/>
-      </p:nvGrpSpPr>
-      <p:grpSpPr/>
-      <p:sp>
-        <p:nvSpPr>
-          <p:cNvPr id="2" name="Rectangle 1"/>
-          <p:cNvSpPr/>
-          <p:nvPr/>
-        </p:nvSpPr>
-        <p:spPr>
-          <a:xfrm>
-            <a:off x="0" y="0"/>
-            <a:ext cx="12191695" cy="1005840"/>
-          </a:xfrm>
-          <a:prstGeom prst="rect">
-            <a:avLst/>
-          </a:prstGeom>
-          <a:solidFill>
-            <a:srgbClr val="FFFFFF"/>
-          </a:solidFill>
-          <a:ln w="25400">
-            <a:solidFill>
-              <a:srgbClr val="1F4E79"/>
-            </a:solidFill>
-          </a:ln>
-          <a:effectLst/>
-        </p:spPr>
-        <p:style>
-          <a:lnRef idx="1">
-            <a:schemeClr val="accent1"/>
-          </a:lnRef>
-          <a:fillRef idx="3">
-            <a:schemeClr val="accent1"/>
-          </a:fillRef>
-          <a:effectRef idx="2">
-            <a:schemeClr val="accent1"/>
-          </a:effectRef>
-          <a:fontRef idx="minor">
-            <a:schemeClr val="lt1"/>
-          </a:fontRef>
-        </p:style>
-        <p:txBody>
-          <a:bodyPr rtlCol="0" anchor="ctr"/>
-          <a:lstStyle/>
-          <a:p>
-            <a:pPr algn="ctr"/>
-          </a:p>
-        </p:txBody>
-      </p:sp>
-      <p:sp>
-        <p:nvSpPr>
-          <p:cNvPr id="3" name="TextBox 2"/>
-          <p:cNvSpPr txBox="1"/>
-          <p:nvPr/>
-        </p:nvSpPr>
-        <p:spPr>
-          <a:xfrm>
-            <a:off x="640080" y="182880"/>
-            <a:ext cx="10972800" cy="640080"/>
-          </a:xfrm>
-          <a:prstGeom prst="rect">
-            <a:avLst/>
-          </a:prstGeom>
-          <a:noFill/>
-        </p:spPr>
-        <p:txBody>
-          <a:bodyPr wrap="square">
-            <a:spAutoFit/>
-          </a:bodyPr>
-          <a:lstStyle/>
-          <a:p>
-            <a:pPr algn="r" rtl="1"/>
-            <a:r>
-              <a:rPr sz="3200" b="1">
-                <a:solidFill>
-                  <a:srgbClr val="1F3B5C"/>
-                </a:solidFill>
-                <a:latin typeface="Arial"/>
-              </a:rPr>
-              <a:t>متى تختار كل نموذج؟ / When to Choose Which</a:t>
-            </a:r>
-          </a:p>
-        </p:txBody>
-      </p:sp>
-      <p:sp>
-        <p:nvSpPr>
-          <p:cNvPr id="4" name="TextBox 3"/>
-          <p:cNvSpPr txBox="1"/>
-          <p:nvPr/>
-        </p:nvSpPr>
-        <p:spPr>
-          <a:xfrm>
-            <a:off x="640080" y="1280160"/>
-            <a:ext cx="10972800" cy="5212080"/>
-          </a:xfrm>
-          <a:prstGeom prst="rect">
-            <a:avLst/>
-          </a:prstGeom>
-          <a:noFill/>
-        </p:spPr>
-        <p:txBody>
-          <a:bodyPr wrap="square">
-            <a:spAutoFit/>
-          </a:bodyPr>
-          <a:lstStyle/>
-          <a:p>
-            <a:pPr algn="r" rtl="1">
-              <a:spcBef>
-                <a:spcPts val="200"/>
-              </a:spcBef>
-              <a:spcAft>
-                <a:spcPts val="1000"/>
-              </a:spcAft>
-            </a:pPr>
-            <a:r>
-              <a:rPr sz="1900">
-                <a:solidFill>
-                  <a:srgbClr val="333333"/>
-                </a:solidFill>
-                <a:latin typeface="Arial"/>
-              </a:rPr>
-              <a:t>• فريق مركزي وتحليلات → Medallion على Lakehouse؛ تقارير صارمة → مستودع؛ مؤسسة كبيرة بفرق مستقلة → Data Mesh.</a:t>
-            </a:r>
-          </a:p>
-          <a:p>
-            <a:pPr algn="l" rtl="0">
-              <a:spcBef>
-                <a:spcPts val="200"/>
-              </a:spcBef>
-              <a:spcAft>
-                <a:spcPts val="1000"/>
-              </a:spcAft>
-            </a:pPr>
-            <a:r>
-              <a:rPr sz="1600">
-                <a:solidFill>
-                  <a:srgbClr val="666666"/>
-                </a:solidFill>
-                <a:latin typeface="Calibri"/>
-              </a:rPr>
-              <a:t>• Central team + analytics → Medallion; strict BI → warehouse; large independent teams → data mesh.</a:t>
-            </a:r>
-          </a:p>
-        </p:txBody>
-      </p:sp>
-      <p:sp>
-        <p:nvSpPr>
-          <p:cNvPr id="5" name="TextBox 4"/>
-          <p:cNvSpPr txBox="1"/>
-          <p:nvPr/>
-        </p:nvSpPr>
-        <p:spPr>
-          <a:xfrm>
-            <a:off x="640080" y="6400800"/>
-            <a:ext cx="8686800" cy="320040"/>
-          </a:xfrm>
-          <a:prstGeom prst="rect">
-            <a:avLst/>
-          </a:prstGeom>
-          <a:noFill/>
-        </p:spPr>
-        <p:txBody>
-          <a:bodyPr wrap="square">
-            <a:spAutoFit/>
-          </a:bodyPr>
-          <a:lstStyle/>
-          <a:p>
-            <a:pPr algn="r" rtl="1"/>
-            <a:r>
-              <a:rPr sz="1000" b="0">
-                <a:solidFill>
-                  <a:srgbClr val="666666"/>
-                </a:solidFill>
-                <a:latin typeface="Arial"/>
-              </a:rPr>
-              <a:t>Module 02 — Data &amp; AI Engineering Track  |  الوحدة الثانية</a:t>
-            </a:r>
-          </a:p>
-        </p:txBody>
-      </p:sp>
-      <p:sp>
-        <p:nvSpPr>
-          <p:cNvPr id="6" name="TextBox 5"/>
-          <p:cNvSpPr txBox="1"/>
-          <p:nvPr/>
-        </p:nvSpPr>
-        <p:spPr>
-          <a:xfrm>
-            <a:off x="9601200" y="6400800"/>
-            <a:ext cx="1920240" cy="320040"/>
-          </a:xfrm>
-          <a:prstGeom prst="rect">
-            <a:avLst/>
-          </a:prstGeom>
-          <a:noFill/>
-        </p:spPr>
-        <p:txBody>
-          <a:bodyPr wrap="square">
-            <a:spAutoFit/>
-          </a:bodyPr>
-          <a:lstStyle/>
-          <a:p>
-            <a:pPr algn="l" rtl="0"/>
-            <a:r>
-              <a:rPr sz="1000" b="0">
-                <a:solidFill>
-                  <a:srgbClr val="666666"/>
-                </a:solidFill>
-                <a:latin typeface="Calibri"/>
-              </a:rPr>
-              <a:t>V07  •  8/14</a:t>
-            </a:r>
-          </a:p>
-        </p:txBody>
-      </p:sp>
-    </p:spTree>
-  </p:cSld>
-  <p:clrMapOvr>
-    <a:masterClrMapping/>
-  </p:clrMapOvr>
-</p:sld>
-</file>
-
-<file path=ppt/slides/slide7.xml><?xml version="1.0" encoding="utf-8"?>
-<p:sld xmlns:a="http://schemas.openxmlformats.org/drawingml/2006/main" xmlns:p="http://schemas.openxmlformats.org/presentationml/2006/main" xmlns:r="http://schemas.openxmlformats.org/officeDocument/2006/relationships">
-  <p:cSld>
-    <p:bg>
-      <p:bgPr>
-        <a:solidFill>
-          <a:srgbClr val="FFFFFF"/>
-        </a:solidFill>
-        <a:effectLst/>
-      </p:bgPr>
-    </p:bg>
-    <p:spTree>
-      <p:nvGrpSpPr>
-        <p:cNvPr id="1" name=""/>
-        <p:cNvGrpSpPr/>
-        <p:nvPr/>
-      </p:nvGrpSpPr>
-      <p:grpSpPr/>
-      <p:sp>
-        <p:nvSpPr>
-          <p:cNvPr id="2" name="Rectangle 1"/>
-          <p:cNvSpPr/>
-          <p:nvPr/>
-        </p:nvSpPr>
-        <p:spPr>
-          <a:xfrm>
-            <a:off x="0" y="0"/>
-            <a:ext cx="12191695" cy="1005840"/>
-          </a:xfrm>
-          <a:prstGeom prst="rect">
-            <a:avLst/>
-          </a:prstGeom>
-          <a:solidFill>
-            <a:srgbClr val="FFFFFF"/>
-          </a:solidFill>
-          <a:ln w="25400">
-            <a:solidFill>
-              <a:srgbClr val="1F4E79"/>
-            </a:solidFill>
-          </a:ln>
-          <a:effectLst/>
-        </p:spPr>
-        <p:style>
-          <a:lnRef idx="1">
-            <a:schemeClr val="accent1"/>
-          </a:lnRef>
-          <a:fillRef idx="3">
-            <a:schemeClr val="accent1"/>
-          </a:fillRef>
-          <a:effectRef idx="2">
-            <a:schemeClr val="accent1"/>
-          </a:effectRef>
-          <a:fontRef idx="minor">
-            <a:schemeClr val="lt1"/>
-          </a:fontRef>
-        </p:style>
-        <p:txBody>
-          <a:bodyPr rtlCol="0" anchor="ctr"/>
-          <a:lstStyle/>
-          <a:p>
-            <a:pPr algn="ctr"/>
-          </a:p>
-        </p:txBody>
-      </p:sp>
-      <p:sp>
-        <p:nvSpPr>
-          <p:cNvPr id="3" name="TextBox 2"/>
-          <p:cNvSpPr txBox="1"/>
-          <p:nvPr/>
-        </p:nvSpPr>
-        <p:spPr>
-          <a:xfrm>
-            <a:off x="640080" y="182880"/>
-            <a:ext cx="10972800" cy="640080"/>
-          </a:xfrm>
-          <a:prstGeom prst="rect">
-            <a:avLst/>
-          </a:prstGeom>
-          <a:noFill/>
-        </p:spPr>
-        <p:txBody>
-          <a:bodyPr wrap="square">
-            <a:spAutoFit/>
-          </a:bodyPr>
-          <a:lstStyle/>
-          <a:p>
-            <a:pPr algn="r" rtl="1"/>
-            <a:r>
-              <a:rPr sz="3200" b="1">
-                <a:solidFill>
-                  <a:srgbClr val="1F3B5C"/>
-                </a:solidFill>
-                <a:latin typeface="Arial"/>
-              </a:rPr>
-              <a:t>ربط بالمقرر / Course Tie-in</a:t>
-            </a:r>
-          </a:p>
-        </p:txBody>
-      </p:sp>
-      <p:sp>
-        <p:nvSpPr>
-          <p:cNvPr id="4" name="TextBox 3"/>
-          <p:cNvSpPr txBox="1"/>
-          <p:nvPr/>
-        </p:nvSpPr>
-        <p:spPr>
-          <a:xfrm>
-            <a:off x="640080" y="1280160"/>
-            <a:ext cx="10972800" cy="5212080"/>
-          </a:xfrm>
-          <a:prstGeom prst="rect">
-            <a:avLst/>
-          </a:prstGeom>
-          <a:noFill/>
-        </p:spPr>
-        <p:txBody>
-          <a:bodyPr wrap="square">
-            <a:spAutoFit/>
-          </a:bodyPr>
-          <a:lstStyle/>
-          <a:p>
-            <a:pPr algn="r" rtl="1">
-              <a:spcBef>
-                <a:spcPts val="200"/>
-              </a:spcBef>
-              <a:spcAft>
-                <a:spcPts val="1000"/>
-              </a:spcAft>
-            </a:pPr>
-            <a:r>
-              <a:rPr sz="1900">
-                <a:solidFill>
-                  <a:srgbClr val="333333"/>
-                </a:solidFill>
-                <a:latin typeface="Arial"/>
-              </a:rPr>
-              <a:t>• مسار عملي: Bronze → Silver → Gold ينتهي في فهرس متجهي يغذّي تطبيق RAG (مختبر L03).</a:t>
-            </a:r>
-          </a:p>
-          <a:p>
-            <a:pPr algn="l" rtl="0">
-              <a:spcBef>
-                <a:spcPts val="200"/>
-              </a:spcBef>
-              <a:spcAft>
-                <a:spcPts val="1000"/>
-              </a:spcAft>
-            </a:pPr>
-            <a:r>
-              <a:rPr sz="1600">
-                <a:solidFill>
-                  <a:srgbClr val="666666"/>
-                </a:solidFill>
-                <a:latin typeface="Calibri"/>
-              </a:rPr>
-              <a:t>• Hands-on path: Bronze → Silver → Gold ending in a vector index feeding a RAG app (lab L03).</a:t>
-            </a:r>
-          </a:p>
-        </p:txBody>
-      </p:sp>
-      <p:sp>
-        <p:nvSpPr>
-          <p:cNvPr id="5" name="TextBox 4"/>
-          <p:cNvSpPr txBox="1"/>
-          <p:nvPr/>
-        </p:nvSpPr>
-        <p:spPr>
-          <a:xfrm>
-            <a:off x="640080" y="6400800"/>
-            <a:ext cx="8686800" cy="320040"/>
-          </a:xfrm>
-          <a:prstGeom prst="rect">
-            <a:avLst/>
-          </a:prstGeom>
-          <a:noFill/>
-        </p:spPr>
-        <p:txBody>
-          <a:bodyPr wrap="square">
-            <a:spAutoFit/>
-          </a:bodyPr>
-          <a:lstStyle/>
-          <a:p>
-            <a:pPr algn="r" rtl="1"/>
-            <a:r>
-              <a:rPr sz="1000" b="0">
-                <a:solidFill>
-                  <a:srgbClr val="666666"/>
-                </a:solidFill>
-                <a:latin typeface="Arial"/>
-              </a:rPr>
-              <a:t>Module 02 — Data &amp; AI Engineering Track  |  الوحدة الثانية</a:t>
-            </a:r>
-          </a:p>
-        </p:txBody>
-      </p:sp>
-      <p:sp>
-        <p:nvSpPr>
-          <p:cNvPr id="6" name="TextBox 5"/>
-          <p:cNvSpPr txBox="1"/>
-          <p:nvPr/>
-        </p:nvSpPr>
-        <p:spPr>
-          <a:xfrm>
-            <a:off x="9601200" y="6400800"/>
-            <a:ext cx="1920240" cy="320040"/>
-          </a:xfrm>
-          <a:prstGeom prst="rect">
-            <a:avLst/>
-          </a:prstGeom>
-          <a:noFill/>
-        </p:spPr>
-        <p:txBody>
-          <a:bodyPr wrap="square">
-            <a:spAutoFit/>
-          </a:bodyPr>
-          <a:lstStyle/>
-          <a:p>
-            <a:pPr algn="l" rtl="0"/>
-            <a:r>
-              <a:rPr sz="1000" b="0">
-                <a:solidFill>
-                  <a:srgbClr val="666666"/>
-                </a:solidFill>
-                <a:latin typeface="Calibri"/>
-              </a:rPr>
-              <a:t>V07  •  9/14</a:t>
-            </a:r>
-          </a:p>
-        </p:txBody>
-      </p:sp>
-    </p:spTree>
-  </p:cSld>
-  <p:clrMapOvr>
-    <a:masterClrMapping/>
-  </p:clrMapOvr>
-</p:sld>
-</file>
-
-<file path=ppt/slides/slide8.xml><?xml version="1.0" encoding="utf-8"?>
-<p:sld xmlns:a="http://schemas.openxmlformats.org/drawingml/2006/main" xmlns:p="http://schemas.openxmlformats.org/presentationml/2006/main" xmlns:r="http://schemas.openxmlformats.org/officeDocument/2006/relationships">
-  <p:cSld>
-    <p:bg>
-      <p:bgPr>
-        <a:solidFill>
-          <a:srgbClr val="FFFFFF"/>
-        </a:solidFill>
-        <a:effectLst/>
-      </p:bgPr>
-    </p:bg>
-    <p:spTree>
-      <p:nvGrpSpPr>
-        <p:cNvPr id="1" name=""/>
-        <p:cNvGrpSpPr/>
-        <p:nvPr/>
-      </p:nvGrpSpPr>
-      <p:grpSpPr/>
-      <p:sp>
-        <p:nvSpPr>
-          <p:cNvPr id="2" name="Rectangle 1"/>
-          <p:cNvSpPr/>
-          <p:nvPr/>
-        </p:nvSpPr>
-        <p:spPr>
-          <a:xfrm>
-            <a:off x="0" y="0"/>
-            <a:ext cx="12191695" cy="1005840"/>
-          </a:xfrm>
-          <a:prstGeom prst="rect">
-            <a:avLst/>
-          </a:prstGeom>
-          <a:solidFill>
-            <a:srgbClr val="FFFFFF"/>
-          </a:solidFill>
-          <a:ln w="25400">
-            <a:solidFill>
-              <a:srgbClr val="1F4E79"/>
-            </a:solidFill>
-          </a:ln>
-          <a:effectLst/>
-        </p:spPr>
-        <p:style>
-          <a:lnRef idx="1">
-            <a:schemeClr val="accent1"/>
-          </a:lnRef>
-          <a:fillRef idx="3">
-            <a:schemeClr val="accent1"/>
-          </a:fillRef>
-          <a:effectRef idx="2">
-            <a:schemeClr val="accent1"/>
-          </a:effectRef>
-          <a:fontRef idx="minor">
-            <a:schemeClr val="lt1"/>
-          </a:fontRef>
-        </p:style>
-        <p:txBody>
-          <a:bodyPr rtlCol="0" anchor="ctr"/>
-          <a:lstStyle/>
-          <a:p>
-            <a:pPr algn="ctr"/>
+            <a:endParaRPr/>
           </a:p>
         </p:txBody>
       </p:sp>
@@ -7186,9 +3702,27 @@
                 <a:tableStyleId>{5C22544A-7EE6-4342-B048-85BDC9FD1C3A}</a:tableStyleId>
               </a:tblPr>
               <a:tblGrid>
-                <a:gridCol w="3657600"/>
-                <a:gridCol w="3657600"/>
-                <a:gridCol w="3657600"/>
+                <a:gridCol w="3657600">
+                  <a:extLst>
+                    <a:ext uri="{9D8B030D-6E8A-4147-A177-3AD203B41FA5}">
+                      <a16:colId xmlns:a16="http://schemas.microsoft.com/office/drawing/2014/main" val="20000"/>
+                    </a:ext>
+                  </a:extLst>
+                </a:gridCol>
+                <a:gridCol w="3657600">
+                  <a:extLst>
+                    <a:ext uri="{9D8B030D-6E8A-4147-A177-3AD203B41FA5}">
+                      <a16:colId xmlns:a16="http://schemas.microsoft.com/office/drawing/2014/main" val="20001"/>
+                    </a:ext>
+                  </a:extLst>
+                </a:gridCol>
+                <a:gridCol w="3657600">
+                  <a:extLst>
+                    <a:ext uri="{9D8B030D-6E8A-4147-A177-3AD203B41FA5}">
+                      <a16:colId xmlns:a16="http://schemas.microsoft.com/office/drawing/2014/main" val="20002"/>
+                    </a:ext>
+                  </a:extLst>
+                </a:gridCol>
               </a:tblGrid>
               <a:tr h="548640">
                 <a:tc>
@@ -7260,6 +3794,11 @@
                     </a:solidFill>
                   </a:tcPr>
                 </a:tc>
+                <a:extLst>
+                  <a:ext uri="{0D108BD9-81ED-4DB2-BD59-A6C34878D82A}">
+                    <a16:rowId xmlns:a16="http://schemas.microsoft.com/office/drawing/2014/main" val="10000"/>
+                  </a:ext>
+                </a:extLst>
               </a:tr>
               <a:tr h="548640">
                 <a:tc>
@@ -7331,6 +3870,11 @@
                     </a:solidFill>
                   </a:tcPr>
                 </a:tc>
+                <a:extLst>
+                  <a:ext uri="{0D108BD9-81ED-4DB2-BD59-A6C34878D82A}">
+                    <a16:rowId xmlns:a16="http://schemas.microsoft.com/office/drawing/2014/main" val="10001"/>
+                  </a:ext>
+                </a:extLst>
               </a:tr>
               <a:tr h="548640">
                 <a:tc>
@@ -7402,6 +3946,11 @@
                     </a:solidFill>
                   </a:tcPr>
                 </a:tc>
+                <a:extLst>
+                  <a:ext uri="{0D108BD9-81ED-4DB2-BD59-A6C34878D82A}">
+                    <a16:rowId xmlns:a16="http://schemas.microsoft.com/office/drawing/2014/main" val="10002"/>
+                  </a:ext>
+                </a:extLst>
               </a:tr>
               <a:tr h="548640">
                 <a:tc>
@@ -7473,6 +4022,11 @@
                     </a:solidFill>
                   </a:tcPr>
                 </a:tc>
+                <a:extLst>
+                  <a:ext uri="{0D108BD9-81ED-4DB2-BD59-A6C34878D82A}">
+                    <a16:rowId xmlns:a16="http://schemas.microsoft.com/office/drawing/2014/main" val="10003"/>
+                  </a:ext>
+                </a:extLst>
               </a:tr>
             </a:tbl>
           </a:graphicData>
@@ -7543,7 +4097,7 @@
                 </a:solidFill>
                 <a:latin typeface="Calibri"/>
               </a:rPr>
-              <a:t>V07  •  10/14</a:t>
+              <a:t>V07  •  11/15</a:t>
             </a:r>
           </a:p>
         </p:txBody>
@@ -7556,8 +4110,8 @@
 </p:sld>
 </file>
 
-<file path=ppt/slides/slide9.xml><?xml version="1.0" encoding="utf-8"?>
-<p:sld xmlns:a="http://schemas.openxmlformats.org/drawingml/2006/main" xmlns:p="http://schemas.openxmlformats.org/presentationml/2006/main" xmlns:r="http://schemas.openxmlformats.org/officeDocument/2006/relationships">
+<file path=ppt/slides/slide12.xml><?xml version="1.0" encoding="utf-8"?>
+<p:sld xmlns:a="http://schemas.openxmlformats.org/drawingml/2006/main" xmlns:r="http://schemas.openxmlformats.org/officeDocument/2006/relationships" xmlns:p="http://schemas.openxmlformats.org/presentationml/2006/main">
   <p:cSld>
     <p:bg>
       <p:bgPr>
@@ -7573,7 +4127,559 @@
         <p:cNvGrpSpPr/>
         <p:nvPr/>
       </p:nvGrpSpPr>
-      <p:grpSpPr/>
+      <p:grpSpPr>
+        <a:xfrm>
+          <a:off x="0" y="0"/>
+          <a:ext cx="0" cy="0"/>
+          <a:chOff x="0" y="0"/>
+          <a:chExt cx="0" cy="0"/>
+        </a:xfrm>
+      </p:grpSpPr>
+      <p:sp>
+        <p:nvSpPr>
+          <p:cNvPr id="2" name="TextBox 1"/>
+          <p:cNvSpPr txBox="1"/>
+          <p:nvPr/>
+        </p:nvSpPr>
+        <p:spPr>
+          <a:xfrm>
+            <a:off x="640080" y="137160"/>
+            <a:ext cx="10972800" cy="640080"/>
+          </a:xfrm>
+          <a:prstGeom prst="rect">
+            <a:avLst/>
+          </a:prstGeom>
+          <a:noFill/>
+        </p:spPr>
+        <p:txBody>
+          <a:bodyPr wrap="none">
+            <a:spAutoFit/>
+          </a:bodyPr>
+          <a:lstStyle/>
+          <a:p>
+            <a:pPr algn="r" rtl="1"/>
+            <a:r>
+              <a:rPr sz="3000" b="1">
+                <a:solidFill>
+                  <a:srgbClr val="1F3B5C"/>
+                </a:solidFill>
+                <a:latin typeface="Arial"/>
+              </a:rPr>
+              <a:t>أنماط معالجة البيانات الثلاثة / Three Data Patterns</a:t>
+            </a:r>
+          </a:p>
+        </p:txBody>
+      </p:sp>
+      <p:sp>
+        <p:nvSpPr>
+          <p:cNvPr id="3" name="Rounded Rectangle 2"/>
+          <p:cNvSpPr/>
+          <p:nvPr/>
+        </p:nvSpPr>
+        <p:spPr>
+          <a:xfrm>
+            <a:off x="640080" y="1371600"/>
+            <a:ext cx="3566160" cy="914400"/>
+          </a:xfrm>
+          <a:prstGeom prst="roundRect">
+            <a:avLst/>
+          </a:prstGeom>
+          <a:solidFill>
+            <a:srgbClr val="DCE6F1"/>
+          </a:solidFill>
+          <a:ln w="12700">
+            <a:solidFill>
+              <a:srgbClr val="1F4E79"/>
+            </a:solidFill>
+          </a:ln>
+          <a:effectLst/>
+        </p:spPr>
+        <p:style>
+          <a:lnRef idx="1">
+            <a:schemeClr val="accent1"/>
+          </a:lnRef>
+          <a:fillRef idx="3">
+            <a:schemeClr val="accent1"/>
+          </a:fillRef>
+          <a:effectRef idx="2">
+            <a:schemeClr val="accent1"/>
+          </a:effectRef>
+          <a:fontRef idx="minor">
+            <a:schemeClr val="lt1"/>
+          </a:fontRef>
+        </p:style>
+        <p:txBody>
+          <a:bodyPr wrap="square" rtlCol="0" anchor="ctr"/>
+          <a:lstStyle/>
+          <a:p>
+            <a:pPr algn="ctr" rtl="1"/>
+            <a:r>
+              <a:rPr sz="1800" b="1">
+                <a:solidFill>
+                  <a:srgbClr val="333333"/>
+                </a:solidFill>
+                <a:latin typeface="Arial"/>
+              </a:rPr>
+              <a:t>المعمارية المتدرِّجة</a:t>
+            </a:r>
+          </a:p>
+          <a:p>
+            <a:pPr algn="ctr" rtl="0"/>
+            <a:r>
+              <a:rPr sz="1300">
+                <a:solidFill>
+                  <a:srgbClr val="666666"/>
+                </a:solidFill>
+                <a:latin typeface="Calibri"/>
+              </a:rPr>
+              <a:t>Medallion</a:t>
+            </a:r>
+          </a:p>
+        </p:txBody>
+      </p:sp>
+      <p:sp>
+        <p:nvSpPr>
+          <p:cNvPr id="4" name="Rounded Rectangle 3"/>
+          <p:cNvSpPr/>
+          <p:nvPr/>
+        </p:nvSpPr>
+        <p:spPr>
+          <a:xfrm>
+            <a:off x="640080" y="2468880"/>
+            <a:ext cx="3566160" cy="2560320"/>
+          </a:xfrm>
+          <a:prstGeom prst="roundRect">
+            <a:avLst/>
+          </a:prstGeom>
+          <a:solidFill>
+            <a:srgbClr val="EDEDED"/>
+          </a:solidFill>
+          <a:ln w="12700">
+            <a:solidFill>
+              <a:srgbClr val="1F4E79"/>
+            </a:solidFill>
+          </a:ln>
+          <a:effectLst/>
+        </p:spPr>
+        <p:style>
+          <a:lnRef idx="1">
+            <a:schemeClr val="accent1"/>
+          </a:lnRef>
+          <a:fillRef idx="3">
+            <a:schemeClr val="accent1"/>
+          </a:fillRef>
+          <a:effectRef idx="2">
+            <a:schemeClr val="accent1"/>
+          </a:effectRef>
+          <a:fontRef idx="minor">
+            <a:schemeClr val="lt1"/>
+          </a:fontRef>
+        </p:style>
+        <p:txBody>
+          <a:bodyPr wrap="square" rtlCol="0" anchor="ctr"/>
+          <a:lstStyle/>
+          <a:p>
+            <a:pPr algn="ctr" rtl="1"/>
+            <a:r>
+              <a:rPr sz="1500" b="1">
+                <a:solidFill>
+                  <a:srgbClr val="333333"/>
+                </a:solidFill>
+                <a:latin typeface="Arial"/>
+              </a:rPr>
+              <a:t>فريق مركزي — تحليلات وAI/ML/RAG</a:t>
+            </a:r>
+          </a:p>
+        </p:txBody>
+      </p:sp>
+      <p:sp>
+        <p:nvSpPr>
+          <p:cNvPr id="5" name="Rounded Rectangle 4"/>
+          <p:cNvSpPr/>
+          <p:nvPr/>
+        </p:nvSpPr>
+        <p:spPr>
+          <a:xfrm>
+            <a:off x="4389119" y="1371600"/>
+            <a:ext cx="3566160" cy="914400"/>
+          </a:xfrm>
+          <a:prstGeom prst="roundRect">
+            <a:avLst/>
+          </a:prstGeom>
+          <a:solidFill>
+            <a:srgbClr val="E2EFDA"/>
+          </a:solidFill>
+          <a:ln w="12700">
+            <a:solidFill>
+              <a:srgbClr val="1F4E79"/>
+            </a:solidFill>
+          </a:ln>
+          <a:effectLst/>
+        </p:spPr>
+        <p:style>
+          <a:lnRef idx="1">
+            <a:schemeClr val="accent1"/>
+          </a:lnRef>
+          <a:fillRef idx="3">
+            <a:schemeClr val="accent1"/>
+          </a:fillRef>
+          <a:effectRef idx="2">
+            <a:schemeClr val="accent1"/>
+          </a:effectRef>
+          <a:fontRef idx="minor">
+            <a:schemeClr val="lt1"/>
+          </a:fontRef>
+        </p:style>
+        <p:txBody>
+          <a:bodyPr wrap="square" rtlCol="0" anchor="ctr"/>
+          <a:lstStyle/>
+          <a:p>
+            <a:pPr algn="ctr" rtl="1"/>
+            <a:r>
+              <a:rPr sz="1800" b="1">
+                <a:solidFill>
+                  <a:srgbClr val="333333"/>
+                </a:solidFill>
+                <a:latin typeface="Arial"/>
+              </a:rPr>
+              <a:t>مستودع البيانات</a:t>
+            </a:r>
+          </a:p>
+          <a:p>
+            <a:pPr algn="ctr" rtl="0"/>
+            <a:r>
+              <a:rPr sz="1300">
+                <a:solidFill>
+                  <a:srgbClr val="666666"/>
+                </a:solidFill>
+                <a:latin typeface="Calibri"/>
+              </a:rPr>
+              <a:t>Data Warehouse</a:t>
+            </a:r>
+          </a:p>
+        </p:txBody>
+      </p:sp>
+      <p:sp>
+        <p:nvSpPr>
+          <p:cNvPr id="6" name="Rounded Rectangle 5"/>
+          <p:cNvSpPr/>
+          <p:nvPr/>
+        </p:nvSpPr>
+        <p:spPr>
+          <a:xfrm>
+            <a:off x="4389119" y="2468880"/>
+            <a:ext cx="3566160" cy="2560320"/>
+          </a:xfrm>
+          <a:prstGeom prst="roundRect">
+            <a:avLst/>
+          </a:prstGeom>
+          <a:solidFill>
+            <a:srgbClr val="EDEDED"/>
+          </a:solidFill>
+          <a:ln w="12700">
+            <a:solidFill>
+              <a:srgbClr val="1F4E79"/>
+            </a:solidFill>
+          </a:ln>
+          <a:effectLst/>
+        </p:spPr>
+        <p:style>
+          <a:lnRef idx="1">
+            <a:schemeClr val="accent1"/>
+          </a:lnRef>
+          <a:fillRef idx="3">
+            <a:schemeClr val="accent1"/>
+          </a:fillRef>
+          <a:effectRef idx="2">
+            <a:schemeClr val="accent1"/>
+          </a:effectRef>
+          <a:fontRef idx="minor">
+            <a:schemeClr val="lt1"/>
+          </a:fontRef>
+        </p:style>
+        <p:txBody>
+          <a:bodyPr wrap="square" rtlCol="0" anchor="ctr"/>
+          <a:lstStyle/>
+          <a:p>
+            <a:pPr algn="ctr" rtl="1"/>
+            <a:r>
+              <a:rPr sz="1500" b="1">
+                <a:solidFill>
+                  <a:srgbClr val="333333"/>
+                </a:solidFill>
+                <a:latin typeface="Arial"/>
+              </a:rPr>
+              <a:t>فرق BI — تقارير وذكاء أعمال</a:t>
+            </a:r>
+          </a:p>
+        </p:txBody>
+      </p:sp>
+      <p:sp>
+        <p:nvSpPr>
+          <p:cNvPr id="7" name="Rounded Rectangle 6"/>
+          <p:cNvSpPr/>
+          <p:nvPr/>
+        </p:nvSpPr>
+        <p:spPr>
+          <a:xfrm>
+            <a:off x="8138158" y="1371600"/>
+            <a:ext cx="3566160" cy="914400"/>
+          </a:xfrm>
+          <a:prstGeom prst="roundRect">
+            <a:avLst/>
+          </a:prstGeom>
+          <a:solidFill>
+            <a:srgbClr val="FDE9D9"/>
+          </a:solidFill>
+          <a:ln w="12700">
+            <a:solidFill>
+              <a:srgbClr val="1F4E79"/>
+            </a:solidFill>
+          </a:ln>
+          <a:effectLst/>
+        </p:spPr>
+        <p:style>
+          <a:lnRef idx="1">
+            <a:schemeClr val="accent1"/>
+          </a:lnRef>
+          <a:fillRef idx="3">
+            <a:schemeClr val="accent1"/>
+          </a:fillRef>
+          <a:effectRef idx="2">
+            <a:schemeClr val="accent1"/>
+          </a:effectRef>
+          <a:fontRef idx="minor">
+            <a:schemeClr val="lt1"/>
+          </a:fontRef>
+        </p:style>
+        <p:txBody>
+          <a:bodyPr wrap="square" rtlCol="0" anchor="ctr"/>
+          <a:lstStyle/>
+          <a:p>
+            <a:pPr algn="ctr" rtl="1"/>
+            <a:r>
+              <a:rPr sz="1800" b="1">
+                <a:solidFill>
+                  <a:srgbClr val="333333"/>
+                </a:solidFill>
+                <a:latin typeface="Arial"/>
+              </a:rPr>
+              <a:t>شبكة البيانات</a:t>
+            </a:r>
+          </a:p>
+          <a:p>
+            <a:pPr algn="ctr" rtl="0"/>
+            <a:r>
+              <a:rPr sz="1300">
+                <a:solidFill>
+                  <a:srgbClr val="666666"/>
+                </a:solidFill>
+                <a:latin typeface="Calibri"/>
+              </a:rPr>
+              <a:t>Data Mesh</a:t>
+            </a:r>
+          </a:p>
+        </p:txBody>
+      </p:sp>
+      <p:sp>
+        <p:nvSpPr>
+          <p:cNvPr id="8" name="Rounded Rectangle 7"/>
+          <p:cNvSpPr/>
+          <p:nvPr/>
+        </p:nvSpPr>
+        <p:spPr>
+          <a:xfrm>
+            <a:off x="8138158" y="2468880"/>
+            <a:ext cx="3566160" cy="2560320"/>
+          </a:xfrm>
+          <a:prstGeom prst="roundRect">
+            <a:avLst/>
+          </a:prstGeom>
+          <a:solidFill>
+            <a:srgbClr val="EDEDED"/>
+          </a:solidFill>
+          <a:ln w="12700">
+            <a:solidFill>
+              <a:srgbClr val="1F4E79"/>
+            </a:solidFill>
+          </a:ln>
+          <a:effectLst/>
+        </p:spPr>
+        <p:style>
+          <a:lnRef idx="1">
+            <a:schemeClr val="accent1"/>
+          </a:lnRef>
+          <a:fillRef idx="3">
+            <a:schemeClr val="accent1"/>
+          </a:fillRef>
+          <a:effectRef idx="2">
+            <a:schemeClr val="accent1"/>
+          </a:effectRef>
+          <a:fontRef idx="minor">
+            <a:schemeClr val="lt1"/>
+          </a:fontRef>
+        </p:style>
+        <p:txBody>
+          <a:bodyPr wrap="square" rtlCol="0" anchor="ctr"/>
+          <a:lstStyle/>
+          <a:p>
+            <a:pPr algn="ctr" rtl="1"/>
+            <a:r>
+              <a:rPr sz="1500" b="1">
+                <a:solidFill>
+                  <a:srgbClr val="333333"/>
+                </a:solidFill>
+                <a:latin typeface="Arial"/>
+              </a:rPr>
+              <a:t>فرق المجالات — مؤسسات كبيرة</a:t>
+            </a:r>
+          </a:p>
+        </p:txBody>
+      </p:sp>
+      <p:sp>
+        <p:nvSpPr>
+          <p:cNvPr id="9" name="TextBox 8"/>
+          <p:cNvSpPr txBox="1"/>
+          <p:nvPr/>
+        </p:nvSpPr>
+        <p:spPr>
+          <a:xfrm>
+            <a:off x="640080" y="6126480"/>
+            <a:ext cx="10972800" cy="548640"/>
+          </a:xfrm>
+          <a:prstGeom prst="rect">
+            <a:avLst/>
+          </a:prstGeom>
+          <a:noFill/>
+        </p:spPr>
+        <p:txBody>
+          <a:bodyPr wrap="square">
+            <a:spAutoFit/>
+          </a:bodyPr>
+          <a:lstStyle/>
+          <a:p>
+            <a:pPr algn="r" rtl="1"/>
+            <a:r>
+              <a:rPr sz="1400">
+                <a:solidFill>
+                  <a:srgbClr val="666666"/>
+                </a:solidFill>
+                <a:latin typeface="Arial"/>
+              </a:rPr>
+              <a:t>المعايير: الفكرة الجوهرية / المالك / الحوكمة / حالة الاستخدام المثلى.</a:t>
+            </a:r>
+          </a:p>
+          <a:p>
+            <a:pPr algn="r" rtl="0"/>
+            <a:r>
+              <a:t>Criteria: core idea / ownership / governance / best use case.</a:t>
+            </a:r>
+          </a:p>
+        </p:txBody>
+      </p:sp>
+      <p:sp>
+        <p:nvSpPr>
+          <p:cNvPr id="10" name="TextBox 9"/>
+          <p:cNvSpPr txBox="1"/>
+          <p:nvPr/>
+        </p:nvSpPr>
+        <p:spPr>
+          <a:xfrm>
+            <a:off x="640080" y="6400800"/>
+            <a:ext cx="8686800" cy="320040"/>
+          </a:xfrm>
+          <a:prstGeom prst="rect">
+            <a:avLst/>
+          </a:prstGeom>
+          <a:noFill/>
+        </p:spPr>
+        <p:txBody>
+          <a:bodyPr wrap="square">
+            <a:spAutoFit/>
+          </a:bodyPr>
+          <a:lstStyle/>
+          <a:p>
+            <a:pPr algn="r" rtl="1"/>
+            <a:r>
+              <a:rPr sz="1000" b="0">
+                <a:solidFill>
+                  <a:srgbClr val="666666"/>
+                </a:solidFill>
+                <a:latin typeface="Arial"/>
+              </a:rPr>
+              <a:t>Module 02 — Data &amp; AI Engineering Track  |  الوحدة الثانية</a:t>
+            </a:r>
+          </a:p>
+        </p:txBody>
+      </p:sp>
+      <p:sp>
+        <p:nvSpPr>
+          <p:cNvPr id="11" name="TextBox 10"/>
+          <p:cNvSpPr txBox="1"/>
+          <p:nvPr/>
+        </p:nvSpPr>
+        <p:spPr>
+          <a:xfrm>
+            <a:off x="9601200" y="6400800"/>
+            <a:ext cx="1920240" cy="320040"/>
+          </a:xfrm>
+          <a:prstGeom prst="rect">
+            <a:avLst/>
+          </a:prstGeom>
+          <a:noFill/>
+        </p:spPr>
+        <p:txBody>
+          <a:bodyPr wrap="square">
+            <a:spAutoFit/>
+          </a:bodyPr>
+          <a:lstStyle/>
+          <a:p>
+            <a:pPr algn="l" rtl="0"/>
+            <a:r>
+              <a:rPr sz="1000" b="0">
+                <a:solidFill>
+                  <a:srgbClr val="666666"/>
+                </a:solidFill>
+                <a:latin typeface="Calibri"/>
+              </a:rPr>
+              <a:t>V07  •  12/15</a:t>
+            </a:r>
+          </a:p>
+        </p:txBody>
+      </p:sp>
+    </p:spTree>
+  </p:cSld>
+  <p:clrMapOvr>
+    <a:masterClrMapping/>
+  </p:clrMapOvr>
+</p:sld>
+</file>
+
+<file path=ppt/slides/slide13.xml><?xml version="1.0" encoding="utf-8"?>
+<p:sld xmlns:a="http://schemas.openxmlformats.org/drawingml/2006/main" xmlns:r="http://schemas.openxmlformats.org/officeDocument/2006/relationships" xmlns:p="http://schemas.openxmlformats.org/presentationml/2006/main">
+  <p:cSld>
+    <p:bg>
+      <p:bgPr>
+        <a:solidFill>
+          <a:srgbClr val="FFFFFF"/>
+        </a:solidFill>
+        <a:effectLst/>
+      </p:bgPr>
+    </p:bg>
+    <p:spTree>
+      <p:nvGrpSpPr>
+        <p:cNvPr id="1" name=""/>
+        <p:cNvGrpSpPr/>
+        <p:nvPr/>
+      </p:nvGrpSpPr>
+      <p:grpSpPr>
+        <a:xfrm>
+          <a:off x="0" y="0"/>
+          <a:ext cx="0" cy="0"/>
+          <a:chOff x="0" y="0"/>
+          <a:chExt cx="0" cy="0"/>
+        </a:xfrm>
+      </p:grpSpPr>
       <p:sp>
         <p:nvSpPr>
           <p:cNvPr id="2" name="Rectangle 1"/>
@@ -7617,6 +4723,7 @@
           <a:lstStyle/>
           <a:p>
             <a:pPr algn="ctr"/>
+            <a:endParaRPr/>
           </a:p>
         </p:txBody>
       </p:sp>
@@ -7857,7 +4964,3827 @@
                 </a:solidFill>
                 <a:latin typeface="Calibri"/>
               </a:rPr>
-              <a:t>V07  •  12/14</a:t>
+              <a:t>V07  •  13/15</a:t>
+            </a:r>
+          </a:p>
+        </p:txBody>
+      </p:sp>
+    </p:spTree>
+  </p:cSld>
+  <p:clrMapOvr>
+    <a:masterClrMapping/>
+  </p:clrMapOvr>
+</p:sld>
+</file>
+
+<file path=ppt/slides/slide14.xml><?xml version="1.0" encoding="utf-8"?>
+<p:sld xmlns:a="http://schemas.openxmlformats.org/drawingml/2006/main" xmlns:r="http://schemas.openxmlformats.org/officeDocument/2006/relationships" xmlns:p="http://schemas.openxmlformats.org/presentationml/2006/main">
+  <p:cSld>
+    <p:bg>
+      <p:bgPr>
+        <a:solidFill>
+          <a:srgbClr val="FFFFFF"/>
+        </a:solidFill>
+        <a:effectLst/>
+      </p:bgPr>
+    </p:bg>
+    <p:spTree>
+      <p:nvGrpSpPr>
+        <p:cNvPr id="1" name=""/>
+        <p:cNvGrpSpPr/>
+        <p:nvPr/>
+      </p:nvGrpSpPr>
+      <p:grpSpPr>
+        <a:xfrm>
+          <a:off x="0" y="0"/>
+          <a:ext cx="0" cy="0"/>
+          <a:chOff x="0" y="0"/>
+          <a:chExt cx="0" cy="0"/>
+        </a:xfrm>
+      </p:grpSpPr>
+      <p:sp>
+        <p:nvSpPr>
+          <p:cNvPr id="2" name="Rectangle 1"/>
+          <p:cNvSpPr/>
+          <p:nvPr/>
+        </p:nvSpPr>
+        <p:spPr>
+          <a:xfrm>
+            <a:off x="0" y="0"/>
+            <a:ext cx="12191695" cy="1005840"/>
+          </a:xfrm>
+          <a:prstGeom prst="rect">
+            <a:avLst/>
+          </a:prstGeom>
+          <a:solidFill>
+            <a:srgbClr val="FFFFFF"/>
+          </a:solidFill>
+          <a:ln w="25400">
+            <a:solidFill>
+              <a:srgbClr val="1F4E79"/>
+            </a:solidFill>
+          </a:ln>
+          <a:effectLst/>
+        </p:spPr>
+        <p:style>
+          <a:lnRef idx="1">
+            <a:schemeClr val="accent1"/>
+          </a:lnRef>
+          <a:fillRef idx="3">
+            <a:schemeClr val="accent1"/>
+          </a:fillRef>
+          <a:effectRef idx="2">
+            <a:schemeClr val="accent1"/>
+          </a:effectRef>
+          <a:fontRef idx="minor">
+            <a:schemeClr val="lt1"/>
+          </a:fontRef>
+        </p:style>
+        <p:txBody>
+          <a:bodyPr rtlCol="0" anchor="ctr"/>
+          <a:lstStyle/>
+          <a:p>
+            <a:pPr algn="ctr"/>
+            <a:endParaRPr/>
+          </a:p>
+        </p:txBody>
+      </p:sp>
+      <p:sp>
+        <p:nvSpPr>
+          <p:cNvPr id="3" name="TextBox 2"/>
+          <p:cNvSpPr txBox="1"/>
+          <p:nvPr/>
+        </p:nvSpPr>
+        <p:spPr>
+          <a:xfrm>
+            <a:off x="640080" y="182880"/>
+            <a:ext cx="10972800" cy="640080"/>
+          </a:xfrm>
+          <a:prstGeom prst="rect">
+            <a:avLst/>
+          </a:prstGeom>
+          <a:noFill/>
+        </p:spPr>
+        <p:txBody>
+          <a:bodyPr wrap="square">
+            <a:spAutoFit/>
+          </a:bodyPr>
+          <a:lstStyle/>
+          <a:p>
+            <a:pPr algn="r" rtl="1"/>
+            <a:r>
+              <a:rPr sz="3200" b="1">
+                <a:solidFill>
+                  <a:srgbClr val="1F3B5C"/>
+                </a:solidFill>
+                <a:latin typeface="Arial"/>
+              </a:rPr>
+              <a:t>إجابات الاختبار / Quiz Answers</a:t>
+            </a:r>
+          </a:p>
+        </p:txBody>
+      </p:sp>
+      <p:sp>
+        <p:nvSpPr>
+          <p:cNvPr id="4" name="TextBox 3"/>
+          <p:cNvSpPr txBox="1"/>
+          <p:nvPr/>
+        </p:nvSpPr>
+        <p:spPr>
+          <a:xfrm>
+            <a:off x="640080" y="1280160"/>
+            <a:ext cx="10972800" cy="5212080"/>
+          </a:xfrm>
+          <a:prstGeom prst="rect">
+            <a:avLst/>
+          </a:prstGeom>
+          <a:noFill/>
+        </p:spPr>
+        <p:txBody>
+          <a:bodyPr wrap="square">
+            <a:spAutoFit/>
+          </a:bodyPr>
+          <a:lstStyle/>
+          <a:p>
+            <a:pPr algn="r" rtl="1">
+              <a:spcBef>
+                <a:spcPts val="200"/>
+              </a:spcBef>
+              <a:spcAft>
+                <a:spcPts val="1000"/>
+              </a:spcAft>
+            </a:pPr>
+            <a:r>
+              <a:rPr sz="1800">
+                <a:solidFill>
+                  <a:srgbClr val="333333"/>
+                </a:solidFill>
+                <a:latin typeface="Arial"/>
+              </a:rPr>
+              <a:t>• 1. لا يُفرض المخطط عند الكتابة بل عند القراءة — سمة البحيرات.</a:t>
+            </a:r>
+          </a:p>
+          <a:p>
+            <a:pPr algn="l" rtl="0">
+              <a:spcBef>
+                <a:spcPts val="200"/>
+              </a:spcBef>
+              <a:spcAft>
+                <a:spcPts val="1000"/>
+              </a:spcAft>
+            </a:pPr>
+            <a:r>
+              <a:rPr sz="1500">
+                <a:solidFill>
+                  <a:srgbClr val="666666"/>
+                </a:solidFill>
+                <a:latin typeface="Calibri"/>
+              </a:rPr>
+              <a:t>• Schema is enforced at read time, not write time — a lake trait.</a:t>
+            </a:r>
+          </a:p>
+          <a:p>
+            <a:pPr algn="r" rtl="1">
+              <a:spcBef>
+                <a:spcPts val="200"/>
+              </a:spcBef>
+              <a:spcAft>
+                <a:spcPts val="1000"/>
+              </a:spcAft>
+            </a:pPr>
+            <a:r>
+              <a:rPr sz="1800">
+                <a:solidFill>
+                  <a:srgbClr val="333333"/>
+                </a:solidFill>
+                <a:latin typeface="Arial"/>
+              </a:rPr>
+              <a:t>• 2. المخطط، الأمان، مستوى الخدمة SLA.</a:t>
+            </a:r>
+          </a:p>
+          <a:p>
+            <a:pPr algn="l" rtl="0">
+              <a:spcBef>
+                <a:spcPts val="200"/>
+              </a:spcBef>
+              <a:spcAft>
+                <a:spcPts val="1000"/>
+              </a:spcAft>
+            </a:pPr>
+            <a:r>
+              <a:rPr sz="1500">
+                <a:solidFill>
+                  <a:srgbClr val="666666"/>
+                </a:solidFill>
+                <a:latin typeface="Calibri"/>
+              </a:rPr>
+              <a:t>• Schema, security, and SLA.</a:t>
+            </a:r>
+          </a:p>
+          <a:p>
+            <a:pPr algn="r" rtl="1">
+              <a:spcBef>
+                <a:spcPts val="200"/>
+              </a:spcBef>
+              <a:spcAft>
+                <a:spcPts val="1000"/>
+              </a:spcAft>
+            </a:pPr>
+            <a:r>
+              <a:rPr sz="1800">
+                <a:solidFill>
+                  <a:srgbClr val="333333"/>
+                </a:solidFill>
+                <a:latin typeface="Arial"/>
+              </a:rPr>
+              <a:t>• 3. معاملات ACID وأداء SQL وحوكمة.</a:t>
+            </a:r>
+          </a:p>
+          <a:p>
+            <a:pPr algn="l" rtl="0">
+              <a:spcBef>
+                <a:spcPts val="200"/>
+              </a:spcBef>
+              <a:spcAft>
+                <a:spcPts val="1000"/>
+              </a:spcAft>
+            </a:pPr>
+            <a:r>
+              <a:rPr sz="1500">
+                <a:solidFill>
+                  <a:srgbClr val="666666"/>
+                </a:solidFill>
+                <a:latin typeface="Calibri"/>
+              </a:rPr>
+              <a:t>• ACID transactions, SQL performance, and governance.</a:t>
+            </a:r>
+          </a:p>
+        </p:txBody>
+      </p:sp>
+      <p:sp>
+        <p:nvSpPr>
+          <p:cNvPr id="5" name="TextBox 4"/>
+          <p:cNvSpPr txBox="1"/>
+          <p:nvPr/>
+        </p:nvSpPr>
+        <p:spPr>
+          <a:xfrm>
+            <a:off x="640080" y="6400800"/>
+            <a:ext cx="8686800" cy="320040"/>
+          </a:xfrm>
+          <a:prstGeom prst="rect">
+            <a:avLst/>
+          </a:prstGeom>
+          <a:noFill/>
+        </p:spPr>
+        <p:txBody>
+          <a:bodyPr wrap="square">
+            <a:spAutoFit/>
+          </a:bodyPr>
+          <a:lstStyle/>
+          <a:p>
+            <a:pPr algn="r" rtl="1"/>
+            <a:r>
+              <a:rPr sz="1000" b="0">
+                <a:solidFill>
+                  <a:srgbClr val="666666"/>
+                </a:solidFill>
+                <a:latin typeface="Arial"/>
+              </a:rPr>
+              <a:t>Module 02 — Data &amp; AI Engineering Track  |  الوحدة الثانية</a:t>
+            </a:r>
+          </a:p>
+        </p:txBody>
+      </p:sp>
+      <p:sp>
+        <p:nvSpPr>
+          <p:cNvPr id="6" name="TextBox 5"/>
+          <p:cNvSpPr txBox="1"/>
+          <p:nvPr/>
+        </p:nvSpPr>
+        <p:spPr>
+          <a:xfrm>
+            <a:off x="9601200" y="6400800"/>
+            <a:ext cx="1920240" cy="320040"/>
+          </a:xfrm>
+          <a:prstGeom prst="rect">
+            <a:avLst/>
+          </a:prstGeom>
+          <a:noFill/>
+        </p:spPr>
+        <p:txBody>
+          <a:bodyPr wrap="square">
+            <a:spAutoFit/>
+          </a:bodyPr>
+          <a:lstStyle/>
+          <a:p>
+            <a:pPr algn="l" rtl="0"/>
+            <a:r>
+              <a:rPr sz="1000" b="0">
+                <a:solidFill>
+                  <a:srgbClr val="666666"/>
+                </a:solidFill>
+                <a:latin typeface="Calibri"/>
+              </a:rPr>
+              <a:t>V07  •  14/15</a:t>
+            </a:r>
+          </a:p>
+        </p:txBody>
+      </p:sp>
+    </p:spTree>
+  </p:cSld>
+  <p:clrMapOvr>
+    <a:masterClrMapping/>
+  </p:clrMapOvr>
+</p:sld>
+</file>
+
+<file path=ppt/slides/slide15.xml><?xml version="1.0" encoding="utf-8"?>
+<p:sld xmlns:a="http://schemas.openxmlformats.org/drawingml/2006/main" xmlns:r="http://schemas.openxmlformats.org/officeDocument/2006/relationships" xmlns:p="http://schemas.openxmlformats.org/presentationml/2006/main">
+  <p:cSld>
+    <p:bg>
+      <p:bgPr>
+        <a:solidFill>
+          <a:srgbClr val="FFFFFF"/>
+        </a:solidFill>
+        <a:effectLst/>
+      </p:bgPr>
+    </p:bg>
+    <p:spTree>
+      <p:nvGrpSpPr>
+        <p:cNvPr id="1" name=""/>
+        <p:cNvGrpSpPr/>
+        <p:nvPr/>
+      </p:nvGrpSpPr>
+      <p:grpSpPr>
+        <a:xfrm>
+          <a:off x="0" y="0"/>
+          <a:ext cx="0" cy="0"/>
+          <a:chOff x="0" y="0"/>
+          <a:chExt cx="0" cy="0"/>
+        </a:xfrm>
+      </p:grpSpPr>
+      <p:sp>
+        <p:nvSpPr>
+          <p:cNvPr id="2" name="Rectangle 1"/>
+          <p:cNvSpPr/>
+          <p:nvPr/>
+        </p:nvSpPr>
+        <p:spPr>
+          <a:xfrm>
+            <a:off x="0" y="0"/>
+            <a:ext cx="12191695" cy="1005840"/>
+          </a:xfrm>
+          <a:prstGeom prst="rect">
+            <a:avLst/>
+          </a:prstGeom>
+          <a:solidFill>
+            <a:srgbClr val="FFFFFF"/>
+          </a:solidFill>
+          <a:ln w="25400">
+            <a:solidFill>
+              <a:srgbClr val="1F4E79"/>
+            </a:solidFill>
+          </a:ln>
+          <a:effectLst/>
+        </p:spPr>
+        <p:style>
+          <a:lnRef idx="1">
+            <a:schemeClr val="accent1"/>
+          </a:lnRef>
+          <a:fillRef idx="3">
+            <a:schemeClr val="accent1"/>
+          </a:fillRef>
+          <a:effectRef idx="2">
+            <a:schemeClr val="accent1"/>
+          </a:effectRef>
+          <a:fontRef idx="minor">
+            <a:schemeClr val="lt1"/>
+          </a:fontRef>
+        </p:style>
+        <p:txBody>
+          <a:bodyPr rtlCol="0" anchor="ctr"/>
+          <a:lstStyle/>
+          <a:p>
+            <a:pPr algn="ctr"/>
+            <a:endParaRPr/>
+          </a:p>
+        </p:txBody>
+      </p:sp>
+      <p:sp>
+        <p:nvSpPr>
+          <p:cNvPr id="3" name="TextBox 2"/>
+          <p:cNvSpPr txBox="1"/>
+          <p:nvPr/>
+        </p:nvSpPr>
+        <p:spPr>
+          <a:xfrm>
+            <a:off x="640080" y="182880"/>
+            <a:ext cx="10972800" cy="640080"/>
+          </a:xfrm>
+          <a:prstGeom prst="rect">
+            <a:avLst/>
+          </a:prstGeom>
+          <a:noFill/>
+        </p:spPr>
+        <p:txBody>
+          <a:bodyPr wrap="square">
+            <a:spAutoFit/>
+          </a:bodyPr>
+          <a:lstStyle/>
+          <a:p>
+            <a:pPr algn="r" rtl="1"/>
+            <a:r>
+              <a:rPr sz="3200" b="1">
+                <a:solidFill>
+                  <a:srgbClr val="1F3B5C"/>
+                </a:solidFill>
+                <a:latin typeface="Arial"/>
+              </a:rPr>
+              <a:t>للاستزادة / Further Reading</a:t>
+            </a:r>
+          </a:p>
+        </p:txBody>
+      </p:sp>
+      <p:sp>
+        <p:nvSpPr>
+          <p:cNvPr id="4" name="TextBox 3"/>
+          <p:cNvSpPr txBox="1"/>
+          <p:nvPr/>
+        </p:nvSpPr>
+        <p:spPr>
+          <a:xfrm>
+            <a:off x="640080" y="1280160"/>
+            <a:ext cx="10972800" cy="5212080"/>
+          </a:xfrm>
+          <a:prstGeom prst="rect">
+            <a:avLst/>
+          </a:prstGeom>
+          <a:noFill/>
+        </p:spPr>
+        <p:txBody>
+          <a:bodyPr wrap="square">
+            <a:spAutoFit/>
+          </a:bodyPr>
+          <a:lstStyle/>
+          <a:p>
+            <a:pPr algn="r" rtl="1">
+              <a:spcBef>
+                <a:spcPts val="200"/>
+              </a:spcBef>
+              <a:spcAft>
+                <a:spcPts val="1000"/>
+              </a:spcAft>
+            </a:pPr>
+            <a:r>
+              <a:rPr sz="2000">
+                <a:solidFill>
+                  <a:srgbClr val="333333"/>
+                </a:solidFill>
+                <a:latin typeface="Arial"/>
+              </a:rPr>
+              <a:t>• توثيق Delta Lake وApache Iceberg.</a:t>
+            </a:r>
+          </a:p>
+          <a:p>
+            <a:pPr algn="l" rtl="0">
+              <a:spcBef>
+                <a:spcPts val="200"/>
+              </a:spcBef>
+              <a:spcAft>
+                <a:spcPts val="1000"/>
+              </a:spcAft>
+            </a:pPr>
+            <a:r>
+              <a:rPr sz="1700">
+                <a:solidFill>
+                  <a:srgbClr val="666666"/>
+                </a:solidFill>
+                <a:latin typeface="Calibri"/>
+              </a:rPr>
+              <a:t>• Delta Lake and Apache Iceberg docs.</a:t>
+            </a:r>
+          </a:p>
+          <a:p>
+            <a:pPr algn="r" rtl="1">
+              <a:spcBef>
+                <a:spcPts val="200"/>
+              </a:spcBef>
+              <a:spcAft>
+                <a:spcPts val="1000"/>
+              </a:spcAft>
+            </a:pPr>
+            <a:r>
+              <a:rPr sz="2000">
+                <a:solidFill>
+                  <a:srgbClr val="333333"/>
+                </a:solidFill>
+                <a:latin typeface="Arial"/>
+              </a:rPr>
+              <a:t>• مقالات Data Contracts (Chad Sanderson).</a:t>
+            </a:r>
+          </a:p>
+          <a:p>
+            <a:pPr algn="l" rtl="0">
+              <a:spcBef>
+                <a:spcPts val="200"/>
+              </a:spcBef>
+              <a:spcAft>
+                <a:spcPts val="1000"/>
+              </a:spcAft>
+            </a:pPr>
+            <a:r>
+              <a:rPr sz="1700">
+                <a:solidFill>
+                  <a:srgbClr val="666666"/>
+                </a:solidFill>
+                <a:latin typeface="Calibri"/>
+              </a:rPr>
+              <a:t>• Data contracts articles (Chad Sanderson).</a:t>
+            </a:r>
+          </a:p>
+        </p:txBody>
+      </p:sp>
+      <p:sp>
+        <p:nvSpPr>
+          <p:cNvPr id="5" name="TextBox 4"/>
+          <p:cNvSpPr txBox="1"/>
+          <p:nvPr/>
+        </p:nvSpPr>
+        <p:spPr>
+          <a:xfrm>
+            <a:off x="640080" y="6400800"/>
+            <a:ext cx="8686800" cy="320040"/>
+          </a:xfrm>
+          <a:prstGeom prst="rect">
+            <a:avLst/>
+          </a:prstGeom>
+          <a:noFill/>
+        </p:spPr>
+        <p:txBody>
+          <a:bodyPr wrap="square">
+            <a:spAutoFit/>
+          </a:bodyPr>
+          <a:lstStyle/>
+          <a:p>
+            <a:pPr algn="r" rtl="1"/>
+            <a:r>
+              <a:rPr sz="1000" b="0">
+                <a:solidFill>
+                  <a:srgbClr val="666666"/>
+                </a:solidFill>
+                <a:latin typeface="Arial"/>
+              </a:rPr>
+              <a:t>Module 02 — Data &amp; AI Engineering Track  |  الوحدة الثانية</a:t>
+            </a:r>
+          </a:p>
+        </p:txBody>
+      </p:sp>
+      <p:sp>
+        <p:nvSpPr>
+          <p:cNvPr id="6" name="TextBox 5"/>
+          <p:cNvSpPr txBox="1"/>
+          <p:nvPr/>
+        </p:nvSpPr>
+        <p:spPr>
+          <a:xfrm>
+            <a:off x="9601200" y="6400800"/>
+            <a:ext cx="1920240" cy="320040"/>
+          </a:xfrm>
+          <a:prstGeom prst="rect">
+            <a:avLst/>
+          </a:prstGeom>
+          <a:noFill/>
+        </p:spPr>
+        <p:txBody>
+          <a:bodyPr wrap="square">
+            <a:spAutoFit/>
+          </a:bodyPr>
+          <a:lstStyle/>
+          <a:p>
+            <a:pPr algn="l" rtl="0"/>
+            <a:r>
+              <a:rPr sz="1000" b="0">
+                <a:solidFill>
+                  <a:srgbClr val="666666"/>
+                </a:solidFill>
+                <a:latin typeface="Calibri"/>
+              </a:rPr>
+              <a:t>V07  •  15/15</a:t>
+            </a:r>
+          </a:p>
+        </p:txBody>
+      </p:sp>
+    </p:spTree>
+  </p:cSld>
+  <p:clrMapOvr>
+    <a:masterClrMapping/>
+  </p:clrMapOvr>
+</p:sld>
+</file>
+
+<file path=ppt/slides/slide2.xml><?xml version="1.0" encoding="utf-8"?>
+<p:sld xmlns:a="http://schemas.openxmlformats.org/drawingml/2006/main" xmlns:r="http://schemas.openxmlformats.org/officeDocument/2006/relationships" xmlns:p="http://schemas.openxmlformats.org/presentationml/2006/main">
+  <p:cSld>
+    <p:bg>
+      <p:bgPr>
+        <a:solidFill>
+          <a:srgbClr val="FFFFFF"/>
+        </a:solidFill>
+        <a:effectLst/>
+      </p:bgPr>
+    </p:bg>
+    <p:spTree>
+      <p:nvGrpSpPr>
+        <p:cNvPr id="1" name=""/>
+        <p:cNvGrpSpPr/>
+        <p:nvPr/>
+      </p:nvGrpSpPr>
+      <p:grpSpPr>
+        <a:xfrm>
+          <a:off x="0" y="0"/>
+          <a:ext cx="0" cy="0"/>
+          <a:chOff x="0" y="0"/>
+          <a:chExt cx="0" cy="0"/>
+        </a:xfrm>
+      </p:grpSpPr>
+      <p:sp>
+        <p:nvSpPr>
+          <p:cNvPr id="2" name="Rectangle 1"/>
+          <p:cNvSpPr/>
+          <p:nvPr/>
+        </p:nvSpPr>
+        <p:spPr>
+          <a:xfrm>
+            <a:off x="0" y="0"/>
+            <a:ext cx="12191695" cy="1005840"/>
+          </a:xfrm>
+          <a:prstGeom prst="rect">
+            <a:avLst/>
+          </a:prstGeom>
+          <a:solidFill>
+            <a:srgbClr val="FFFFFF"/>
+          </a:solidFill>
+          <a:ln w="25400">
+            <a:solidFill>
+              <a:srgbClr val="1F4E79"/>
+            </a:solidFill>
+          </a:ln>
+          <a:effectLst/>
+        </p:spPr>
+        <p:style>
+          <a:lnRef idx="1">
+            <a:schemeClr val="accent1"/>
+          </a:lnRef>
+          <a:fillRef idx="3">
+            <a:schemeClr val="accent1"/>
+          </a:fillRef>
+          <a:effectRef idx="2">
+            <a:schemeClr val="accent1"/>
+          </a:effectRef>
+          <a:fontRef idx="minor">
+            <a:schemeClr val="lt1"/>
+          </a:fontRef>
+        </p:style>
+        <p:txBody>
+          <a:bodyPr rtlCol="0" anchor="ctr"/>
+          <a:lstStyle/>
+          <a:p>
+            <a:pPr algn="ctr"/>
+            <a:endParaRPr/>
+          </a:p>
+        </p:txBody>
+      </p:sp>
+      <p:sp>
+        <p:nvSpPr>
+          <p:cNvPr id="3" name="TextBox 2"/>
+          <p:cNvSpPr txBox="1"/>
+          <p:nvPr/>
+        </p:nvSpPr>
+        <p:spPr>
+          <a:xfrm>
+            <a:off x="640080" y="182880"/>
+            <a:ext cx="10972800" cy="640080"/>
+          </a:xfrm>
+          <a:prstGeom prst="rect">
+            <a:avLst/>
+          </a:prstGeom>
+          <a:noFill/>
+        </p:spPr>
+        <p:txBody>
+          <a:bodyPr wrap="square">
+            <a:spAutoFit/>
+          </a:bodyPr>
+          <a:lstStyle/>
+          <a:p>
+            <a:pPr algn="r" rtl="1"/>
+            <a:r>
+              <a:rPr sz="3200" b="1">
+                <a:solidFill>
+                  <a:srgbClr val="1F3B5C"/>
+                </a:solidFill>
+                <a:latin typeface="Arial"/>
+              </a:rPr>
+              <a:t>أجندة العرض / Agenda</a:t>
+            </a:r>
+          </a:p>
+        </p:txBody>
+      </p:sp>
+      <p:sp>
+        <p:nvSpPr>
+          <p:cNvPr id="4" name="TextBox 3"/>
+          <p:cNvSpPr txBox="1"/>
+          <p:nvPr/>
+        </p:nvSpPr>
+        <p:spPr>
+          <a:xfrm>
+            <a:off x="640080" y="1280160"/>
+            <a:ext cx="10972800" cy="5212080"/>
+          </a:xfrm>
+          <a:prstGeom prst="rect">
+            <a:avLst/>
+          </a:prstGeom>
+          <a:noFill/>
+        </p:spPr>
+        <p:txBody>
+          <a:bodyPr wrap="square">
+            <a:spAutoFit/>
+          </a:bodyPr>
+          <a:lstStyle/>
+          <a:p>
+            <a:pPr algn="r" rtl="1">
+              <a:spcBef>
+                <a:spcPts val="200"/>
+              </a:spcBef>
+              <a:spcAft>
+                <a:spcPts val="1000"/>
+              </a:spcAft>
+            </a:pPr>
+            <a:r>
+              <a:rPr sz="1600">
+                <a:solidFill>
+                  <a:srgbClr val="333333"/>
+                </a:solidFill>
+                <a:latin typeface="Arial"/>
+              </a:rPr>
+              <a:t>• V07 — المستودعات والبحيرات ومعمارية Lakehouse</a:t>
+            </a:r>
+          </a:p>
+          <a:p>
+            <a:pPr algn="l" rtl="0">
+              <a:spcBef>
+                <a:spcPts val="200"/>
+              </a:spcBef>
+              <a:spcAft>
+                <a:spcPts val="1000"/>
+              </a:spcAft>
+            </a:pPr>
+            <a:r>
+              <a:rPr sz="1300">
+                <a:solidFill>
+                  <a:srgbClr val="666666"/>
+                </a:solidFill>
+                <a:latin typeface="Calibri"/>
+              </a:rPr>
+              <a:t>• V07 — Warehouses, Data Lakes &amp; Lakehouse</a:t>
+            </a:r>
+          </a:p>
+          <a:p>
+            <a:pPr algn="r" rtl="1">
+              <a:spcBef>
+                <a:spcPts val="200"/>
+              </a:spcBef>
+              <a:spcAft>
+                <a:spcPts val="1000"/>
+              </a:spcAft>
+            </a:pPr>
+            <a:r>
+              <a:rPr sz="1600">
+                <a:solidFill>
+                  <a:srgbClr val="333333"/>
+                </a:solidFill>
+                <a:latin typeface="Arial"/>
+              </a:rPr>
+              <a:t>• المستودع مقابل البحيرة / Warehouse vs Lake</a:t>
+            </a:r>
+          </a:p>
+          <a:p>
+            <a:pPr algn="r" rtl="1">
+              <a:spcBef>
+                <a:spcPts val="200"/>
+              </a:spcBef>
+              <a:spcAft>
+                <a:spcPts val="1000"/>
+              </a:spcAft>
+            </a:pPr>
+            <a:r>
+              <a:rPr sz="1600">
+                <a:solidFill>
+                  <a:srgbClr val="333333"/>
+                </a:solidFill>
+                <a:latin typeface="Arial"/>
+              </a:rPr>
+              <a:t>• معمارية Lakehouse / Lakehouse</a:t>
+            </a:r>
+          </a:p>
+          <a:p>
+            <a:pPr algn="r" rtl="1">
+              <a:spcBef>
+                <a:spcPts val="200"/>
+              </a:spcBef>
+              <a:spcAft>
+                <a:spcPts val="1000"/>
+              </a:spcAft>
+            </a:pPr>
+            <a:r>
+              <a:rPr sz="1600">
+                <a:solidFill>
+                  <a:srgbClr val="333333"/>
+                </a:solidFill>
+                <a:latin typeface="Arial"/>
+              </a:rPr>
+              <a:t>• منتجات البيانات وعقودها / Data Products &amp; Contracts</a:t>
+            </a:r>
+          </a:p>
+          <a:p>
+            <a:pPr algn="r" rtl="1">
+              <a:spcBef>
+                <a:spcPts val="200"/>
+              </a:spcBef>
+              <a:spcAft>
+                <a:spcPts val="1000"/>
+              </a:spcAft>
+            </a:pPr>
+            <a:r>
+              <a:rPr sz="1600">
+                <a:solidFill>
+                  <a:srgbClr val="333333"/>
+                </a:solidFill>
+                <a:latin typeface="Arial"/>
+              </a:rPr>
+              <a:t>• متى تختار كل نموذج؟ / When to Choose Which</a:t>
+            </a:r>
+          </a:p>
+          <a:p>
+            <a:pPr algn="r" rtl="1">
+              <a:spcBef>
+                <a:spcPts val="200"/>
+              </a:spcBef>
+              <a:spcAft>
+                <a:spcPts val="1000"/>
+              </a:spcAft>
+            </a:pPr>
+            <a:r>
+              <a:rPr sz="1600">
+                <a:solidFill>
+                  <a:srgbClr val="333333"/>
+                </a:solidFill>
+                <a:latin typeface="Arial"/>
+              </a:rPr>
+              <a:t>• ربط بالمقرر / Course Tie-in</a:t>
+            </a:r>
+          </a:p>
+        </p:txBody>
+      </p:sp>
+      <p:sp>
+        <p:nvSpPr>
+          <p:cNvPr id="5" name="TextBox 4"/>
+          <p:cNvSpPr txBox="1"/>
+          <p:nvPr/>
+        </p:nvSpPr>
+        <p:spPr>
+          <a:xfrm>
+            <a:off x="640080" y="6400800"/>
+            <a:ext cx="8686800" cy="320040"/>
+          </a:xfrm>
+          <a:prstGeom prst="rect">
+            <a:avLst/>
+          </a:prstGeom>
+          <a:noFill/>
+        </p:spPr>
+        <p:txBody>
+          <a:bodyPr wrap="square">
+            <a:spAutoFit/>
+          </a:bodyPr>
+          <a:lstStyle/>
+          <a:p>
+            <a:pPr algn="r" rtl="1"/>
+            <a:r>
+              <a:rPr sz="1000" b="0">
+                <a:solidFill>
+                  <a:srgbClr val="666666"/>
+                </a:solidFill>
+                <a:latin typeface="Arial"/>
+              </a:rPr>
+              <a:t>Module 02 — Data &amp; AI Engineering Track  |  الوحدة الثانية</a:t>
+            </a:r>
+          </a:p>
+        </p:txBody>
+      </p:sp>
+      <p:sp>
+        <p:nvSpPr>
+          <p:cNvPr id="6" name="TextBox 5"/>
+          <p:cNvSpPr txBox="1"/>
+          <p:nvPr/>
+        </p:nvSpPr>
+        <p:spPr>
+          <a:xfrm>
+            <a:off x="9601200" y="6400800"/>
+            <a:ext cx="1920240" cy="320040"/>
+          </a:xfrm>
+          <a:prstGeom prst="rect">
+            <a:avLst/>
+          </a:prstGeom>
+          <a:noFill/>
+        </p:spPr>
+        <p:txBody>
+          <a:bodyPr wrap="square">
+            <a:spAutoFit/>
+          </a:bodyPr>
+          <a:lstStyle/>
+          <a:p>
+            <a:pPr algn="l" rtl="0"/>
+            <a:r>
+              <a:rPr sz="1000" b="0">
+                <a:solidFill>
+                  <a:srgbClr val="666666"/>
+                </a:solidFill>
+                <a:latin typeface="Calibri"/>
+              </a:rPr>
+              <a:t>V07  •  2/15</a:t>
+            </a:r>
+          </a:p>
+        </p:txBody>
+      </p:sp>
+    </p:spTree>
+  </p:cSld>
+  <p:clrMapOvr>
+    <a:masterClrMapping/>
+  </p:clrMapOvr>
+</p:sld>
+</file>
+
+<file path=ppt/slides/slide3.xml><?xml version="1.0" encoding="utf-8"?>
+<p:sld xmlns:a="http://schemas.openxmlformats.org/drawingml/2006/main" xmlns:r="http://schemas.openxmlformats.org/officeDocument/2006/relationships" xmlns:p="http://schemas.openxmlformats.org/presentationml/2006/main">
+  <p:cSld>
+    <p:bg>
+      <p:bgPr>
+        <a:solidFill>
+          <a:srgbClr val="FFFFFF"/>
+        </a:solidFill>
+        <a:effectLst/>
+      </p:bgPr>
+    </p:bg>
+    <p:spTree>
+      <p:nvGrpSpPr>
+        <p:cNvPr id="1" name=""/>
+        <p:cNvGrpSpPr/>
+        <p:nvPr/>
+      </p:nvGrpSpPr>
+      <p:grpSpPr>
+        <a:xfrm>
+          <a:off x="0" y="0"/>
+          <a:ext cx="0" cy="0"/>
+          <a:chOff x="0" y="0"/>
+          <a:chExt cx="0" cy="0"/>
+        </a:xfrm>
+      </p:grpSpPr>
+      <p:sp>
+        <p:nvSpPr>
+          <p:cNvPr id="2" name="Rectangle 1"/>
+          <p:cNvSpPr/>
+          <p:nvPr/>
+        </p:nvSpPr>
+        <p:spPr>
+          <a:xfrm>
+            <a:off x="0" y="0"/>
+            <a:ext cx="12191695" cy="1005840"/>
+          </a:xfrm>
+          <a:prstGeom prst="rect">
+            <a:avLst/>
+          </a:prstGeom>
+          <a:solidFill>
+            <a:srgbClr val="FFFFFF"/>
+          </a:solidFill>
+          <a:ln w="25400">
+            <a:solidFill>
+              <a:srgbClr val="1F4E79"/>
+            </a:solidFill>
+          </a:ln>
+          <a:effectLst/>
+        </p:spPr>
+        <p:style>
+          <a:lnRef idx="1">
+            <a:schemeClr val="accent1"/>
+          </a:lnRef>
+          <a:fillRef idx="3">
+            <a:schemeClr val="accent1"/>
+          </a:fillRef>
+          <a:effectRef idx="2">
+            <a:schemeClr val="accent1"/>
+          </a:effectRef>
+          <a:fontRef idx="minor">
+            <a:schemeClr val="lt1"/>
+          </a:fontRef>
+        </p:style>
+        <p:txBody>
+          <a:bodyPr rtlCol="0" anchor="ctr"/>
+          <a:lstStyle/>
+          <a:p>
+            <a:pPr algn="ctr"/>
+            <a:endParaRPr/>
+          </a:p>
+        </p:txBody>
+      </p:sp>
+      <p:sp>
+        <p:nvSpPr>
+          <p:cNvPr id="3" name="TextBox 2"/>
+          <p:cNvSpPr txBox="1"/>
+          <p:nvPr/>
+        </p:nvSpPr>
+        <p:spPr>
+          <a:xfrm>
+            <a:off x="640080" y="182880"/>
+            <a:ext cx="10972800" cy="640080"/>
+          </a:xfrm>
+          <a:prstGeom prst="rect">
+            <a:avLst/>
+          </a:prstGeom>
+          <a:noFill/>
+        </p:spPr>
+        <p:txBody>
+          <a:bodyPr wrap="square">
+            <a:spAutoFit/>
+          </a:bodyPr>
+          <a:lstStyle/>
+          <a:p>
+            <a:pPr algn="r" rtl="1"/>
+            <a:r>
+              <a:rPr sz="3200" b="1">
+                <a:solidFill>
+                  <a:srgbClr val="1F3B5C"/>
+                </a:solidFill>
+                <a:latin typeface="Arial"/>
+              </a:rPr>
+              <a:t>المستودع مقابل البحيرة / Warehouse vs Lake</a:t>
+            </a:r>
+          </a:p>
+        </p:txBody>
+      </p:sp>
+      <p:sp>
+        <p:nvSpPr>
+          <p:cNvPr id="4" name="TextBox 3"/>
+          <p:cNvSpPr txBox="1"/>
+          <p:nvPr/>
+        </p:nvSpPr>
+        <p:spPr>
+          <a:xfrm>
+            <a:off x="640080" y="1280160"/>
+            <a:ext cx="10972800" cy="5212080"/>
+          </a:xfrm>
+          <a:prstGeom prst="rect">
+            <a:avLst/>
+          </a:prstGeom>
+          <a:noFill/>
+        </p:spPr>
+        <p:txBody>
+          <a:bodyPr wrap="square">
+            <a:spAutoFit/>
+          </a:bodyPr>
+          <a:lstStyle/>
+          <a:p>
+            <a:pPr algn="r" rtl="1">
+              <a:spcBef>
+                <a:spcPts val="200"/>
+              </a:spcBef>
+              <a:spcAft>
+                <a:spcPts val="1000"/>
+              </a:spcAft>
+            </a:pPr>
+            <a:r>
+              <a:rPr sz="1900">
+                <a:solidFill>
+                  <a:srgbClr val="333333"/>
+                </a:solidFill>
+                <a:latin typeface="Arial"/>
+              </a:rPr>
+              <a:t>• المستودع: مخطط عند الكتابة، SQL سريع، بيانات مهيكلة فقط.</a:t>
+            </a:r>
+          </a:p>
+          <a:p>
+            <a:pPr algn="l" rtl="0">
+              <a:spcBef>
+                <a:spcPts val="200"/>
+              </a:spcBef>
+              <a:spcAft>
+                <a:spcPts val="1000"/>
+              </a:spcAft>
+            </a:pPr>
+            <a:r>
+              <a:rPr sz="1600">
+                <a:solidFill>
+                  <a:srgbClr val="666666"/>
+                </a:solidFill>
+                <a:latin typeface="Calibri"/>
+              </a:rPr>
+              <a:t>• Warehouse: schema-on-write, fast SQL, structured data only.</a:t>
+            </a:r>
+          </a:p>
+          <a:p>
+            <a:pPr algn="r" rtl="1">
+              <a:spcBef>
+                <a:spcPts val="200"/>
+              </a:spcBef>
+              <a:spcAft>
+                <a:spcPts val="1000"/>
+              </a:spcAft>
+            </a:pPr>
+            <a:r>
+              <a:rPr sz="1900">
+                <a:solidFill>
+                  <a:srgbClr val="333333"/>
+                </a:solidFill>
+                <a:latin typeface="Arial"/>
+              </a:rPr>
+              <a:t>• البحيرة: مخطط عند القراءة، كل التنسيقات، تكلفة تخزين منخفضة.</a:t>
+            </a:r>
+          </a:p>
+          <a:p>
+            <a:pPr algn="l" rtl="0">
+              <a:spcBef>
+                <a:spcPts val="200"/>
+              </a:spcBef>
+              <a:spcAft>
+                <a:spcPts val="1000"/>
+              </a:spcAft>
+            </a:pPr>
+            <a:r>
+              <a:rPr sz="1600">
+                <a:solidFill>
+                  <a:srgbClr val="666666"/>
+                </a:solidFill>
+                <a:latin typeface="Calibri"/>
+              </a:rPr>
+              <a:t>• Lake: schema-on-read, any format, low-cost storage.</a:t>
+            </a:r>
+          </a:p>
+        </p:txBody>
+      </p:sp>
+      <p:sp>
+        <p:nvSpPr>
+          <p:cNvPr id="5" name="TextBox 4"/>
+          <p:cNvSpPr txBox="1"/>
+          <p:nvPr/>
+        </p:nvSpPr>
+        <p:spPr>
+          <a:xfrm>
+            <a:off x="640080" y="6400800"/>
+            <a:ext cx="8686800" cy="320040"/>
+          </a:xfrm>
+          <a:prstGeom prst="rect">
+            <a:avLst/>
+          </a:prstGeom>
+          <a:noFill/>
+        </p:spPr>
+        <p:txBody>
+          <a:bodyPr wrap="square">
+            <a:spAutoFit/>
+          </a:bodyPr>
+          <a:lstStyle/>
+          <a:p>
+            <a:pPr algn="r" rtl="1"/>
+            <a:r>
+              <a:rPr sz="1000" b="0">
+                <a:solidFill>
+                  <a:srgbClr val="666666"/>
+                </a:solidFill>
+                <a:latin typeface="Arial"/>
+              </a:rPr>
+              <a:t>Module 02 — Data &amp; AI Engineering Track  |  الوحدة الثانية</a:t>
+            </a:r>
+          </a:p>
+        </p:txBody>
+      </p:sp>
+      <p:sp>
+        <p:nvSpPr>
+          <p:cNvPr id="6" name="TextBox 5"/>
+          <p:cNvSpPr txBox="1"/>
+          <p:nvPr/>
+        </p:nvSpPr>
+        <p:spPr>
+          <a:xfrm>
+            <a:off x="9601200" y="6400800"/>
+            <a:ext cx="1920240" cy="320040"/>
+          </a:xfrm>
+          <a:prstGeom prst="rect">
+            <a:avLst/>
+          </a:prstGeom>
+          <a:noFill/>
+        </p:spPr>
+        <p:txBody>
+          <a:bodyPr wrap="square">
+            <a:spAutoFit/>
+          </a:bodyPr>
+          <a:lstStyle/>
+          <a:p>
+            <a:pPr algn="l" rtl="0"/>
+            <a:r>
+              <a:rPr sz="1000" b="0">
+                <a:solidFill>
+                  <a:srgbClr val="666666"/>
+                </a:solidFill>
+                <a:latin typeface="Calibri"/>
+              </a:rPr>
+              <a:t>V07  •  3/15</a:t>
+            </a:r>
+          </a:p>
+        </p:txBody>
+      </p:sp>
+    </p:spTree>
+  </p:cSld>
+  <p:clrMapOvr>
+    <a:masterClrMapping/>
+  </p:clrMapOvr>
+</p:sld>
+</file>
+
+<file path=ppt/slides/slide4.xml><?xml version="1.0" encoding="utf-8"?>
+<p:sld xmlns:a="http://schemas.openxmlformats.org/drawingml/2006/main" xmlns:r="http://schemas.openxmlformats.org/officeDocument/2006/relationships" xmlns:p="http://schemas.openxmlformats.org/presentationml/2006/main">
+  <p:cSld>
+    <p:bg>
+      <p:bgPr>
+        <a:solidFill>
+          <a:srgbClr val="FFFFFF"/>
+        </a:solidFill>
+        <a:effectLst/>
+      </p:bgPr>
+    </p:bg>
+    <p:spTree>
+      <p:nvGrpSpPr>
+        <p:cNvPr id="1" name=""/>
+        <p:cNvGrpSpPr/>
+        <p:nvPr/>
+      </p:nvGrpSpPr>
+      <p:grpSpPr>
+        <a:xfrm>
+          <a:off x="0" y="0"/>
+          <a:ext cx="0" cy="0"/>
+          <a:chOff x="0" y="0"/>
+          <a:chExt cx="0" cy="0"/>
+        </a:xfrm>
+      </p:grpSpPr>
+      <p:sp>
+        <p:nvSpPr>
+          <p:cNvPr id="2" name="TextBox 1"/>
+          <p:cNvSpPr txBox="1"/>
+          <p:nvPr/>
+        </p:nvSpPr>
+        <p:spPr>
+          <a:xfrm>
+            <a:off x="640080" y="137160"/>
+            <a:ext cx="10972800" cy="640080"/>
+          </a:xfrm>
+          <a:prstGeom prst="rect">
+            <a:avLst/>
+          </a:prstGeom>
+          <a:noFill/>
+        </p:spPr>
+        <p:txBody>
+          <a:bodyPr wrap="none">
+            <a:spAutoFit/>
+          </a:bodyPr>
+          <a:lstStyle/>
+          <a:p>
+            <a:pPr algn="r" rtl="1"/>
+            <a:r>
+              <a:rPr sz="3000" b="1">
+                <a:solidFill>
+                  <a:srgbClr val="1F3B5C"/>
+                </a:solidFill>
+                <a:latin typeface="Arial"/>
+              </a:rPr>
+              <a:t>خريطة قرار: المستودع مقابل البحيرة / Warehouse vs Lake Decision Map</a:t>
+            </a:r>
+          </a:p>
+        </p:txBody>
+      </p:sp>
+      <p:sp>
+        <p:nvSpPr>
+          <p:cNvPr id="3" name="Rounded Rectangle 2"/>
+          <p:cNvSpPr/>
+          <p:nvPr/>
+        </p:nvSpPr>
+        <p:spPr>
+          <a:xfrm>
+            <a:off x="731520" y="1234440"/>
+            <a:ext cx="5029200" cy="822960"/>
+          </a:xfrm>
+          <a:prstGeom prst="roundRect">
+            <a:avLst/>
+          </a:prstGeom>
+          <a:solidFill>
+            <a:srgbClr val="E2EFDA"/>
+          </a:solidFill>
+          <a:ln w="12700">
+            <a:solidFill>
+              <a:srgbClr val="1F4E79"/>
+            </a:solidFill>
+          </a:ln>
+          <a:effectLst/>
+        </p:spPr>
+        <p:style>
+          <a:lnRef idx="1">
+            <a:schemeClr val="accent1"/>
+          </a:lnRef>
+          <a:fillRef idx="3">
+            <a:schemeClr val="accent1"/>
+          </a:fillRef>
+          <a:effectRef idx="2">
+            <a:schemeClr val="accent1"/>
+          </a:effectRef>
+          <a:fontRef idx="minor">
+            <a:schemeClr val="lt1"/>
+          </a:fontRef>
+        </p:style>
+        <p:txBody>
+          <a:bodyPr wrap="square" rtlCol="0" anchor="ctr"/>
+          <a:lstStyle/>
+          <a:p>
+            <a:pPr algn="ctr" rtl="1"/>
+            <a:r>
+              <a:rPr sz="2000" b="1">
+                <a:solidFill>
+                  <a:srgbClr val="333333"/>
+                </a:solidFill>
+                <a:latin typeface="Arial"/>
+              </a:rPr>
+              <a:t>مستودع البيانات</a:t>
+            </a:r>
+          </a:p>
+          <a:p>
+            <a:pPr algn="ctr" rtl="0"/>
+            <a:r>
+              <a:rPr sz="1400">
+                <a:solidFill>
+                  <a:srgbClr val="666666"/>
+                </a:solidFill>
+                <a:latin typeface="Calibri"/>
+              </a:rPr>
+              <a:t>Data Warehouse</a:t>
+            </a:r>
+          </a:p>
+        </p:txBody>
+      </p:sp>
+      <p:sp>
+        <p:nvSpPr>
+          <p:cNvPr id="4" name="Rounded Rectangle 3"/>
+          <p:cNvSpPr/>
+          <p:nvPr/>
+        </p:nvSpPr>
+        <p:spPr>
+          <a:xfrm>
+            <a:off x="6400800" y="1234440"/>
+            <a:ext cx="5029200" cy="822960"/>
+          </a:xfrm>
+          <a:prstGeom prst="roundRect">
+            <a:avLst/>
+          </a:prstGeom>
+          <a:solidFill>
+            <a:srgbClr val="DCE6F1"/>
+          </a:solidFill>
+          <a:ln w="12700">
+            <a:solidFill>
+              <a:srgbClr val="1F4E79"/>
+            </a:solidFill>
+          </a:ln>
+          <a:effectLst/>
+        </p:spPr>
+        <p:style>
+          <a:lnRef idx="1">
+            <a:schemeClr val="accent1"/>
+          </a:lnRef>
+          <a:fillRef idx="3">
+            <a:schemeClr val="accent1"/>
+          </a:fillRef>
+          <a:effectRef idx="2">
+            <a:schemeClr val="accent1"/>
+          </a:effectRef>
+          <a:fontRef idx="minor">
+            <a:schemeClr val="lt1"/>
+          </a:fontRef>
+        </p:style>
+        <p:txBody>
+          <a:bodyPr wrap="square" rtlCol="0" anchor="ctr"/>
+          <a:lstStyle/>
+          <a:p>
+            <a:pPr algn="ctr" rtl="1"/>
+            <a:r>
+              <a:rPr sz="2000" b="1">
+                <a:solidFill>
+                  <a:srgbClr val="333333"/>
+                </a:solidFill>
+                <a:latin typeface="Arial"/>
+              </a:rPr>
+              <a:t>بحيرة البيانات</a:t>
+            </a:r>
+          </a:p>
+          <a:p>
+            <a:pPr algn="ctr" rtl="0"/>
+            <a:r>
+              <a:rPr sz="1400">
+                <a:solidFill>
+                  <a:srgbClr val="666666"/>
+                </a:solidFill>
+                <a:latin typeface="Calibri"/>
+              </a:rPr>
+              <a:t>Data Lake</a:t>
+            </a:r>
+          </a:p>
+        </p:txBody>
+      </p:sp>
+      <p:sp>
+        <p:nvSpPr>
+          <p:cNvPr id="5" name="Rounded Rectangle 4"/>
+          <p:cNvSpPr/>
+          <p:nvPr/>
+        </p:nvSpPr>
+        <p:spPr>
+          <a:xfrm>
+            <a:off x="731520" y="2331720"/>
+            <a:ext cx="5029200" cy="731520"/>
+          </a:xfrm>
+          <a:prstGeom prst="roundRect">
+            <a:avLst/>
+          </a:prstGeom>
+          <a:solidFill>
+            <a:srgbClr val="EDEDED"/>
+          </a:solidFill>
+          <a:ln w="12700">
+            <a:solidFill>
+              <a:srgbClr val="1F4E79"/>
+            </a:solidFill>
+          </a:ln>
+          <a:effectLst/>
+        </p:spPr>
+        <p:style>
+          <a:lnRef idx="1">
+            <a:schemeClr val="accent1"/>
+          </a:lnRef>
+          <a:fillRef idx="3">
+            <a:schemeClr val="accent1"/>
+          </a:fillRef>
+          <a:effectRef idx="2">
+            <a:schemeClr val="accent1"/>
+          </a:effectRef>
+          <a:fontRef idx="minor">
+            <a:schemeClr val="lt1"/>
+          </a:fontRef>
+        </p:style>
+        <p:txBody>
+          <a:bodyPr wrap="square" rtlCol="0" anchor="ctr"/>
+          <a:lstStyle/>
+          <a:p>
+            <a:pPr algn="ctr" rtl="1"/>
+            <a:r>
+              <a:rPr sz="1400" b="1">
+                <a:solidFill>
+                  <a:srgbClr val="333333"/>
+                </a:solidFill>
+                <a:latin typeface="Arial"/>
+              </a:rPr>
+              <a:t>مخطط عند الكتابة</a:t>
+            </a:r>
+          </a:p>
+          <a:p>
+            <a:pPr algn="ctr" rtl="0"/>
+            <a:r>
+              <a:rPr sz="1100">
+                <a:solidFill>
+                  <a:srgbClr val="666666"/>
+                </a:solidFill>
+                <a:latin typeface="Calibri"/>
+              </a:rPr>
+              <a:t>Schema on write</a:t>
+            </a:r>
+          </a:p>
+        </p:txBody>
+      </p:sp>
+      <p:sp>
+        <p:nvSpPr>
+          <p:cNvPr id="6" name="Rounded Rectangle 5"/>
+          <p:cNvSpPr/>
+          <p:nvPr/>
+        </p:nvSpPr>
+        <p:spPr>
+          <a:xfrm>
+            <a:off x="6400800" y="2331720"/>
+            <a:ext cx="5029200" cy="731520"/>
+          </a:xfrm>
+          <a:prstGeom prst="roundRect">
+            <a:avLst/>
+          </a:prstGeom>
+          <a:solidFill>
+            <a:srgbClr val="EDEDED"/>
+          </a:solidFill>
+          <a:ln w="12700">
+            <a:solidFill>
+              <a:srgbClr val="1F4E79"/>
+            </a:solidFill>
+          </a:ln>
+          <a:effectLst/>
+        </p:spPr>
+        <p:style>
+          <a:lnRef idx="1">
+            <a:schemeClr val="accent1"/>
+          </a:lnRef>
+          <a:fillRef idx="3">
+            <a:schemeClr val="accent1"/>
+          </a:fillRef>
+          <a:effectRef idx="2">
+            <a:schemeClr val="accent1"/>
+          </a:effectRef>
+          <a:fontRef idx="minor">
+            <a:schemeClr val="lt1"/>
+          </a:fontRef>
+        </p:style>
+        <p:txBody>
+          <a:bodyPr wrap="square" rtlCol="0" anchor="ctr"/>
+          <a:lstStyle/>
+          <a:p>
+            <a:pPr algn="ctr" rtl="1"/>
+            <a:r>
+              <a:rPr sz="1400" b="1">
+                <a:solidFill>
+                  <a:srgbClr val="333333"/>
+                </a:solidFill>
+                <a:latin typeface="Arial"/>
+              </a:rPr>
+              <a:t>مخطط عند القراءة</a:t>
+            </a:r>
+          </a:p>
+          <a:p>
+            <a:pPr algn="ctr" rtl="0"/>
+            <a:r>
+              <a:rPr sz="1100">
+                <a:solidFill>
+                  <a:srgbClr val="666666"/>
+                </a:solidFill>
+                <a:latin typeface="Calibri"/>
+              </a:rPr>
+              <a:t>Schema on read</a:t>
+            </a:r>
+          </a:p>
+        </p:txBody>
+      </p:sp>
+      <p:sp>
+        <p:nvSpPr>
+          <p:cNvPr id="7" name="Rounded Rectangle 6"/>
+          <p:cNvSpPr/>
+          <p:nvPr/>
+        </p:nvSpPr>
+        <p:spPr>
+          <a:xfrm>
+            <a:off x="731520" y="3200400"/>
+            <a:ext cx="5029200" cy="731520"/>
+          </a:xfrm>
+          <a:prstGeom prst="roundRect">
+            <a:avLst/>
+          </a:prstGeom>
+          <a:solidFill>
+            <a:srgbClr val="EDEDED"/>
+          </a:solidFill>
+          <a:ln w="12700">
+            <a:solidFill>
+              <a:srgbClr val="1F4E79"/>
+            </a:solidFill>
+          </a:ln>
+          <a:effectLst/>
+        </p:spPr>
+        <p:style>
+          <a:lnRef idx="1">
+            <a:schemeClr val="accent1"/>
+          </a:lnRef>
+          <a:fillRef idx="3">
+            <a:schemeClr val="accent1"/>
+          </a:fillRef>
+          <a:effectRef idx="2">
+            <a:schemeClr val="accent1"/>
+          </a:effectRef>
+          <a:fontRef idx="minor">
+            <a:schemeClr val="lt1"/>
+          </a:fontRef>
+        </p:style>
+        <p:txBody>
+          <a:bodyPr wrap="square" rtlCol="0" anchor="ctr"/>
+          <a:lstStyle/>
+          <a:p>
+            <a:pPr algn="ctr" rtl="1"/>
+            <a:r>
+              <a:rPr sz="1400" b="1">
+                <a:solidFill>
+                  <a:srgbClr val="333333"/>
+                </a:solidFill>
+                <a:latin typeface="Arial"/>
+              </a:rPr>
+              <a:t>بيانات منظمة + SQL</a:t>
+            </a:r>
+          </a:p>
+          <a:p>
+            <a:pPr algn="ctr" rtl="0"/>
+            <a:r>
+              <a:rPr sz="1100">
+                <a:solidFill>
+                  <a:srgbClr val="666666"/>
+                </a:solidFill>
+                <a:latin typeface="Calibri"/>
+              </a:rPr>
+              <a:t>Curated data + SQL</a:t>
+            </a:r>
+          </a:p>
+        </p:txBody>
+      </p:sp>
+      <p:sp>
+        <p:nvSpPr>
+          <p:cNvPr id="8" name="Rounded Rectangle 7"/>
+          <p:cNvSpPr/>
+          <p:nvPr/>
+        </p:nvSpPr>
+        <p:spPr>
+          <a:xfrm>
+            <a:off x="6400800" y="3200400"/>
+            <a:ext cx="5029200" cy="731520"/>
+          </a:xfrm>
+          <a:prstGeom prst="roundRect">
+            <a:avLst/>
+          </a:prstGeom>
+          <a:solidFill>
+            <a:srgbClr val="EDEDED"/>
+          </a:solidFill>
+          <a:ln w="12700">
+            <a:solidFill>
+              <a:srgbClr val="1F4E79"/>
+            </a:solidFill>
+          </a:ln>
+          <a:effectLst/>
+        </p:spPr>
+        <p:style>
+          <a:lnRef idx="1">
+            <a:schemeClr val="accent1"/>
+          </a:lnRef>
+          <a:fillRef idx="3">
+            <a:schemeClr val="accent1"/>
+          </a:fillRef>
+          <a:effectRef idx="2">
+            <a:schemeClr val="accent1"/>
+          </a:effectRef>
+          <a:fontRef idx="minor">
+            <a:schemeClr val="lt1"/>
+          </a:fontRef>
+        </p:style>
+        <p:txBody>
+          <a:bodyPr wrap="square" rtlCol="0" anchor="ctr"/>
+          <a:lstStyle/>
+          <a:p>
+            <a:pPr algn="ctr" rtl="1"/>
+            <a:r>
+              <a:rPr sz="1400" b="1">
+                <a:solidFill>
+                  <a:srgbClr val="333333"/>
+                </a:solidFill>
+                <a:latin typeface="Arial"/>
+              </a:rPr>
+              <a:t>كل التنسيقات</a:t>
+            </a:r>
+          </a:p>
+          <a:p>
+            <a:pPr algn="ctr" rtl="0"/>
+            <a:r>
+              <a:rPr sz="1100">
+                <a:solidFill>
+                  <a:srgbClr val="666666"/>
+                </a:solidFill>
+                <a:latin typeface="Calibri"/>
+              </a:rPr>
+              <a:t>Any format</a:t>
+            </a:r>
+          </a:p>
+        </p:txBody>
+      </p:sp>
+      <p:sp>
+        <p:nvSpPr>
+          <p:cNvPr id="9" name="Rounded Rectangle 8"/>
+          <p:cNvSpPr/>
+          <p:nvPr/>
+        </p:nvSpPr>
+        <p:spPr>
+          <a:xfrm>
+            <a:off x="731520" y="4069080"/>
+            <a:ext cx="5029200" cy="731520"/>
+          </a:xfrm>
+          <a:prstGeom prst="roundRect">
+            <a:avLst/>
+          </a:prstGeom>
+          <a:solidFill>
+            <a:srgbClr val="EDEDED"/>
+          </a:solidFill>
+          <a:ln w="12700">
+            <a:solidFill>
+              <a:srgbClr val="1F4E79"/>
+            </a:solidFill>
+          </a:ln>
+          <a:effectLst/>
+        </p:spPr>
+        <p:style>
+          <a:lnRef idx="1">
+            <a:schemeClr val="accent1"/>
+          </a:lnRef>
+          <a:fillRef idx="3">
+            <a:schemeClr val="accent1"/>
+          </a:fillRef>
+          <a:effectRef idx="2">
+            <a:schemeClr val="accent1"/>
+          </a:effectRef>
+          <a:fontRef idx="minor">
+            <a:schemeClr val="lt1"/>
+          </a:fontRef>
+        </p:style>
+        <p:txBody>
+          <a:bodyPr wrap="square" rtlCol="0" anchor="ctr"/>
+          <a:lstStyle/>
+          <a:p>
+            <a:pPr algn="ctr" rtl="1"/>
+            <a:r>
+              <a:rPr sz="1400" b="1">
+                <a:solidFill>
+                  <a:srgbClr val="333333"/>
+                </a:solidFill>
+                <a:latin typeface="Arial"/>
+              </a:rPr>
+              <a:t>تقارير وذكاء أعمال</a:t>
+            </a:r>
+          </a:p>
+          <a:p>
+            <a:pPr algn="ctr" rtl="0"/>
+            <a:r>
+              <a:rPr sz="1100">
+                <a:solidFill>
+                  <a:srgbClr val="666666"/>
+                </a:solidFill>
+                <a:latin typeface="Calibri"/>
+              </a:rPr>
+              <a:t>Reporting and BI</a:t>
+            </a:r>
+          </a:p>
+        </p:txBody>
+      </p:sp>
+      <p:sp>
+        <p:nvSpPr>
+          <p:cNvPr id="10" name="Rounded Rectangle 9"/>
+          <p:cNvSpPr/>
+          <p:nvPr/>
+        </p:nvSpPr>
+        <p:spPr>
+          <a:xfrm>
+            <a:off x="6400800" y="4069080"/>
+            <a:ext cx="5029200" cy="731520"/>
+          </a:xfrm>
+          <a:prstGeom prst="roundRect">
+            <a:avLst/>
+          </a:prstGeom>
+          <a:solidFill>
+            <a:srgbClr val="EDEDED"/>
+          </a:solidFill>
+          <a:ln w="12700">
+            <a:solidFill>
+              <a:srgbClr val="1F4E79"/>
+            </a:solidFill>
+          </a:ln>
+          <a:effectLst/>
+        </p:spPr>
+        <p:style>
+          <a:lnRef idx="1">
+            <a:schemeClr val="accent1"/>
+          </a:lnRef>
+          <a:fillRef idx="3">
+            <a:schemeClr val="accent1"/>
+          </a:fillRef>
+          <a:effectRef idx="2">
+            <a:schemeClr val="accent1"/>
+          </a:effectRef>
+          <a:fontRef idx="minor">
+            <a:schemeClr val="lt1"/>
+          </a:fontRef>
+        </p:style>
+        <p:txBody>
+          <a:bodyPr wrap="square" rtlCol="0" anchor="ctr"/>
+          <a:lstStyle/>
+          <a:p>
+            <a:pPr algn="ctr" rtl="1"/>
+            <a:r>
+              <a:rPr sz="1400" b="1">
+                <a:solidFill>
+                  <a:srgbClr val="333333"/>
+                </a:solidFill>
+                <a:latin typeface="Arial"/>
+              </a:rPr>
+              <a:t>استكشاف وAI/ML</a:t>
+            </a:r>
+          </a:p>
+          <a:p>
+            <a:pPr algn="ctr" rtl="0"/>
+            <a:r>
+              <a:rPr sz="1100">
+                <a:solidFill>
+                  <a:srgbClr val="666666"/>
+                </a:solidFill>
+                <a:latin typeface="Calibri"/>
+              </a:rPr>
+              <a:t>Exploration and AI/ML</a:t>
+            </a:r>
+          </a:p>
+        </p:txBody>
+      </p:sp>
+      <p:sp>
+        <p:nvSpPr>
+          <p:cNvPr id="11" name="Rounded Rectangle 10"/>
+          <p:cNvSpPr/>
+          <p:nvPr/>
+        </p:nvSpPr>
+        <p:spPr>
+          <a:xfrm>
+            <a:off x="3886200" y="5212080"/>
+            <a:ext cx="4434840" cy="640080"/>
+          </a:xfrm>
+          <a:prstGeom prst="roundRect">
+            <a:avLst/>
+          </a:prstGeom>
+          <a:solidFill>
+            <a:srgbClr val="FDE9D9"/>
+          </a:solidFill>
+          <a:ln w="12700">
+            <a:solidFill>
+              <a:srgbClr val="1F4E79"/>
+            </a:solidFill>
+          </a:ln>
+          <a:effectLst/>
+        </p:spPr>
+        <p:style>
+          <a:lnRef idx="1">
+            <a:schemeClr val="accent1"/>
+          </a:lnRef>
+          <a:fillRef idx="3">
+            <a:schemeClr val="accent1"/>
+          </a:fillRef>
+          <a:effectRef idx="2">
+            <a:schemeClr val="accent1"/>
+          </a:effectRef>
+          <a:fontRef idx="minor">
+            <a:schemeClr val="lt1"/>
+          </a:fontRef>
+        </p:style>
+        <p:txBody>
+          <a:bodyPr wrap="square" rtlCol="0" anchor="ctr"/>
+          <a:lstStyle/>
+          <a:p>
+            <a:pPr algn="ctr" rtl="1"/>
+            <a:r>
+              <a:rPr sz="1400" b="1">
+                <a:solidFill>
+                  <a:srgbClr val="333333"/>
+                </a:solidFill>
+                <a:latin typeface="Arial"/>
+              </a:rPr>
+              <a:t>Lakehouse = مرونة البحيرة + موثوقية المستودع</a:t>
+            </a:r>
+          </a:p>
+          <a:p>
+            <a:pPr algn="ctr" rtl="0"/>
+            <a:r>
+              <a:rPr sz="1100">
+                <a:solidFill>
+                  <a:srgbClr val="666666"/>
+                </a:solidFill>
+                <a:latin typeface="Calibri"/>
+              </a:rPr>
+              <a:t>Lakehouse = lake flexibility + warehouse reliability</a:t>
+            </a:r>
+          </a:p>
+        </p:txBody>
+      </p:sp>
+      <p:sp>
+        <p:nvSpPr>
+          <p:cNvPr id="12" name="TextBox 11"/>
+          <p:cNvSpPr txBox="1"/>
+          <p:nvPr/>
+        </p:nvSpPr>
+        <p:spPr>
+          <a:xfrm>
+            <a:off x="640080" y="6126480"/>
+            <a:ext cx="10972800" cy="548640"/>
+          </a:xfrm>
+          <a:prstGeom prst="rect">
+            <a:avLst/>
+          </a:prstGeom>
+          <a:noFill/>
+        </p:spPr>
+        <p:txBody>
+          <a:bodyPr wrap="square">
+            <a:spAutoFit/>
+          </a:bodyPr>
+          <a:lstStyle/>
+          <a:p>
+            <a:pPr algn="r" rtl="1"/>
+            <a:r>
+              <a:rPr sz="1400">
+                <a:solidFill>
+                  <a:srgbClr val="666666"/>
+                </a:solidFill>
+                <a:latin typeface="Arial"/>
+              </a:rPr>
+              <a:t>لا يوجد فائز دائم: ابدأ من نوع السؤال، والفريق، ومتطلبات الحوكمة.</a:t>
+            </a:r>
+          </a:p>
+          <a:p>
+            <a:pPr algn="r" rtl="0"/>
+            <a:r>
+              <a:t>There is no universal winner: start with the question, team, and governance needs.</a:t>
+            </a:r>
+          </a:p>
+        </p:txBody>
+      </p:sp>
+      <p:sp>
+        <p:nvSpPr>
+          <p:cNvPr id="13" name="TextBox 12"/>
+          <p:cNvSpPr txBox="1"/>
+          <p:nvPr/>
+        </p:nvSpPr>
+        <p:spPr>
+          <a:xfrm>
+            <a:off x="640080" y="6400800"/>
+            <a:ext cx="8686800" cy="320040"/>
+          </a:xfrm>
+          <a:prstGeom prst="rect">
+            <a:avLst/>
+          </a:prstGeom>
+          <a:noFill/>
+        </p:spPr>
+        <p:txBody>
+          <a:bodyPr wrap="square">
+            <a:spAutoFit/>
+          </a:bodyPr>
+          <a:lstStyle/>
+          <a:p>
+            <a:pPr algn="r" rtl="1"/>
+            <a:r>
+              <a:rPr sz="1000" b="0">
+                <a:solidFill>
+                  <a:srgbClr val="666666"/>
+                </a:solidFill>
+                <a:latin typeface="Arial"/>
+              </a:rPr>
+              <a:t>Module 02 — Data &amp; AI Engineering Track  |  الوحدة الثانية</a:t>
+            </a:r>
+          </a:p>
+        </p:txBody>
+      </p:sp>
+      <p:sp>
+        <p:nvSpPr>
+          <p:cNvPr id="14" name="TextBox 13"/>
+          <p:cNvSpPr txBox="1"/>
+          <p:nvPr/>
+        </p:nvSpPr>
+        <p:spPr>
+          <a:xfrm>
+            <a:off x="9601200" y="6400800"/>
+            <a:ext cx="1920240" cy="320040"/>
+          </a:xfrm>
+          <a:prstGeom prst="rect">
+            <a:avLst/>
+          </a:prstGeom>
+          <a:noFill/>
+        </p:spPr>
+        <p:txBody>
+          <a:bodyPr wrap="square">
+            <a:spAutoFit/>
+          </a:bodyPr>
+          <a:lstStyle/>
+          <a:p>
+            <a:pPr algn="l" rtl="0"/>
+            <a:r>
+              <a:rPr sz="1000" b="0">
+                <a:solidFill>
+                  <a:srgbClr val="666666"/>
+                </a:solidFill>
+                <a:latin typeface="Calibri"/>
+              </a:rPr>
+              <a:t>V07  •  4/15</a:t>
+            </a:r>
+          </a:p>
+        </p:txBody>
+      </p:sp>
+    </p:spTree>
+  </p:cSld>
+  <p:clrMapOvr>
+    <a:masterClrMapping/>
+  </p:clrMapOvr>
+</p:sld>
+</file>
+
+<file path=ppt/slides/slide5.xml><?xml version="1.0" encoding="utf-8"?>
+<p:sld xmlns:a="http://schemas.openxmlformats.org/drawingml/2006/main" xmlns:r="http://schemas.openxmlformats.org/officeDocument/2006/relationships" xmlns:p="http://schemas.openxmlformats.org/presentationml/2006/main">
+  <p:cSld>
+    <p:bg>
+      <p:bgPr>
+        <a:solidFill>
+          <a:srgbClr val="FFFFFF"/>
+        </a:solidFill>
+        <a:effectLst/>
+      </p:bgPr>
+    </p:bg>
+    <p:spTree>
+      <p:nvGrpSpPr>
+        <p:cNvPr id="1" name=""/>
+        <p:cNvGrpSpPr/>
+        <p:nvPr/>
+      </p:nvGrpSpPr>
+      <p:grpSpPr>
+        <a:xfrm>
+          <a:off x="0" y="0"/>
+          <a:ext cx="0" cy="0"/>
+          <a:chOff x="0" y="0"/>
+          <a:chExt cx="0" cy="0"/>
+        </a:xfrm>
+      </p:grpSpPr>
+      <p:sp>
+        <p:nvSpPr>
+          <p:cNvPr id="2" name="Rectangle 1"/>
+          <p:cNvSpPr/>
+          <p:nvPr/>
+        </p:nvSpPr>
+        <p:spPr>
+          <a:xfrm>
+            <a:off x="0" y="0"/>
+            <a:ext cx="12191695" cy="1005840"/>
+          </a:xfrm>
+          <a:prstGeom prst="rect">
+            <a:avLst/>
+          </a:prstGeom>
+          <a:solidFill>
+            <a:srgbClr val="FFFFFF"/>
+          </a:solidFill>
+          <a:ln w="25400">
+            <a:solidFill>
+              <a:srgbClr val="1F4E79"/>
+            </a:solidFill>
+          </a:ln>
+          <a:effectLst/>
+        </p:spPr>
+        <p:style>
+          <a:lnRef idx="1">
+            <a:schemeClr val="accent1"/>
+          </a:lnRef>
+          <a:fillRef idx="3">
+            <a:schemeClr val="accent1"/>
+          </a:fillRef>
+          <a:effectRef idx="2">
+            <a:schemeClr val="accent1"/>
+          </a:effectRef>
+          <a:fontRef idx="minor">
+            <a:schemeClr val="lt1"/>
+          </a:fontRef>
+        </p:style>
+        <p:txBody>
+          <a:bodyPr rtlCol="0" anchor="ctr"/>
+          <a:lstStyle/>
+          <a:p>
+            <a:pPr algn="ctr"/>
+            <a:endParaRPr/>
+          </a:p>
+        </p:txBody>
+      </p:sp>
+      <p:sp>
+        <p:nvSpPr>
+          <p:cNvPr id="3" name="TextBox 2"/>
+          <p:cNvSpPr txBox="1"/>
+          <p:nvPr/>
+        </p:nvSpPr>
+        <p:spPr>
+          <a:xfrm>
+            <a:off x="640080" y="182880"/>
+            <a:ext cx="10972800" cy="640080"/>
+          </a:xfrm>
+          <a:prstGeom prst="rect">
+            <a:avLst/>
+          </a:prstGeom>
+          <a:noFill/>
+        </p:spPr>
+        <p:txBody>
+          <a:bodyPr wrap="square">
+            <a:spAutoFit/>
+          </a:bodyPr>
+          <a:lstStyle/>
+          <a:p>
+            <a:pPr algn="r" rtl="1"/>
+            <a:r>
+              <a:rPr sz="3200" b="1">
+                <a:solidFill>
+                  <a:srgbClr val="1F3B5C"/>
+                </a:solidFill>
+                <a:latin typeface="Arial"/>
+              </a:rPr>
+              <a:t>معمارية Lakehouse / Lakehouse</a:t>
+            </a:r>
+          </a:p>
+        </p:txBody>
+      </p:sp>
+      <p:sp>
+        <p:nvSpPr>
+          <p:cNvPr id="4" name="TextBox 3"/>
+          <p:cNvSpPr txBox="1"/>
+          <p:nvPr/>
+        </p:nvSpPr>
+        <p:spPr>
+          <a:xfrm>
+            <a:off x="640080" y="1280160"/>
+            <a:ext cx="10972800" cy="5212080"/>
+          </a:xfrm>
+          <a:prstGeom prst="rect">
+            <a:avLst/>
+          </a:prstGeom>
+          <a:noFill/>
+        </p:spPr>
+        <p:txBody>
+          <a:bodyPr wrap="square">
+            <a:spAutoFit/>
+          </a:bodyPr>
+          <a:lstStyle/>
+          <a:p>
+            <a:pPr algn="r" rtl="1">
+              <a:spcBef>
+                <a:spcPts val="200"/>
+              </a:spcBef>
+              <a:spcAft>
+                <a:spcPts val="1000"/>
+              </a:spcAft>
+            </a:pPr>
+            <a:r>
+              <a:rPr sz="1900">
+                <a:solidFill>
+                  <a:srgbClr val="333333"/>
+                </a:solidFill>
+                <a:latin typeface="Arial"/>
+              </a:rPr>
+              <a:t>• تجمع مرونة البحيرة وأداء المستودع في منصة واحدة (Delta Lake, Iceberg, Hudi).</a:t>
+            </a:r>
+          </a:p>
+          <a:p>
+            <a:pPr algn="l" rtl="0">
+              <a:spcBef>
+                <a:spcPts val="200"/>
+              </a:spcBef>
+              <a:spcAft>
+                <a:spcPts val="1000"/>
+              </a:spcAft>
+            </a:pPr>
+            <a:r>
+              <a:rPr sz="1600">
+                <a:solidFill>
+                  <a:srgbClr val="666666"/>
+                </a:solidFill>
+                <a:latin typeface="Calibri"/>
+              </a:rPr>
+              <a:t>• Combines lake flexibility with warehouse performance (Delta Lake, Iceberg, Hudi).</a:t>
+            </a:r>
+          </a:p>
+          <a:p>
+            <a:pPr algn="r" rtl="1">
+              <a:spcBef>
+                <a:spcPts val="200"/>
+              </a:spcBef>
+              <a:spcAft>
+                <a:spcPts val="1000"/>
+              </a:spcAft>
+            </a:pPr>
+            <a:r>
+              <a:rPr sz="1900">
+                <a:solidFill>
+                  <a:srgbClr val="333333"/>
+                </a:solidFill>
+                <a:latin typeface="Arial"/>
+              </a:rPr>
+              <a:t>• طبقات معاملات ACID وفهرسة وحوكمة فوق تخزين الكائنات.</a:t>
+            </a:r>
+          </a:p>
+          <a:p>
+            <a:pPr algn="l" rtl="0">
+              <a:spcBef>
+                <a:spcPts val="200"/>
+              </a:spcBef>
+              <a:spcAft>
+                <a:spcPts val="1000"/>
+              </a:spcAft>
+            </a:pPr>
+            <a:r>
+              <a:rPr sz="1600">
+                <a:solidFill>
+                  <a:srgbClr val="666666"/>
+                </a:solidFill>
+                <a:latin typeface="Calibri"/>
+              </a:rPr>
+              <a:t>• ACID transactions, indexing, and governance layers over object storage.</a:t>
+            </a:r>
+          </a:p>
+        </p:txBody>
+      </p:sp>
+      <p:sp>
+        <p:nvSpPr>
+          <p:cNvPr id="5" name="TextBox 4"/>
+          <p:cNvSpPr txBox="1"/>
+          <p:nvPr/>
+        </p:nvSpPr>
+        <p:spPr>
+          <a:xfrm>
+            <a:off x="640080" y="6400800"/>
+            <a:ext cx="8686800" cy="320040"/>
+          </a:xfrm>
+          <a:prstGeom prst="rect">
+            <a:avLst/>
+          </a:prstGeom>
+          <a:noFill/>
+        </p:spPr>
+        <p:txBody>
+          <a:bodyPr wrap="square">
+            <a:spAutoFit/>
+          </a:bodyPr>
+          <a:lstStyle/>
+          <a:p>
+            <a:pPr algn="r" rtl="1"/>
+            <a:r>
+              <a:rPr sz="1000" b="0">
+                <a:solidFill>
+                  <a:srgbClr val="666666"/>
+                </a:solidFill>
+                <a:latin typeface="Arial"/>
+              </a:rPr>
+              <a:t>Module 02 — Data &amp; AI Engineering Track  |  الوحدة الثانية</a:t>
+            </a:r>
+          </a:p>
+        </p:txBody>
+      </p:sp>
+      <p:sp>
+        <p:nvSpPr>
+          <p:cNvPr id="6" name="TextBox 5"/>
+          <p:cNvSpPr txBox="1"/>
+          <p:nvPr/>
+        </p:nvSpPr>
+        <p:spPr>
+          <a:xfrm>
+            <a:off x="9601200" y="6400800"/>
+            <a:ext cx="1920240" cy="320040"/>
+          </a:xfrm>
+          <a:prstGeom prst="rect">
+            <a:avLst/>
+          </a:prstGeom>
+          <a:noFill/>
+        </p:spPr>
+        <p:txBody>
+          <a:bodyPr wrap="square">
+            <a:spAutoFit/>
+          </a:bodyPr>
+          <a:lstStyle/>
+          <a:p>
+            <a:pPr algn="l" rtl="0"/>
+            <a:r>
+              <a:rPr sz="1000" b="0">
+                <a:solidFill>
+                  <a:srgbClr val="666666"/>
+                </a:solidFill>
+                <a:latin typeface="Calibri"/>
+              </a:rPr>
+              <a:t>V07  •  5/15</a:t>
+            </a:r>
+          </a:p>
+        </p:txBody>
+      </p:sp>
+    </p:spTree>
+  </p:cSld>
+  <p:clrMapOvr>
+    <a:masterClrMapping/>
+  </p:clrMapOvr>
+</p:sld>
+</file>
+
+<file path=ppt/slides/slide6.xml><?xml version="1.0" encoding="utf-8"?>
+<p:sld xmlns:a="http://schemas.openxmlformats.org/drawingml/2006/main" xmlns:r="http://schemas.openxmlformats.org/officeDocument/2006/relationships" xmlns:p="http://schemas.openxmlformats.org/presentationml/2006/main">
+  <p:cSld>
+    <p:bg>
+      <p:bgPr>
+        <a:solidFill>
+          <a:srgbClr val="FFFFFF"/>
+        </a:solidFill>
+        <a:effectLst/>
+      </p:bgPr>
+    </p:bg>
+    <p:spTree>
+      <p:nvGrpSpPr>
+        <p:cNvPr id="1" name=""/>
+        <p:cNvGrpSpPr/>
+        <p:nvPr/>
+      </p:nvGrpSpPr>
+      <p:grpSpPr>
+        <a:xfrm>
+          <a:off x="0" y="0"/>
+          <a:ext cx="0" cy="0"/>
+          <a:chOff x="0" y="0"/>
+          <a:chExt cx="0" cy="0"/>
+        </a:xfrm>
+      </p:grpSpPr>
+      <p:sp>
+        <p:nvSpPr>
+          <p:cNvPr id="2" name="TextBox 1"/>
+          <p:cNvSpPr txBox="1"/>
+          <p:nvPr/>
+        </p:nvSpPr>
+        <p:spPr>
+          <a:xfrm>
+            <a:off x="640080" y="137160"/>
+            <a:ext cx="10972800" cy="640080"/>
+          </a:xfrm>
+          <a:prstGeom prst="rect">
+            <a:avLst/>
+          </a:prstGeom>
+          <a:noFill/>
+        </p:spPr>
+        <p:txBody>
+          <a:bodyPr wrap="none">
+            <a:spAutoFit/>
+          </a:bodyPr>
+          <a:lstStyle/>
+          <a:p>
+            <a:pPr algn="r" rtl="1"/>
+            <a:r>
+              <a:rPr sz="3000" b="1">
+                <a:solidFill>
+                  <a:srgbClr val="1F3B5C"/>
+                </a:solidFill>
+                <a:latin typeface="Arial"/>
+              </a:rPr>
+              <a:t>المعمارية المتدرِّجة Medallion / Medallion Layers</a:t>
+            </a:r>
+          </a:p>
+        </p:txBody>
+      </p:sp>
+      <p:sp>
+        <p:nvSpPr>
+          <p:cNvPr id="3" name="Rounded Rectangle 2"/>
+          <p:cNvSpPr/>
+          <p:nvPr/>
+        </p:nvSpPr>
+        <p:spPr>
+          <a:xfrm>
+            <a:off x="2286000" y="1188720"/>
+            <a:ext cx="7589520" cy="1234440"/>
+          </a:xfrm>
+          <a:prstGeom prst="roundRect">
+            <a:avLst/>
+          </a:prstGeom>
+          <a:solidFill>
+            <a:srgbClr val="FDE9D9"/>
+          </a:solidFill>
+          <a:ln w="12700">
+            <a:solidFill>
+              <a:srgbClr val="1F4E79"/>
+            </a:solidFill>
+          </a:ln>
+          <a:effectLst/>
+        </p:spPr>
+        <p:style>
+          <a:lnRef idx="1">
+            <a:schemeClr val="accent1"/>
+          </a:lnRef>
+          <a:fillRef idx="3">
+            <a:schemeClr val="accent1"/>
+          </a:fillRef>
+          <a:effectRef idx="2">
+            <a:schemeClr val="accent1"/>
+          </a:effectRef>
+          <a:fontRef idx="minor">
+            <a:schemeClr val="lt1"/>
+          </a:fontRef>
+        </p:style>
+        <p:txBody>
+          <a:bodyPr wrap="square" rtlCol="0" anchor="ctr"/>
+          <a:lstStyle/>
+          <a:p>
+            <a:pPr algn="ctr" rtl="1"/>
+            <a:r>
+              <a:rPr sz="1800" b="1">
+                <a:solidFill>
+                  <a:srgbClr val="333333"/>
+                </a:solidFill>
+                <a:latin typeface="Arial"/>
+              </a:rPr>
+              <a:t>Bronze — بيانات خام غير قابلة للتغيير</a:t>
+            </a:r>
+          </a:p>
+          <a:p>
+            <a:pPr algn="ctr" rtl="0"/>
+            <a:r>
+              <a:rPr sz="1300">
+                <a:solidFill>
+                  <a:srgbClr val="666666"/>
+                </a:solidFill>
+                <a:latin typeface="Calibri"/>
+              </a:rPr>
+              <a:t>Raw immutable data</a:t>
+            </a:r>
+          </a:p>
+        </p:txBody>
+      </p:sp>
+      <p:sp>
+        <p:nvSpPr>
+          <p:cNvPr id="4" name="Rounded Rectangle 3"/>
+          <p:cNvSpPr/>
+          <p:nvPr/>
+        </p:nvSpPr>
+        <p:spPr>
+          <a:xfrm>
+            <a:off x="2286000" y="2697480"/>
+            <a:ext cx="7589520" cy="1234440"/>
+          </a:xfrm>
+          <a:prstGeom prst="roundRect">
+            <a:avLst/>
+          </a:prstGeom>
+          <a:solidFill>
+            <a:srgbClr val="EDEDED"/>
+          </a:solidFill>
+          <a:ln w="12700">
+            <a:solidFill>
+              <a:srgbClr val="1F4E79"/>
+            </a:solidFill>
+          </a:ln>
+          <a:effectLst/>
+        </p:spPr>
+        <p:style>
+          <a:lnRef idx="1">
+            <a:schemeClr val="accent1"/>
+          </a:lnRef>
+          <a:fillRef idx="3">
+            <a:schemeClr val="accent1"/>
+          </a:fillRef>
+          <a:effectRef idx="2">
+            <a:schemeClr val="accent1"/>
+          </a:effectRef>
+          <a:fontRef idx="minor">
+            <a:schemeClr val="lt1"/>
+          </a:fontRef>
+        </p:style>
+        <p:txBody>
+          <a:bodyPr wrap="square" rtlCol="0" anchor="ctr"/>
+          <a:lstStyle/>
+          <a:p>
+            <a:pPr algn="ctr" rtl="1"/>
+            <a:r>
+              <a:rPr sz="1800" b="1">
+                <a:solidFill>
+                  <a:srgbClr val="333333"/>
+                </a:solidFill>
+                <a:latin typeface="Arial"/>
+              </a:rPr>
+              <a:t>Silver — بيانات منقَّاة ومنظَّمة</a:t>
+            </a:r>
+          </a:p>
+          <a:p>
+            <a:pPr algn="ctr" rtl="0"/>
+            <a:r>
+              <a:rPr sz="1300">
+                <a:solidFill>
+                  <a:srgbClr val="666666"/>
+                </a:solidFill>
+                <a:latin typeface="Calibri"/>
+              </a:rPr>
+              <a:t>Cleansed &amp; structured data</a:t>
+            </a:r>
+          </a:p>
+        </p:txBody>
+      </p:sp>
+      <p:sp>
+        <p:nvSpPr>
+          <p:cNvPr id="5" name="Rounded Rectangle 4"/>
+          <p:cNvSpPr/>
+          <p:nvPr/>
+        </p:nvSpPr>
+        <p:spPr>
+          <a:xfrm>
+            <a:off x="2286000" y="4206240"/>
+            <a:ext cx="7589520" cy="1234440"/>
+          </a:xfrm>
+          <a:prstGeom prst="roundRect">
+            <a:avLst/>
+          </a:prstGeom>
+          <a:solidFill>
+            <a:srgbClr val="E2EFDA"/>
+          </a:solidFill>
+          <a:ln w="12700">
+            <a:solidFill>
+              <a:srgbClr val="1F4E79"/>
+            </a:solidFill>
+          </a:ln>
+          <a:effectLst/>
+        </p:spPr>
+        <p:style>
+          <a:lnRef idx="1">
+            <a:schemeClr val="accent1"/>
+          </a:lnRef>
+          <a:fillRef idx="3">
+            <a:schemeClr val="accent1"/>
+          </a:fillRef>
+          <a:effectRef idx="2">
+            <a:schemeClr val="accent1"/>
+          </a:effectRef>
+          <a:fontRef idx="minor">
+            <a:schemeClr val="lt1"/>
+          </a:fontRef>
+        </p:style>
+        <p:txBody>
+          <a:bodyPr wrap="square" rtlCol="0" anchor="ctr"/>
+          <a:lstStyle/>
+          <a:p>
+            <a:pPr algn="ctr" rtl="1"/>
+            <a:r>
+              <a:rPr sz="1800" b="1">
+                <a:solidFill>
+                  <a:srgbClr val="333333"/>
+                </a:solidFill>
+                <a:latin typeface="Arial"/>
+              </a:rPr>
+              <a:t>Gold — تجميعات جاهزة للتحليل</a:t>
+            </a:r>
+          </a:p>
+          <a:p>
+            <a:pPr algn="ctr" rtl="0"/>
+            <a:r>
+              <a:rPr sz="1300">
+                <a:solidFill>
+                  <a:srgbClr val="666666"/>
+                </a:solidFill>
+                <a:latin typeface="Calibri"/>
+              </a:rPr>
+              <a:t>Analytics-ready aggregates</a:t>
+            </a:r>
+          </a:p>
+        </p:txBody>
+      </p:sp>
+      <p:sp>
+        <p:nvSpPr>
+          <p:cNvPr id="6" name="Left Arrow 5"/>
+          <p:cNvSpPr/>
+          <p:nvPr/>
+        </p:nvSpPr>
+        <p:spPr>
+          <a:xfrm>
+            <a:off x="5897880" y="2450592"/>
+            <a:ext cx="365760" cy="274320"/>
+          </a:xfrm>
+          <a:prstGeom prst="leftArrow">
+            <a:avLst/>
+          </a:prstGeom>
+          <a:solidFill>
+            <a:srgbClr val="1F4E79"/>
+          </a:solidFill>
+          <a:ln>
+            <a:noFill/>
+          </a:ln>
+          <a:effectLst/>
+        </p:spPr>
+        <p:style>
+          <a:lnRef idx="1">
+            <a:schemeClr val="accent1"/>
+          </a:lnRef>
+          <a:fillRef idx="3">
+            <a:schemeClr val="accent1"/>
+          </a:fillRef>
+          <a:effectRef idx="2">
+            <a:schemeClr val="accent1"/>
+          </a:effectRef>
+          <a:fontRef idx="minor">
+            <a:schemeClr val="lt1"/>
+          </a:fontRef>
+        </p:style>
+        <p:txBody>
+          <a:bodyPr rtlCol="0" anchor="ctr"/>
+          <a:lstStyle/>
+          <a:p>
+            <a:pPr algn="ctr"/>
+            <a:endParaRPr/>
+          </a:p>
+        </p:txBody>
+      </p:sp>
+      <p:sp>
+        <p:nvSpPr>
+          <p:cNvPr id="7" name="Left Arrow 6"/>
+          <p:cNvSpPr/>
+          <p:nvPr/>
+        </p:nvSpPr>
+        <p:spPr>
+          <a:xfrm>
+            <a:off x="5897880" y="3959352"/>
+            <a:ext cx="365760" cy="274320"/>
+          </a:xfrm>
+          <a:prstGeom prst="leftArrow">
+            <a:avLst/>
+          </a:prstGeom>
+          <a:solidFill>
+            <a:srgbClr val="1F4E79"/>
+          </a:solidFill>
+          <a:ln>
+            <a:noFill/>
+          </a:ln>
+          <a:effectLst/>
+        </p:spPr>
+        <p:style>
+          <a:lnRef idx="1">
+            <a:schemeClr val="accent1"/>
+          </a:lnRef>
+          <a:fillRef idx="3">
+            <a:schemeClr val="accent1"/>
+          </a:fillRef>
+          <a:effectRef idx="2">
+            <a:schemeClr val="accent1"/>
+          </a:effectRef>
+          <a:fontRef idx="minor">
+            <a:schemeClr val="lt1"/>
+          </a:fontRef>
+        </p:style>
+        <p:txBody>
+          <a:bodyPr rtlCol="0" anchor="ctr"/>
+          <a:lstStyle/>
+          <a:p>
+            <a:pPr algn="ctr"/>
+            <a:endParaRPr/>
+          </a:p>
+        </p:txBody>
+      </p:sp>
+      <p:sp>
+        <p:nvSpPr>
+          <p:cNvPr id="8" name="TextBox 7"/>
+          <p:cNvSpPr txBox="1"/>
+          <p:nvPr/>
+        </p:nvSpPr>
+        <p:spPr>
+          <a:xfrm>
+            <a:off x="640080" y="6126480"/>
+            <a:ext cx="10972800" cy="548640"/>
+          </a:xfrm>
+          <a:prstGeom prst="rect">
+            <a:avLst/>
+          </a:prstGeom>
+          <a:noFill/>
+        </p:spPr>
+        <p:txBody>
+          <a:bodyPr wrap="square">
+            <a:spAutoFit/>
+          </a:bodyPr>
+          <a:lstStyle/>
+          <a:p>
+            <a:pPr algn="r" rtl="1"/>
+            <a:r>
+              <a:rPr sz="1400">
+                <a:solidFill>
+                  <a:srgbClr val="666666"/>
+                </a:solidFill>
+                <a:latin typeface="Arial"/>
+              </a:rPr>
+              <a:t>الحوكمة عبر تحسين الجودة بين الطبقات — إدارة مركزية.</a:t>
+            </a:r>
+          </a:p>
+          <a:p>
+            <a:pPr algn="r" rtl="0"/>
+            <a:r>
+              <a:t>Governance via quality improvement between layers — central ownership.</a:t>
+            </a:r>
+          </a:p>
+        </p:txBody>
+      </p:sp>
+      <p:sp>
+        <p:nvSpPr>
+          <p:cNvPr id="9" name="TextBox 8"/>
+          <p:cNvSpPr txBox="1"/>
+          <p:nvPr/>
+        </p:nvSpPr>
+        <p:spPr>
+          <a:xfrm>
+            <a:off x="640080" y="6400800"/>
+            <a:ext cx="8686800" cy="320040"/>
+          </a:xfrm>
+          <a:prstGeom prst="rect">
+            <a:avLst/>
+          </a:prstGeom>
+          <a:noFill/>
+        </p:spPr>
+        <p:txBody>
+          <a:bodyPr wrap="square">
+            <a:spAutoFit/>
+          </a:bodyPr>
+          <a:lstStyle/>
+          <a:p>
+            <a:pPr algn="r" rtl="1"/>
+            <a:r>
+              <a:rPr sz="1000" b="0">
+                <a:solidFill>
+                  <a:srgbClr val="666666"/>
+                </a:solidFill>
+                <a:latin typeface="Arial"/>
+              </a:rPr>
+              <a:t>Module 02 — Data &amp; AI Engineering Track  |  الوحدة الثانية</a:t>
+            </a:r>
+          </a:p>
+        </p:txBody>
+      </p:sp>
+      <p:sp>
+        <p:nvSpPr>
+          <p:cNvPr id="10" name="TextBox 9"/>
+          <p:cNvSpPr txBox="1"/>
+          <p:nvPr/>
+        </p:nvSpPr>
+        <p:spPr>
+          <a:xfrm>
+            <a:off x="9601200" y="6400800"/>
+            <a:ext cx="1920240" cy="320040"/>
+          </a:xfrm>
+          <a:prstGeom prst="rect">
+            <a:avLst/>
+          </a:prstGeom>
+          <a:noFill/>
+        </p:spPr>
+        <p:txBody>
+          <a:bodyPr wrap="square">
+            <a:spAutoFit/>
+          </a:bodyPr>
+          <a:lstStyle/>
+          <a:p>
+            <a:pPr algn="l" rtl="0"/>
+            <a:r>
+              <a:rPr sz="1000" b="0">
+                <a:solidFill>
+                  <a:srgbClr val="666666"/>
+                </a:solidFill>
+                <a:latin typeface="Calibri"/>
+              </a:rPr>
+              <a:t>V07  •  6/15</a:t>
+            </a:r>
+          </a:p>
+        </p:txBody>
+      </p:sp>
+    </p:spTree>
+  </p:cSld>
+  <p:clrMapOvr>
+    <a:masterClrMapping/>
+  </p:clrMapOvr>
+</p:sld>
+</file>
+
+<file path=ppt/slides/slide7.xml><?xml version="1.0" encoding="utf-8"?>
+<p:sld xmlns:a="http://schemas.openxmlformats.org/drawingml/2006/main" xmlns:r="http://schemas.openxmlformats.org/officeDocument/2006/relationships" xmlns:p="http://schemas.openxmlformats.org/presentationml/2006/main">
+  <p:cSld>
+    <p:bg>
+      <p:bgPr>
+        <a:solidFill>
+          <a:srgbClr val="FFFFFF"/>
+        </a:solidFill>
+        <a:effectLst/>
+      </p:bgPr>
+    </p:bg>
+    <p:spTree>
+      <p:nvGrpSpPr>
+        <p:cNvPr id="1" name=""/>
+        <p:cNvGrpSpPr/>
+        <p:nvPr/>
+      </p:nvGrpSpPr>
+      <p:grpSpPr>
+        <a:xfrm>
+          <a:off x="0" y="0"/>
+          <a:ext cx="0" cy="0"/>
+          <a:chOff x="0" y="0"/>
+          <a:chExt cx="0" cy="0"/>
+        </a:xfrm>
+      </p:grpSpPr>
+      <p:sp>
+        <p:nvSpPr>
+          <p:cNvPr id="2" name="Rectangle 1"/>
+          <p:cNvSpPr/>
+          <p:nvPr/>
+        </p:nvSpPr>
+        <p:spPr>
+          <a:xfrm>
+            <a:off x="0" y="0"/>
+            <a:ext cx="12191695" cy="1005840"/>
+          </a:xfrm>
+          <a:prstGeom prst="rect">
+            <a:avLst/>
+          </a:prstGeom>
+          <a:solidFill>
+            <a:srgbClr val="FFFFFF"/>
+          </a:solidFill>
+          <a:ln w="25400">
+            <a:solidFill>
+              <a:srgbClr val="1F4E79"/>
+            </a:solidFill>
+          </a:ln>
+          <a:effectLst/>
+        </p:spPr>
+        <p:style>
+          <a:lnRef idx="1">
+            <a:schemeClr val="accent1"/>
+          </a:lnRef>
+          <a:fillRef idx="3">
+            <a:schemeClr val="accent1"/>
+          </a:fillRef>
+          <a:effectRef idx="2">
+            <a:schemeClr val="accent1"/>
+          </a:effectRef>
+          <a:fontRef idx="minor">
+            <a:schemeClr val="lt1"/>
+          </a:fontRef>
+        </p:style>
+        <p:txBody>
+          <a:bodyPr rtlCol="0" anchor="ctr"/>
+          <a:lstStyle/>
+          <a:p>
+            <a:pPr algn="ctr"/>
+            <a:endParaRPr/>
+          </a:p>
+        </p:txBody>
+      </p:sp>
+      <p:sp>
+        <p:nvSpPr>
+          <p:cNvPr id="3" name="TextBox 2"/>
+          <p:cNvSpPr txBox="1"/>
+          <p:nvPr/>
+        </p:nvSpPr>
+        <p:spPr>
+          <a:xfrm>
+            <a:off x="640080" y="182880"/>
+            <a:ext cx="10972800" cy="640080"/>
+          </a:xfrm>
+          <a:prstGeom prst="rect">
+            <a:avLst/>
+          </a:prstGeom>
+          <a:noFill/>
+        </p:spPr>
+        <p:txBody>
+          <a:bodyPr wrap="square">
+            <a:spAutoFit/>
+          </a:bodyPr>
+          <a:lstStyle/>
+          <a:p>
+            <a:pPr algn="r" rtl="1"/>
+            <a:r>
+              <a:rPr sz="3200" b="1">
+                <a:solidFill>
+                  <a:srgbClr val="1F3B5C"/>
+                </a:solidFill>
+                <a:latin typeface="Arial"/>
+              </a:rPr>
+              <a:t>منتجات البيانات وعقودها / Data Products &amp; Contracts</a:t>
+            </a:r>
+          </a:p>
+        </p:txBody>
+      </p:sp>
+      <p:sp>
+        <p:nvSpPr>
+          <p:cNvPr id="4" name="TextBox 3"/>
+          <p:cNvSpPr txBox="1"/>
+          <p:nvPr/>
+        </p:nvSpPr>
+        <p:spPr>
+          <a:xfrm>
+            <a:off x="640080" y="1280160"/>
+            <a:ext cx="10972800" cy="5212080"/>
+          </a:xfrm>
+          <a:prstGeom prst="rect">
+            <a:avLst/>
+          </a:prstGeom>
+          <a:noFill/>
+        </p:spPr>
+        <p:txBody>
+          <a:bodyPr wrap="square">
+            <a:spAutoFit/>
+          </a:bodyPr>
+          <a:lstStyle/>
+          <a:p>
+            <a:pPr algn="r" rtl="1">
+              <a:spcBef>
+                <a:spcPts val="200"/>
+              </a:spcBef>
+              <a:spcAft>
+                <a:spcPts val="1000"/>
+              </a:spcAft>
+            </a:pPr>
+            <a:r>
+              <a:rPr sz="1900">
+                <a:solidFill>
+                  <a:srgbClr val="333333"/>
+                </a:solidFill>
+                <a:latin typeface="Arial"/>
+              </a:rPr>
+              <a:t>• منتج البيانات: مجموعة بيانات موثوقة موثّقة قابلة للاكتشاف تُدار كمنتج حقيقي.</a:t>
+            </a:r>
+          </a:p>
+          <a:p>
+            <a:pPr algn="l" rtl="0">
+              <a:spcBef>
+                <a:spcPts val="200"/>
+              </a:spcBef>
+              <a:spcAft>
+                <a:spcPts val="1000"/>
+              </a:spcAft>
+            </a:pPr>
+            <a:r>
+              <a:rPr sz="1600">
+                <a:solidFill>
+                  <a:srgbClr val="666666"/>
+                </a:solidFill>
+                <a:latin typeface="Calibri"/>
+              </a:rPr>
+              <a:t>• Data product: a trusted, documented, discoverable dataset managed like a product.</a:t>
+            </a:r>
+          </a:p>
+          <a:p>
+            <a:pPr algn="r" rtl="1">
+              <a:spcBef>
+                <a:spcPts val="200"/>
+              </a:spcBef>
+              <a:spcAft>
+                <a:spcPts val="1000"/>
+              </a:spcAft>
+            </a:pPr>
+            <a:r>
+              <a:rPr sz="1900">
+                <a:solidFill>
+                  <a:srgbClr val="333333"/>
+                </a:solidFill>
+                <a:latin typeface="Arial"/>
+              </a:rPr>
+              <a:t>• عقد البيانات: المخطط والأمان ومستوى الخدمة SLA — وحدة التسليم الحديثة.</a:t>
+            </a:r>
+          </a:p>
+          <a:p>
+            <a:pPr algn="l" rtl="0">
+              <a:spcBef>
+                <a:spcPts val="200"/>
+              </a:spcBef>
+              <a:spcAft>
+                <a:spcPts val="1000"/>
+              </a:spcAft>
+            </a:pPr>
+            <a:r>
+              <a:rPr sz="1600">
+                <a:solidFill>
+                  <a:srgbClr val="666666"/>
+                </a:solidFill>
+                <a:latin typeface="Calibri"/>
+              </a:rPr>
+              <a:t>• Data contract: schema + security + SLA — the modern delivery unit.</a:t>
+            </a:r>
+          </a:p>
+        </p:txBody>
+      </p:sp>
+      <p:sp>
+        <p:nvSpPr>
+          <p:cNvPr id="5" name="TextBox 4"/>
+          <p:cNvSpPr txBox="1"/>
+          <p:nvPr/>
+        </p:nvSpPr>
+        <p:spPr>
+          <a:xfrm>
+            <a:off x="640080" y="6400800"/>
+            <a:ext cx="8686800" cy="320040"/>
+          </a:xfrm>
+          <a:prstGeom prst="rect">
+            <a:avLst/>
+          </a:prstGeom>
+          <a:noFill/>
+        </p:spPr>
+        <p:txBody>
+          <a:bodyPr wrap="square">
+            <a:spAutoFit/>
+          </a:bodyPr>
+          <a:lstStyle/>
+          <a:p>
+            <a:pPr algn="r" rtl="1"/>
+            <a:r>
+              <a:rPr sz="1000" b="0">
+                <a:solidFill>
+                  <a:srgbClr val="666666"/>
+                </a:solidFill>
+                <a:latin typeface="Arial"/>
+              </a:rPr>
+              <a:t>Module 02 — Data &amp; AI Engineering Track  |  الوحدة الثانية</a:t>
+            </a:r>
+          </a:p>
+        </p:txBody>
+      </p:sp>
+      <p:sp>
+        <p:nvSpPr>
+          <p:cNvPr id="6" name="TextBox 5"/>
+          <p:cNvSpPr txBox="1"/>
+          <p:nvPr/>
+        </p:nvSpPr>
+        <p:spPr>
+          <a:xfrm>
+            <a:off x="9601200" y="6400800"/>
+            <a:ext cx="1920240" cy="320040"/>
+          </a:xfrm>
+          <a:prstGeom prst="rect">
+            <a:avLst/>
+          </a:prstGeom>
+          <a:noFill/>
+        </p:spPr>
+        <p:txBody>
+          <a:bodyPr wrap="square">
+            <a:spAutoFit/>
+          </a:bodyPr>
+          <a:lstStyle/>
+          <a:p>
+            <a:pPr algn="l" rtl="0"/>
+            <a:r>
+              <a:rPr sz="1000" b="0">
+                <a:solidFill>
+                  <a:srgbClr val="666666"/>
+                </a:solidFill>
+                <a:latin typeface="Calibri"/>
+              </a:rPr>
+              <a:t>V07  •  7/15</a:t>
+            </a:r>
+          </a:p>
+        </p:txBody>
+      </p:sp>
+    </p:spTree>
+  </p:cSld>
+  <p:clrMapOvr>
+    <a:masterClrMapping/>
+  </p:clrMapOvr>
+</p:sld>
+</file>
+
+<file path=ppt/slides/slide8.xml><?xml version="1.0" encoding="utf-8"?>
+<p:sld xmlns:a="http://schemas.openxmlformats.org/drawingml/2006/main" xmlns:r="http://schemas.openxmlformats.org/officeDocument/2006/relationships" xmlns:p="http://schemas.openxmlformats.org/presentationml/2006/main">
+  <p:cSld>
+    <p:bg>
+      <p:bgPr>
+        <a:solidFill>
+          <a:srgbClr val="FFFFFF"/>
+        </a:solidFill>
+        <a:effectLst/>
+      </p:bgPr>
+    </p:bg>
+    <p:spTree>
+      <p:nvGrpSpPr>
+        <p:cNvPr id="1" name=""/>
+        <p:cNvGrpSpPr/>
+        <p:nvPr/>
+      </p:nvGrpSpPr>
+      <p:grpSpPr>
+        <a:xfrm>
+          <a:off x="0" y="0"/>
+          <a:ext cx="0" cy="0"/>
+          <a:chOff x="0" y="0"/>
+          <a:chExt cx="0" cy="0"/>
+        </a:xfrm>
+      </p:grpSpPr>
+      <p:sp>
+        <p:nvSpPr>
+          <p:cNvPr id="2" name="TextBox 1"/>
+          <p:cNvSpPr txBox="1"/>
+          <p:nvPr/>
+        </p:nvSpPr>
+        <p:spPr>
+          <a:xfrm>
+            <a:off x="640080" y="137160"/>
+            <a:ext cx="10972800" cy="640080"/>
+          </a:xfrm>
+          <a:prstGeom prst="rect">
+            <a:avLst/>
+          </a:prstGeom>
+          <a:noFill/>
+        </p:spPr>
+        <p:txBody>
+          <a:bodyPr wrap="none">
+            <a:spAutoFit/>
+          </a:bodyPr>
+          <a:lstStyle/>
+          <a:p>
+            <a:pPr algn="r" rtl="1"/>
+            <a:r>
+              <a:rPr sz="3000" b="1">
+                <a:solidFill>
+                  <a:srgbClr val="1F3B5C"/>
+                </a:solidFill>
+                <a:latin typeface="Arial"/>
+              </a:rPr>
+              <a:t>منتج البيانات وعقد البيانات / Data Product &amp; Contract</a:t>
+            </a:r>
+          </a:p>
+        </p:txBody>
+      </p:sp>
+      <p:sp>
+        <p:nvSpPr>
+          <p:cNvPr id="3" name="Rounded Rectangle 2"/>
+          <p:cNvSpPr/>
+          <p:nvPr/>
+        </p:nvSpPr>
+        <p:spPr>
+          <a:xfrm>
+            <a:off x="822960" y="1645920"/>
+            <a:ext cx="4206240" cy="3108960"/>
+          </a:xfrm>
+          <a:prstGeom prst="roundRect">
+            <a:avLst/>
+          </a:prstGeom>
+          <a:solidFill>
+            <a:srgbClr val="DCE6F1"/>
+          </a:solidFill>
+          <a:ln w="12700">
+            <a:solidFill>
+              <a:srgbClr val="1F4E79"/>
+            </a:solidFill>
+          </a:ln>
+          <a:effectLst/>
+        </p:spPr>
+        <p:style>
+          <a:lnRef idx="1">
+            <a:schemeClr val="accent1"/>
+          </a:lnRef>
+          <a:fillRef idx="3">
+            <a:schemeClr val="accent1"/>
+          </a:fillRef>
+          <a:effectRef idx="2">
+            <a:schemeClr val="accent1"/>
+          </a:effectRef>
+          <a:fontRef idx="minor">
+            <a:schemeClr val="lt1"/>
+          </a:fontRef>
+        </p:style>
+        <p:txBody>
+          <a:bodyPr wrap="square" rtlCol="0" anchor="ctr"/>
+          <a:lstStyle/>
+          <a:p>
+            <a:pPr algn="ctr" rtl="1"/>
+            <a:r>
+              <a:rPr sz="2000" b="1">
+                <a:solidFill>
+                  <a:srgbClr val="333333"/>
+                </a:solidFill>
+                <a:latin typeface="Arial"/>
+              </a:rPr>
+              <a:t>منتج البيانات</a:t>
+            </a:r>
+          </a:p>
+          <a:p>
+            <a:pPr algn="ctr" rtl="0"/>
+            <a:r>
+              <a:rPr sz="1400">
+                <a:solidFill>
+                  <a:srgbClr val="666666"/>
+                </a:solidFill>
+                <a:latin typeface="Calibri"/>
+              </a:rPr>
+              <a:t>Data Product — موثوق • موثّق • قابل للاكتشاف</a:t>
+            </a:r>
+          </a:p>
+        </p:txBody>
+      </p:sp>
+      <p:sp>
+        <p:nvSpPr>
+          <p:cNvPr id="4" name="Rounded Rectangle 3"/>
+          <p:cNvSpPr/>
+          <p:nvPr/>
+        </p:nvSpPr>
+        <p:spPr>
+          <a:xfrm>
+            <a:off x="7223760" y="1645920"/>
+            <a:ext cx="4206240" cy="914400"/>
+          </a:xfrm>
+          <a:prstGeom prst="roundRect">
+            <a:avLst/>
+          </a:prstGeom>
+          <a:solidFill>
+            <a:srgbClr val="E2EFDA"/>
+          </a:solidFill>
+          <a:ln w="12700">
+            <a:solidFill>
+              <a:srgbClr val="1F4E79"/>
+            </a:solidFill>
+          </a:ln>
+          <a:effectLst/>
+        </p:spPr>
+        <p:style>
+          <a:lnRef idx="1">
+            <a:schemeClr val="accent1"/>
+          </a:lnRef>
+          <a:fillRef idx="3">
+            <a:schemeClr val="accent1"/>
+          </a:fillRef>
+          <a:effectRef idx="2">
+            <a:schemeClr val="accent1"/>
+          </a:effectRef>
+          <a:fontRef idx="minor">
+            <a:schemeClr val="lt1"/>
+          </a:fontRef>
+        </p:style>
+        <p:txBody>
+          <a:bodyPr wrap="square" rtlCol="0" anchor="ctr"/>
+          <a:lstStyle/>
+          <a:p>
+            <a:pPr algn="ctr" rtl="1"/>
+            <a:r>
+              <a:rPr sz="2000" b="1">
+                <a:solidFill>
+                  <a:srgbClr val="333333"/>
+                </a:solidFill>
+                <a:latin typeface="Arial"/>
+              </a:rPr>
+              <a:t>عقد البيانات</a:t>
+            </a:r>
+          </a:p>
+          <a:p>
+            <a:pPr algn="ctr" rtl="0"/>
+            <a:r>
+              <a:rPr sz="1400">
+                <a:solidFill>
+                  <a:srgbClr val="666666"/>
+                </a:solidFill>
+                <a:latin typeface="Calibri"/>
+              </a:rPr>
+              <a:t>Data Contract</a:t>
+            </a:r>
+          </a:p>
+        </p:txBody>
+      </p:sp>
+      <p:sp>
+        <p:nvSpPr>
+          <p:cNvPr id="5" name="Rounded Rectangle 4"/>
+          <p:cNvSpPr/>
+          <p:nvPr/>
+        </p:nvSpPr>
+        <p:spPr>
+          <a:xfrm>
+            <a:off x="7589520" y="2743200"/>
+            <a:ext cx="3474720" cy="594360"/>
+          </a:xfrm>
+          <a:prstGeom prst="roundRect">
+            <a:avLst/>
+          </a:prstGeom>
+          <a:solidFill>
+            <a:srgbClr val="EDEDED"/>
+          </a:solidFill>
+          <a:ln w="12700">
+            <a:solidFill>
+              <a:srgbClr val="1F4E79"/>
+            </a:solidFill>
+          </a:ln>
+          <a:effectLst/>
+        </p:spPr>
+        <p:style>
+          <a:lnRef idx="1">
+            <a:schemeClr val="accent1"/>
+          </a:lnRef>
+          <a:fillRef idx="3">
+            <a:schemeClr val="accent1"/>
+          </a:fillRef>
+          <a:effectRef idx="2">
+            <a:schemeClr val="accent1"/>
+          </a:effectRef>
+          <a:fontRef idx="minor">
+            <a:schemeClr val="lt1"/>
+          </a:fontRef>
+        </p:style>
+        <p:txBody>
+          <a:bodyPr wrap="square" rtlCol="0" anchor="ctr"/>
+          <a:lstStyle/>
+          <a:p>
+            <a:pPr algn="ctr" rtl="1"/>
+            <a:r>
+              <a:rPr sz="1400" b="1">
+                <a:solidFill>
+                  <a:srgbClr val="333333"/>
+                </a:solidFill>
+                <a:latin typeface="Arial"/>
+              </a:rPr>
+              <a:t>المخطط / Schema</a:t>
+            </a:r>
+          </a:p>
+        </p:txBody>
+      </p:sp>
+      <p:sp>
+        <p:nvSpPr>
+          <p:cNvPr id="6" name="Rounded Rectangle 5"/>
+          <p:cNvSpPr/>
+          <p:nvPr/>
+        </p:nvSpPr>
+        <p:spPr>
+          <a:xfrm>
+            <a:off x="7589520" y="0"/>
+            <a:ext cx="3474720" cy="594360"/>
+          </a:xfrm>
+          <a:prstGeom prst="roundRect">
+            <a:avLst/>
+          </a:prstGeom>
+          <a:solidFill>
+            <a:srgbClr val="EDEDED"/>
+          </a:solidFill>
+          <a:ln w="12700">
+            <a:solidFill>
+              <a:srgbClr val="1F4E79"/>
+            </a:solidFill>
+          </a:ln>
+          <a:effectLst/>
+        </p:spPr>
+        <p:style>
+          <a:lnRef idx="1">
+            <a:schemeClr val="accent1"/>
+          </a:lnRef>
+          <a:fillRef idx="3">
+            <a:schemeClr val="accent1"/>
+          </a:fillRef>
+          <a:effectRef idx="2">
+            <a:schemeClr val="accent1"/>
+          </a:effectRef>
+          <a:fontRef idx="minor">
+            <a:schemeClr val="lt1"/>
+          </a:fontRef>
+        </p:style>
+        <p:txBody>
+          <a:bodyPr wrap="square" rtlCol="0" anchor="ctr"/>
+          <a:lstStyle/>
+          <a:p>
+            <a:pPr algn="ctr" rtl="1"/>
+            <a:r>
+              <a:rPr sz="1400" b="1">
+                <a:solidFill>
+                  <a:srgbClr val="333333"/>
+                </a:solidFill>
+                <a:latin typeface="Arial"/>
+              </a:rPr>
+              <a:t>الأمان / Security</a:t>
+            </a:r>
+          </a:p>
+        </p:txBody>
+      </p:sp>
+      <p:sp>
+        <p:nvSpPr>
+          <p:cNvPr id="7" name="Rounded Rectangle 6"/>
+          <p:cNvSpPr/>
+          <p:nvPr/>
+        </p:nvSpPr>
+        <p:spPr>
+          <a:xfrm>
+            <a:off x="7589520" y="0"/>
+            <a:ext cx="3474720" cy="594360"/>
+          </a:xfrm>
+          <a:prstGeom prst="roundRect">
+            <a:avLst/>
+          </a:prstGeom>
+          <a:solidFill>
+            <a:srgbClr val="EDEDED"/>
+          </a:solidFill>
+          <a:ln w="12700">
+            <a:solidFill>
+              <a:srgbClr val="1F4E79"/>
+            </a:solidFill>
+          </a:ln>
+          <a:effectLst/>
+        </p:spPr>
+        <p:style>
+          <a:lnRef idx="1">
+            <a:schemeClr val="accent1"/>
+          </a:lnRef>
+          <a:fillRef idx="3">
+            <a:schemeClr val="accent1"/>
+          </a:fillRef>
+          <a:effectRef idx="2">
+            <a:schemeClr val="accent1"/>
+          </a:effectRef>
+          <a:fontRef idx="minor">
+            <a:schemeClr val="lt1"/>
+          </a:fontRef>
+        </p:style>
+        <p:txBody>
+          <a:bodyPr wrap="square" rtlCol="0" anchor="ctr"/>
+          <a:lstStyle/>
+          <a:p>
+            <a:pPr algn="ctr" rtl="1"/>
+            <a:r>
+              <a:rPr sz="1400" b="1">
+                <a:solidFill>
+                  <a:srgbClr val="333333"/>
+                </a:solidFill>
+                <a:latin typeface="Arial"/>
+              </a:rPr>
+              <a:t>مستوى الخدمة / SLA</a:t>
+            </a:r>
+          </a:p>
+        </p:txBody>
+      </p:sp>
+      <p:sp>
+        <p:nvSpPr>
+          <p:cNvPr id="8" name="Left Arrow 7"/>
+          <p:cNvSpPr/>
+          <p:nvPr/>
+        </p:nvSpPr>
+        <p:spPr>
+          <a:xfrm>
+            <a:off x="5257800" y="3017520"/>
+            <a:ext cx="1737360" cy="365760"/>
+          </a:xfrm>
+          <a:prstGeom prst="leftArrow">
+            <a:avLst/>
+          </a:prstGeom>
+          <a:solidFill>
+            <a:srgbClr val="1F4E79"/>
+          </a:solidFill>
+          <a:ln>
+            <a:noFill/>
+          </a:ln>
+          <a:effectLst/>
+        </p:spPr>
+        <p:style>
+          <a:lnRef idx="1">
+            <a:schemeClr val="accent1"/>
+          </a:lnRef>
+          <a:fillRef idx="3">
+            <a:schemeClr val="accent1"/>
+          </a:fillRef>
+          <a:effectRef idx="2">
+            <a:schemeClr val="accent1"/>
+          </a:effectRef>
+          <a:fontRef idx="minor">
+            <a:schemeClr val="lt1"/>
+          </a:fontRef>
+        </p:style>
+        <p:txBody>
+          <a:bodyPr rtlCol="0" anchor="ctr"/>
+          <a:lstStyle/>
+          <a:p>
+            <a:pPr algn="ctr"/>
+            <a:endParaRPr/>
+          </a:p>
+        </p:txBody>
+      </p:sp>
+      <p:sp>
+        <p:nvSpPr>
+          <p:cNvPr id="9" name="TextBox 8"/>
+          <p:cNvSpPr txBox="1"/>
+          <p:nvPr/>
+        </p:nvSpPr>
+        <p:spPr>
+          <a:xfrm>
+            <a:off x="640080" y="6126480"/>
+            <a:ext cx="10972800" cy="548640"/>
+          </a:xfrm>
+          <a:prstGeom prst="rect">
+            <a:avLst/>
+          </a:prstGeom>
+          <a:noFill/>
+        </p:spPr>
+        <p:txBody>
+          <a:bodyPr wrap="square">
+            <a:spAutoFit/>
+          </a:bodyPr>
+          <a:lstStyle/>
+          <a:p>
+            <a:pPr algn="r" rtl="1"/>
+            <a:r>
+              <a:rPr sz="1400">
+                <a:solidFill>
+                  <a:srgbClr val="666666"/>
+                </a:solidFill>
+                <a:latin typeface="Arial"/>
+              </a:rPr>
+              <a:t>وحدة التسليم الحديثة في هندسة البيانات.</a:t>
+            </a:r>
+          </a:p>
+          <a:p>
+            <a:pPr algn="r" rtl="0"/>
+            <a:r>
+              <a:t>The modern delivery unit in data engineering.</a:t>
+            </a:r>
+          </a:p>
+        </p:txBody>
+      </p:sp>
+      <p:sp>
+        <p:nvSpPr>
+          <p:cNvPr id="10" name="TextBox 9"/>
+          <p:cNvSpPr txBox="1"/>
+          <p:nvPr/>
+        </p:nvSpPr>
+        <p:spPr>
+          <a:xfrm>
+            <a:off x="640080" y="6400800"/>
+            <a:ext cx="8686800" cy="320040"/>
+          </a:xfrm>
+          <a:prstGeom prst="rect">
+            <a:avLst/>
+          </a:prstGeom>
+          <a:noFill/>
+        </p:spPr>
+        <p:txBody>
+          <a:bodyPr wrap="square">
+            <a:spAutoFit/>
+          </a:bodyPr>
+          <a:lstStyle/>
+          <a:p>
+            <a:pPr algn="r" rtl="1"/>
+            <a:r>
+              <a:rPr sz="1000" b="0">
+                <a:solidFill>
+                  <a:srgbClr val="666666"/>
+                </a:solidFill>
+                <a:latin typeface="Arial"/>
+              </a:rPr>
+              <a:t>Module 02 — Data &amp; AI Engineering Track  |  الوحدة الثانية</a:t>
+            </a:r>
+          </a:p>
+        </p:txBody>
+      </p:sp>
+      <p:sp>
+        <p:nvSpPr>
+          <p:cNvPr id="11" name="TextBox 10"/>
+          <p:cNvSpPr txBox="1"/>
+          <p:nvPr/>
+        </p:nvSpPr>
+        <p:spPr>
+          <a:xfrm>
+            <a:off x="9601200" y="6400800"/>
+            <a:ext cx="1920240" cy="320040"/>
+          </a:xfrm>
+          <a:prstGeom prst="rect">
+            <a:avLst/>
+          </a:prstGeom>
+          <a:noFill/>
+        </p:spPr>
+        <p:txBody>
+          <a:bodyPr wrap="square">
+            <a:spAutoFit/>
+          </a:bodyPr>
+          <a:lstStyle/>
+          <a:p>
+            <a:pPr algn="l" rtl="0"/>
+            <a:r>
+              <a:rPr sz="1000" b="0">
+                <a:solidFill>
+                  <a:srgbClr val="666666"/>
+                </a:solidFill>
+                <a:latin typeface="Calibri"/>
+              </a:rPr>
+              <a:t>V07  •  8/15</a:t>
+            </a:r>
+          </a:p>
+        </p:txBody>
+      </p:sp>
+    </p:spTree>
+  </p:cSld>
+  <p:clrMapOvr>
+    <a:masterClrMapping/>
+  </p:clrMapOvr>
+</p:sld>
+</file>
+
+<file path=ppt/slides/slide9.xml><?xml version="1.0" encoding="utf-8"?>
+<p:sld xmlns:a="http://schemas.openxmlformats.org/drawingml/2006/main" xmlns:r="http://schemas.openxmlformats.org/officeDocument/2006/relationships" xmlns:p="http://schemas.openxmlformats.org/presentationml/2006/main">
+  <p:cSld>
+    <p:bg>
+      <p:bgPr>
+        <a:solidFill>
+          <a:srgbClr val="FFFFFF"/>
+        </a:solidFill>
+        <a:effectLst/>
+      </p:bgPr>
+    </p:bg>
+    <p:spTree>
+      <p:nvGrpSpPr>
+        <p:cNvPr id="1" name=""/>
+        <p:cNvGrpSpPr/>
+        <p:nvPr/>
+      </p:nvGrpSpPr>
+      <p:grpSpPr>
+        <a:xfrm>
+          <a:off x="0" y="0"/>
+          <a:ext cx="0" cy="0"/>
+          <a:chOff x="0" y="0"/>
+          <a:chExt cx="0" cy="0"/>
+        </a:xfrm>
+      </p:grpSpPr>
+      <p:sp>
+        <p:nvSpPr>
+          <p:cNvPr id="2" name="Rectangle 1"/>
+          <p:cNvSpPr/>
+          <p:nvPr/>
+        </p:nvSpPr>
+        <p:spPr>
+          <a:xfrm>
+            <a:off x="0" y="0"/>
+            <a:ext cx="12191695" cy="1005840"/>
+          </a:xfrm>
+          <a:prstGeom prst="rect">
+            <a:avLst/>
+          </a:prstGeom>
+          <a:solidFill>
+            <a:srgbClr val="FFFFFF"/>
+          </a:solidFill>
+          <a:ln w="25400">
+            <a:solidFill>
+              <a:srgbClr val="1F4E79"/>
+            </a:solidFill>
+          </a:ln>
+          <a:effectLst/>
+        </p:spPr>
+        <p:style>
+          <a:lnRef idx="1">
+            <a:schemeClr val="accent1"/>
+          </a:lnRef>
+          <a:fillRef idx="3">
+            <a:schemeClr val="accent1"/>
+          </a:fillRef>
+          <a:effectRef idx="2">
+            <a:schemeClr val="accent1"/>
+          </a:effectRef>
+          <a:fontRef idx="minor">
+            <a:schemeClr val="lt1"/>
+          </a:fontRef>
+        </p:style>
+        <p:txBody>
+          <a:bodyPr rtlCol="0" anchor="ctr"/>
+          <a:lstStyle/>
+          <a:p>
+            <a:pPr algn="ctr"/>
+            <a:endParaRPr/>
+          </a:p>
+        </p:txBody>
+      </p:sp>
+      <p:sp>
+        <p:nvSpPr>
+          <p:cNvPr id="3" name="TextBox 2"/>
+          <p:cNvSpPr txBox="1"/>
+          <p:nvPr/>
+        </p:nvSpPr>
+        <p:spPr>
+          <a:xfrm>
+            <a:off x="640080" y="182880"/>
+            <a:ext cx="10972800" cy="640080"/>
+          </a:xfrm>
+          <a:prstGeom prst="rect">
+            <a:avLst/>
+          </a:prstGeom>
+          <a:noFill/>
+        </p:spPr>
+        <p:txBody>
+          <a:bodyPr wrap="square">
+            <a:spAutoFit/>
+          </a:bodyPr>
+          <a:lstStyle/>
+          <a:p>
+            <a:pPr algn="r" rtl="1"/>
+            <a:r>
+              <a:rPr sz="3200" b="1">
+                <a:solidFill>
+                  <a:srgbClr val="1F3B5C"/>
+                </a:solidFill>
+                <a:latin typeface="Arial"/>
+              </a:rPr>
+              <a:t>متى تختار كل نموذج؟ / When to Choose Which</a:t>
+            </a:r>
+          </a:p>
+        </p:txBody>
+      </p:sp>
+      <p:sp>
+        <p:nvSpPr>
+          <p:cNvPr id="4" name="TextBox 3"/>
+          <p:cNvSpPr txBox="1"/>
+          <p:nvPr/>
+        </p:nvSpPr>
+        <p:spPr>
+          <a:xfrm>
+            <a:off x="640080" y="1280160"/>
+            <a:ext cx="10972800" cy="5212080"/>
+          </a:xfrm>
+          <a:prstGeom prst="rect">
+            <a:avLst/>
+          </a:prstGeom>
+          <a:noFill/>
+        </p:spPr>
+        <p:txBody>
+          <a:bodyPr wrap="square">
+            <a:spAutoFit/>
+          </a:bodyPr>
+          <a:lstStyle/>
+          <a:p>
+            <a:pPr algn="r" rtl="1">
+              <a:spcBef>
+                <a:spcPts val="200"/>
+              </a:spcBef>
+              <a:spcAft>
+                <a:spcPts val="1000"/>
+              </a:spcAft>
+            </a:pPr>
+            <a:r>
+              <a:rPr sz="1900">
+                <a:solidFill>
+                  <a:srgbClr val="333333"/>
+                </a:solidFill>
+                <a:latin typeface="Arial"/>
+              </a:rPr>
+              <a:t>• فريق مركزي وتحليلات → Medallion على Lakehouse؛ تقارير صارمة → مستودع؛ مؤسسة كبيرة بفرق مستقلة → Data Mesh.</a:t>
+            </a:r>
+          </a:p>
+          <a:p>
+            <a:pPr algn="l" rtl="0">
+              <a:spcBef>
+                <a:spcPts val="200"/>
+              </a:spcBef>
+              <a:spcAft>
+                <a:spcPts val="1000"/>
+              </a:spcAft>
+            </a:pPr>
+            <a:r>
+              <a:rPr sz="1600">
+                <a:solidFill>
+                  <a:srgbClr val="666666"/>
+                </a:solidFill>
+                <a:latin typeface="Calibri"/>
+              </a:rPr>
+              <a:t>• Central team + analytics → Medallion; strict BI → warehouse; large independent teams → data mesh.</a:t>
+            </a:r>
+          </a:p>
+        </p:txBody>
+      </p:sp>
+      <p:sp>
+        <p:nvSpPr>
+          <p:cNvPr id="5" name="TextBox 4"/>
+          <p:cNvSpPr txBox="1"/>
+          <p:nvPr/>
+        </p:nvSpPr>
+        <p:spPr>
+          <a:xfrm>
+            <a:off x="640080" y="6400800"/>
+            <a:ext cx="8686800" cy="320040"/>
+          </a:xfrm>
+          <a:prstGeom prst="rect">
+            <a:avLst/>
+          </a:prstGeom>
+          <a:noFill/>
+        </p:spPr>
+        <p:txBody>
+          <a:bodyPr wrap="square">
+            <a:spAutoFit/>
+          </a:bodyPr>
+          <a:lstStyle/>
+          <a:p>
+            <a:pPr algn="r" rtl="1"/>
+            <a:r>
+              <a:rPr sz="1000" b="0">
+                <a:solidFill>
+                  <a:srgbClr val="666666"/>
+                </a:solidFill>
+                <a:latin typeface="Arial"/>
+              </a:rPr>
+              <a:t>Module 02 — Data &amp; AI Engineering Track  |  الوحدة الثانية</a:t>
+            </a:r>
+          </a:p>
+        </p:txBody>
+      </p:sp>
+      <p:sp>
+        <p:nvSpPr>
+          <p:cNvPr id="6" name="TextBox 5"/>
+          <p:cNvSpPr txBox="1"/>
+          <p:nvPr/>
+        </p:nvSpPr>
+        <p:spPr>
+          <a:xfrm>
+            <a:off x="9601200" y="6400800"/>
+            <a:ext cx="1920240" cy="320040"/>
+          </a:xfrm>
+          <a:prstGeom prst="rect">
+            <a:avLst/>
+          </a:prstGeom>
+          <a:noFill/>
+        </p:spPr>
+        <p:txBody>
+          <a:bodyPr wrap="square">
+            <a:spAutoFit/>
+          </a:bodyPr>
+          <a:lstStyle/>
+          <a:p>
+            <a:pPr algn="l" rtl="0"/>
+            <a:r>
+              <a:rPr sz="1000" b="0">
+                <a:solidFill>
+                  <a:srgbClr val="666666"/>
+                </a:solidFill>
+                <a:latin typeface="Calibri"/>
+              </a:rPr>
+              <a:t>V07  •  9/15</a:t>
             </a:r>
           </a:p>
         </p:txBody>
